--- a/examples/premium-st2/星尘ST2-发布会.pptx
+++ b/examples/premium-st2/星尘ST2-发布会.pptx
@@ -1827,6 +1827,190 @@
   <p:clrMapOvr>
     <a:masterClrMapping/>
   </p:clrMapOvr>
+  <p:transition spd="slow">
+    <p:fade/>
+  </p:transition>
+  <p:timing>
+    <p:tnLst>
+      <p:par>
+        <p:cTn id="1" dur="indefinite" restart="never" nodeType="tmRoot">
+          <p:childTnLst>
+            <p:seq concurrent="1" nextAc="seek">
+              <p:cTn id="2" dur="indefinite" nodeType="mainSeq">
+                <p:childTnLst>
+                  <p:par>
+                    <p:cTn id="3" fill="hold">
+                      <p:stCondLst>
+                        <p:cond delay="indefinite"/>
+                        <p:cond evt="onBegin" delay="0">
+                          <p:tn val="2"/>
+                        </p:cond>
+                      </p:stCondLst>
+                      <p:childTnLst>
+                        <p:par>
+                          <p:cTn id="4" fill="hold">
+                            <p:stCondLst>
+                              <p:cond delay="0"/>
+                            </p:stCondLst>
+                            <p:childTnLst>
+                              <p:par>
+                                <p:cTn id="5" presetID="10" presetClass="entr" presetSubtype="0" fill="hold" grpId="0" nodeType="afterEffect">
+                                  <p:stCondLst>
+                                    <p:cond delay="0"/>
+                                  </p:stCondLst>
+                                  <p:childTnLst>
+                                    <p:set>
+                                      <p:cBhvr>
+                                        <p:cTn id="6" dur="1"/>
+                                        <p:tgtEl>
+                                          <p:spTgt spid="2"/>
+                                        </p:tgtEl>
+                                        <p:attrNameLst>
+                                          <p:attrName>style.visibility</p:attrName>
+                                        </p:attrNameLst>
+                                      </p:cBhvr>
+                                      <p:to>
+                                        <p:strVal val="visible"/>
+                                      </p:to>
+                                    </p:set>
+                                    <p:animEffect transition="in" filter="fade">
+                                      <p:cBhvr>
+                                        <p:cTn id="7" dur="900"/>
+                                        <p:tgtEl>
+                                          <p:spTgt spid="2"/>
+                                        </p:tgtEl>
+                                      </p:cBhvr>
+                                    </p:animEffect>
+                                  </p:childTnLst>
+                                </p:cTn>
+                              </p:par>
+                              <p:par>
+                                <p:cTn id="8" presetID="10" presetClass="entr" presetSubtype="0" fill="hold" grpId="0" nodeType="afterEffect">
+                                  <p:stCondLst>
+                                    <p:cond delay="1200"/>
+                                  </p:stCondLst>
+                                  <p:childTnLst>
+                                    <p:set>
+                                      <p:cBhvr>
+                                        <p:cTn id="9" dur="1"/>
+                                        <p:tgtEl>
+                                          <p:spTgt spid="3"/>
+                                        </p:tgtEl>
+                                        <p:attrNameLst>
+                                          <p:attrName>style.visibility</p:attrName>
+                                        </p:attrNameLst>
+                                      </p:cBhvr>
+                                      <p:to>
+                                        <p:strVal val="visible"/>
+                                      </p:to>
+                                    </p:set>
+                                    <p:animEffect transition="in" filter="fade">
+                                      <p:cBhvr>
+                                        <p:cTn id="10" dur="900"/>
+                                        <p:tgtEl>
+                                          <p:spTgt spid="3"/>
+                                        </p:tgtEl>
+                                      </p:cBhvr>
+                                    </p:animEffect>
+                                  </p:childTnLst>
+                                </p:cTn>
+                              </p:par>
+                              <p:par>
+                                <p:cTn id="11" presetID="10" presetClass="entr" presetSubtype="0" fill="hold" grpId="0" nodeType="afterEffect">
+                                  <p:stCondLst>
+                                    <p:cond delay="2700"/>
+                                  </p:stCondLst>
+                                  <p:childTnLst>
+                                    <p:set>
+                                      <p:cBhvr>
+                                        <p:cTn id="12" dur="1"/>
+                                        <p:tgtEl>
+                                          <p:spTgt spid="4"/>
+                                        </p:tgtEl>
+                                        <p:attrNameLst>
+                                          <p:attrName>style.visibility</p:attrName>
+                                        </p:attrNameLst>
+                                      </p:cBhvr>
+                                      <p:to>
+                                        <p:strVal val="visible"/>
+                                      </p:to>
+                                    </p:set>
+                                    <p:animEffect transition="in" filter="fade">
+                                      <p:cBhvr>
+                                        <p:cTn id="13" dur="900"/>
+                                        <p:tgtEl>
+                                          <p:spTgt spid="4"/>
+                                        </p:tgtEl>
+                                      </p:cBhvr>
+                                    </p:animEffect>
+                                  </p:childTnLst>
+                                </p:cTn>
+                              </p:par>
+                              <p:par>
+                                <p:cTn id="14" presetID="10" presetClass="entr" presetSubtype="0" fill="hold" grpId="0" nodeType="afterEffect">
+                                  <p:stCondLst>
+                                    <p:cond delay="4500"/>
+                                  </p:stCondLst>
+                                  <p:childTnLst>
+                                    <p:set>
+                                      <p:cBhvr>
+                                        <p:cTn id="15" dur="1"/>
+                                        <p:tgtEl>
+                                          <p:spTgt spid="5"/>
+                                        </p:tgtEl>
+                                        <p:attrNameLst>
+                                          <p:attrName>style.visibility</p:attrName>
+                                        </p:attrNameLst>
+                                      </p:cBhvr>
+                                      <p:to>
+                                        <p:strVal val="visible"/>
+                                      </p:to>
+                                    </p:set>
+                                    <p:animEffect transition="in" filter="fade">
+                                      <p:cBhvr>
+                                        <p:cTn id="16" dur="900"/>
+                                        <p:tgtEl>
+                                          <p:spTgt spid="5"/>
+                                        </p:tgtEl>
+                                      </p:cBhvr>
+                                    </p:animEffect>
+                                  </p:childTnLst>
+                                </p:cTn>
+                              </p:par>
+                            </p:childTnLst>
+                          </p:cTn>
+                        </p:par>
+                      </p:childTnLst>
+                    </p:cTn>
+                  </p:par>
+                </p:childTnLst>
+              </p:cTn>
+              <p:prevCondLst>
+                <p:cond evt="onPrev" delay="0">
+                  <p:tgtEl>
+                    <p:sldTgt/>
+                  </p:tgtEl>
+                </p:cond>
+              </p:prevCondLst>
+              <p:nextCondLst>
+                <p:cond evt="onNext" delay="0">
+                  <p:tgtEl>
+                    <p:sldTgt/>
+                  </p:tgtEl>
+                </p:cond>
+              </p:nextCondLst>
+            </p:seq>
+          </p:childTnLst>
+        </p:cTn>
+      </p:par>
+    </p:tnLst>
+    <p:bldLst>
+      <p:bldP spid="2" grpId="0"/>
+      <p:bldP spid="3" grpId="0"/>
+      <p:bldP spid="4" grpId="0"/>
+      <p:bldP spid="5" grpId="0"/>
+    </p:bldLst>
+  </p:timing>
 </p:sld>
 </file>
 
@@ -1937,6 +2121,9 @@
   <p:clrMapOvr>
     <a:masterClrMapping/>
   </p:clrMapOvr>
+  <p:transition spd="slow">
+    <p:fade/>
+  </p:transition>
 </p:sld>
 </file>
 
@@ -2115,6 +2302,190 @@
   <p:clrMapOvr>
     <a:masterClrMapping/>
   </p:clrMapOvr>
+  <p:transition spd="slow">
+    <p:fade/>
+  </p:transition>
+  <p:timing>
+    <p:tnLst>
+      <p:par>
+        <p:cTn id="1" dur="indefinite" restart="never" nodeType="tmRoot">
+          <p:childTnLst>
+            <p:seq concurrent="1" nextAc="seek">
+              <p:cTn id="2" dur="indefinite" nodeType="mainSeq">
+                <p:childTnLst>
+                  <p:par>
+                    <p:cTn id="3" fill="hold">
+                      <p:stCondLst>
+                        <p:cond delay="indefinite"/>
+                        <p:cond evt="onBegin" delay="0">
+                          <p:tn val="2"/>
+                        </p:cond>
+                      </p:stCondLst>
+                      <p:childTnLst>
+                        <p:par>
+                          <p:cTn id="4" fill="hold">
+                            <p:stCondLst>
+                              <p:cond delay="0"/>
+                            </p:stCondLst>
+                            <p:childTnLst>
+                              <p:par>
+                                <p:cTn id="5" presetID="10" presetClass="entr" presetSubtype="0" fill="hold" grpId="0" nodeType="afterEffect">
+                                  <p:stCondLst>
+                                    <p:cond delay="0"/>
+                                  </p:stCondLst>
+                                  <p:childTnLst>
+                                    <p:set>
+                                      <p:cBhvr>
+                                        <p:cTn id="6" dur="1"/>
+                                        <p:tgtEl>
+                                          <p:spTgt spid="2"/>
+                                        </p:tgtEl>
+                                        <p:attrNameLst>
+                                          <p:attrName>style.visibility</p:attrName>
+                                        </p:attrNameLst>
+                                      </p:cBhvr>
+                                      <p:to>
+                                        <p:strVal val="visible"/>
+                                      </p:to>
+                                    </p:set>
+                                    <p:animEffect transition="in" filter="fade">
+                                      <p:cBhvr>
+                                        <p:cTn id="7" dur="800"/>
+                                        <p:tgtEl>
+                                          <p:spTgt spid="2"/>
+                                        </p:tgtEl>
+                                      </p:cBhvr>
+                                    </p:animEffect>
+                                  </p:childTnLst>
+                                </p:cTn>
+                              </p:par>
+                              <p:par>
+                                <p:cTn id="8" presetID="10" presetClass="entr" presetSubtype="0" fill="hold" grpId="0" nodeType="afterEffect">
+                                  <p:stCondLst>
+                                    <p:cond delay="1050"/>
+                                  </p:stCondLst>
+                                  <p:childTnLst>
+                                    <p:set>
+                                      <p:cBhvr>
+                                        <p:cTn id="9" dur="1"/>
+                                        <p:tgtEl>
+                                          <p:spTgt spid="3"/>
+                                        </p:tgtEl>
+                                        <p:attrNameLst>
+                                          <p:attrName>style.visibility</p:attrName>
+                                        </p:attrNameLst>
+                                      </p:cBhvr>
+                                      <p:to>
+                                        <p:strVal val="visible"/>
+                                      </p:to>
+                                    </p:set>
+                                    <p:animEffect transition="in" filter="fade">
+                                      <p:cBhvr>
+                                        <p:cTn id="10" dur="800"/>
+                                        <p:tgtEl>
+                                          <p:spTgt spid="3"/>
+                                        </p:tgtEl>
+                                      </p:cBhvr>
+                                    </p:animEffect>
+                                  </p:childTnLst>
+                                </p:cTn>
+                              </p:par>
+                              <p:par>
+                                <p:cTn id="11" presetID="10" presetClass="entr" presetSubtype="0" fill="hold" grpId="0" nodeType="afterEffect">
+                                  <p:stCondLst>
+                                    <p:cond delay="2350"/>
+                                  </p:stCondLst>
+                                  <p:childTnLst>
+                                    <p:set>
+                                      <p:cBhvr>
+                                        <p:cTn id="12" dur="1"/>
+                                        <p:tgtEl>
+                                          <p:spTgt spid="4"/>
+                                        </p:tgtEl>
+                                        <p:attrNameLst>
+                                          <p:attrName>style.visibility</p:attrName>
+                                        </p:attrNameLst>
+                                      </p:cBhvr>
+                                      <p:to>
+                                        <p:strVal val="visible"/>
+                                      </p:to>
+                                    </p:set>
+                                    <p:animEffect transition="in" filter="fade">
+                                      <p:cBhvr>
+                                        <p:cTn id="13" dur="800"/>
+                                        <p:tgtEl>
+                                          <p:spTgt spid="4"/>
+                                        </p:tgtEl>
+                                      </p:cBhvr>
+                                    </p:animEffect>
+                                  </p:childTnLst>
+                                </p:cTn>
+                              </p:par>
+                              <p:par>
+                                <p:cTn id="14" presetID="10" presetClass="entr" presetSubtype="0" fill="hold" grpId="0" nodeType="afterEffect">
+                                  <p:stCondLst>
+                                    <p:cond delay="3900"/>
+                                  </p:stCondLst>
+                                  <p:childTnLst>
+                                    <p:set>
+                                      <p:cBhvr>
+                                        <p:cTn id="15" dur="1"/>
+                                        <p:tgtEl>
+                                          <p:spTgt spid="5"/>
+                                        </p:tgtEl>
+                                        <p:attrNameLst>
+                                          <p:attrName>style.visibility</p:attrName>
+                                        </p:attrNameLst>
+                                      </p:cBhvr>
+                                      <p:to>
+                                        <p:strVal val="visible"/>
+                                      </p:to>
+                                    </p:set>
+                                    <p:animEffect transition="in" filter="fade">
+                                      <p:cBhvr>
+                                        <p:cTn id="16" dur="800"/>
+                                        <p:tgtEl>
+                                          <p:spTgt spid="5"/>
+                                        </p:tgtEl>
+                                      </p:cBhvr>
+                                    </p:animEffect>
+                                  </p:childTnLst>
+                                </p:cTn>
+                              </p:par>
+                            </p:childTnLst>
+                          </p:cTn>
+                        </p:par>
+                      </p:childTnLst>
+                    </p:cTn>
+                  </p:par>
+                </p:childTnLst>
+              </p:cTn>
+              <p:prevCondLst>
+                <p:cond evt="onPrev" delay="0">
+                  <p:tgtEl>
+                    <p:sldTgt/>
+                  </p:tgtEl>
+                </p:cond>
+              </p:prevCondLst>
+              <p:nextCondLst>
+                <p:cond evt="onNext" delay="0">
+                  <p:tgtEl>
+                    <p:sldTgt/>
+                  </p:tgtEl>
+                </p:cond>
+              </p:nextCondLst>
+            </p:seq>
+          </p:childTnLst>
+        </p:cTn>
+      </p:par>
+    </p:tnLst>
+    <p:bldLst>
+      <p:bldP spid="2" grpId="0"/>
+      <p:bldP spid="3" grpId="0"/>
+      <p:bldP spid="4" grpId="0"/>
+      <p:bldP spid="5" grpId="0"/>
+    </p:bldLst>
+  </p:timing>
 </p:sld>
 </file>
 
@@ -2225,6 +2596,126 @@
   <p:clrMapOvr>
     <a:masterClrMapping/>
   </p:clrMapOvr>
+  <p:transition spd="slow">
+    <p:fade/>
+  </p:transition>
+  <p:timing>
+    <p:tnLst>
+      <p:par>
+        <p:cTn id="1" dur="indefinite" restart="never" nodeType="tmRoot">
+          <p:childTnLst>
+            <p:seq concurrent="1" nextAc="seek">
+              <p:cTn id="2" dur="indefinite" nodeType="mainSeq">
+                <p:childTnLst>
+                  <p:par>
+                    <p:cTn id="3" fill="hold">
+                      <p:stCondLst>
+                        <p:cond delay="indefinite"/>
+                        <p:cond evt="onBegin" delay="0">
+                          <p:tn val="2"/>
+                        </p:cond>
+                      </p:stCondLst>
+                      <p:childTnLst>
+                        <p:par>
+                          <p:cTn id="4" fill="hold">
+                            <p:stCondLst>
+                              <p:cond delay="0"/>
+                            </p:stCondLst>
+                            <p:childTnLst>
+                              <p:par>
+                                <p:cTn id="5" presetID="10" presetClass="entr" presetSubtype="0" fill="hold" grpId="0" nodeType="afterEffect">
+                                  <p:stCondLst>
+                                    <p:cond delay="0"/>
+                                  </p:stCondLst>
+                                  <p:childTnLst>
+                                    <p:set>
+                                      <p:cBhvr>
+                                        <p:cTn id="6" dur="1"/>
+                                        <p:tgtEl>
+                                          <p:spTgt spid="2"/>
+                                        </p:tgtEl>
+                                        <p:attrNameLst>
+                                          <p:attrName>style.visibility</p:attrName>
+                                        </p:attrNameLst>
+                                      </p:cBhvr>
+                                      <p:to>
+                                        <p:strVal val="visible"/>
+                                      </p:to>
+                                    </p:set>
+                                    <p:animEffect transition="in" filter="fade">
+                                      <p:cBhvr>
+                                        <p:cTn id="7" dur="900"/>
+                                        <p:tgtEl>
+                                          <p:spTgt spid="2"/>
+                                        </p:tgtEl>
+                                      </p:cBhvr>
+                                    </p:animEffect>
+                                  </p:childTnLst>
+                                </p:cTn>
+                              </p:par>
+                              <p:par>
+                                <p:cTn id="8" presetID="10" presetClass="entr" presetSubtype="0" fill="hold" grpId="0" nodeType="afterEffect">
+                                  <p:stCondLst>
+                                    <p:cond delay="900"/>
+                                  </p:stCondLst>
+                                  <p:childTnLst>
+                                    <p:set>
+                                      <p:cBhvr>
+                                        <p:cTn id="9" dur="1"/>
+                                        <p:tgtEl>
+                                          <p:spTgt spid="3"/>
+                                        </p:tgtEl>
+                                        <p:attrNameLst>
+                                          <p:attrName>style.visibility</p:attrName>
+                                        </p:attrNameLst>
+                                      </p:cBhvr>
+                                      <p:to>
+                                        <p:strVal val="visible"/>
+                                      </p:to>
+                                    </p:set>
+                                    <p:animEffect transition="in" filter="fade">
+                                      <p:cBhvr>
+                                        <p:cTn id="10" dur="900"/>
+                                        <p:tgtEl>
+                                          <p:spTgt spid="3"/>
+                                        </p:tgtEl>
+                                      </p:cBhvr>
+                                    </p:animEffect>
+                                  </p:childTnLst>
+                                </p:cTn>
+                              </p:par>
+                            </p:childTnLst>
+                          </p:cTn>
+                        </p:par>
+                      </p:childTnLst>
+                    </p:cTn>
+                  </p:par>
+                </p:childTnLst>
+              </p:cTn>
+              <p:prevCondLst>
+                <p:cond evt="onPrev" delay="0">
+                  <p:tgtEl>
+                    <p:sldTgt/>
+                  </p:tgtEl>
+                </p:cond>
+              </p:prevCondLst>
+              <p:nextCondLst>
+                <p:cond evt="onNext" delay="0">
+                  <p:tgtEl>
+                    <p:sldTgt/>
+                  </p:tgtEl>
+                </p:cond>
+              </p:nextCondLst>
+            </p:seq>
+          </p:childTnLst>
+        </p:cTn>
+      </p:par>
+    </p:tnLst>
+    <p:bldLst>
+      <p:bldP spid="2" grpId="0"/>
+      <p:bldP spid="3" grpId="0"/>
+    </p:bldLst>
+  </p:timing>
 </p:sld>
 </file>
 
@@ -2576,6 +3067,350 @@
   <p:clrMapOvr>
     <a:masterClrMapping/>
   </p:clrMapOvr>
+  <p:transition spd="slow">
+    <p:fade/>
+  </p:transition>
+  <p:timing>
+    <p:tnLst>
+      <p:par>
+        <p:cTn id="1" dur="indefinite" restart="never" nodeType="tmRoot">
+          <p:childTnLst>
+            <p:seq concurrent="1" nextAc="seek">
+              <p:cTn id="2" dur="indefinite" nodeType="mainSeq">
+                <p:childTnLst>
+                  <p:par>
+                    <p:cTn id="3" fill="hold">
+                      <p:stCondLst>
+                        <p:cond delay="indefinite"/>
+                        <p:cond evt="onBegin" delay="0">
+                          <p:tn val="2"/>
+                        </p:cond>
+                      </p:stCondLst>
+                      <p:childTnLst>
+                        <p:par>
+                          <p:cTn id="4" fill="hold">
+                            <p:stCondLst>
+                              <p:cond delay="0"/>
+                            </p:stCondLst>
+                            <p:childTnLst>
+                              <p:par>
+                                <p:cTn id="5" presetID="10" presetClass="entr" presetSubtype="0" fill="hold" grpId="0" nodeType="afterEffect">
+                                  <p:stCondLst>
+                                    <p:cond delay="0"/>
+                                  </p:stCondLst>
+                                  <p:childTnLst>
+                                    <p:set>
+                                      <p:cBhvr>
+                                        <p:cTn id="6" dur="1"/>
+                                        <p:tgtEl>
+                                          <p:spTgt spid="2"/>
+                                        </p:tgtEl>
+                                        <p:attrNameLst>
+                                          <p:attrName>style.visibility</p:attrName>
+                                        </p:attrNameLst>
+                                      </p:cBhvr>
+                                      <p:to>
+                                        <p:strVal val="visible"/>
+                                      </p:to>
+                                    </p:set>
+                                    <p:animEffect transition="in" filter="fade">
+                                      <p:cBhvr>
+                                        <p:cTn id="7" dur="700"/>
+                                        <p:tgtEl>
+                                          <p:spTgt spid="2"/>
+                                        </p:tgtEl>
+                                      </p:cBhvr>
+                                    </p:animEffect>
+                                  </p:childTnLst>
+                                </p:cTn>
+                              </p:par>
+                              <p:par>
+                                <p:cTn id="8" presetID="10" presetClass="entr" presetSubtype="0" fill="hold" grpId="0" nodeType="afterEffect">
+                                  <p:stCondLst>
+                                    <p:cond delay="900"/>
+                                  </p:stCondLst>
+                                  <p:childTnLst>
+                                    <p:set>
+                                      <p:cBhvr>
+                                        <p:cTn id="9" dur="1"/>
+                                        <p:tgtEl>
+                                          <p:spTgt spid="3"/>
+                                        </p:tgtEl>
+                                        <p:attrNameLst>
+                                          <p:attrName>style.visibility</p:attrName>
+                                        </p:attrNameLst>
+                                      </p:cBhvr>
+                                      <p:to>
+                                        <p:strVal val="visible"/>
+                                      </p:to>
+                                    </p:set>
+                                    <p:animEffect transition="in" filter="fade">
+                                      <p:cBhvr>
+                                        <p:cTn id="10" dur="700"/>
+                                        <p:tgtEl>
+                                          <p:spTgt spid="3"/>
+                                        </p:tgtEl>
+                                      </p:cBhvr>
+                                    </p:animEffect>
+                                  </p:childTnLst>
+                                </p:cTn>
+                              </p:par>
+                              <p:par>
+                                <p:cTn id="11" presetID="10" presetClass="entr" presetSubtype="0" fill="hold" grpId="0" nodeType="afterEffect">
+                                  <p:stCondLst>
+                                    <p:cond delay="2000"/>
+                                  </p:stCondLst>
+                                  <p:childTnLst>
+                                    <p:set>
+                                      <p:cBhvr>
+                                        <p:cTn id="12" dur="1"/>
+                                        <p:tgtEl>
+                                          <p:spTgt spid="4"/>
+                                        </p:tgtEl>
+                                        <p:attrNameLst>
+                                          <p:attrName>style.visibility</p:attrName>
+                                        </p:attrNameLst>
+                                      </p:cBhvr>
+                                      <p:to>
+                                        <p:strVal val="visible"/>
+                                      </p:to>
+                                    </p:set>
+                                    <p:animEffect transition="in" filter="fade">
+                                      <p:cBhvr>
+                                        <p:cTn id="13" dur="700"/>
+                                        <p:tgtEl>
+                                          <p:spTgt spid="4"/>
+                                        </p:tgtEl>
+                                      </p:cBhvr>
+                                    </p:animEffect>
+                                  </p:childTnLst>
+                                </p:cTn>
+                              </p:par>
+                              <p:par>
+                                <p:cTn id="14" presetID="10" presetClass="entr" presetSubtype="0" fill="hold" grpId="0" nodeType="afterEffect">
+                                  <p:stCondLst>
+                                    <p:cond delay="3300"/>
+                                  </p:stCondLst>
+                                  <p:childTnLst>
+                                    <p:set>
+                                      <p:cBhvr>
+                                        <p:cTn id="15" dur="1"/>
+                                        <p:tgtEl>
+                                          <p:spTgt spid="5"/>
+                                        </p:tgtEl>
+                                        <p:attrNameLst>
+                                          <p:attrName>style.visibility</p:attrName>
+                                        </p:attrNameLst>
+                                      </p:cBhvr>
+                                      <p:to>
+                                        <p:strVal val="visible"/>
+                                      </p:to>
+                                    </p:set>
+                                    <p:animEffect transition="in" filter="fade">
+                                      <p:cBhvr>
+                                        <p:cTn id="16" dur="700"/>
+                                        <p:tgtEl>
+                                          <p:spTgt spid="5"/>
+                                        </p:tgtEl>
+                                      </p:cBhvr>
+                                    </p:animEffect>
+                                  </p:childTnLst>
+                                </p:cTn>
+                              </p:par>
+                              <p:par>
+                                <p:cTn id="17" presetID="10" presetClass="entr" presetSubtype="0" fill="hold" grpId="0" nodeType="afterEffect">
+                                  <p:stCondLst>
+                                    <p:cond delay="4800"/>
+                                  </p:stCondLst>
+                                  <p:childTnLst>
+                                    <p:set>
+                                      <p:cBhvr>
+                                        <p:cTn id="18" dur="1"/>
+                                        <p:tgtEl>
+                                          <p:spTgt spid="6"/>
+                                        </p:tgtEl>
+                                        <p:attrNameLst>
+                                          <p:attrName>style.visibility</p:attrName>
+                                        </p:attrNameLst>
+                                      </p:cBhvr>
+                                      <p:to>
+                                        <p:strVal val="visible"/>
+                                      </p:to>
+                                    </p:set>
+                                    <p:animEffect transition="in" filter="fade">
+                                      <p:cBhvr>
+                                        <p:cTn id="19" dur="700"/>
+                                        <p:tgtEl>
+                                          <p:spTgt spid="6"/>
+                                        </p:tgtEl>
+                                      </p:cBhvr>
+                                    </p:animEffect>
+                                  </p:childTnLst>
+                                </p:cTn>
+                              </p:par>
+                              <p:par>
+                                <p:cTn id="20" presetID="10" presetClass="entr" presetSubtype="0" fill="hold" grpId="0" nodeType="afterEffect">
+                                  <p:stCondLst>
+                                    <p:cond delay="6500"/>
+                                  </p:stCondLst>
+                                  <p:childTnLst>
+                                    <p:set>
+                                      <p:cBhvr>
+                                        <p:cTn id="21" dur="1"/>
+                                        <p:tgtEl>
+                                          <p:spTgt spid="7"/>
+                                        </p:tgtEl>
+                                        <p:attrNameLst>
+                                          <p:attrName>style.visibility</p:attrName>
+                                        </p:attrNameLst>
+                                      </p:cBhvr>
+                                      <p:to>
+                                        <p:strVal val="visible"/>
+                                      </p:to>
+                                    </p:set>
+                                    <p:animEffect transition="in" filter="fade">
+                                      <p:cBhvr>
+                                        <p:cTn id="22" dur="700"/>
+                                        <p:tgtEl>
+                                          <p:spTgt spid="7"/>
+                                        </p:tgtEl>
+                                      </p:cBhvr>
+                                    </p:animEffect>
+                                  </p:childTnLst>
+                                </p:cTn>
+                              </p:par>
+                              <p:par>
+                                <p:cTn id="23" presetID="10" presetClass="entr" presetSubtype="0" fill="hold" grpId="0" nodeType="afterEffect">
+                                  <p:stCondLst>
+                                    <p:cond delay="8400"/>
+                                  </p:stCondLst>
+                                  <p:childTnLst>
+                                    <p:set>
+                                      <p:cBhvr>
+                                        <p:cTn id="24" dur="1"/>
+                                        <p:tgtEl>
+                                          <p:spTgt spid="8"/>
+                                        </p:tgtEl>
+                                        <p:attrNameLst>
+                                          <p:attrName>style.visibility</p:attrName>
+                                        </p:attrNameLst>
+                                      </p:cBhvr>
+                                      <p:to>
+                                        <p:strVal val="visible"/>
+                                      </p:to>
+                                    </p:set>
+                                    <p:animEffect transition="in" filter="fade">
+                                      <p:cBhvr>
+                                        <p:cTn id="25" dur="700"/>
+                                        <p:tgtEl>
+                                          <p:spTgt spid="8"/>
+                                        </p:tgtEl>
+                                      </p:cBhvr>
+                                    </p:animEffect>
+                                  </p:childTnLst>
+                                </p:cTn>
+                              </p:par>
+                              <p:par>
+                                <p:cTn id="26" presetID="10" presetClass="entr" presetSubtype="0" fill="hold" grpId="0" nodeType="afterEffect">
+                                  <p:stCondLst>
+                                    <p:cond delay="10500"/>
+                                  </p:stCondLst>
+                                  <p:childTnLst>
+                                    <p:set>
+                                      <p:cBhvr>
+                                        <p:cTn id="27" dur="1"/>
+                                        <p:tgtEl>
+                                          <p:spTgt spid="9"/>
+                                        </p:tgtEl>
+                                        <p:attrNameLst>
+                                          <p:attrName>style.visibility</p:attrName>
+                                        </p:attrNameLst>
+                                      </p:cBhvr>
+                                      <p:to>
+                                        <p:strVal val="visible"/>
+                                      </p:to>
+                                    </p:set>
+                                    <p:animEffect transition="in" filter="fade">
+                                      <p:cBhvr>
+                                        <p:cTn id="28" dur="700"/>
+                                        <p:tgtEl>
+                                          <p:spTgt spid="9"/>
+                                        </p:tgtEl>
+                                      </p:cBhvr>
+                                    </p:animEffect>
+                                  </p:childTnLst>
+                                </p:cTn>
+                              </p:par>
+                              <p:par>
+                                <p:cTn id="29" presetID="10" presetClass="entr" presetSubtype="0" fill="hold" grpId="0" nodeType="afterEffect">
+                                  <p:stCondLst>
+                                    <p:cond delay="12800"/>
+                                  </p:stCondLst>
+                                  <p:childTnLst>
+                                    <p:set>
+                                      <p:cBhvr>
+                                        <p:cTn id="30" dur="1"/>
+                                        <p:tgtEl>
+                                          <p:spTgt spid="10"/>
+                                        </p:tgtEl>
+                                        <p:attrNameLst>
+                                          <p:attrName>style.visibility</p:attrName>
+                                        </p:attrNameLst>
+                                      </p:cBhvr>
+                                      <p:to>
+                                        <p:strVal val="visible"/>
+                                      </p:to>
+                                    </p:set>
+                                    <p:animEffect transition="in" filter="fade">
+                                      <p:cBhvr>
+                                        <p:cTn id="31" dur="700"/>
+                                        <p:tgtEl>
+                                          <p:spTgt spid="10"/>
+                                        </p:tgtEl>
+                                      </p:cBhvr>
+                                    </p:animEffect>
+                                  </p:childTnLst>
+                                </p:cTn>
+                              </p:par>
+                            </p:childTnLst>
+                          </p:cTn>
+                        </p:par>
+                      </p:childTnLst>
+                    </p:cTn>
+                  </p:par>
+                </p:childTnLst>
+              </p:cTn>
+              <p:prevCondLst>
+                <p:cond evt="onPrev" delay="0">
+                  <p:tgtEl>
+                    <p:sldTgt/>
+                  </p:tgtEl>
+                </p:cond>
+              </p:prevCondLst>
+              <p:nextCondLst>
+                <p:cond evt="onNext" delay="0">
+                  <p:tgtEl>
+                    <p:sldTgt/>
+                  </p:tgtEl>
+                </p:cond>
+              </p:nextCondLst>
+            </p:seq>
+          </p:childTnLst>
+        </p:cTn>
+      </p:par>
+    </p:tnLst>
+    <p:bldLst>
+      <p:bldP spid="2" grpId="0"/>
+      <p:bldP spid="3" grpId="0"/>
+      <p:bldP spid="4" grpId="0"/>
+      <p:bldP spid="5" grpId="0"/>
+      <p:bldP spid="6" grpId="0"/>
+      <p:bldP spid="7" grpId="0"/>
+      <p:bldP spid="8" grpId="0"/>
+      <p:bldP spid="9" grpId="0"/>
+      <p:bldP spid="10" grpId="0"/>
+    </p:bldLst>
+  </p:timing>
 </p:sld>
 </file>
 
@@ -2904,6 +3739,318 @@
   <p:clrMapOvr>
     <a:masterClrMapping/>
   </p:clrMapOvr>
+  <p:transition spd="slow">
+    <p:fade/>
+  </p:transition>
+  <p:timing>
+    <p:tnLst>
+      <p:par>
+        <p:cTn id="1" dur="indefinite" restart="never" nodeType="tmRoot">
+          <p:childTnLst>
+            <p:seq concurrent="1" nextAc="seek">
+              <p:cTn id="2" dur="indefinite" nodeType="mainSeq">
+                <p:childTnLst>
+                  <p:par>
+                    <p:cTn id="3" fill="hold">
+                      <p:stCondLst>
+                        <p:cond delay="indefinite"/>
+                        <p:cond evt="onBegin" delay="0">
+                          <p:tn val="2"/>
+                        </p:cond>
+                      </p:stCondLst>
+                      <p:childTnLst>
+                        <p:par>
+                          <p:cTn id="4" fill="hold">
+                            <p:stCondLst>
+                              <p:cond delay="0"/>
+                            </p:stCondLst>
+                            <p:childTnLst>
+                              <p:par>
+                                <p:cTn id="5" presetID="10" presetClass="entr" presetSubtype="0" fill="hold" grpId="0" nodeType="afterEffect">
+                                  <p:stCondLst>
+                                    <p:cond delay="0"/>
+                                  </p:stCondLst>
+                                  <p:childTnLst>
+                                    <p:set>
+                                      <p:cBhvr>
+                                        <p:cTn id="6" dur="1"/>
+                                        <p:tgtEl>
+                                          <p:spTgt spid="8"/>
+                                        </p:tgtEl>
+                                        <p:attrNameLst>
+                                          <p:attrName>style.visibility</p:attrName>
+                                        </p:attrNameLst>
+                                      </p:cBhvr>
+                                      <p:to>
+                                        <p:strVal val="visible"/>
+                                      </p:to>
+                                    </p:set>
+                                    <p:animEffect transition="in" filter="fade">
+                                      <p:cBhvr>
+                                        <p:cTn id="7" dur="800"/>
+                                        <p:tgtEl>
+                                          <p:spTgt spid="8"/>
+                                        </p:tgtEl>
+                                      </p:cBhvr>
+                                    </p:animEffect>
+                                  </p:childTnLst>
+                                </p:cTn>
+                              </p:par>
+                              <p:par>
+                                <p:cTn id="8" presetID="10" presetClass="entr" presetSubtype="0" fill="hold" grpId="0" nodeType="afterEffect">
+                                  <p:stCondLst>
+                                    <p:cond delay="1050"/>
+                                  </p:stCondLst>
+                                  <p:childTnLst>
+                                    <p:set>
+                                      <p:cBhvr>
+                                        <p:cTn id="9" dur="1"/>
+                                        <p:tgtEl>
+                                          <p:spTgt spid="2"/>
+                                        </p:tgtEl>
+                                        <p:attrNameLst>
+                                          <p:attrName>style.visibility</p:attrName>
+                                        </p:attrNameLst>
+                                      </p:cBhvr>
+                                      <p:to>
+                                        <p:strVal val="visible"/>
+                                      </p:to>
+                                    </p:set>
+                                    <p:animEffect transition="in" filter="fade">
+                                      <p:cBhvr>
+                                        <p:cTn id="10" dur="800"/>
+                                        <p:tgtEl>
+                                          <p:spTgt spid="2"/>
+                                        </p:tgtEl>
+                                      </p:cBhvr>
+                                    </p:animEffect>
+                                  </p:childTnLst>
+                                </p:cTn>
+                              </p:par>
+                              <p:par>
+                                <p:cTn id="11" presetID="10" presetClass="entr" presetSubtype="0" fill="hold" grpId="0" nodeType="afterEffect">
+                                  <p:stCondLst>
+                                    <p:cond delay="2350"/>
+                                  </p:stCondLst>
+                                  <p:childTnLst>
+                                    <p:set>
+                                      <p:cBhvr>
+                                        <p:cTn id="12" dur="1"/>
+                                        <p:tgtEl>
+                                          <p:spTgt spid="4"/>
+                                        </p:tgtEl>
+                                        <p:attrNameLst>
+                                          <p:attrName>style.visibility</p:attrName>
+                                        </p:attrNameLst>
+                                      </p:cBhvr>
+                                      <p:to>
+                                        <p:strVal val="visible"/>
+                                      </p:to>
+                                    </p:set>
+                                    <p:animEffect transition="in" filter="fade">
+                                      <p:cBhvr>
+                                        <p:cTn id="13" dur="800"/>
+                                        <p:tgtEl>
+                                          <p:spTgt spid="4"/>
+                                        </p:tgtEl>
+                                      </p:cBhvr>
+                                    </p:animEffect>
+                                  </p:childTnLst>
+                                </p:cTn>
+                              </p:par>
+                              <p:par>
+                                <p:cTn id="14" presetID="10" presetClass="entr" presetSubtype="0" fill="hold" grpId="0" nodeType="afterEffect">
+                                  <p:stCondLst>
+                                    <p:cond delay="3900"/>
+                                  </p:stCondLst>
+                                  <p:childTnLst>
+                                    <p:set>
+                                      <p:cBhvr>
+                                        <p:cTn id="15" dur="1"/>
+                                        <p:tgtEl>
+                                          <p:spTgt spid="6"/>
+                                        </p:tgtEl>
+                                        <p:attrNameLst>
+                                          <p:attrName>style.visibility</p:attrName>
+                                        </p:attrNameLst>
+                                      </p:cBhvr>
+                                      <p:to>
+                                        <p:strVal val="visible"/>
+                                      </p:to>
+                                    </p:set>
+                                    <p:animEffect transition="in" filter="fade">
+                                      <p:cBhvr>
+                                        <p:cTn id="16" dur="800"/>
+                                        <p:tgtEl>
+                                          <p:spTgt spid="6"/>
+                                        </p:tgtEl>
+                                      </p:cBhvr>
+                                    </p:animEffect>
+                                  </p:childTnLst>
+                                </p:cTn>
+                              </p:par>
+                              <p:par>
+                                <p:cTn id="17" presetID="10" presetClass="entr" presetSubtype="0" fill="hold" grpId="0" nodeType="afterEffect">
+                                  <p:stCondLst>
+                                    <p:cond delay="5700"/>
+                                  </p:stCondLst>
+                                  <p:childTnLst>
+                                    <p:set>
+                                      <p:cBhvr>
+                                        <p:cTn id="18" dur="1"/>
+                                        <p:tgtEl>
+                                          <p:spTgt spid="3"/>
+                                        </p:tgtEl>
+                                        <p:attrNameLst>
+                                          <p:attrName>style.visibility</p:attrName>
+                                        </p:attrNameLst>
+                                      </p:cBhvr>
+                                      <p:to>
+                                        <p:strVal val="visible"/>
+                                      </p:to>
+                                    </p:set>
+                                    <p:animEffect transition="in" filter="fade">
+                                      <p:cBhvr>
+                                        <p:cTn id="19" dur="800"/>
+                                        <p:tgtEl>
+                                          <p:spTgt spid="3"/>
+                                        </p:tgtEl>
+                                      </p:cBhvr>
+                                    </p:animEffect>
+                                  </p:childTnLst>
+                                </p:cTn>
+                              </p:par>
+                              <p:par>
+                                <p:cTn id="20" presetID="10" presetClass="entr" presetSubtype="0" fill="hold" grpId="0" nodeType="afterEffect">
+                                  <p:stCondLst>
+                                    <p:cond delay="7750"/>
+                                  </p:stCondLst>
+                                  <p:childTnLst>
+                                    <p:set>
+                                      <p:cBhvr>
+                                        <p:cTn id="21" dur="1"/>
+                                        <p:tgtEl>
+                                          <p:spTgt spid="5"/>
+                                        </p:tgtEl>
+                                        <p:attrNameLst>
+                                          <p:attrName>style.visibility</p:attrName>
+                                        </p:attrNameLst>
+                                      </p:cBhvr>
+                                      <p:to>
+                                        <p:strVal val="visible"/>
+                                      </p:to>
+                                    </p:set>
+                                    <p:animEffect transition="in" filter="fade">
+                                      <p:cBhvr>
+                                        <p:cTn id="22" dur="800"/>
+                                        <p:tgtEl>
+                                          <p:spTgt spid="5"/>
+                                        </p:tgtEl>
+                                      </p:cBhvr>
+                                    </p:animEffect>
+                                  </p:childTnLst>
+                                </p:cTn>
+                              </p:par>
+                              <p:par>
+                                <p:cTn id="23" presetID="10" presetClass="entr" presetSubtype="0" fill="hold" grpId="0" nodeType="afterEffect">
+                                  <p:stCondLst>
+                                    <p:cond delay="10050"/>
+                                  </p:stCondLst>
+                                  <p:childTnLst>
+                                    <p:set>
+                                      <p:cBhvr>
+                                        <p:cTn id="24" dur="1"/>
+                                        <p:tgtEl>
+                                          <p:spTgt spid="7"/>
+                                        </p:tgtEl>
+                                        <p:attrNameLst>
+                                          <p:attrName>style.visibility</p:attrName>
+                                        </p:attrNameLst>
+                                      </p:cBhvr>
+                                      <p:to>
+                                        <p:strVal val="visible"/>
+                                      </p:to>
+                                    </p:set>
+                                    <p:animEffect transition="in" filter="fade">
+                                      <p:cBhvr>
+                                        <p:cTn id="25" dur="800"/>
+                                        <p:tgtEl>
+                                          <p:spTgt spid="7"/>
+                                        </p:tgtEl>
+                                      </p:cBhvr>
+                                    </p:animEffect>
+                                  </p:childTnLst>
+                                </p:cTn>
+                              </p:par>
+                              <p:par>
+                                <p:cTn id="26" presetID="10" presetClass="entr" presetSubtype="0" fill="hold" grpId="0" nodeType="afterEffect">
+                                  <p:stCondLst>
+                                    <p:cond delay="12600"/>
+                                  </p:stCondLst>
+                                  <p:childTnLst>
+                                    <p:set>
+                                      <p:cBhvr>
+                                        <p:cTn id="27" dur="1"/>
+                                        <p:tgtEl>
+                                          <p:spTgt spid="9"/>
+                                        </p:tgtEl>
+                                        <p:attrNameLst>
+                                          <p:attrName>style.visibility</p:attrName>
+                                        </p:attrNameLst>
+                                      </p:cBhvr>
+                                      <p:to>
+                                        <p:strVal val="visible"/>
+                                      </p:to>
+                                    </p:set>
+                                    <p:animEffect transition="in" filter="fade">
+                                      <p:cBhvr>
+                                        <p:cTn id="28" dur="800"/>
+                                        <p:tgtEl>
+                                          <p:spTgt spid="9"/>
+                                        </p:tgtEl>
+                                      </p:cBhvr>
+                                    </p:animEffect>
+                                  </p:childTnLst>
+                                </p:cTn>
+                              </p:par>
+                            </p:childTnLst>
+                          </p:cTn>
+                        </p:par>
+                      </p:childTnLst>
+                    </p:cTn>
+                  </p:par>
+                </p:childTnLst>
+              </p:cTn>
+              <p:prevCondLst>
+                <p:cond evt="onPrev" delay="0">
+                  <p:tgtEl>
+                    <p:sldTgt/>
+                  </p:tgtEl>
+                </p:cond>
+              </p:prevCondLst>
+              <p:nextCondLst>
+                <p:cond evt="onNext" delay="0">
+                  <p:tgtEl>
+                    <p:sldTgt/>
+                  </p:tgtEl>
+                </p:cond>
+              </p:nextCondLst>
+            </p:seq>
+          </p:childTnLst>
+        </p:cTn>
+      </p:par>
+    </p:tnLst>
+    <p:bldLst>
+      <p:bldP spid="8" grpId="0"/>
+      <p:bldP spid="2" grpId="0"/>
+      <p:bldP spid="4" grpId="0"/>
+      <p:bldP spid="6" grpId="0"/>
+      <p:bldP spid="3" grpId="0"/>
+      <p:bldP spid="5" grpId="0"/>
+      <p:bldP spid="7" grpId="0"/>
+      <p:bldP spid="9" grpId="0"/>
+    </p:bldLst>
+  </p:timing>
 </p:sld>
 </file>
 
@@ -3613,6 +4760,670 @@
   <p:clrMapOvr>
     <a:masterClrMapping/>
   </p:clrMapOvr>
+  <p:transition spd="slow">
+    <p:fade/>
+  </p:transition>
+  <p:timing>
+    <p:tnLst>
+      <p:par>
+        <p:cTn id="1" dur="indefinite" restart="never" nodeType="tmRoot">
+          <p:childTnLst>
+            <p:seq concurrent="1" nextAc="seek">
+              <p:cTn id="2" dur="indefinite" nodeType="mainSeq">
+                <p:childTnLst>
+                  <p:par>
+                    <p:cTn id="3" fill="hold">
+                      <p:stCondLst>
+                        <p:cond delay="indefinite"/>
+                        <p:cond evt="onBegin" delay="0">
+                          <p:tn val="2"/>
+                        </p:cond>
+                      </p:stCondLst>
+                      <p:childTnLst>
+                        <p:par>
+                          <p:cTn id="4" fill="hold">
+                            <p:stCondLst>
+                              <p:cond delay="0"/>
+                            </p:stCondLst>
+                            <p:childTnLst>
+                              <p:par>
+                                <p:cTn id="5" presetID="10" presetClass="entr" presetSubtype="0" fill="hold" grpId="0" nodeType="afterEffect">
+                                  <p:stCondLst>
+                                    <p:cond delay="0"/>
+                                  </p:stCondLst>
+                                  <p:childTnLst>
+                                    <p:set>
+                                      <p:cBhvr>
+                                        <p:cTn id="6" dur="1"/>
+                                        <p:tgtEl>
+                                          <p:spTgt spid="2"/>
+                                        </p:tgtEl>
+                                        <p:attrNameLst>
+                                          <p:attrName>style.visibility</p:attrName>
+                                        </p:attrNameLst>
+                                      </p:cBhvr>
+                                      <p:to>
+                                        <p:strVal val="visible"/>
+                                      </p:to>
+                                    </p:set>
+                                    <p:animEffect transition="in" filter="fade">
+                                      <p:cBhvr>
+                                        <p:cTn id="7" dur="700"/>
+                                        <p:tgtEl>
+                                          <p:spTgt spid="2"/>
+                                        </p:tgtEl>
+                                      </p:cBhvr>
+                                    </p:animEffect>
+                                  </p:childTnLst>
+                                </p:cTn>
+                              </p:par>
+                              <p:par>
+                                <p:cTn id="8" presetID="10" presetClass="entr" presetSubtype="0" fill="hold" grpId="0" nodeType="afterEffect">
+                                  <p:stCondLst>
+                                    <p:cond delay="880"/>
+                                  </p:stCondLst>
+                                  <p:childTnLst>
+                                    <p:set>
+                                      <p:cBhvr>
+                                        <p:cTn id="9" dur="1"/>
+                                        <p:tgtEl>
+                                          <p:spTgt spid="4"/>
+                                        </p:tgtEl>
+                                        <p:attrNameLst>
+                                          <p:attrName>style.visibility</p:attrName>
+                                        </p:attrNameLst>
+                                      </p:cBhvr>
+                                      <p:to>
+                                        <p:strVal val="visible"/>
+                                      </p:to>
+                                    </p:set>
+                                    <p:animEffect transition="in" filter="fade">
+                                      <p:cBhvr>
+                                        <p:cTn id="10" dur="700"/>
+                                        <p:tgtEl>
+                                          <p:spTgt spid="4"/>
+                                        </p:tgtEl>
+                                      </p:cBhvr>
+                                    </p:animEffect>
+                                  </p:childTnLst>
+                                </p:cTn>
+                              </p:par>
+                              <p:par>
+                                <p:cTn id="11" presetID="10" presetClass="entr" presetSubtype="0" fill="hold" grpId="0" nodeType="afterEffect">
+                                  <p:stCondLst>
+                                    <p:cond delay="1940"/>
+                                  </p:stCondLst>
+                                  <p:childTnLst>
+                                    <p:set>
+                                      <p:cBhvr>
+                                        <p:cTn id="12" dur="1"/>
+                                        <p:tgtEl>
+                                          <p:spTgt spid="7"/>
+                                        </p:tgtEl>
+                                        <p:attrNameLst>
+                                          <p:attrName>style.visibility</p:attrName>
+                                        </p:attrNameLst>
+                                      </p:cBhvr>
+                                      <p:to>
+                                        <p:strVal val="visible"/>
+                                      </p:to>
+                                    </p:set>
+                                    <p:animEffect transition="in" filter="fade">
+                                      <p:cBhvr>
+                                        <p:cTn id="13" dur="700"/>
+                                        <p:tgtEl>
+                                          <p:spTgt spid="7"/>
+                                        </p:tgtEl>
+                                      </p:cBhvr>
+                                    </p:animEffect>
+                                  </p:childTnLst>
+                                </p:cTn>
+                              </p:par>
+                              <p:par>
+                                <p:cTn id="14" presetID="10" presetClass="entr" presetSubtype="0" fill="hold" grpId="0" nodeType="afterEffect">
+                                  <p:stCondLst>
+                                    <p:cond delay="3180"/>
+                                  </p:stCondLst>
+                                  <p:childTnLst>
+                                    <p:set>
+                                      <p:cBhvr>
+                                        <p:cTn id="15" dur="1"/>
+                                        <p:tgtEl>
+                                          <p:spTgt spid="5"/>
+                                        </p:tgtEl>
+                                        <p:attrNameLst>
+                                          <p:attrName>style.visibility</p:attrName>
+                                        </p:attrNameLst>
+                                      </p:cBhvr>
+                                      <p:to>
+                                        <p:strVal val="visible"/>
+                                      </p:to>
+                                    </p:set>
+                                    <p:animEffect transition="in" filter="fade">
+                                      <p:cBhvr>
+                                        <p:cTn id="16" dur="700"/>
+                                        <p:tgtEl>
+                                          <p:spTgt spid="5"/>
+                                        </p:tgtEl>
+                                      </p:cBhvr>
+                                    </p:animEffect>
+                                  </p:childTnLst>
+                                </p:cTn>
+                              </p:par>
+                              <p:par>
+                                <p:cTn id="17" presetID="10" presetClass="entr" presetSubtype="0" fill="hold" grpId="0" nodeType="afterEffect">
+                                  <p:stCondLst>
+                                    <p:cond delay="4600"/>
+                                  </p:stCondLst>
+                                  <p:childTnLst>
+                                    <p:set>
+                                      <p:cBhvr>
+                                        <p:cTn id="18" dur="1"/>
+                                        <p:tgtEl>
+                                          <p:spTgt spid="8"/>
+                                        </p:tgtEl>
+                                        <p:attrNameLst>
+                                          <p:attrName>style.visibility</p:attrName>
+                                        </p:attrNameLst>
+                                      </p:cBhvr>
+                                      <p:to>
+                                        <p:strVal val="visible"/>
+                                      </p:to>
+                                    </p:set>
+                                    <p:animEffect transition="in" filter="fade">
+                                      <p:cBhvr>
+                                        <p:cTn id="19" dur="700"/>
+                                        <p:tgtEl>
+                                          <p:spTgt spid="8"/>
+                                        </p:tgtEl>
+                                      </p:cBhvr>
+                                    </p:animEffect>
+                                  </p:childTnLst>
+                                </p:cTn>
+                              </p:par>
+                              <p:par>
+                                <p:cTn id="20" presetID="10" presetClass="entr" presetSubtype="0" fill="hold" grpId="0" nodeType="afterEffect">
+                                  <p:stCondLst>
+                                    <p:cond delay="6200"/>
+                                  </p:stCondLst>
+                                  <p:childTnLst>
+                                    <p:set>
+                                      <p:cBhvr>
+                                        <p:cTn id="21" dur="1"/>
+                                        <p:tgtEl>
+                                          <p:spTgt spid="6"/>
+                                        </p:tgtEl>
+                                        <p:attrNameLst>
+                                          <p:attrName>style.visibility</p:attrName>
+                                        </p:attrNameLst>
+                                      </p:cBhvr>
+                                      <p:to>
+                                        <p:strVal val="visible"/>
+                                      </p:to>
+                                    </p:set>
+                                    <p:animEffect transition="in" filter="fade">
+                                      <p:cBhvr>
+                                        <p:cTn id="22" dur="700"/>
+                                        <p:tgtEl>
+                                          <p:spTgt spid="6"/>
+                                        </p:tgtEl>
+                                      </p:cBhvr>
+                                    </p:animEffect>
+                                  </p:childTnLst>
+                                </p:cTn>
+                              </p:par>
+                              <p:par>
+                                <p:cTn id="23" presetID="10" presetClass="entr" presetSubtype="0" fill="hold" grpId="0" nodeType="afterEffect">
+                                  <p:stCondLst>
+                                    <p:cond delay="7980"/>
+                                  </p:stCondLst>
+                                  <p:childTnLst>
+                                    <p:set>
+                                      <p:cBhvr>
+                                        <p:cTn id="24" dur="1"/>
+                                        <p:tgtEl>
+                                          <p:spTgt spid="9"/>
+                                        </p:tgtEl>
+                                        <p:attrNameLst>
+                                          <p:attrName>style.visibility</p:attrName>
+                                        </p:attrNameLst>
+                                      </p:cBhvr>
+                                      <p:to>
+                                        <p:strVal val="visible"/>
+                                      </p:to>
+                                    </p:set>
+                                    <p:animEffect transition="in" filter="fade">
+                                      <p:cBhvr>
+                                        <p:cTn id="25" dur="700"/>
+                                        <p:tgtEl>
+                                          <p:spTgt spid="9"/>
+                                        </p:tgtEl>
+                                      </p:cBhvr>
+                                    </p:animEffect>
+                                  </p:childTnLst>
+                                </p:cTn>
+                              </p:par>
+                              <p:par>
+                                <p:cTn id="26" presetID="10" presetClass="entr" presetSubtype="0" fill="hold" grpId="0" nodeType="afterEffect">
+                                  <p:stCondLst>
+                                    <p:cond delay="9940"/>
+                                  </p:stCondLst>
+                                  <p:childTnLst>
+                                    <p:set>
+                                      <p:cBhvr>
+                                        <p:cTn id="27" dur="1"/>
+                                        <p:tgtEl>
+                                          <p:spTgt spid="10"/>
+                                        </p:tgtEl>
+                                        <p:attrNameLst>
+                                          <p:attrName>style.visibility</p:attrName>
+                                        </p:attrNameLst>
+                                      </p:cBhvr>
+                                      <p:to>
+                                        <p:strVal val="visible"/>
+                                      </p:to>
+                                    </p:set>
+                                    <p:animEffect transition="in" filter="fade">
+                                      <p:cBhvr>
+                                        <p:cTn id="28" dur="700"/>
+                                        <p:tgtEl>
+                                          <p:spTgt spid="10"/>
+                                        </p:tgtEl>
+                                      </p:cBhvr>
+                                    </p:animEffect>
+                                  </p:childTnLst>
+                                </p:cTn>
+                              </p:par>
+                              <p:par>
+                                <p:cTn id="29" presetID="10" presetClass="entr" presetSubtype="0" fill="hold" grpId="0" nodeType="afterEffect">
+                                  <p:stCondLst>
+                                    <p:cond delay="12080"/>
+                                  </p:stCondLst>
+                                  <p:childTnLst>
+                                    <p:set>
+                                      <p:cBhvr>
+                                        <p:cTn id="30" dur="1"/>
+                                        <p:tgtEl>
+                                          <p:spTgt spid="13"/>
+                                        </p:tgtEl>
+                                        <p:attrNameLst>
+                                          <p:attrName>style.visibility</p:attrName>
+                                        </p:attrNameLst>
+                                      </p:cBhvr>
+                                      <p:to>
+                                        <p:strVal val="visible"/>
+                                      </p:to>
+                                    </p:set>
+                                    <p:animEffect transition="in" filter="fade">
+                                      <p:cBhvr>
+                                        <p:cTn id="31" dur="700"/>
+                                        <p:tgtEl>
+                                          <p:spTgt spid="13"/>
+                                        </p:tgtEl>
+                                      </p:cBhvr>
+                                    </p:animEffect>
+                                  </p:childTnLst>
+                                </p:cTn>
+                              </p:par>
+                              <p:par>
+                                <p:cTn id="32" presetID="10" presetClass="entr" presetSubtype="0" fill="hold" grpId="0" nodeType="afterEffect">
+                                  <p:stCondLst>
+                                    <p:cond delay="14400"/>
+                                  </p:stCondLst>
+                                  <p:childTnLst>
+                                    <p:set>
+                                      <p:cBhvr>
+                                        <p:cTn id="33" dur="1"/>
+                                        <p:tgtEl>
+                                          <p:spTgt spid="11"/>
+                                        </p:tgtEl>
+                                        <p:attrNameLst>
+                                          <p:attrName>style.visibility</p:attrName>
+                                        </p:attrNameLst>
+                                      </p:cBhvr>
+                                      <p:to>
+                                        <p:strVal val="visible"/>
+                                      </p:to>
+                                    </p:set>
+                                    <p:animEffect transition="in" filter="fade">
+                                      <p:cBhvr>
+                                        <p:cTn id="34" dur="700"/>
+                                        <p:tgtEl>
+                                          <p:spTgt spid="11"/>
+                                        </p:tgtEl>
+                                      </p:cBhvr>
+                                    </p:animEffect>
+                                  </p:childTnLst>
+                                </p:cTn>
+                              </p:par>
+                              <p:par>
+                                <p:cTn id="35" presetID="10" presetClass="entr" presetSubtype="0" fill="hold" grpId="0" nodeType="afterEffect">
+                                  <p:stCondLst>
+                                    <p:cond delay="16900"/>
+                                  </p:stCondLst>
+                                  <p:childTnLst>
+                                    <p:set>
+                                      <p:cBhvr>
+                                        <p:cTn id="36" dur="1"/>
+                                        <p:tgtEl>
+                                          <p:spTgt spid="14"/>
+                                        </p:tgtEl>
+                                        <p:attrNameLst>
+                                          <p:attrName>style.visibility</p:attrName>
+                                        </p:attrNameLst>
+                                      </p:cBhvr>
+                                      <p:to>
+                                        <p:strVal val="visible"/>
+                                      </p:to>
+                                    </p:set>
+                                    <p:animEffect transition="in" filter="fade">
+                                      <p:cBhvr>
+                                        <p:cTn id="37" dur="700"/>
+                                        <p:tgtEl>
+                                          <p:spTgt spid="14"/>
+                                        </p:tgtEl>
+                                      </p:cBhvr>
+                                    </p:animEffect>
+                                  </p:childTnLst>
+                                </p:cTn>
+                              </p:par>
+                              <p:par>
+                                <p:cTn id="38" presetID="10" presetClass="entr" presetSubtype="0" fill="hold" grpId="0" nodeType="afterEffect">
+                                  <p:stCondLst>
+                                    <p:cond delay="19580"/>
+                                  </p:stCondLst>
+                                  <p:childTnLst>
+                                    <p:set>
+                                      <p:cBhvr>
+                                        <p:cTn id="39" dur="1"/>
+                                        <p:tgtEl>
+                                          <p:spTgt spid="3"/>
+                                        </p:tgtEl>
+                                        <p:attrNameLst>
+                                          <p:attrName>style.visibility</p:attrName>
+                                        </p:attrNameLst>
+                                      </p:cBhvr>
+                                      <p:to>
+                                        <p:strVal val="visible"/>
+                                      </p:to>
+                                    </p:set>
+                                    <p:animEffect transition="in" filter="fade">
+                                      <p:cBhvr>
+                                        <p:cTn id="40" dur="700"/>
+                                        <p:tgtEl>
+                                          <p:spTgt spid="3"/>
+                                        </p:tgtEl>
+                                      </p:cBhvr>
+                                    </p:animEffect>
+                                  </p:childTnLst>
+                                </p:cTn>
+                              </p:par>
+                              <p:par>
+                                <p:cTn id="41" presetID="10" presetClass="entr" presetSubtype="0" fill="hold" grpId="0" nodeType="afterEffect">
+                                  <p:stCondLst>
+                                    <p:cond delay="22440"/>
+                                  </p:stCondLst>
+                                  <p:childTnLst>
+                                    <p:set>
+                                      <p:cBhvr>
+                                        <p:cTn id="42" dur="1"/>
+                                        <p:tgtEl>
+                                          <p:spTgt spid="12"/>
+                                        </p:tgtEl>
+                                        <p:attrNameLst>
+                                          <p:attrName>style.visibility</p:attrName>
+                                        </p:attrNameLst>
+                                      </p:cBhvr>
+                                      <p:to>
+                                        <p:strVal val="visible"/>
+                                      </p:to>
+                                    </p:set>
+                                    <p:animEffect transition="in" filter="fade">
+                                      <p:cBhvr>
+                                        <p:cTn id="43" dur="700"/>
+                                        <p:tgtEl>
+                                          <p:spTgt spid="12"/>
+                                        </p:tgtEl>
+                                      </p:cBhvr>
+                                    </p:animEffect>
+                                  </p:childTnLst>
+                                </p:cTn>
+                              </p:par>
+                              <p:par>
+                                <p:cTn id="44" presetID="10" presetClass="entr" presetSubtype="0" fill="hold" grpId="0" nodeType="afterEffect">
+                                  <p:stCondLst>
+                                    <p:cond delay="25480"/>
+                                  </p:stCondLst>
+                                  <p:childTnLst>
+                                    <p:set>
+                                      <p:cBhvr>
+                                        <p:cTn id="45" dur="1"/>
+                                        <p:tgtEl>
+                                          <p:spTgt spid="15"/>
+                                        </p:tgtEl>
+                                        <p:attrNameLst>
+                                          <p:attrName>style.visibility</p:attrName>
+                                        </p:attrNameLst>
+                                      </p:cBhvr>
+                                      <p:to>
+                                        <p:strVal val="visible"/>
+                                      </p:to>
+                                    </p:set>
+                                    <p:animEffect transition="in" filter="fade">
+                                      <p:cBhvr>
+                                        <p:cTn id="46" dur="700"/>
+                                        <p:tgtEl>
+                                          <p:spTgt spid="15"/>
+                                        </p:tgtEl>
+                                      </p:cBhvr>
+                                    </p:animEffect>
+                                  </p:childTnLst>
+                                </p:cTn>
+                              </p:par>
+                              <p:par>
+                                <p:cTn id="47" presetID="10" presetClass="entr" presetSubtype="0" fill="hold" grpId="0" nodeType="afterEffect">
+                                  <p:stCondLst>
+                                    <p:cond delay="28700"/>
+                                  </p:stCondLst>
+                                  <p:childTnLst>
+                                    <p:set>
+                                      <p:cBhvr>
+                                        <p:cTn id="48" dur="1"/>
+                                        <p:tgtEl>
+                                          <p:spTgt spid="16"/>
+                                        </p:tgtEl>
+                                        <p:attrNameLst>
+                                          <p:attrName>style.visibility</p:attrName>
+                                        </p:attrNameLst>
+                                      </p:cBhvr>
+                                      <p:to>
+                                        <p:strVal val="visible"/>
+                                      </p:to>
+                                    </p:set>
+                                    <p:animEffect transition="in" filter="fade">
+                                      <p:cBhvr>
+                                        <p:cTn id="49" dur="700"/>
+                                        <p:tgtEl>
+                                          <p:spTgt spid="16"/>
+                                        </p:tgtEl>
+                                      </p:cBhvr>
+                                    </p:animEffect>
+                                  </p:childTnLst>
+                                </p:cTn>
+                              </p:par>
+                              <p:par>
+                                <p:cTn id="50" presetID="10" presetClass="entr" presetSubtype="0" fill="hold" grpId="0" nodeType="afterEffect">
+                                  <p:stCondLst>
+                                    <p:cond delay="32100"/>
+                                  </p:stCondLst>
+                                  <p:childTnLst>
+                                    <p:set>
+                                      <p:cBhvr>
+                                        <p:cTn id="51" dur="1"/>
+                                        <p:tgtEl>
+                                          <p:spTgt spid="18"/>
+                                        </p:tgtEl>
+                                        <p:attrNameLst>
+                                          <p:attrName>style.visibility</p:attrName>
+                                        </p:attrNameLst>
+                                      </p:cBhvr>
+                                      <p:to>
+                                        <p:strVal val="visible"/>
+                                      </p:to>
+                                    </p:set>
+                                    <p:animEffect transition="in" filter="fade">
+                                      <p:cBhvr>
+                                        <p:cTn id="52" dur="700"/>
+                                        <p:tgtEl>
+                                          <p:spTgt spid="18"/>
+                                        </p:tgtEl>
+                                      </p:cBhvr>
+                                    </p:animEffect>
+                                  </p:childTnLst>
+                                </p:cTn>
+                              </p:par>
+                              <p:par>
+                                <p:cTn id="53" presetID="10" presetClass="entr" presetSubtype="0" fill="hold" grpId="0" nodeType="afterEffect">
+                                  <p:stCondLst>
+                                    <p:cond delay="35680"/>
+                                  </p:stCondLst>
+                                  <p:childTnLst>
+                                    <p:set>
+                                      <p:cBhvr>
+                                        <p:cTn id="54" dur="1"/>
+                                        <p:tgtEl>
+                                          <p:spTgt spid="17"/>
+                                        </p:tgtEl>
+                                        <p:attrNameLst>
+                                          <p:attrName>style.visibility</p:attrName>
+                                        </p:attrNameLst>
+                                      </p:cBhvr>
+                                      <p:to>
+                                        <p:strVal val="visible"/>
+                                      </p:to>
+                                    </p:set>
+                                    <p:animEffect transition="in" filter="fade">
+                                      <p:cBhvr>
+                                        <p:cTn id="55" dur="700"/>
+                                        <p:tgtEl>
+                                          <p:spTgt spid="17"/>
+                                        </p:tgtEl>
+                                      </p:cBhvr>
+                                    </p:animEffect>
+                                  </p:childTnLst>
+                                </p:cTn>
+                              </p:par>
+                              <p:par>
+                                <p:cTn id="56" presetID="10" presetClass="entr" presetSubtype="0" fill="hold" grpId="0" nodeType="afterEffect">
+                                  <p:stCondLst>
+                                    <p:cond delay="39440"/>
+                                  </p:stCondLst>
+                                  <p:childTnLst>
+                                    <p:set>
+                                      <p:cBhvr>
+                                        <p:cTn id="57" dur="1"/>
+                                        <p:tgtEl>
+                                          <p:spTgt spid="19"/>
+                                        </p:tgtEl>
+                                        <p:attrNameLst>
+                                          <p:attrName>style.visibility</p:attrName>
+                                        </p:attrNameLst>
+                                      </p:cBhvr>
+                                      <p:to>
+                                        <p:strVal val="visible"/>
+                                      </p:to>
+                                    </p:set>
+                                    <p:animEffect transition="in" filter="fade">
+                                      <p:cBhvr>
+                                        <p:cTn id="58" dur="700"/>
+                                        <p:tgtEl>
+                                          <p:spTgt spid="19"/>
+                                        </p:tgtEl>
+                                      </p:cBhvr>
+                                    </p:animEffect>
+                                  </p:childTnLst>
+                                </p:cTn>
+                              </p:par>
+                              <p:par>
+                                <p:cTn id="59" presetID="10" presetClass="entr" presetSubtype="0" fill="hold" grpId="0" nodeType="afterEffect">
+                                  <p:stCondLst>
+                                    <p:cond delay="43380"/>
+                                  </p:stCondLst>
+                                  <p:childTnLst>
+                                    <p:set>
+                                      <p:cBhvr>
+                                        <p:cTn id="60" dur="1"/>
+                                        <p:tgtEl>
+                                          <p:spTgt spid="20"/>
+                                        </p:tgtEl>
+                                        <p:attrNameLst>
+                                          <p:attrName>style.visibility</p:attrName>
+                                        </p:attrNameLst>
+                                      </p:cBhvr>
+                                      <p:to>
+                                        <p:strVal val="visible"/>
+                                      </p:to>
+                                    </p:set>
+                                    <p:animEffect transition="in" filter="fade">
+                                      <p:cBhvr>
+                                        <p:cTn id="61" dur="700"/>
+                                        <p:tgtEl>
+                                          <p:spTgt spid="20"/>
+                                        </p:tgtEl>
+                                      </p:cBhvr>
+                                    </p:animEffect>
+                                  </p:childTnLst>
+                                </p:cTn>
+                              </p:par>
+                            </p:childTnLst>
+                          </p:cTn>
+                        </p:par>
+                      </p:childTnLst>
+                    </p:cTn>
+                  </p:par>
+                </p:childTnLst>
+              </p:cTn>
+              <p:prevCondLst>
+                <p:cond evt="onPrev" delay="0">
+                  <p:tgtEl>
+                    <p:sldTgt/>
+                  </p:tgtEl>
+                </p:cond>
+              </p:prevCondLst>
+              <p:nextCondLst>
+                <p:cond evt="onNext" delay="0">
+                  <p:tgtEl>
+                    <p:sldTgt/>
+                  </p:tgtEl>
+                </p:cond>
+              </p:nextCondLst>
+            </p:seq>
+          </p:childTnLst>
+        </p:cTn>
+      </p:par>
+    </p:tnLst>
+    <p:bldLst>
+      <p:bldP spid="2" grpId="0"/>
+      <p:bldP spid="4" grpId="0"/>
+      <p:bldP spid="7" grpId="0"/>
+      <p:bldP spid="5" grpId="0"/>
+      <p:bldP spid="8" grpId="0"/>
+      <p:bldP spid="6" grpId="0"/>
+      <p:bldP spid="9" grpId="0"/>
+      <p:bldP spid="10" grpId="0"/>
+      <p:bldP spid="13" grpId="0"/>
+      <p:bldP spid="11" grpId="0"/>
+      <p:bldP spid="14" grpId="0"/>
+      <p:bldP spid="3" grpId="0"/>
+      <p:bldP spid="12" grpId="0"/>
+      <p:bldP spid="15" grpId="0"/>
+      <p:bldP spid="16" grpId="0"/>
+      <p:bldP spid="18" grpId="0"/>
+      <p:bldP spid="17" grpId="0"/>
+      <p:bldP spid="19" grpId="0"/>
+      <p:bldP spid="20" grpId="0"/>
+    </p:bldLst>
+  </p:timing>
 </p:sld>
 </file>
 
@@ -3853,6 +5664,222 @@
   <p:clrMapOvr>
     <a:masterClrMapping/>
   </p:clrMapOvr>
+  <p:transition spd="slow">
+    <p:fade/>
+  </p:transition>
+  <p:timing>
+    <p:tnLst>
+      <p:par>
+        <p:cTn id="1" dur="indefinite" restart="never" nodeType="tmRoot">
+          <p:childTnLst>
+            <p:seq concurrent="1" nextAc="seek">
+              <p:cTn id="2" dur="indefinite" nodeType="mainSeq">
+                <p:childTnLst>
+                  <p:par>
+                    <p:cTn id="3" fill="hold">
+                      <p:stCondLst>
+                        <p:cond delay="indefinite"/>
+                        <p:cond evt="onBegin" delay="0">
+                          <p:tn val="2"/>
+                        </p:cond>
+                      </p:stCondLst>
+                      <p:childTnLst>
+                        <p:par>
+                          <p:cTn id="4" fill="hold">
+                            <p:stCondLst>
+                              <p:cond delay="0"/>
+                            </p:stCondLst>
+                            <p:childTnLst>
+                              <p:par>
+                                <p:cTn id="5" presetID="10" presetClass="entr" presetSubtype="0" fill="hold" grpId="0" nodeType="afterEffect">
+                                  <p:stCondLst>
+                                    <p:cond delay="0"/>
+                                  </p:stCondLst>
+                                  <p:childTnLst>
+                                    <p:set>
+                                      <p:cBhvr>
+                                        <p:cTn id="6" dur="1"/>
+                                        <p:tgtEl>
+                                          <p:spTgt spid="2"/>
+                                        </p:tgtEl>
+                                        <p:attrNameLst>
+                                          <p:attrName>style.visibility</p:attrName>
+                                        </p:attrNameLst>
+                                      </p:cBhvr>
+                                      <p:to>
+                                        <p:strVal val="visible"/>
+                                      </p:to>
+                                    </p:set>
+                                    <p:animEffect transition="in" filter="fade">
+                                      <p:cBhvr>
+                                        <p:cTn id="7" dur="900"/>
+                                        <p:tgtEl>
+                                          <p:spTgt spid="2"/>
+                                        </p:tgtEl>
+                                      </p:cBhvr>
+                                    </p:animEffect>
+                                  </p:childTnLst>
+                                </p:cTn>
+                              </p:par>
+                              <p:par>
+                                <p:cTn id="8" presetID="10" presetClass="entr" presetSubtype="0" fill="hold" grpId="0" nodeType="afterEffect">
+                                  <p:stCondLst>
+                                    <p:cond delay="1150"/>
+                                  </p:stCondLst>
+                                  <p:childTnLst>
+                                    <p:set>
+                                      <p:cBhvr>
+                                        <p:cTn id="9" dur="1"/>
+                                        <p:tgtEl>
+                                          <p:spTgt spid="3"/>
+                                        </p:tgtEl>
+                                        <p:attrNameLst>
+                                          <p:attrName>style.visibility</p:attrName>
+                                        </p:attrNameLst>
+                                      </p:cBhvr>
+                                      <p:to>
+                                        <p:strVal val="visible"/>
+                                      </p:to>
+                                    </p:set>
+                                    <p:animEffect transition="in" filter="fade">
+                                      <p:cBhvr>
+                                        <p:cTn id="10" dur="900"/>
+                                        <p:tgtEl>
+                                          <p:spTgt spid="3"/>
+                                        </p:tgtEl>
+                                      </p:cBhvr>
+                                    </p:animEffect>
+                                  </p:childTnLst>
+                                </p:cTn>
+                              </p:par>
+                              <p:par>
+                                <p:cTn id="11" presetID="10" presetClass="entr" presetSubtype="0" fill="hold" grpId="0" nodeType="afterEffect">
+                                  <p:stCondLst>
+                                    <p:cond delay="2550"/>
+                                  </p:stCondLst>
+                                  <p:childTnLst>
+                                    <p:set>
+                                      <p:cBhvr>
+                                        <p:cTn id="12" dur="1"/>
+                                        <p:tgtEl>
+                                          <p:spTgt spid="4"/>
+                                        </p:tgtEl>
+                                        <p:attrNameLst>
+                                          <p:attrName>style.visibility</p:attrName>
+                                        </p:attrNameLst>
+                                      </p:cBhvr>
+                                      <p:to>
+                                        <p:strVal val="visible"/>
+                                      </p:to>
+                                    </p:set>
+                                    <p:animEffect transition="in" filter="fade">
+                                      <p:cBhvr>
+                                        <p:cTn id="13" dur="900"/>
+                                        <p:tgtEl>
+                                          <p:spTgt spid="4"/>
+                                        </p:tgtEl>
+                                      </p:cBhvr>
+                                    </p:animEffect>
+                                  </p:childTnLst>
+                                </p:cTn>
+                              </p:par>
+                              <p:par>
+                                <p:cTn id="14" presetID="10" presetClass="entr" presetSubtype="0" fill="hold" grpId="0" nodeType="afterEffect">
+                                  <p:stCondLst>
+                                    <p:cond delay="4200"/>
+                                  </p:stCondLst>
+                                  <p:childTnLst>
+                                    <p:set>
+                                      <p:cBhvr>
+                                        <p:cTn id="15" dur="1"/>
+                                        <p:tgtEl>
+                                          <p:spTgt spid="5"/>
+                                        </p:tgtEl>
+                                        <p:attrNameLst>
+                                          <p:attrName>style.visibility</p:attrName>
+                                        </p:attrNameLst>
+                                      </p:cBhvr>
+                                      <p:to>
+                                        <p:strVal val="visible"/>
+                                      </p:to>
+                                    </p:set>
+                                    <p:animEffect transition="in" filter="fade">
+                                      <p:cBhvr>
+                                        <p:cTn id="16" dur="900"/>
+                                        <p:tgtEl>
+                                          <p:spTgt spid="5"/>
+                                        </p:tgtEl>
+                                      </p:cBhvr>
+                                    </p:animEffect>
+                                  </p:childTnLst>
+                                </p:cTn>
+                              </p:par>
+                              <p:par>
+                                <p:cTn id="17" presetID="10" presetClass="entr" presetSubtype="0" fill="hold" grpId="0" nodeType="afterEffect">
+                                  <p:stCondLst>
+                                    <p:cond delay="6100"/>
+                                  </p:stCondLst>
+                                  <p:childTnLst>
+                                    <p:set>
+                                      <p:cBhvr>
+                                        <p:cTn id="18" dur="1"/>
+                                        <p:tgtEl>
+                                          <p:spTgt spid="6"/>
+                                        </p:tgtEl>
+                                        <p:attrNameLst>
+                                          <p:attrName>style.visibility</p:attrName>
+                                        </p:attrNameLst>
+                                      </p:cBhvr>
+                                      <p:to>
+                                        <p:strVal val="visible"/>
+                                      </p:to>
+                                    </p:set>
+                                    <p:animEffect transition="in" filter="fade">
+                                      <p:cBhvr>
+                                        <p:cTn id="19" dur="900"/>
+                                        <p:tgtEl>
+                                          <p:spTgt spid="6"/>
+                                        </p:tgtEl>
+                                      </p:cBhvr>
+                                    </p:animEffect>
+                                  </p:childTnLst>
+                                </p:cTn>
+                              </p:par>
+                            </p:childTnLst>
+                          </p:cTn>
+                        </p:par>
+                      </p:childTnLst>
+                    </p:cTn>
+                  </p:par>
+                </p:childTnLst>
+              </p:cTn>
+              <p:prevCondLst>
+                <p:cond evt="onPrev" delay="0">
+                  <p:tgtEl>
+                    <p:sldTgt/>
+                  </p:tgtEl>
+                </p:cond>
+              </p:prevCondLst>
+              <p:nextCondLst>
+                <p:cond evt="onNext" delay="0">
+                  <p:tgtEl>
+                    <p:sldTgt/>
+                  </p:tgtEl>
+                </p:cond>
+              </p:nextCondLst>
+            </p:seq>
+          </p:childTnLst>
+        </p:cTn>
+      </p:par>
+    </p:tnLst>
+    <p:bldLst>
+      <p:bldP spid="2" grpId="0"/>
+      <p:bldP spid="3" grpId="0"/>
+      <p:bldP spid="4" grpId="0"/>
+      <p:bldP spid="5" grpId="0"/>
+      <p:bldP spid="6" grpId="0"/>
+    </p:bldLst>
+  </p:timing>
 </p:sld>
 </file>
 
@@ -4204,6 +6231,350 @@
   <p:clrMapOvr>
     <a:masterClrMapping/>
   </p:clrMapOvr>
+  <p:transition spd="slow">
+    <p:fade/>
+  </p:transition>
+  <p:timing>
+    <p:tnLst>
+      <p:par>
+        <p:cTn id="1" dur="indefinite" restart="never" nodeType="tmRoot">
+          <p:childTnLst>
+            <p:seq concurrent="1" nextAc="seek">
+              <p:cTn id="2" dur="indefinite" nodeType="mainSeq">
+                <p:childTnLst>
+                  <p:par>
+                    <p:cTn id="3" fill="hold">
+                      <p:stCondLst>
+                        <p:cond delay="indefinite"/>
+                        <p:cond evt="onBegin" delay="0">
+                          <p:tn val="2"/>
+                        </p:cond>
+                      </p:stCondLst>
+                      <p:childTnLst>
+                        <p:par>
+                          <p:cTn id="4" fill="hold">
+                            <p:stCondLst>
+                              <p:cond delay="0"/>
+                            </p:stCondLst>
+                            <p:childTnLst>
+                              <p:par>
+                                <p:cTn id="5" presetID="10" presetClass="entr" presetSubtype="0" fill="hold" grpId="0" nodeType="afterEffect">
+                                  <p:stCondLst>
+                                    <p:cond delay="0"/>
+                                  </p:stCondLst>
+                                  <p:childTnLst>
+                                    <p:set>
+                                      <p:cBhvr>
+                                        <p:cTn id="6" dur="1"/>
+                                        <p:tgtEl>
+                                          <p:spTgt spid="2"/>
+                                        </p:tgtEl>
+                                        <p:attrNameLst>
+                                          <p:attrName>style.visibility</p:attrName>
+                                        </p:attrNameLst>
+                                      </p:cBhvr>
+                                      <p:to>
+                                        <p:strVal val="visible"/>
+                                      </p:to>
+                                    </p:set>
+                                    <p:animEffect transition="in" filter="fade">
+                                      <p:cBhvr>
+                                        <p:cTn id="7" dur="600"/>
+                                        <p:tgtEl>
+                                          <p:spTgt spid="2"/>
+                                        </p:tgtEl>
+                                      </p:cBhvr>
+                                    </p:animEffect>
+                                  </p:childTnLst>
+                                </p:cTn>
+                              </p:par>
+                              <p:par>
+                                <p:cTn id="8" presetID="10" presetClass="entr" presetSubtype="0" fill="hold" grpId="0" nodeType="afterEffect">
+                                  <p:stCondLst>
+                                    <p:cond delay="750"/>
+                                  </p:stCondLst>
+                                  <p:childTnLst>
+                                    <p:set>
+                                      <p:cBhvr>
+                                        <p:cTn id="9" dur="1"/>
+                                        <p:tgtEl>
+                                          <p:spTgt spid="3"/>
+                                        </p:tgtEl>
+                                        <p:attrNameLst>
+                                          <p:attrName>style.visibility</p:attrName>
+                                        </p:attrNameLst>
+                                      </p:cBhvr>
+                                      <p:to>
+                                        <p:strVal val="visible"/>
+                                      </p:to>
+                                    </p:set>
+                                    <p:animEffect transition="in" filter="fade">
+                                      <p:cBhvr>
+                                        <p:cTn id="10" dur="600"/>
+                                        <p:tgtEl>
+                                          <p:spTgt spid="3"/>
+                                        </p:tgtEl>
+                                      </p:cBhvr>
+                                    </p:animEffect>
+                                  </p:childTnLst>
+                                </p:cTn>
+                              </p:par>
+                              <p:par>
+                                <p:cTn id="11" presetID="10" presetClass="entr" presetSubtype="0" fill="hold" grpId="0" nodeType="afterEffect">
+                                  <p:stCondLst>
+                                    <p:cond delay="1650"/>
+                                  </p:stCondLst>
+                                  <p:childTnLst>
+                                    <p:set>
+                                      <p:cBhvr>
+                                        <p:cTn id="12" dur="1"/>
+                                        <p:tgtEl>
+                                          <p:spTgt spid="4"/>
+                                        </p:tgtEl>
+                                        <p:attrNameLst>
+                                          <p:attrName>style.visibility</p:attrName>
+                                        </p:attrNameLst>
+                                      </p:cBhvr>
+                                      <p:to>
+                                        <p:strVal val="visible"/>
+                                      </p:to>
+                                    </p:set>
+                                    <p:animEffect transition="in" filter="fade">
+                                      <p:cBhvr>
+                                        <p:cTn id="13" dur="600"/>
+                                        <p:tgtEl>
+                                          <p:spTgt spid="4"/>
+                                        </p:tgtEl>
+                                      </p:cBhvr>
+                                    </p:animEffect>
+                                  </p:childTnLst>
+                                </p:cTn>
+                              </p:par>
+                              <p:par>
+                                <p:cTn id="14" presetID="10" presetClass="entr" presetSubtype="0" fill="hold" grpId="0" nodeType="afterEffect">
+                                  <p:stCondLst>
+                                    <p:cond delay="2700"/>
+                                  </p:stCondLst>
+                                  <p:childTnLst>
+                                    <p:set>
+                                      <p:cBhvr>
+                                        <p:cTn id="15" dur="1"/>
+                                        <p:tgtEl>
+                                          <p:spTgt spid="5"/>
+                                        </p:tgtEl>
+                                        <p:attrNameLst>
+                                          <p:attrName>style.visibility</p:attrName>
+                                        </p:attrNameLst>
+                                      </p:cBhvr>
+                                      <p:to>
+                                        <p:strVal val="visible"/>
+                                      </p:to>
+                                    </p:set>
+                                    <p:animEffect transition="in" filter="fade">
+                                      <p:cBhvr>
+                                        <p:cTn id="16" dur="600"/>
+                                        <p:tgtEl>
+                                          <p:spTgt spid="5"/>
+                                        </p:tgtEl>
+                                      </p:cBhvr>
+                                    </p:animEffect>
+                                  </p:childTnLst>
+                                </p:cTn>
+                              </p:par>
+                              <p:par>
+                                <p:cTn id="17" presetID="10" presetClass="entr" presetSubtype="0" fill="hold" grpId="0" nodeType="afterEffect">
+                                  <p:stCondLst>
+                                    <p:cond delay="3900"/>
+                                  </p:stCondLst>
+                                  <p:childTnLst>
+                                    <p:set>
+                                      <p:cBhvr>
+                                        <p:cTn id="18" dur="1"/>
+                                        <p:tgtEl>
+                                          <p:spTgt spid="6"/>
+                                        </p:tgtEl>
+                                        <p:attrNameLst>
+                                          <p:attrName>style.visibility</p:attrName>
+                                        </p:attrNameLst>
+                                      </p:cBhvr>
+                                      <p:to>
+                                        <p:strVal val="visible"/>
+                                      </p:to>
+                                    </p:set>
+                                    <p:animEffect transition="in" filter="fade">
+                                      <p:cBhvr>
+                                        <p:cTn id="19" dur="600"/>
+                                        <p:tgtEl>
+                                          <p:spTgt spid="6"/>
+                                        </p:tgtEl>
+                                      </p:cBhvr>
+                                    </p:animEffect>
+                                  </p:childTnLst>
+                                </p:cTn>
+                              </p:par>
+                              <p:par>
+                                <p:cTn id="20" presetID="10" presetClass="entr" presetSubtype="0" fill="hold" grpId="0" nodeType="afterEffect">
+                                  <p:stCondLst>
+                                    <p:cond delay="5250"/>
+                                  </p:stCondLst>
+                                  <p:childTnLst>
+                                    <p:set>
+                                      <p:cBhvr>
+                                        <p:cTn id="21" dur="1"/>
+                                        <p:tgtEl>
+                                          <p:spTgt spid="7"/>
+                                        </p:tgtEl>
+                                        <p:attrNameLst>
+                                          <p:attrName>style.visibility</p:attrName>
+                                        </p:attrNameLst>
+                                      </p:cBhvr>
+                                      <p:to>
+                                        <p:strVal val="visible"/>
+                                      </p:to>
+                                    </p:set>
+                                    <p:animEffect transition="in" filter="fade">
+                                      <p:cBhvr>
+                                        <p:cTn id="22" dur="600"/>
+                                        <p:tgtEl>
+                                          <p:spTgt spid="7"/>
+                                        </p:tgtEl>
+                                      </p:cBhvr>
+                                    </p:animEffect>
+                                  </p:childTnLst>
+                                </p:cTn>
+                              </p:par>
+                              <p:par>
+                                <p:cTn id="23" presetID="10" presetClass="entr" presetSubtype="0" fill="hold" grpId="0" nodeType="afterEffect">
+                                  <p:stCondLst>
+                                    <p:cond delay="6750"/>
+                                  </p:stCondLst>
+                                  <p:childTnLst>
+                                    <p:set>
+                                      <p:cBhvr>
+                                        <p:cTn id="24" dur="1"/>
+                                        <p:tgtEl>
+                                          <p:spTgt spid="8"/>
+                                        </p:tgtEl>
+                                        <p:attrNameLst>
+                                          <p:attrName>style.visibility</p:attrName>
+                                        </p:attrNameLst>
+                                      </p:cBhvr>
+                                      <p:to>
+                                        <p:strVal val="visible"/>
+                                      </p:to>
+                                    </p:set>
+                                    <p:animEffect transition="in" filter="fade">
+                                      <p:cBhvr>
+                                        <p:cTn id="25" dur="600"/>
+                                        <p:tgtEl>
+                                          <p:spTgt spid="8"/>
+                                        </p:tgtEl>
+                                      </p:cBhvr>
+                                    </p:animEffect>
+                                  </p:childTnLst>
+                                </p:cTn>
+                              </p:par>
+                              <p:par>
+                                <p:cTn id="26" presetID="10" presetClass="entr" presetSubtype="0" fill="hold" grpId="0" nodeType="afterEffect">
+                                  <p:stCondLst>
+                                    <p:cond delay="8400"/>
+                                  </p:stCondLst>
+                                  <p:childTnLst>
+                                    <p:set>
+                                      <p:cBhvr>
+                                        <p:cTn id="27" dur="1"/>
+                                        <p:tgtEl>
+                                          <p:spTgt spid="9"/>
+                                        </p:tgtEl>
+                                        <p:attrNameLst>
+                                          <p:attrName>style.visibility</p:attrName>
+                                        </p:attrNameLst>
+                                      </p:cBhvr>
+                                      <p:to>
+                                        <p:strVal val="visible"/>
+                                      </p:to>
+                                    </p:set>
+                                    <p:animEffect transition="in" filter="fade">
+                                      <p:cBhvr>
+                                        <p:cTn id="28" dur="600"/>
+                                        <p:tgtEl>
+                                          <p:spTgt spid="9"/>
+                                        </p:tgtEl>
+                                      </p:cBhvr>
+                                    </p:animEffect>
+                                  </p:childTnLst>
+                                </p:cTn>
+                              </p:par>
+                              <p:par>
+                                <p:cTn id="29" presetID="10" presetClass="entr" presetSubtype="0" fill="hold" grpId="0" nodeType="afterEffect">
+                                  <p:stCondLst>
+                                    <p:cond delay="10200"/>
+                                  </p:stCondLst>
+                                  <p:childTnLst>
+                                    <p:set>
+                                      <p:cBhvr>
+                                        <p:cTn id="30" dur="1"/>
+                                        <p:tgtEl>
+                                          <p:spTgt spid="10"/>
+                                        </p:tgtEl>
+                                        <p:attrNameLst>
+                                          <p:attrName>style.visibility</p:attrName>
+                                        </p:attrNameLst>
+                                      </p:cBhvr>
+                                      <p:to>
+                                        <p:strVal val="visible"/>
+                                      </p:to>
+                                    </p:set>
+                                    <p:animEffect transition="in" filter="fade">
+                                      <p:cBhvr>
+                                        <p:cTn id="31" dur="600"/>
+                                        <p:tgtEl>
+                                          <p:spTgt spid="10"/>
+                                        </p:tgtEl>
+                                      </p:cBhvr>
+                                    </p:animEffect>
+                                  </p:childTnLst>
+                                </p:cTn>
+                              </p:par>
+                            </p:childTnLst>
+                          </p:cTn>
+                        </p:par>
+                      </p:childTnLst>
+                    </p:cTn>
+                  </p:par>
+                </p:childTnLst>
+              </p:cTn>
+              <p:prevCondLst>
+                <p:cond evt="onPrev" delay="0">
+                  <p:tgtEl>
+                    <p:sldTgt/>
+                  </p:tgtEl>
+                </p:cond>
+              </p:prevCondLst>
+              <p:nextCondLst>
+                <p:cond evt="onNext" delay="0">
+                  <p:tgtEl>
+                    <p:sldTgt/>
+                  </p:tgtEl>
+                </p:cond>
+              </p:nextCondLst>
+            </p:seq>
+          </p:childTnLst>
+        </p:cTn>
+      </p:par>
+    </p:tnLst>
+    <p:bldLst>
+      <p:bldP spid="2" grpId="0"/>
+      <p:bldP spid="3" grpId="0"/>
+      <p:bldP spid="4" grpId="0"/>
+      <p:bldP spid="5" grpId="0"/>
+      <p:bldP spid="6" grpId="0"/>
+      <p:bldP spid="7" grpId="0"/>
+      <p:bldP spid="8" grpId="0"/>
+      <p:bldP spid="9" grpId="0"/>
+      <p:bldP spid="10" grpId="0"/>
+    </p:bldLst>
+  </p:timing>
 </p:sld>
 </file>
 
@@ -4343,6 +6714,158 @@
   <p:clrMapOvr>
     <a:masterClrMapping/>
   </p:clrMapOvr>
+  <p:transition spd="slow">
+    <p:fade/>
+  </p:transition>
+  <p:timing>
+    <p:tnLst>
+      <p:par>
+        <p:cTn id="1" dur="indefinite" restart="never" nodeType="tmRoot">
+          <p:childTnLst>
+            <p:seq concurrent="1" nextAc="seek">
+              <p:cTn id="2" dur="indefinite" nodeType="mainSeq">
+                <p:childTnLst>
+                  <p:par>
+                    <p:cTn id="3" fill="hold">
+                      <p:stCondLst>
+                        <p:cond delay="indefinite"/>
+                        <p:cond evt="onBegin" delay="0">
+                          <p:tn val="2"/>
+                        </p:cond>
+                      </p:stCondLst>
+                      <p:childTnLst>
+                        <p:par>
+                          <p:cTn id="4" fill="hold">
+                            <p:stCondLst>
+                              <p:cond delay="0"/>
+                            </p:stCondLst>
+                            <p:childTnLst>
+                              <p:par>
+                                <p:cTn id="5" presetID="10" presetClass="entr" presetSubtype="0" fill="hold" grpId="0" nodeType="afterEffect">
+                                  <p:stCondLst>
+                                    <p:cond delay="0"/>
+                                  </p:stCondLst>
+                                  <p:childTnLst>
+                                    <p:set>
+                                      <p:cBhvr>
+                                        <p:cTn id="6" dur="1"/>
+                                        <p:tgtEl>
+                                          <p:spTgt spid="2"/>
+                                        </p:tgtEl>
+                                        <p:attrNameLst>
+                                          <p:attrName>style.visibility</p:attrName>
+                                        </p:attrNameLst>
+                                      </p:cBhvr>
+                                      <p:to>
+                                        <p:strVal val="visible"/>
+                                      </p:to>
+                                    </p:set>
+                                    <p:animEffect transition="in" filter="fade">
+                                      <p:cBhvr>
+                                        <p:cTn id="7" dur="900"/>
+                                        <p:tgtEl>
+                                          <p:spTgt spid="2"/>
+                                        </p:tgtEl>
+                                      </p:cBhvr>
+                                    </p:animEffect>
+                                  </p:childTnLst>
+                                </p:cTn>
+                              </p:par>
+                              <p:par>
+                                <p:cTn id="8" presetID="10" presetClass="entr" presetSubtype="0" fill="hold" grpId="0" nodeType="afterEffect">
+                                  <p:stCondLst>
+                                    <p:cond delay="900"/>
+                                  </p:stCondLst>
+                                  <p:childTnLst>
+                                    <p:set>
+                                      <p:cBhvr>
+                                        <p:cTn id="9" dur="1"/>
+                                        <p:tgtEl>
+                                          <p:spTgt spid="3"/>
+                                        </p:tgtEl>
+                                        <p:attrNameLst>
+                                          <p:attrName>style.visibility</p:attrName>
+                                        </p:attrNameLst>
+                                      </p:cBhvr>
+                                      <p:to>
+                                        <p:strVal val="visible"/>
+                                      </p:to>
+                                    </p:set>
+                                    <p:animEffect transition="in" filter="fade">
+                                      <p:cBhvr>
+                                        <p:cTn id="10" dur="900"/>
+                                        <p:tgtEl>
+                                          <p:spTgt spid="3"/>
+                                        </p:tgtEl>
+                                      </p:cBhvr>
+                                    </p:animEffect>
+                                  </p:childTnLst>
+                                </p:cTn>
+                              </p:par>
+                              <p:par>
+                                <p:cTn id="11" presetID="10" presetClass="entr" presetSubtype="0" fill="hold" grpId="0" nodeType="afterEffect">
+                                  <p:stCondLst>
+                                    <p:cond delay="1800"/>
+                                  </p:stCondLst>
+                                  <p:childTnLst>
+                                    <p:set>
+                                      <p:cBhvr>
+                                        <p:cTn id="12" dur="1"/>
+                                        <p:tgtEl>
+                                          <p:spTgt spid="4"/>
+                                        </p:tgtEl>
+                                        <p:attrNameLst>
+                                          <p:attrName>style.visibility</p:attrName>
+                                        </p:attrNameLst>
+                                      </p:cBhvr>
+                                      <p:to>
+                                        <p:strVal val="visible"/>
+                                      </p:to>
+                                    </p:set>
+                                    <p:animEffect transition="in" filter="fade">
+                                      <p:cBhvr>
+                                        <p:cTn id="13" dur="900"/>
+                                        <p:tgtEl>
+                                          <p:spTgt spid="4"/>
+                                        </p:tgtEl>
+                                      </p:cBhvr>
+                                    </p:animEffect>
+                                  </p:childTnLst>
+                                </p:cTn>
+                              </p:par>
+                            </p:childTnLst>
+                          </p:cTn>
+                        </p:par>
+                      </p:childTnLst>
+                    </p:cTn>
+                  </p:par>
+                </p:childTnLst>
+              </p:cTn>
+              <p:prevCondLst>
+                <p:cond evt="onPrev" delay="0">
+                  <p:tgtEl>
+                    <p:sldTgt/>
+                  </p:tgtEl>
+                </p:cond>
+              </p:prevCondLst>
+              <p:nextCondLst>
+                <p:cond evt="onNext" delay="0">
+                  <p:tgtEl>
+                    <p:sldTgt/>
+                  </p:tgtEl>
+                </p:cond>
+              </p:nextCondLst>
+            </p:seq>
+          </p:childTnLst>
+        </p:cTn>
+      </p:par>
+    </p:tnLst>
+    <p:bldLst>
+      <p:bldP spid="2" grpId="0"/>
+      <p:bldP spid="3" grpId="0"/>
+      <p:bldP spid="4" grpId="0"/>
+    </p:bldLst>
+  </p:timing>
 </p:sld>
 </file>
 

--- a/examples/premium-st2/星尘ST2-发布会.pptx
+++ b/examples/premium-st2/星尘ST2-发布会.pptx
@@ -1841,10 +1841,7 @@
                   <p:par>
                     <p:cTn id="3" fill="hold">
                       <p:stCondLst>
-                        <p:cond delay="indefinite"/>
-                        <p:cond evt="onBegin" delay="0">
-                          <p:tn val="2"/>
-                        </p:cond>
+                        <p:cond delay="0"/>
                       </p:stCondLst>
                       <p:childTnLst>
                         <p:par>
@@ -1854,14 +1851,18 @@
                             </p:stCondLst>
                             <p:childTnLst>
                               <p:par>
-                                <p:cTn id="5" presetID="10" presetClass="entr" presetSubtype="0" fill="hold" grpId="0" nodeType="afterEffect">
+                                <p:cTn presetID="10" presetClass="entr" presetSubtype="0" fill="hold" grpId="0" nodeType="afterEffect">
                                   <p:stCondLst>
                                     <p:cond delay="0"/>
                                   </p:stCondLst>
                                   <p:childTnLst>
                                     <p:set>
                                       <p:cBhvr>
-                                        <p:cTn id="6" dur="1"/>
+                                        <p:cTn id="5" dur="1" fill="hold">
+                                          <p:stCondLst>
+                                            <p:cond delay="0"/>
+                                          </p:stCondLst>
+                                        </p:cTn>
                                         <p:tgtEl>
                                           <p:spTgt spid="2"/>
                                         </p:tgtEl>
@@ -1875,7 +1876,7 @@
                                     </p:set>
                                     <p:animEffect transition="in" filter="fade">
                                       <p:cBhvr>
-                                        <p:cTn id="7" dur="900"/>
+                                        <p:cTn id="6" dur="900"/>
                                         <p:tgtEl>
                                           <p:spTgt spid="2"/>
                                         </p:tgtEl>
@@ -1884,15 +1885,28 @@
                                   </p:childTnLst>
                                 </p:cTn>
                               </p:par>
+                            </p:childTnLst>
+                          </p:cTn>
+                        </p:par>
+                        <p:par>
+                          <p:cTn id="7" fill="hold">
+                            <p:stCondLst>
+                              <p:cond delay="1200"/>
+                            </p:stCondLst>
+                            <p:childTnLst>
                               <p:par>
-                                <p:cTn id="8" presetID="10" presetClass="entr" presetSubtype="0" fill="hold" grpId="0" nodeType="afterEffect">
+                                <p:cTn presetID="10" presetClass="entr" presetSubtype="0" fill="hold" grpId="0" nodeType="afterEffect">
                                   <p:stCondLst>
-                                    <p:cond delay="1200"/>
+                                    <p:cond delay="0"/>
                                   </p:stCondLst>
                                   <p:childTnLst>
                                     <p:set>
                                       <p:cBhvr>
-                                        <p:cTn id="9" dur="1"/>
+                                        <p:cTn id="8" dur="1" fill="hold">
+                                          <p:stCondLst>
+                                            <p:cond delay="0"/>
+                                          </p:stCondLst>
+                                        </p:cTn>
                                         <p:tgtEl>
                                           <p:spTgt spid="3"/>
                                         </p:tgtEl>
@@ -1906,7 +1920,7 @@
                                     </p:set>
                                     <p:animEffect transition="in" filter="fade">
                                       <p:cBhvr>
-                                        <p:cTn id="10" dur="900"/>
+                                        <p:cTn id="9" dur="900"/>
                                         <p:tgtEl>
                                           <p:spTgt spid="3"/>
                                         </p:tgtEl>
@@ -1915,15 +1929,28 @@
                                   </p:childTnLst>
                                 </p:cTn>
                               </p:par>
+                            </p:childTnLst>
+                          </p:cTn>
+                        </p:par>
+                        <p:par>
+                          <p:cTn id="10" fill="hold">
+                            <p:stCondLst>
+                              <p:cond delay="2700"/>
+                            </p:stCondLst>
+                            <p:childTnLst>
                               <p:par>
-                                <p:cTn id="11" presetID="10" presetClass="entr" presetSubtype="0" fill="hold" grpId="0" nodeType="afterEffect">
+                                <p:cTn presetID="10" presetClass="entr" presetSubtype="0" fill="hold" grpId="0" nodeType="afterEffect">
                                   <p:stCondLst>
-                                    <p:cond delay="2700"/>
+                                    <p:cond delay="0"/>
                                   </p:stCondLst>
                                   <p:childTnLst>
                                     <p:set>
                                       <p:cBhvr>
-                                        <p:cTn id="12" dur="1"/>
+                                        <p:cTn id="11" dur="1" fill="hold">
+                                          <p:stCondLst>
+                                            <p:cond delay="0"/>
+                                          </p:stCondLst>
+                                        </p:cTn>
                                         <p:tgtEl>
                                           <p:spTgt spid="4"/>
                                         </p:tgtEl>
@@ -1937,7 +1964,7 @@
                                     </p:set>
                                     <p:animEffect transition="in" filter="fade">
                                       <p:cBhvr>
-                                        <p:cTn id="13" dur="900"/>
+                                        <p:cTn id="12" dur="900"/>
                                         <p:tgtEl>
                                           <p:spTgt spid="4"/>
                                         </p:tgtEl>
@@ -1946,15 +1973,28 @@
                                   </p:childTnLst>
                                 </p:cTn>
                               </p:par>
+                            </p:childTnLst>
+                          </p:cTn>
+                        </p:par>
+                        <p:par>
+                          <p:cTn id="13" fill="hold">
+                            <p:stCondLst>
+                              <p:cond delay="4500"/>
+                            </p:stCondLst>
+                            <p:childTnLst>
                               <p:par>
-                                <p:cTn id="14" presetID="10" presetClass="entr" presetSubtype="0" fill="hold" grpId="0" nodeType="afterEffect">
+                                <p:cTn presetID="10" presetClass="entr" presetSubtype="0" fill="hold" grpId="0" nodeType="afterEffect">
                                   <p:stCondLst>
-                                    <p:cond delay="4500"/>
+                                    <p:cond delay="0"/>
                                   </p:stCondLst>
                                   <p:childTnLst>
                                     <p:set>
                                       <p:cBhvr>
-                                        <p:cTn id="15" dur="1"/>
+                                        <p:cTn id="14" dur="1" fill="hold">
+                                          <p:stCondLst>
+                                            <p:cond delay="0"/>
+                                          </p:stCondLst>
+                                        </p:cTn>
                                         <p:tgtEl>
                                           <p:spTgt spid="5"/>
                                         </p:tgtEl>
@@ -1968,7 +2008,7 @@
                                     </p:set>
                                     <p:animEffect transition="in" filter="fade">
                                       <p:cBhvr>
-                                        <p:cTn id="16" dur="900"/>
+                                        <p:cTn id="15" dur="900"/>
                                         <p:tgtEl>
                                           <p:spTgt spid="5"/>
                                         </p:tgtEl>
@@ -2316,10 +2356,7 @@
                   <p:par>
                     <p:cTn id="3" fill="hold">
                       <p:stCondLst>
-                        <p:cond delay="indefinite"/>
-                        <p:cond evt="onBegin" delay="0">
-                          <p:tn val="2"/>
-                        </p:cond>
+                        <p:cond delay="0"/>
                       </p:stCondLst>
                       <p:childTnLst>
                         <p:par>
@@ -2329,14 +2366,18 @@
                             </p:stCondLst>
                             <p:childTnLst>
                               <p:par>
-                                <p:cTn id="5" presetID="10" presetClass="entr" presetSubtype="0" fill="hold" grpId="0" nodeType="afterEffect">
+                                <p:cTn presetID="10" presetClass="entr" presetSubtype="0" fill="hold" grpId="0" nodeType="afterEffect">
                                   <p:stCondLst>
                                     <p:cond delay="0"/>
                                   </p:stCondLst>
                                   <p:childTnLst>
                                     <p:set>
                                       <p:cBhvr>
-                                        <p:cTn id="6" dur="1"/>
+                                        <p:cTn id="5" dur="1" fill="hold">
+                                          <p:stCondLst>
+                                            <p:cond delay="0"/>
+                                          </p:stCondLst>
+                                        </p:cTn>
                                         <p:tgtEl>
                                           <p:spTgt spid="2"/>
                                         </p:tgtEl>
@@ -2350,7 +2391,7 @@
                                     </p:set>
                                     <p:animEffect transition="in" filter="fade">
                                       <p:cBhvr>
-                                        <p:cTn id="7" dur="800"/>
+                                        <p:cTn id="6" dur="800"/>
                                         <p:tgtEl>
                                           <p:spTgt spid="2"/>
                                         </p:tgtEl>
@@ -2359,15 +2400,28 @@
                                   </p:childTnLst>
                                 </p:cTn>
                               </p:par>
+                            </p:childTnLst>
+                          </p:cTn>
+                        </p:par>
+                        <p:par>
+                          <p:cTn id="7" fill="hold">
+                            <p:stCondLst>
+                              <p:cond delay="1050"/>
+                            </p:stCondLst>
+                            <p:childTnLst>
                               <p:par>
-                                <p:cTn id="8" presetID="10" presetClass="entr" presetSubtype="0" fill="hold" grpId="0" nodeType="afterEffect">
+                                <p:cTn presetID="10" presetClass="entr" presetSubtype="0" fill="hold" grpId="0" nodeType="afterEffect">
                                   <p:stCondLst>
-                                    <p:cond delay="1050"/>
+                                    <p:cond delay="0"/>
                                   </p:stCondLst>
                                   <p:childTnLst>
                                     <p:set>
                                       <p:cBhvr>
-                                        <p:cTn id="9" dur="1"/>
+                                        <p:cTn id="8" dur="1" fill="hold">
+                                          <p:stCondLst>
+                                            <p:cond delay="0"/>
+                                          </p:stCondLst>
+                                        </p:cTn>
                                         <p:tgtEl>
                                           <p:spTgt spid="3"/>
                                         </p:tgtEl>
@@ -2381,7 +2435,7 @@
                                     </p:set>
                                     <p:animEffect transition="in" filter="fade">
                                       <p:cBhvr>
-                                        <p:cTn id="10" dur="800"/>
+                                        <p:cTn id="9" dur="800"/>
                                         <p:tgtEl>
                                           <p:spTgt spid="3"/>
                                         </p:tgtEl>
@@ -2390,15 +2444,28 @@
                                   </p:childTnLst>
                                 </p:cTn>
                               </p:par>
+                            </p:childTnLst>
+                          </p:cTn>
+                        </p:par>
+                        <p:par>
+                          <p:cTn id="10" fill="hold">
+                            <p:stCondLst>
+                              <p:cond delay="2350"/>
+                            </p:stCondLst>
+                            <p:childTnLst>
                               <p:par>
-                                <p:cTn id="11" presetID="10" presetClass="entr" presetSubtype="0" fill="hold" grpId="0" nodeType="afterEffect">
+                                <p:cTn presetID="10" presetClass="entr" presetSubtype="0" fill="hold" grpId="0" nodeType="afterEffect">
                                   <p:stCondLst>
-                                    <p:cond delay="2350"/>
+                                    <p:cond delay="0"/>
                                   </p:stCondLst>
                                   <p:childTnLst>
                                     <p:set>
                                       <p:cBhvr>
-                                        <p:cTn id="12" dur="1"/>
+                                        <p:cTn id="11" dur="1" fill="hold">
+                                          <p:stCondLst>
+                                            <p:cond delay="0"/>
+                                          </p:stCondLst>
+                                        </p:cTn>
                                         <p:tgtEl>
                                           <p:spTgt spid="4"/>
                                         </p:tgtEl>
@@ -2412,7 +2479,7 @@
                                     </p:set>
                                     <p:animEffect transition="in" filter="fade">
                                       <p:cBhvr>
-                                        <p:cTn id="13" dur="800"/>
+                                        <p:cTn id="12" dur="800"/>
                                         <p:tgtEl>
                                           <p:spTgt spid="4"/>
                                         </p:tgtEl>
@@ -2421,15 +2488,28 @@
                                   </p:childTnLst>
                                 </p:cTn>
                               </p:par>
+                            </p:childTnLst>
+                          </p:cTn>
+                        </p:par>
+                        <p:par>
+                          <p:cTn id="13" fill="hold">
+                            <p:stCondLst>
+                              <p:cond delay="3900"/>
+                            </p:stCondLst>
+                            <p:childTnLst>
                               <p:par>
-                                <p:cTn id="14" presetID="10" presetClass="entr" presetSubtype="0" fill="hold" grpId="0" nodeType="afterEffect">
+                                <p:cTn presetID="10" presetClass="entr" presetSubtype="0" fill="hold" grpId="0" nodeType="afterEffect">
                                   <p:stCondLst>
-                                    <p:cond delay="3900"/>
+                                    <p:cond delay="0"/>
                                   </p:stCondLst>
                                   <p:childTnLst>
                                     <p:set>
                                       <p:cBhvr>
-                                        <p:cTn id="15" dur="1"/>
+                                        <p:cTn id="14" dur="1" fill="hold">
+                                          <p:stCondLst>
+                                            <p:cond delay="0"/>
+                                          </p:stCondLst>
+                                        </p:cTn>
                                         <p:tgtEl>
                                           <p:spTgt spid="5"/>
                                         </p:tgtEl>
@@ -2443,7 +2523,7 @@
                                     </p:set>
                                     <p:animEffect transition="in" filter="fade">
                                       <p:cBhvr>
-                                        <p:cTn id="16" dur="800"/>
+                                        <p:cTn id="15" dur="800"/>
                                         <p:tgtEl>
                                           <p:spTgt spid="5"/>
                                         </p:tgtEl>
@@ -2610,10 +2690,7 @@
                   <p:par>
                     <p:cTn id="3" fill="hold">
                       <p:stCondLst>
-                        <p:cond delay="indefinite"/>
-                        <p:cond evt="onBegin" delay="0">
-                          <p:tn val="2"/>
-                        </p:cond>
+                        <p:cond delay="0"/>
                       </p:stCondLst>
                       <p:childTnLst>
                         <p:par>
@@ -2623,14 +2700,18 @@
                             </p:stCondLst>
                             <p:childTnLst>
                               <p:par>
-                                <p:cTn id="5" presetID="10" presetClass="entr" presetSubtype="0" fill="hold" grpId="0" nodeType="afterEffect">
+                                <p:cTn presetID="10" presetClass="entr" presetSubtype="0" fill="hold" grpId="0" nodeType="afterEffect">
                                   <p:stCondLst>
                                     <p:cond delay="0"/>
                                   </p:stCondLst>
                                   <p:childTnLst>
                                     <p:set>
                                       <p:cBhvr>
-                                        <p:cTn id="6" dur="1"/>
+                                        <p:cTn id="5" dur="1" fill="hold">
+                                          <p:stCondLst>
+                                            <p:cond delay="0"/>
+                                          </p:stCondLst>
+                                        </p:cTn>
                                         <p:tgtEl>
                                           <p:spTgt spid="2"/>
                                         </p:tgtEl>
@@ -2644,7 +2725,7 @@
                                     </p:set>
                                     <p:animEffect transition="in" filter="fade">
                                       <p:cBhvr>
-                                        <p:cTn id="7" dur="900"/>
+                                        <p:cTn id="6" dur="900"/>
                                         <p:tgtEl>
                                           <p:spTgt spid="2"/>
                                         </p:tgtEl>
@@ -2653,15 +2734,28 @@
                                   </p:childTnLst>
                                 </p:cTn>
                               </p:par>
+                            </p:childTnLst>
+                          </p:cTn>
+                        </p:par>
+                        <p:par>
+                          <p:cTn id="7" fill="hold">
+                            <p:stCondLst>
+                              <p:cond delay="900"/>
+                            </p:stCondLst>
+                            <p:childTnLst>
                               <p:par>
-                                <p:cTn id="8" presetID="10" presetClass="entr" presetSubtype="0" fill="hold" grpId="0" nodeType="afterEffect">
+                                <p:cTn presetID="10" presetClass="entr" presetSubtype="0" fill="hold" grpId="0" nodeType="afterEffect">
                                   <p:stCondLst>
-                                    <p:cond delay="900"/>
+                                    <p:cond delay="0"/>
                                   </p:stCondLst>
                                   <p:childTnLst>
                                     <p:set>
                                       <p:cBhvr>
-                                        <p:cTn id="9" dur="1"/>
+                                        <p:cTn id="8" dur="1" fill="hold">
+                                          <p:stCondLst>
+                                            <p:cond delay="0"/>
+                                          </p:stCondLst>
+                                        </p:cTn>
                                         <p:tgtEl>
                                           <p:spTgt spid="3"/>
                                         </p:tgtEl>
@@ -2675,7 +2769,7 @@
                                     </p:set>
                                     <p:animEffect transition="in" filter="fade">
                                       <p:cBhvr>
-                                        <p:cTn id="10" dur="900"/>
+                                        <p:cTn id="9" dur="900"/>
                                         <p:tgtEl>
                                           <p:spTgt spid="3"/>
                                         </p:tgtEl>
@@ -3081,10 +3175,7 @@
                   <p:par>
                     <p:cTn id="3" fill="hold">
                       <p:stCondLst>
-                        <p:cond delay="indefinite"/>
-                        <p:cond evt="onBegin" delay="0">
-                          <p:tn val="2"/>
-                        </p:cond>
+                        <p:cond delay="0"/>
                       </p:stCondLst>
                       <p:childTnLst>
                         <p:par>
@@ -3094,14 +3185,18 @@
                             </p:stCondLst>
                             <p:childTnLst>
                               <p:par>
-                                <p:cTn id="5" presetID="10" presetClass="entr" presetSubtype="0" fill="hold" grpId="0" nodeType="afterEffect">
+                                <p:cTn presetID="10" presetClass="entr" presetSubtype="0" fill="hold" grpId="0" nodeType="afterEffect">
                                   <p:stCondLst>
                                     <p:cond delay="0"/>
                                   </p:stCondLst>
                                   <p:childTnLst>
                                     <p:set>
                                       <p:cBhvr>
-                                        <p:cTn id="6" dur="1"/>
+                                        <p:cTn id="5" dur="1" fill="hold">
+                                          <p:stCondLst>
+                                            <p:cond delay="0"/>
+                                          </p:stCondLst>
+                                        </p:cTn>
                                         <p:tgtEl>
                                           <p:spTgt spid="2"/>
                                         </p:tgtEl>
@@ -3115,7 +3210,7 @@
                                     </p:set>
                                     <p:animEffect transition="in" filter="fade">
                                       <p:cBhvr>
-                                        <p:cTn id="7" dur="700"/>
+                                        <p:cTn id="6" dur="700"/>
                                         <p:tgtEl>
                                           <p:spTgt spid="2"/>
                                         </p:tgtEl>
@@ -3124,15 +3219,28 @@
                                   </p:childTnLst>
                                 </p:cTn>
                               </p:par>
+                            </p:childTnLst>
+                          </p:cTn>
+                        </p:par>
+                        <p:par>
+                          <p:cTn id="7" fill="hold">
+                            <p:stCondLst>
+                              <p:cond delay="900"/>
+                            </p:stCondLst>
+                            <p:childTnLst>
                               <p:par>
-                                <p:cTn id="8" presetID="10" presetClass="entr" presetSubtype="0" fill="hold" grpId="0" nodeType="afterEffect">
+                                <p:cTn presetID="10" presetClass="entr" presetSubtype="0" fill="hold" grpId="0" nodeType="afterEffect">
                                   <p:stCondLst>
-                                    <p:cond delay="900"/>
+                                    <p:cond delay="0"/>
                                   </p:stCondLst>
                                   <p:childTnLst>
                                     <p:set>
                                       <p:cBhvr>
-                                        <p:cTn id="9" dur="1"/>
+                                        <p:cTn id="8" dur="1" fill="hold">
+                                          <p:stCondLst>
+                                            <p:cond delay="0"/>
+                                          </p:stCondLst>
+                                        </p:cTn>
                                         <p:tgtEl>
                                           <p:spTgt spid="3"/>
                                         </p:tgtEl>
@@ -3146,7 +3254,7 @@
                                     </p:set>
                                     <p:animEffect transition="in" filter="fade">
                                       <p:cBhvr>
-                                        <p:cTn id="10" dur="700"/>
+                                        <p:cTn id="9" dur="700"/>
                                         <p:tgtEl>
                                           <p:spTgt spid="3"/>
                                         </p:tgtEl>
@@ -3155,15 +3263,28 @@
                                   </p:childTnLst>
                                 </p:cTn>
                               </p:par>
+                            </p:childTnLst>
+                          </p:cTn>
+                        </p:par>
+                        <p:par>
+                          <p:cTn id="10" fill="hold">
+                            <p:stCondLst>
+                              <p:cond delay="2000"/>
+                            </p:stCondLst>
+                            <p:childTnLst>
                               <p:par>
-                                <p:cTn id="11" presetID="10" presetClass="entr" presetSubtype="0" fill="hold" grpId="0" nodeType="afterEffect">
+                                <p:cTn presetID="10" presetClass="entr" presetSubtype="0" fill="hold" grpId="0" nodeType="afterEffect">
                                   <p:stCondLst>
-                                    <p:cond delay="2000"/>
+                                    <p:cond delay="0"/>
                                   </p:stCondLst>
                                   <p:childTnLst>
                                     <p:set>
                                       <p:cBhvr>
-                                        <p:cTn id="12" dur="1"/>
+                                        <p:cTn id="11" dur="1" fill="hold">
+                                          <p:stCondLst>
+                                            <p:cond delay="0"/>
+                                          </p:stCondLst>
+                                        </p:cTn>
                                         <p:tgtEl>
                                           <p:spTgt spid="4"/>
                                         </p:tgtEl>
@@ -3177,7 +3298,7 @@
                                     </p:set>
                                     <p:animEffect transition="in" filter="fade">
                                       <p:cBhvr>
-                                        <p:cTn id="13" dur="700"/>
+                                        <p:cTn id="12" dur="700"/>
                                         <p:tgtEl>
                                           <p:spTgt spid="4"/>
                                         </p:tgtEl>
@@ -3186,15 +3307,28 @@
                                   </p:childTnLst>
                                 </p:cTn>
                               </p:par>
+                            </p:childTnLst>
+                          </p:cTn>
+                        </p:par>
+                        <p:par>
+                          <p:cTn id="13" fill="hold">
+                            <p:stCondLst>
+                              <p:cond delay="3300"/>
+                            </p:stCondLst>
+                            <p:childTnLst>
                               <p:par>
-                                <p:cTn id="14" presetID="10" presetClass="entr" presetSubtype="0" fill="hold" grpId="0" nodeType="afterEffect">
+                                <p:cTn presetID="10" presetClass="entr" presetSubtype="0" fill="hold" grpId="0" nodeType="afterEffect">
                                   <p:stCondLst>
-                                    <p:cond delay="3300"/>
+                                    <p:cond delay="0"/>
                                   </p:stCondLst>
                                   <p:childTnLst>
                                     <p:set>
                                       <p:cBhvr>
-                                        <p:cTn id="15" dur="1"/>
+                                        <p:cTn id="14" dur="1" fill="hold">
+                                          <p:stCondLst>
+                                            <p:cond delay="0"/>
+                                          </p:stCondLst>
+                                        </p:cTn>
                                         <p:tgtEl>
                                           <p:spTgt spid="5"/>
                                         </p:tgtEl>
@@ -3208,7 +3342,7 @@
                                     </p:set>
                                     <p:animEffect transition="in" filter="fade">
                                       <p:cBhvr>
-                                        <p:cTn id="16" dur="700"/>
+                                        <p:cTn id="15" dur="700"/>
                                         <p:tgtEl>
                                           <p:spTgt spid="5"/>
                                         </p:tgtEl>
@@ -3217,15 +3351,28 @@
                                   </p:childTnLst>
                                 </p:cTn>
                               </p:par>
+                            </p:childTnLst>
+                          </p:cTn>
+                        </p:par>
+                        <p:par>
+                          <p:cTn id="16" fill="hold">
+                            <p:stCondLst>
+                              <p:cond delay="4800"/>
+                            </p:stCondLst>
+                            <p:childTnLst>
                               <p:par>
-                                <p:cTn id="17" presetID="10" presetClass="entr" presetSubtype="0" fill="hold" grpId="0" nodeType="afterEffect">
+                                <p:cTn presetID="10" presetClass="entr" presetSubtype="0" fill="hold" grpId="0" nodeType="afterEffect">
                                   <p:stCondLst>
-                                    <p:cond delay="4800"/>
+                                    <p:cond delay="0"/>
                                   </p:stCondLst>
                                   <p:childTnLst>
                                     <p:set>
                                       <p:cBhvr>
-                                        <p:cTn id="18" dur="1"/>
+                                        <p:cTn id="17" dur="1" fill="hold">
+                                          <p:stCondLst>
+                                            <p:cond delay="0"/>
+                                          </p:stCondLst>
+                                        </p:cTn>
                                         <p:tgtEl>
                                           <p:spTgt spid="6"/>
                                         </p:tgtEl>
@@ -3239,7 +3386,7 @@
                                     </p:set>
                                     <p:animEffect transition="in" filter="fade">
                                       <p:cBhvr>
-                                        <p:cTn id="19" dur="700"/>
+                                        <p:cTn id="18" dur="700"/>
                                         <p:tgtEl>
                                           <p:spTgt spid="6"/>
                                         </p:tgtEl>
@@ -3248,15 +3395,28 @@
                                   </p:childTnLst>
                                 </p:cTn>
                               </p:par>
+                            </p:childTnLst>
+                          </p:cTn>
+                        </p:par>
+                        <p:par>
+                          <p:cTn id="19" fill="hold">
+                            <p:stCondLst>
+                              <p:cond delay="6500"/>
+                            </p:stCondLst>
+                            <p:childTnLst>
                               <p:par>
-                                <p:cTn id="20" presetID="10" presetClass="entr" presetSubtype="0" fill="hold" grpId="0" nodeType="afterEffect">
+                                <p:cTn presetID="10" presetClass="entr" presetSubtype="0" fill="hold" grpId="0" nodeType="afterEffect">
                                   <p:stCondLst>
-                                    <p:cond delay="6500"/>
+                                    <p:cond delay="0"/>
                                   </p:stCondLst>
                                   <p:childTnLst>
                                     <p:set>
                                       <p:cBhvr>
-                                        <p:cTn id="21" dur="1"/>
+                                        <p:cTn id="20" dur="1" fill="hold">
+                                          <p:stCondLst>
+                                            <p:cond delay="0"/>
+                                          </p:stCondLst>
+                                        </p:cTn>
                                         <p:tgtEl>
                                           <p:spTgt spid="7"/>
                                         </p:tgtEl>
@@ -3270,7 +3430,7 @@
                                     </p:set>
                                     <p:animEffect transition="in" filter="fade">
                                       <p:cBhvr>
-                                        <p:cTn id="22" dur="700"/>
+                                        <p:cTn id="21" dur="700"/>
                                         <p:tgtEl>
                                           <p:spTgt spid="7"/>
                                         </p:tgtEl>
@@ -3279,15 +3439,28 @@
                                   </p:childTnLst>
                                 </p:cTn>
                               </p:par>
+                            </p:childTnLst>
+                          </p:cTn>
+                        </p:par>
+                        <p:par>
+                          <p:cTn id="22" fill="hold">
+                            <p:stCondLst>
+                              <p:cond delay="8400"/>
+                            </p:stCondLst>
+                            <p:childTnLst>
                               <p:par>
-                                <p:cTn id="23" presetID="10" presetClass="entr" presetSubtype="0" fill="hold" grpId="0" nodeType="afterEffect">
+                                <p:cTn presetID="10" presetClass="entr" presetSubtype="0" fill="hold" grpId="0" nodeType="afterEffect">
                                   <p:stCondLst>
-                                    <p:cond delay="8400"/>
+                                    <p:cond delay="0"/>
                                   </p:stCondLst>
                                   <p:childTnLst>
                                     <p:set>
                                       <p:cBhvr>
-                                        <p:cTn id="24" dur="1"/>
+                                        <p:cTn id="23" dur="1" fill="hold">
+                                          <p:stCondLst>
+                                            <p:cond delay="0"/>
+                                          </p:stCondLst>
+                                        </p:cTn>
                                         <p:tgtEl>
                                           <p:spTgt spid="8"/>
                                         </p:tgtEl>
@@ -3301,7 +3474,7 @@
                                     </p:set>
                                     <p:animEffect transition="in" filter="fade">
                                       <p:cBhvr>
-                                        <p:cTn id="25" dur="700"/>
+                                        <p:cTn id="24" dur="700"/>
                                         <p:tgtEl>
                                           <p:spTgt spid="8"/>
                                         </p:tgtEl>
@@ -3310,15 +3483,28 @@
                                   </p:childTnLst>
                                 </p:cTn>
                               </p:par>
+                            </p:childTnLst>
+                          </p:cTn>
+                        </p:par>
+                        <p:par>
+                          <p:cTn id="25" fill="hold">
+                            <p:stCondLst>
+                              <p:cond delay="10500"/>
+                            </p:stCondLst>
+                            <p:childTnLst>
                               <p:par>
-                                <p:cTn id="26" presetID="10" presetClass="entr" presetSubtype="0" fill="hold" grpId="0" nodeType="afterEffect">
+                                <p:cTn presetID="10" presetClass="entr" presetSubtype="0" fill="hold" grpId="0" nodeType="afterEffect">
                                   <p:stCondLst>
-                                    <p:cond delay="10500"/>
+                                    <p:cond delay="0"/>
                                   </p:stCondLst>
                                   <p:childTnLst>
                                     <p:set>
                                       <p:cBhvr>
-                                        <p:cTn id="27" dur="1"/>
+                                        <p:cTn id="26" dur="1" fill="hold">
+                                          <p:stCondLst>
+                                            <p:cond delay="0"/>
+                                          </p:stCondLst>
+                                        </p:cTn>
                                         <p:tgtEl>
                                           <p:spTgt spid="9"/>
                                         </p:tgtEl>
@@ -3332,7 +3518,7 @@
                                     </p:set>
                                     <p:animEffect transition="in" filter="fade">
                                       <p:cBhvr>
-                                        <p:cTn id="28" dur="700"/>
+                                        <p:cTn id="27" dur="700"/>
                                         <p:tgtEl>
                                           <p:spTgt spid="9"/>
                                         </p:tgtEl>
@@ -3341,15 +3527,28 @@
                                   </p:childTnLst>
                                 </p:cTn>
                               </p:par>
+                            </p:childTnLst>
+                          </p:cTn>
+                        </p:par>
+                        <p:par>
+                          <p:cTn id="28" fill="hold">
+                            <p:stCondLst>
+                              <p:cond delay="12800"/>
+                            </p:stCondLst>
+                            <p:childTnLst>
                               <p:par>
-                                <p:cTn id="29" presetID="10" presetClass="entr" presetSubtype="0" fill="hold" grpId="0" nodeType="afterEffect">
+                                <p:cTn presetID="10" presetClass="entr" presetSubtype="0" fill="hold" grpId="0" nodeType="afterEffect">
                                   <p:stCondLst>
-                                    <p:cond delay="12800"/>
+                                    <p:cond delay="0"/>
                                   </p:stCondLst>
                                   <p:childTnLst>
                                     <p:set>
                                       <p:cBhvr>
-                                        <p:cTn id="30" dur="1"/>
+                                        <p:cTn id="29" dur="1" fill="hold">
+                                          <p:stCondLst>
+                                            <p:cond delay="0"/>
+                                          </p:stCondLst>
+                                        </p:cTn>
                                         <p:tgtEl>
                                           <p:spTgt spid="10"/>
                                         </p:tgtEl>
@@ -3363,7 +3562,7 @@
                                     </p:set>
                                     <p:animEffect transition="in" filter="fade">
                                       <p:cBhvr>
-                                        <p:cTn id="31" dur="700"/>
+                                        <p:cTn id="30" dur="700"/>
                                         <p:tgtEl>
                                           <p:spTgt spid="10"/>
                                         </p:tgtEl>
@@ -3753,10 +3952,7 @@
                   <p:par>
                     <p:cTn id="3" fill="hold">
                       <p:stCondLst>
-                        <p:cond delay="indefinite"/>
-                        <p:cond evt="onBegin" delay="0">
-                          <p:tn val="2"/>
-                        </p:cond>
+                        <p:cond delay="0"/>
                       </p:stCondLst>
                       <p:childTnLst>
                         <p:par>
@@ -3766,14 +3962,18 @@
                             </p:stCondLst>
                             <p:childTnLst>
                               <p:par>
-                                <p:cTn id="5" presetID="10" presetClass="entr" presetSubtype="0" fill="hold" grpId="0" nodeType="afterEffect">
+                                <p:cTn presetID="10" presetClass="entr" presetSubtype="0" fill="hold" grpId="0" nodeType="afterEffect">
                                   <p:stCondLst>
                                     <p:cond delay="0"/>
                                   </p:stCondLst>
                                   <p:childTnLst>
                                     <p:set>
                                       <p:cBhvr>
-                                        <p:cTn id="6" dur="1"/>
+                                        <p:cTn id="5" dur="1" fill="hold">
+                                          <p:stCondLst>
+                                            <p:cond delay="0"/>
+                                          </p:stCondLst>
+                                        </p:cTn>
                                         <p:tgtEl>
                                           <p:spTgt spid="8"/>
                                         </p:tgtEl>
@@ -3787,7 +3987,7 @@
                                     </p:set>
                                     <p:animEffect transition="in" filter="fade">
                                       <p:cBhvr>
-                                        <p:cTn id="7" dur="800"/>
+                                        <p:cTn id="6" dur="800"/>
                                         <p:tgtEl>
                                           <p:spTgt spid="8"/>
                                         </p:tgtEl>
@@ -3796,15 +3996,28 @@
                                   </p:childTnLst>
                                 </p:cTn>
                               </p:par>
+                            </p:childTnLst>
+                          </p:cTn>
+                        </p:par>
+                        <p:par>
+                          <p:cTn id="7" fill="hold">
+                            <p:stCondLst>
+                              <p:cond delay="1050"/>
+                            </p:stCondLst>
+                            <p:childTnLst>
                               <p:par>
-                                <p:cTn id="8" presetID="10" presetClass="entr" presetSubtype="0" fill="hold" grpId="0" nodeType="afterEffect">
+                                <p:cTn presetID="10" presetClass="entr" presetSubtype="0" fill="hold" grpId="0" nodeType="afterEffect">
                                   <p:stCondLst>
-                                    <p:cond delay="1050"/>
+                                    <p:cond delay="0"/>
                                   </p:stCondLst>
                                   <p:childTnLst>
                                     <p:set>
                                       <p:cBhvr>
-                                        <p:cTn id="9" dur="1"/>
+                                        <p:cTn id="8" dur="1" fill="hold">
+                                          <p:stCondLst>
+                                            <p:cond delay="0"/>
+                                          </p:stCondLst>
+                                        </p:cTn>
                                         <p:tgtEl>
                                           <p:spTgt spid="2"/>
                                         </p:tgtEl>
@@ -3818,7 +4031,7 @@
                                     </p:set>
                                     <p:animEffect transition="in" filter="fade">
                                       <p:cBhvr>
-                                        <p:cTn id="10" dur="800"/>
+                                        <p:cTn id="9" dur="800"/>
                                         <p:tgtEl>
                                           <p:spTgt spid="2"/>
                                         </p:tgtEl>
@@ -3827,15 +4040,28 @@
                                   </p:childTnLst>
                                 </p:cTn>
                               </p:par>
+                            </p:childTnLst>
+                          </p:cTn>
+                        </p:par>
+                        <p:par>
+                          <p:cTn id="10" fill="hold">
+                            <p:stCondLst>
+                              <p:cond delay="2350"/>
+                            </p:stCondLst>
+                            <p:childTnLst>
                               <p:par>
-                                <p:cTn id="11" presetID="10" presetClass="entr" presetSubtype="0" fill="hold" grpId="0" nodeType="afterEffect">
+                                <p:cTn presetID="10" presetClass="entr" presetSubtype="0" fill="hold" grpId="0" nodeType="afterEffect">
                                   <p:stCondLst>
-                                    <p:cond delay="2350"/>
+                                    <p:cond delay="0"/>
                                   </p:stCondLst>
                                   <p:childTnLst>
                                     <p:set>
                                       <p:cBhvr>
-                                        <p:cTn id="12" dur="1"/>
+                                        <p:cTn id="11" dur="1" fill="hold">
+                                          <p:stCondLst>
+                                            <p:cond delay="0"/>
+                                          </p:stCondLst>
+                                        </p:cTn>
                                         <p:tgtEl>
                                           <p:spTgt spid="4"/>
                                         </p:tgtEl>
@@ -3849,7 +4075,7 @@
                                     </p:set>
                                     <p:animEffect transition="in" filter="fade">
                                       <p:cBhvr>
-                                        <p:cTn id="13" dur="800"/>
+                                        <p:cTn id="12" dur="800"/>
                                         <p:tgtEl>
                                           <p:spTgt spid="4"/>
                                         </p:tgtEl>
@@ -3858,15 +4084,28 @@
                                   </p:childTnLst>
                                 </p:cTn>
                               </p:par>
+                            </p:childTnLst>
+                          </p:cTn>
+                        </p:par>
+                        <p:par>
+                          <p:cTn id="13" fill="hold">
+                            <p:stCondLst>
+                              <p:cond delay="3900"/>
+                            </p:stCondLst>
+                            <p:childTnLst>
                               <p:par>
-                                <p:cTn id="14" presetID="10" presetClass="entr" presetSubtype="0" fill="hold" grpId="0" nodeType="afterEffect">
+                                <p:cTn presetID="10" presetClass="entr" presetSubtype="0" fill="hold" grpId="0" nodeType="afterEffect">
                                   <p:stCondLst>
-                                    <p:cond delay="3900"/>
+                                    <p:cond delay="0"/>
                                   </p:stCondLst>
                                   <p:childTnLst>
                                     <p:set>
                                       <p:cBhvr>
-                                        <p:cTn id="15" dur="1"/>
+                                        <p:cTn id="14" dur="1" fill="hold">
+                                          <p:stCondLst>
+                                            <p:cond delay="0"/>
+                                          </p:stCondLst>
+                                        </p:cTn>
                                         <p:tgtEl>
                                           <p:spTgt spid="6"/>
                                         </p:tgtEl>
@@ -3880,7 +4119,7 @@
                                     </p:set>
                                     <p:animEffect transition="in" filter="fade">
                                       <p:cBhvr>
-                                        <p:cTn id="16" dur="800"/>
+                                        <p:cTn id="15" dur="800"/>
                                         <p:tgtEl>
                                           <p:spTgt spid="6"/>
                                         </p:tgtEl>
@@ -3889,15 +4128,28 @@
                                   </p:childTnLst>
                                 </p:cTn>
                               </p:par>
+                            </p:childTnLst>
+                          </p:cTn>
+                        </p:par>
+                        <p:par>
+                          <p:cTn id="16" fill="hold">
+                            <p:stCondLst>
+                              <p:cond delay="5700"/>
+                            </p:stCondLst>
+                            <p:childTnLst>
                               <p:par>
-                                <p:cTn id="17" presetID="10" presetClass="entr" presetSubtype="0" fill="hold" grpId="0" nodeType="afterEffect">
+                                <p:cTn presetID="10" presetClass="entr" presetSubtype="0" fill="hold" grpId="0" nodeType="afterEffect">
                                   <p:stCondLst>
-                                    <p:cond delay="5700"/>
+                                    <p:cond delay="0"/>
                                   </p:stCondLst>
                                   <p:childTnLst>
                                     <p:set>
                                       <p:cBhvr>
-                                        <p:cTn id="18" dur="1"/>
+                                        <p:cTn id="17" dur="1" fill="hold">
+                                          <p:stCondLst>
+                                            <p:cond delay="0"/>
+                                          </p:stCondLst>
+                                        </p:cTn>
                                         <p:tgtEl>
                                           <p:spTgt spid="3"/>
                                         </p:tgtEl>
@@ -3911,7 +4163,7 @@
                                     </p:set>
                                     <p:animEffect transition="in" filter="fade">
                                       <p:cBhvr>
-                                        <p:cTn id="19" dur="800"/>
+                                        <p:cTn id="18" dur="800"/>
                                         <p:tgtEl>
                                           <p:spTgt spid="3"/>
                                         </p:tgtEl>
@@ -3920,15 +4172,28 @@
                                   </p:childTnLst>
                                 </p:cTn>
                               </p:par>
+                            </p:childTnLst>
+                          </p:cTn>
+                        </p:par>
+                        <p:par>
+                          <p:cTn id="19" fill="hold">
+                            <p:stCondLst>
+                              <p:cond delay="7750"/>
+                            </p:stCondLst>
+                            <p:childTnLst>
                               <p:par>
-                                <p:cTn id="20" presetID="10" presetClass="entr" presetSubtype="0" fill="hold" grpId="0" nodeType="afterEffect">
+                                <p:cTn presetID="10" presetClass="entr" presetSubtype="0" fill="hold" grpId="0" nodeType="afterEffect">
                                   <p:stCondLst>
-                                    <p:cond delay="7750"/>
+                                    <p:cond delay="0"/>
                                   </p:stCondLst>
                                   <p:childTnLst>
                                     <p:set>
                                       <p:cBhvr>
-                                        <p:cTn id="21" dur="1"/>
+                                        <p:cTn id="20" dur="1" fill="hold">
+                                          <p:stCondLst>
+                                            <p:cond delay="0"/>
+                                          </p:stCondLst>
+                                        </p:cTn>
                                         <p:tgtEl>
                                           <p:spTgt spid="5"/>
                                         </p:tgtEl>
@@ -3942,7 +4207,7 @@
                                     </p:set>
                                     <p:animEffect transition="in" filter="fade">
                                       <p:cBhvr>
-                                        <p:cTn id="22" dur="800"/>
+                                        <p:cTn id="21" dur="800"/>
                                         <p:tgtEl>
                                           <p:spTgt spid="5"/>
                                         </p:tgtEl>
@@ -3951,15 +4216,28 @@
                                   </p:childTnLst>
                                 </p:cTn>
                               </p:par>
+                            </p:childTnLst>
+                          </p:cTn>
+                        </p:par>
+                        <p:par>
+                          <p:cTn id="22" fill="hold">
+                            <p:stCondLst>
+                              <p:cond delay="10050"/>
+                            </p:stCondLst>
+                            <p:childTnLst>
                               <p:par>
-                                <p:cTn id="23" presetID="10" presetClass="entr" presetSubtype="0" fill="hold" grpId="0" nodeType="afterEffect">
+                                <p:cTn presetID="10" presetClass="entr" presetSubtype="0" fill="hold" grpId="0" nodeType="afterEffect">
                                   <p:stCondLst>
-                                    <p:cond delay="10050"/>
+                                    <p:cond delay="0"/>
                                   </p:stCondLst>
                                   <p:childTnLst>
                                     <p:set>
                                       <p:cBhvr>
-                                        <p:cTn id="24" dur="1"/>
+                                        <p:cTn id="23" dur="1" fill="hold">
+                                          <p:stCondLst>
+                                            <p:cond delay="0"/>
+                                          </p:stCondLst>
+                                        </p:cTn>
                                         <p:tgtEl>
                                           <p:spTgt spid="7"/>
                                         </p:tgtEl>
@@ -3973,7 +4251,7 @@
                                     </p:set>
                                     <p:animEffect transition="in" filter="fade">
                                       <p:cBhvr>
-                                        <p:cTn id="25" dur="800"/>
+                                        <p:cTn id="24" dur="800"/>
                                         <p:tgtEl>
                                           <p:spTgt spid="7"/>
                                         </p:tgtEl>
@@ -3982,15 +4260,28 @@
                                   </p:childTnLst>
                                 </p:cTn>
                               </p:par>
+                            </p:childTnLst>
+                          </p:cTn>
+                        </p:par>
+                        <p:par>
+                          <p:cTn id="25" fill="hold">
+                            <p:stCondLst>
+                              <p:cond delay="12600"/>
+                            </p:stCondLst>
+                            <p:childTnLst>
                               <p:par>
-                                <p:cTn id="26" presetID="10" presetClass="entr" presetSubtype="0" fill="hold" grpId="0" nodeType="afterEffect">
+                                <p:cTn presetID="10" presetClass="entr" presetSubtype="0" fill="hold" grpId="0" nodeType="afterEffect">
                                   <p:stCondLst>
-                                    <p:cond delay="12600"/>
+                                    <p:cond delay="0"/>
                                   </p:stCondLst>
                                   <p:childTnLst>
                                     <p:set>
                                       <p:cBhvr>
-                                        <p:cTn id="27" dur="1"/>
+                                        <p:cTn id="26" dur="1" fill="hold">
+                                          <p:stCondLst>
+                                            <p:cond delay="0"/>
+                                          </p:stCondLst>
+                                        </p:cTn>
                                         <p:tgtEl>
                                           <p:spTgt spid="9"/>
                                         </p:tgtEl>
@@ -4004,7 +4295,7 @@
                                     </p:set>
                                     <p:animEffect transition="in" filter="fade">
                                       <p:cBhvr>
-                                        <p:cTn id="28" dur="800"/>
+                                        <p:cTn id="27" dur="800"/>
                                         <p:tgtEl>
                                           <p:spTgt spid="9"/>
                                         </p:tgtEl>
@@ -4774,10 +5065,7 @@
                   <p:par>
                     <p:cTn id="3" fill="hold">
                       <p:stCondLst>
-                        <p:cond delay="indefinite"/>
-                        <p:cond evt="onBegin" delay="0">
-                          <p:tn val="2"/>
-                        </p:cond>
+                        <p:cond delay="0"/>
                       </p:stCondLst>
                       <p:childTnLst>
                         <p:par>
@@ -4787,14 +5075,18 @@
                             </p:stCondLst>
                             <p:childTnLst>
                               <p:par>
-                                <p:cTn id="5" presetID="10" presetClass="entr" presetSubtype="0" fill="hold" grpId="0" nodeType="afterEffect">
+                                <p:cTn presetID="10" presetClass="entr" presetSubtype="0" fill="hold" grpId="0" nodeType="afterEffect">
                                   <p:stCondLst>
                                     <p:cond delay="0"/>
                                   </p:stCondLst>
                                   <p:childTnLst>
                                     <p:set>
                                       <p:cBhvr>
-                                        <p:cTn id="6" dur="1"/>
+                                        <p:cTn id="5" dur="1" fill="hold">
+                                          <p:stCondLst>
+                                            <p:cond delay="0"/>
+                                          </p:stCondLst>
+                                        </p:cTn>
                                         <p:tgtEl>
                                           <p:spTgt spid="2"/>
                                         </p:tgtEl>
@@ -4808,7 +5100,7 @@
                                     </p:set>
                                     <p:animEffect transition="in" filter="fade">
                                       <p:cBhvr>
-                                        <p:cTn id="7" dur="700"/>
+                                        <p:cTn id="6" dur="700"/>
                                         <p:tgtEl>
                                           <p:spTgt spid="2"/>
                                         </p:tgtEl>
@@ -4817,15 +5109,28 @@
                                   </p:childTnLst>
                                 </p:cTn>
                               </p:par>
+                            </p:childTnLst>
+                          </p:cTn>
+                        </p:par>
+                        <p:par>
+                          <p:cTn id="7" fill="hold">
+                            <p:stCondLst>
+                              <p:cond delay="880"/>
+                            </p:stCondLst>
+                            <p:childTnLst>
                               <p:par>
-                                <p:cTn id="8" presetID="10" presetClass="entr" presetSubtype="0" fill="hold" grpId="0" nodeType="afterEffect">
+                                <p:cTn presetID="10" presetClass="entr" presetSubtype="0" fill="hold" grpId="0" nodeType="afterEffect">
                                   <p:stCondLst>
-                                    <p:cond delay="880"/>
+                                    <p:cond delay="0"/>
                                   </p:stCondLst>
                                   <p:childTnLst>
                                     <p:set>
                                       <p:cBhvr>
-                                        <p:cTn id="9" dur="1"/>
+                                        <p:cTn id="8" dur="1" fill="hold">
+                                          <p:stCondLst>
+                                            <p:cond delay="0"/>
+                                          </p:stCondLst>
+                                        </p:cTn>
                                         <p:tgtEl>
                                           <p:spTgt spid="4"/>
                                         </p:tgtEl>
@@ -4839,7 +5144,7 @@
                                     </p:set>
                                     <p:animEffect transition="in" filter="fade">
                                       <p:cBhvr>
-                                        <p:cTn id="10" dur="700"/>
+                                        <p:cTn id="9" dur="700"/>
                                         <p:tgtEl>
                                           <p:spTgt spid="4"/>
                                         </p:tgtEl>
@@ -4848,15 +5153,28 @@
                                   </p:childTnLst>
                                 </p:cTn>
                               </p:par>
+                            </p:childTnLst>
+                          </p:cTn>
+                        </p:par>
+                        <p:par>
+                          <p:cTn id="10" fill="hold">
+                            <p:stCondLst>
+                              <p:cond delay="1940"/>
+                            </p:stCondLst>
+                            <p:childTnLst>
                               <p:par>
-                                <p:cTn id="11" presetID="10" presetClass="entr" presetSubtype="0" fill="hold" grpId="0" nodeType="afterEffect">
+                                <p:cTn presetID="10" presetClass="entr" presetSubtype="0" fill="hold" grpId="0" nodeType="afterEffect">
                                   <p:stCondLst>
-                                    <p:cond delay="1940"/>
+                                    <p:cond delay="0"/>
                                   </p:stCondLst>
                                   <p:childTnLst>
                                     <p:set>
                                       <p:cBhvr>
-                                        <p:cTn id="12" dur="1"/>
+                                        <p:cTn id="11" dur="1" fill="hold">
+                                          <p:stCondLst>
+                                            <p:cond delay="0"/>
+                                          </p:stCondLst>
+                                        </p:cTn>
                                         <p:tgtEl>
                                           <p:spTgt spid="7"/>
                                         </p:tgtEl>
@@ -4870,7 +5188,7 @@
                                     </p:set>
                                     <p:animEffect transition="in" filter="fade">
                                       <p:cBhvr>
-                                        <p:cTn id="13" dur="700"/>
+                                        <p:cTn id="12" dur="700"/>
                                         <p:tgtEl>
                                           <p:spTgt spid="7"/>
                                         </p:tgtEl>
@@ -4879,15 +5197,28 @@
                                   </p:childTnLst>
                                 </p:cTn>
                               </p:par>
+                            </p:childTnLst>
+                          </p:cTn>
+                        </p:par>
+                        <p:par>
+                          <p:cTn id="13" fill="hold">
+                            <p:stCondLst>
+                              <p:cond delay="3180"/>
+                            </p:stCondLst>
+                            <p:childTnLst>
                               <p:par>
-                                <p:cTn id="14" presetID="10" presetClass="entr" presetSubtype="0" fill="hold" grpId="0" nodeType="afterEffect">
+                                <p:cTn presetID="10" presetClass="entr" presetSubtype="0" fill="hold" grpId="0" nodeType="afterEffect">
                                   <p:stCondLst>
-                                    <p:cond delay="3180"/>
+                                    <p:cond delay="0"/>
                                   </p:stCondLst>
                                   <p:childTnLst>
                                     <p:set>
                                       <p:cBhvr>
-                                        <p:cTn id="15" dur="1"/>
+                                        <p:cTn id="14" dur="1" fill="hold">
+                                          <p:stCondLst>
+                                            <p:cond delay="0"/>
+                                          </p:stCondLst>
+                                        </p:cTn>
                                         <p:tgtEl>
                                           <p:spTgt spid="5"/>
                                         </p:tgtEl>
@@ -4901,7 +5232,7 @@
                                     </p:set>
                                     <p:animEffect transition="in" filter="fade">
                                       <p:cBhvr>
-                                        <p:cTn id="16" dur="700"/>
+                                        <p:cTn id="15" dur="700"/>
                                         <p:tgtEl>
                                           <p:spTgt spid="5"/>
                                         </p:tgtEl>
@@ -4910,15 +5241,28 @@
                                   </p:childTnLst>
                                 </p:cTn>
                               </p:par>
+                            </p:childTnLst>
+                          </p:cTn>
+                        </p:par>
+                        <p:par>
+                          <p:cTn id="16" fill="hold">
+                            <p:stCondLst>
+                              <p:cond delay="4600"/>
+                            </p:stCondLst>
+                            <p:childTnLst>
                               <p:par>
-                                <p:cTn id="17" presetID="10" presetClass="entr" presetSubtype="0" fill="hold" grpId="0" nodeType="afterEffect">
+                                <p:cTn presetID="10" presetClass="entr" presetSubtype="0" fill="hold" grpId="0" nodeType="afterEffect">
                                   <p:stCondLst>
-                                    <p:cond delay="4600"/>
+                                    <p:cond delay="0"/>
                                   </p:stCondLst>
                                   <p:childTnLst>
                                     <p:set>
                                       <p:cBhvr>
-                                        <p:cTn id="18" dur="1"/>
+                                        <p:cTn id="17" dur="1" fill="hold">
+                                          <p:stCondLst>
+                                            <p:cond delay="0"/>
+                                          </p:stCondLst>
+                                        </p:cTn>
                                         <p:tgtEl>
                                           <p:spTgt spid="8"/>
                                         </p:tgtEl>
@@ -4932,7 +5276,7 @@
                                     </p:set>
                                     <p:animEffect transition="in" filter="fade">
                                       <p:cBhvr>
-                                        <p:cTn id="19" dur="700"/>
+                                        <p:cTn id="18" dur="700"/>
                                         <p:tgtEl>
                                           <p:spTgt spid="8"/>
                                         </p:tgtEl>
@@ -4941,15 +5285,28 @@
                                   </p:childTnLst>
                                 </p:cTn>
                               </p:par>
+                            </p:childTnLst>
+                          </p:cTn>
+                        </p:par>
+                        <p:par>
+                          <p:cTn id="19" fill="hold">
+                            <p:stCondLst>
+                              <p:cond delay="6200"/>
+                            </p:stCondLst>
+                            <p:childTnLst>
                               <p:par>
-                                <p:cTn id="20" presetID="10" presetClass="entr" presetSubtype="0" fill="hold" grpId="0" nodeType="afterEffect">
+                                <p:cTn presetID="10" presetClass="entr" presetSubtype="0" fill="hold" grpId="0" nodeType="afterEffect">
                                   <p:stCondLst>
-                                    <p:cond delay="6200"/>
+                                    <p:cond delay="0"/>
                                   </p:stCondLst>
                                   <p:childTnLst>
                                     <p:set>
                                       <p:cBhvr>
-                                        <p:cTn id="21" dur="1"/>
+                                        <p:cTn id="20" dur="1" fill="hold">
+                                          <p:stCondLst>
+                                            <p:cond delay="0"/>
+                                          </p:stCondLst>
+                                        </p:cTn>
                                         <p:tgtEl>
                                           <p:spTgt spid="6"/>
                                         </p:tgtEl>
@@ -4963,7 +5320,7 @@
                                     </p:set>
                                     <p:animEffect transition="in" filter="fade">
                                       <p:cBhvr>
-                                        <p:cTn id="22" dur="700"/>
+                                        <p:cTn id="21" dur="700"/>
                                         <p:tgtEl>
                                           <p:spTgt spid="6"/>
                                         </p:tgtEl>
@@ -4972,15 +5329,28 @@
                                   </p:childTnLst>
                                 </p:cTn>
                               </p:par>
+                            </p:childTnLst>
+                          </p:cTn>
+                        </p:par>
+                        <p:par>
+                          <p:cTn id="22" fill="hold">
+                            <p:stCondLst>
+                              <p:cond delay="7980"/>
+                            </p:stCondLst>
+                            <p:childTnLst>
                               <p:par>
-                                <p:cTn id="23" presetID="10" presetClass="entr" presetSubtype="0" fill="hold" grpId="0" nodeType="afterEffect">
+                                <p:cTn presetID="10" presetClass="entr" presetSubtype="0" fill="hold" grpId="0" nodeType="afterEffect">
                                   <p:stCondLst>
-                                    <p:cond delay="7980"/>
+                                    <p:cond delay="0"/>
                                   </p:stCondLst>
                                   <p:childTnLst>
                                     <p:set>
                                       <p:cBhvr>
-                                        <p:cTn id="24" dur="1"/>
+                                        <p:cTn id="23" dur="1" fill="hold">
+                                          <p:stCondLst>
+                                            <p:cond delay="0"/>
+                                          </p:stCondLst>
+                                        </p:cTn>
                                         <p:tgtEl>
                                           <p:spTgt spid="9"/>
                                         </p:tgtEl>
@@ -4994,7 +5364,7 @@
                                     </p:set>
                                     <p:animEffect transition="in" filter="fade">
                                       <p:cBhvr>
-                                        <p:cTn id="25" dur="700"/>
+                                        <p:cTn id="24" dur="700"/>
                                         <p:tgtEl>
                                           <p:spTgt spid="9"/>
                                         </p:tgtEl>
@@ -5003,15 +5373,28 @@
                                   </p:childTnLst>
                                 </p:cTn>
                               </p:par>
+                            </p:childTnLst>
+                          </p:cTn>
+                        </p:par>
+                        <p:par>
+                          <p:cTn id="25" fill="hold">
+                            <p:stCondLst>
+                              <p:cond delay="9940"/>
+                            </p:stCondLst>
+                            <p:childTnLst>
                               <p:par>
-                                <p:cTn id="26" presetID="10" presetClass="entr" presetSubtype="0" fill="hold" grpId="0" nodeType="afterEffect">
+                                <p:cTn presetID="10" presetClass="entr" presetSubtype="0" fill="hold" grpId="0" nodeType="afterEffect">
                                   <p:stCondLst>
-                                    <p:cond delay="9940"/>
+                                    <p:cond delay="0"/>
                                   </p:stCondLst>
                                   <p:childTnLst>
                                     <p:set>
                                       <p:cBhvr>
-                                        <p:cTn id="27" dur="1"/>
+                                        <p:cTn id="26" dur="1" fill="hold">
+                                          <p:stCondLst>
+                                            <p:cond delay="0"/>
+                                          </p:stCondLst>
+                                        </p:cTn>
                                         <p:tgtEl>
                                           <p:spTgt spid="10"/>
                                         </p:tgtEl>
@@ -5025,7 +5408,7 @@
                                     </p:set>
                                     <p:animEffect transition="in" filter="fade">
                                       <p:cBhvr>
-                                        <p:cTn id="28" dur="700"/>
+                                        <p:cTn id="27" dur="700"/>
                                         <p:tgtEl>
                                           <p:spTgt spid="10"/>
                                         </p:tgtEl>
@@ -5034,15 +5417,28 @@
                                   </p:childTnLst>
                                 </p:cTn>
                               </p:par>
+                            </p:childTnLst>
+                          </p:cTn>
+                        </p:par>
+                        <p:par>
+                          <p:cTn id="28" fill="hold">
+                            <p:stCondLst>
+                              <p:cond delay="12080"/>
+                            </p:stCondLst>
+                            <p:childTnLst>
                               <p:par>
-                                <p:cTn id="29" presetID="10" presetClass="entr" presetSubtype="0" fill="hold" grpId="0" nodeType="afterEffect">
+                                <p:cTn presetID="10" presetClass="entr" presetSubtype="0" fill="hold" grpId="0" nodeType="afterEffect">
                                   <p:stCondLst>
-                                    <p:cond delay="12080"/>
+                                    <p:cond delay="0"/>
                                   </p:stCondLst>
                                   <p:childTnLst>
                                     <p:set>
                                       <p:cBhvr>
-                                        <p:cTn id="30" dur="1"/>
+                                        <p:cTn id="29" dur="1" fill="hold">
+                                          <p:stCondLst>
+                                            <p:cond delay="0"/>
+                                          </p:stCondLst>
+                                        </p:cTn>
                                         <p:tgtEl>
                                           <p:spTgt spid="13"/>
                                         </p:tgtEl>
@@ -5056,7 +5452,7 @@
                                     </p:set>
                                     <p:animEffect transition="in" filter="fade">
                                       <p:cBhvr>
-                                        <p:cTn id="31" dur="700"/>
+                                        <p:cTn id="30" dur="700"/>
                                         <p:tgtEl>
                                           <p:spTgt spid="13"/>
                                         </p:tgtEl>
@@ -5065,15 +5461,28 @@
                                   </p:childTnLst>
                                 </p:cTn>
                               </p:par>
+                            </p:childTnLst>
+                          </p:cTn>
+                        </p:par>
+                        <p:par>
+                          <p:cTn id="31" fill="hold">
+                            <p:stCondLst>
+                              <p:cond delay="14400"/>
+                            </p:stCondLst>
+                            <p:childTnLst>
                               <p:par>
-                                <p:cTn id="32" presetID="10" presetClass="entr" presetSubtype="0" fill="hold" grpId="0" nodeType="afterEffect">
+                                <p:cTn presetID="10" presetClass="entr" presetSubtype="0" fill="hold" grpId="0" nodeType="afterEffect">
                                   <p:stCondLst>
-                                    <p:cond delay="14400"/>
+                                    <p:cond delay="0"/>
                                   </p:stCondLst>
                                   <p:childTnLst>
                                     <p:set>
                                       <p:cBhvr>
-                                        <p:cTn id="33" dur="1"/>
+                                        <p:cTn id="32" dur="1" fill="hold">
+                                          <p:stCondLst>
+                                            <p:cond delay="0"/>
+                                          </p:stCondLst>
+                                        </p:cTn>
                                         <p:tgtEl>
                                           <p:spTgt spid="11"/>
                                         </p:tgtEl>
@@ -5087,7 +5496,7 @@
                                     </p:set>
                                     <p:animEffect transition="in" filter="fade">
                                       <p:cBhvr>
-                                        <p:cTn id="34" dur="700"/>
+                                        <p:cTn id="33" dur="700"/>
                                         <p:tgtEl>
                                           <p:spTgt spid="11"/>
                                         </p:tgtEl>
@@ -5096,15 +5505,28 @@
                                   </p:childTnLst>
                                 </p:cTn>
                               </p:par>
+                            </p:childTnLst>
+                          </p:cTn>
+                        </p:par>
+                        <p:par>
+                          <p:cTn id="34" fill="hold">
+                            <p:stCondLst>
+                              <p:cond delay="16900"/>
+                            </p:stCondLst>
+                            <p:childTnLst>
                               <p:par>
-                                <p:cTn id="35" presetID="10" presetClass="entr" presetSubtype="0" fill="hold" grpId="0" nodeType="afterEffect">
+                                <p:cTn presetID="10" presetClass="entr" presetSubtype="0" fill="hold" grpId="0" nodeType="afterEffect">
                                   <p:stCondLst>
-                                    <p:cond delay="16900"/>
+                                    <p:cond delay="0"/>
                                   </p:stCondLst>
                                   <p:childTnLst>
                                     <p:set>
                                       <p:cBhvr>
-                                        <p:cTn id="36" dur="1"/>
+                                        <p:cTn id="35" dur="1" fill="hold">
+                                          <p:stCondLst>
+                                            <p:cond delay="0"/>
+                                          </p:stCondLst>
+                                        </p:cTn>
                                         <p:tgtEl>
                                           <p:spTgt spid="14"/>
                                         </p:tgtEl>
@@ -5118,7 +5540,7 @@
                                     </p:set>
                                     <p:animEffect transition="in" filter="fade">
                                       <p:cBhvr>
-                                        <p:cTn id="37" dur="700"/>
+                                        <p:cTn id="36" dur="700"/>
                                         <p:tgtEl>
                                           <p:spTgt spid="14"/>
                                         </p:tgtEl>
@@ -5127,15 +5549,28 @@
                                   </p:childTnLst>
                                 </p:cTn>
                               </p:par>
+                            </p:childTnLst>
+                          </p:cTn>
+                        </p:par>
+                        <p:par>
+                          <p:cTn id="37" fill="hold">
+                            <p:stCondLst>
+                              <p:cond delay="19580"/>
+                            </p:stCondLst>
+                            <p:childTnLst>
                               <p:par>
-                                <p:cTn id="38" presetID="10" presetClass="entr" presetSubtype="0" fill="hold" grpId="0" nodeType="afterEffect">
+                                <p:cTn presetID="10" presetClass="entr" presetSubtype="0" fill="hold" grpId="0" nodeType="afterEffect">
                                   <p:stCondLst>
-                                    <p:cond delay="19580"/>
+                                    <p:cond delay="0"/>
                                   </p:stCondLst>
                                   <p:childTnLst>
                                     <p:set>
                                       <p:cBhvr>
-                                        <p:cTn id="39" dur="1"/>
+                                        <p:cTn id="38" dur="1" fill="hold">
+                                          <p:stCondLst>
+                                            <p:cond delay="0"/>
+                                          </p:stCondLst>
+                                        </p:cTn>
                                         <p:tgtEl>
                                           <p:spTgt spid="3"/>
                                         </p:tgtEl>
@@ -5149,7 +5584,7 @@
                                     </p:set>
                                     <p:animEffect transition="in" filter="fade">
                                       <p:cBhvr>
-                                        <p:cTn id="40" dur="700"/>
+                                        <p:cTn id="39" dur="700"/>
                                         <p:tgtEl>
                                           <p:spTgt spid="3"/>
                                         </p:tgtEl>
@@ -5158,15 +5593,28 @@
                                   </p:childTnLst>
                                 </p:cTn>
                               </p:par>
+                            </p:childTnLst>
+                          </p:cTn>
+                        </p:par>
+                        <p:par>
+                          <p:cTn id="40" fill="hold">
+                            <p:stCondLst>
+                              <p:cond delay="22440"/>
+                            </p:stCondLst>
+                            <p:childTnLst>
                               <p:par>
-                                <p:cTn id="41" presetID="10" presetClass="entr" presetSubtype="0" fill="hold" grpId="0" nodeType="afterEffect">
+                                <p:cTn presetID="10" presetClass="entr" presetSubtype="0" fill="hold" grpId="0" nodeType="afterEffect">
                                   <p:stCondLst>
-                                    <p:cond delay="22440"/>
+                                    <p:cond delay="0"/>
                                   </p:stCondLst>
                                   <p:childTnLst>
                                     <p:set>
                                       <p:cBhvr>
-                                        <p:cTn id="42" dur="1"/>
+                                        <p:cTn id="41" dur="1" fill="hold">
+                                          <p:stCondLst>
+                                            <p:cond delay="0"/>
+                                          </p:stCondLst>
+                                        </p:cTn>
                                         <p:tgtEl>
                                           <p:spTgt spid="12"/>
                                         </p:tgtEl>
@@ -5180,7 +5628,7 @@
                                     </p:set>
                                     <p:animEffect transition="in" filter="fade">
                                       <p:cBhvr>
-                                        <p:cTn id="43" dur="700"/>
+                                        <p:cTn id="42" dur="700"/>
                                         <p:tgtEl>
                                           <p:spTgt spid="12"/>
                                         </p:tgtEl>
@@ -5189,15 +5637,28 @@
                                   </p:childTnLst>
                                 </p:cTn>
                               </p:par>
+                            </p:childTnLst>
+                          </p:cTn>
+                        </p:par>
+                        <p:par>
+                          <p:cTn id="43" fill="hold">
+                            <p:stCondLst>
+                              <p:cond delay="25480"/>
+                            </p:stCondLst>
+                            <p:childTnLst>
                               <p:par>
-                                <p:cTn id="44" presetID="10" presetClass="entr" presetSubtype="0" fill="hold" grpId="0" nodeType="afterEffect">
+                                <p:cTn presetID="10" presetClass="entr" presetSubtype="0" fill="hold" grpId="0" nodeType="afterEffect">
                                   <p:stCondLst>
-                                    <p:cond delay="25480"/>
+                                    <p:cond delay="0"/>
                                   </p:stCondLst>
                                   <p:childTnLst>
                                     <p:set>
                                       <p:cBhvr>
-                                        <p:cTn id="45" dur="1"/>
+                                        <p:cTn id="44" dur="1" fill="hold">
+                                          <p:stCondLst>
+                                            <p:cond delay="0"/>
+                                          </p:stCondLst>
+                                        </p:cTn>
                                         <p:tgtEl>
                                           <p:spTgt spid="15"/>
                                         </p:tgtEl>
@@ -5211,7 +5672,7 @@
                                     </p:set>
                                     <p:animEffect transition="in" filter="fade">
                                       <p:cBhvr>
-                                        <p:cTn id="46" dur="700"/>
+                                        <p:cTn id="45" dur="700"/>
                                         <p:tgtEl>
                                           <p:spTgt spid="15"/>
                                         </p:tgtEl>
@@ -5220,15 +5681,28 @@
                                   </p:childTnLst>
                                 </p:cTn>
                               </p:par>
+                            </p:childTnLst>
+                          </p:cTn>
+                        </p:par>
+                        <p:par>
+                          <p:cTn id="46" fill="hold">
+                            <p:stCondLst>
+                              <p:cond delay="28700"/>
+                            </p:stCondLst>
+                            <p:childTnLst>
                               <p:par>
-                                <p:cTn id="47" presetID="10" presetClass="entr" presetSubtype="0" fill="hold" grpId="0" nodeType="afterEffect">
+                                <p:cTn presetID="10" presetClass="entr" presetSubtype="0" fill="hold" grpId="0" nodeType="afterEffect">
                                   <p:stCondLst>
-                                    <p:cond delay="28700"/>
+                                    <p:cond delay="0"/>
                                   </p:stCondLst>
                                   <p:childTnLst>
                                     <p:set>
                                       <p:cBhvr>
-                                        <p:cTn id="48" dur="1"/>
+                                        <p:cTn id="47" dur="1" fill="hold">
+                                          <p:stCondLst>
+                                            <p:cond delay="0"/>
+                                          </p:stCondLst>
+                                        </p:cTn>
                                         <p:tgtEl>
                                           <p:spTgt spid="16"/>
                                         </p:tgtEl>
@@ -5242,7 +5716,7 @@
                                     </p:set>
                                     <p:animEffect transition="in" filter="fade">
                                       <p:cBhvr>
-                                        <p:cTn id="49" dur="700"/>
+                                        <p:cTn id="48" dur="700"/>
                                         <p:tgtEl>
                                           <p:spTgt spid="16"/>
                                         </p:tgtEl>
@@ -5251,15 +5725,28 @@
                                   </p:childTnLst>
                                 </p:cTn>
                               </p:par>
+                            </p:childTnLst>
+                          </p:cTn>
+                        </p:par>
+                        <p:par>
+                          <p:cTn id="49" fill="hold">
+                            <p:stCondLst>
+                              <p:cond delay="32100"/>
+                            </p:stCondLst>
+                            <p:childTnLst>
                               <p:par>
-                                <p:cTn id="50" presetID="10" presetClass="entr" presetSubtype="0" fill="hold" grpId="0" nodeType="afterEffect">
+                                <p:cTn presetID="10" presetClass="entr" presetSubtype="0" fill="hold" grpId="0" nodeType="afterEffect">
                                   <p:stCondLst>
-                                    <p:cond delay="32100"/>
+                                    <p:cond delay="0"/>
                                   </p:stCondLst>
                                   <p:childTnLst>
                                     <p:set>
                                       <p:cBhvr>
-                                        <p:cTn id="51" dur="1"/>
+                                        <p:cTn id="50" dur="1" fill="hold">
+                                          <p:stCondLst>
+                                            <p:cond delay="0"/>
+                                          </p:stCondLst>
+                                        </p:cTn>
                                         <p:tgtEl>
                                           <p:spTgt spid="18"/>
                                         </p:tgtEl>
@@ -5273,7 +5760,7 @@
                                     </p:set>
                                     <p:animEffect transition="in" filter="fade">
                                       <p:cBhvr>
-                                        <p:cTn id="52" dur="700"/>
+                                        <p:cTn id="51" dur="700"/>
                                         <p:tgtEl>
                                           <p:spTgt spid="18"/>
                                         </p:tgtEl>
@@ -5282,15 +5769,28 @@
                                   </p:childTnLst>
                                 </p:cTn>
                               </p:par>
+                            </p:childTnLst>
+                          </p:cTn>
+                        </p:par>
+                        <p:par>
+                          <p:cTn id="52" fill="hold">
+                            <p:stCondLst>
+                              <p:cond delay="35680"/>
+                            </p:stCondLst>
+                            <p:childTnLst>
                               <p:par>
-                                <p:cTn id="53" presetID="10" presetClass="entr" presetSubtype="0" fill="hold" grpId="0" nodeType="afterEffect">
+                                <p:cTn presetID="10" presetClass="entr" presetSubtype="0" fill="hold" grpId="0" nodeType="afterEffect">
                                   <p:stCondLst>
-                                    <p:cond delay="35680"/>
+                                    <p:cond delay="0"/>
                                   </p:stCondLst>
                                   <p:childTnLst>
                                     <p:set>
                                       <p:cBhvr>
-                                        <p:cTn id="54" dur="1"/>
+                                        <p:cTn id="53" dur="1" fill="hold">
+                                          <p:stCondLst>
+                                            <p:cond delay="0"/>
+                                          </p:stCondLst>
+                                        </p:cTn>
                                         <p:tgtEl>
                                           <p:spTgt spid="17"/>
                                         </p:tgtEl>
@@ -5304,7 +5804,7 @@
                                     </p:set>
                                     <p:animEffect transition="in" filter="fade">
                                       <p:cBhvr>
-                                        <p:cTn id="55" dur="700"/>
+                                        <p:cTn id="54" dur="700"/>
                                         <p:tgtEl>
                                           <p:spTgt spid="17"/>
                                         </p:tgtEl>
@@ -5313,15 +5813,28 @@
                                   </p:childTnLst>
                                 </p:cTn>
                               </p:par>
+                            </p:childTnLst>
+                          </p:cTn>
+                        </p:par>
+                        <p:par>
+                          <p:cTn id="55" fill="hold">
+                            <p:stCondLst>
+                              <p:cond delay="39440"/>
+                            </p:stCondLst>
+                            <p:childTnLst>
                               <p:par>
-                                <p:cTn id="56" presetID="10" presetClass="entr" presetSubtype="0" fill="hold" grpId="0" nodeType="afterEffect">
+                                <p:cTn presetID="10" presetClass="entr" presetSubtype="0" fill="hold" grpId="0" nodeType="afterEffect">
                                   <p:stCondLst>
-                                    <p:cond delay="39440"/>
+                                    <p:cond delay="0"/>
                                   </p:stCondLst>
                                   <p:childTnLst>
                                     <p:set>
                                       <p:cBhvr>
-                                        <p:cTn id="57" dur="1"/>
+                                        <p:cTn id="56" dur="1" fill="hold">
+                                          <p:stCondLst>
+                                            <p:cond delay="0"/>
+                                          </p:stCondLst>
+                                        </p:cTn>
                                         <p:tgtEl>
                                           <p:spTgt spid="19"/>
                                         </p:tgtEl>
@@ -5335,7 +5848,7 @@
                                     </p:set>
                                     <p:animEffect transition="in" filter="fade">
                                       <p:cBhvr>
-                                        <p:cTn id="58" dur="700"/>
+                                        <p:cTn id="57" dur="700"/>
                                         <p:tgtEl>
                                           <p:spTgt spid="19"/>
                                         </p:tgtEl>
@@ -5344,15 +5857,28 @@
                                   </p:childTnLst>
                                 </p:cTn>
                               </p:par>
+                            </p:childTnLst>
+                          </p:cTn>
+                        </p:par>
+                        <p:par>
+                          <p:cTn id="58" fill="hold">
+                            <p:stCondLst>
+                              <p:cond delay="43380"/>
+                            </p:stCondLst>
+                            <p:childTnLst>
                               <p:par>
-                                <p:cTn id="59" presetID="10" presetClass="entr" presetSubtype="0" fill="hold" grpId="0" nodeType="afterEffect">
+                                <p:cTn presetID="10" presetClass="entr" presetSubtype="0" fill="hold" grpId="0" nodeType="afterEffect">
                                   <p:stCondLst>
-                                    <p:cond delay="43380"/>
+                                    <p:cond delay="0"/>
                                   </p:stCondLst>
                                   <p:childTnLst>
                                     <p:set>
                                       <p:cBhvr>
-                                        <p:cTn id="60" dur="1"/>
+                                        <p:cTn id="59" dur="1" fill="hold">
+                                          <p:stCondLst>
+                                            <p:cond delay="0"/>
+                                          </p:stCondLst>
+                                        </p:cTn>
                                         <p:tgtEl>
                                           <p:spTgt spid="20"/>
                                         </p:tgtEl>
@@ -5366,7 +5892,7 @@
                                     </p:set>
                                     <p:animEffect transition="in" filter="fade">
                                       <p:cBhvr>
-                                        <p:cTn id="61" dur="700"/>
+                                        <p:cTn id="60" dur="700"/>
                                         <p:tgtEl>
                                           <p:spTgt spid="20"/>
                                         </p:tgtEl>
@@ -5678,10 +6204,7 @@
                   <p:par>
                     <p:cTn id="3" fill="hold">
                       <p:stCondLst>
-                        <p:cond delay="indefinite"/>
-                        <p:cond evt="onBegin" delay="0">
-                          <p:tn val="2"/>
-                        </p:cond>
+                        <p:cond delay="0"/>
                       </p:stCondLst>
                       <p:childTnLst>
                         <p:par>
@@ -5691,14 +6214,18 @@
                             </p:stCondLst>
                             <p:childTnLst>
                               <p:par>
-                                <p:cTn id="5" presetID="10" presetClass="entr" presetSubtype="0" fill="hold" grpId="0" nodeType="afterEffect">
+                                <p:cTn presetID="10" presetClass="entr" presetSubtype="0" fill="hold" grpId="0" nodeType="afterEffect">
                                   <p:stCondLst>
                                     <p:cond delay="0"/>
                                   </p:stCondLst>
                                   <p:childTnLst>
                                     <p:set>
                                       <p:cBhvr>
-                                        <p:cTn id="6" dur="1"/>
+                                        <p:cTn id="5" dur="1" fill="hold">
+                                          <p:stCondLst>
+                                            <p:cond delay="0"/>
+                                          </p:stCondLst>
+                                        </p:cTn>
                                         <p:tgtEl>
                                           <p:spTgt spid="2"/>
                                         </p:tgtEl>
@@ -5712,7 +6239,7 @@
                                     </p:set>
                                     <p:animEffect transition="in" filter="fade">
                                       <p:cBhvr>
-                                        <p:cTn id="7" dur="900"/>
+                                        <p:cTn id="6" dur="900"/>
                                         <p:tgtEl>
                                           <p:spTgt spid="2"/>
                                         </p:tgtEl>
@@ -5721,15 +6248,28 @@
                                   </p:childTnLst>
                                 </p:cTn>
                               </p:par>
+                            </p:childTnLst>
+                          </p:cTn>
+                        </p:par>
+                        <p:par>
+                          <p:cTn id="7" fill="hold">
+                            <p:stCondLst>
+                              <p:cond delay="1150"/>
+                            </p:stCondLst>
+                            <p:childTnLst>
                               <p:par>
-                                <p:cTn id="8" presetID="10" presetClass="entr" presetSubtype="0" fill="hold" grpId="0" nodeType="afterEffect">
+                                <p:cTn presetID="10" presetClass="entr" presetSubtype="0" fill="hold" grpId="0" nodeType="afterEffect">
                                   <p:stCondLst>
-                                    <p:cond delay="1150"/>
+                                    <p:cond delay="0"/>
                                   </p:stCondLst>
                                   <p:childTnLst>
                                     <p:set>
                                       <p:cBhvr>
-                                        <p:cTn id="9" dur="1"/>
+                                        <p:cTn id="8" dur="1" fill="hold">
+                                          <p:stCondLst>
+                                            <p:cond delay="0"/>
+                                          </p:stCondLst>
+                                        </p:cTn>
                                         <p:tgtEl>
                                           <p:spTgt spid="3"/>
                                         </p:tgtEl>
@@ -5743,7 +6283,7 @@
                                     </p:set>
                                     <p:animEffect transition="in" filter="fade">
                                       <p:cBhvr>
-                                        <p:cTn id="10" dur="900"/>
+                                        <p:cTn id="9" dur="900"/>
                                         <p:tgtEl>
                                           <p:spTgt spid="3"/>
                                         </p:tgtEl>
@@ -5752,15 +6292,28 @@
                                   </p:childTnLst>
                                 </p:cTn>
                               </p:par>
+                            </p:childTnLst>
+                          </p:cTn>
+                        </p:par>
+                        <p:par>
+                          <p:cTn id="10" fill="hold">
+                            <p:stCondLst>
+                              <p:cond delay="2550"/>
+                            </p:stCondLst>
+                            <p:childTnLst>
                               <p:par>
-                                <p:cTn id="11" presetID="10" presetClass="entr" presetSubtype="0" fill="hold" grpId="0" nodeType="afterEffect">
+                                <p:cTn presetID="10" presetClass="entr" presetSubtype="0" fill="hold" grpId="0" nodeType="afterEffect">
                                   <p:stCondLst>
-                                    <p:cond delay="2550"/>
+                                    <p:cond delay="0"/>
                                   </p:stCondLst>
                                   <p:childTnLst>
                                     <p:set>
                                       <p:cBhvr>
-                                        <p:cTn id="12" dur="1"/>
+                                        <p:cTn id="11" dur="1" fill="hold">
+                                          <p:stCondLst>
+                                            <p:cond delay="0"/>
+                                          </p:stCondLst>
+                                        </p:cTn>
                                         <p:tgtEl>
                                           <p:spTgt spid="4"/>
                                         </p:tgtEl>
@@ -5774,7 +6327,7 @@
                                     </p:set>
                                     <p:animEffect transition="in" filter="fade">
                                       <p:cBhvr>
-                                        <p:cTn id="13" dur="900"/>
+                                        <p:cTn id="12" dur="900"/>
                                         <p:tgtEl>
                                           <p:spTgt spid="4"/>
                                         </p:tgtEl>
@@ -5783,15 +6336,28 @@
                                   </p:childTnLst>
                                 </p:cTn>
                               </p:par>
+                            </p:childTnLst>
+                          </p:cTn>
+                        </p:par>
+                        <p:par>
+                          <p:cTn id="13" fill="hold">
+                            <p:stCondLst>
+                              <p:cond delay="4200"/>
+                            </p:stCondLst>
+                            <p:childTnLst>
                               <p:par>
-                                <p:cTn id="14" presetID="10" presetClass="entr" presetSubtype="0" fill="hold" grpId="0" nodeType="afterEffect">
+                                <p:cTn presetID="10" presetClass="entr" presetSubtype="0" fill="hold" grpId="0" nodeType="afterEffect">
                                   <p:stCondLst>
-                                    <p:cond delay="4200"/>
+                                    <p:cond delay="0"/>
                                   </p:stCondLst>
                                   <p:childTnLst>
                                     <p:set>
                                       <p:cBhvr>
-                                        <p:cTn id="15" dur="1"/>
+                                        <p:cTn id="14" dur="1" fill="hold">
+                                          <p:stCondLst>
+                                            <p:cond delay="0"/>
+                                          </p:stCondLst>
+                                        </p:cTn>
                                         <p:tgtEl>
                                           <p:spTgt spid="5"/>
                                         </p:tgtEl>
@@ -5805,7 +6371,7 @@
                                     </p:set>
                                     <p:animEffect transition="in" filter="fade">
                                       <p:cBhvr>
-                                        <p:cTn id="16" dur="900"/>
+                                        <p:cTn id="15" dur="900"/>
                                         <p:tgtEl>
                                           <p:spTgt spid="5"/>
                                         </p:tgtEl>
@@ -5814,15 +6380,28 @@
                                   </p:childTnLst>
                                 </p:cTn>
                               </p:par>
+                            </p:childTnLst>
+                          </p:cTn>
+                        </p:par>
+                        <p:par>
+                          <p:cTn id="16" fill="hold">
+                            <p:stCondLst>
+                              <p:cond delay="6100"/>
+                            </p:stCondLst>
+                            <p:childTnLst>
                               <p:par>
-                                <p:cTn id="17" presetID="10" presetClass="entr" presetSubtype="0" fill="hold" grpId="0" nodeType="afterEffect">
+                                <p:cTn presetID="10" presetClass="entr" presetSubtype="0" fill="hold" grpId="0" nodeType="afterEffect">
                                   <p:stCondLst>
-                                    <p:cond delay="6100"/>
+                                    <p:cond delay="0"/>
                                   </p:stCondLst>
                                   <p:childTnLst>
                                     <p:set>
                                       <p:cBhvr>
-                                        <p:cTn id="18" dur="1"/>
+                                        <p:cTn id="17" dur="1" fill="hold">
+                                          <p:stCondLst>
+                                            <p:cond delay="0"/>
+                                          </p:stCondLst>
+                                        </p:cTn>
                                         <p:tgtEl>
                                           <p:spTgt spid="6"/>
                                         </p:tgtEl>
@@ -5836,7 +6415,7 @@
                                     </p:set>
                                     <p:animEffect transition="in" filter="fade">
                                       <p:cBhvr>
-                                        <p:cTn id="19" dur="900"/>
+                                        <p:cTn id="18" dur="900"/>
                                         <p:tgtEl>
                                           <p:spTgt spid="6"/>
                                         </p:tgtEl>
@@ -6245,10 +6824,7 @@
                   <p:par>
                     <p:cTn id="3" fill="hold">
                       <p:stCondLst>
-                        <p:cond delay="indefinite"/>
-                        <p:cond evt="onBegin" delay="0">
-                          <p:tn val="2"/>
-                        </p:cond>
+                        <p:cond delay="0"/>
                       </p:stCondLst>
                       <p:childTnLst>
                         <p:par>
@@ -6258,14 +6834,18 @@
                             </p:stCondLst>
                             <p:childTnLst>
                               <p:par>
-                                <p:cTn id="5" presetID="10" presetClass="entr" presetSubtype="0" fill="hold" grpId="0" nodeType="afterEffect">
+                                <p:cTn presetID="10" presetClass="entr" presetSubtype="0" fill="hold" grpId="0" nodeType="afterEffect">
                                   <p:stCondLst>
                                     <p:cond delay="0"/>
                                   </p:stCondLst>
                                   <p:childTnLst>
                                     <p:set>
                                       <p:cBhvr>
-                                        <p:cTn id="6" dur="1"/>
+                                        <p:cTn id="5" dur="1" fill="hold">
+                                          <p:stCondLst>
+                                            <p:cond delay="0"/>
+                                          </p:stCondLst>
+                                        </p:cTn>
                                         <p:tgtEl>
                                           <p:spTgt spid="2"/>
                                         </p:tgtEl>
@@ -6279,7 +6859,7 @@
                                     </p:set>
                                     <p:animEffect transition="in" filter="fade">
                                       <p:cBhvr>
-                                        <p:cTn id="7" dur="600"/>
+                                        <p:cTn id="6" dur="600"/>
                                         <p:tgtEl>
                                           <p:spTgt spid="2"/>
                                         </p:tgtEl>
@@ -6288,15 +6868,28 @@
                                   </p:childTnLst>
                                 </p:cTn>
                               </p:par>
+                            </p:childTnLst>
+                          </p:cTn>
+                        </p:par>
+                        <p:par>
+                          <p:cTn id="7" fill="hold">
+                            <p:stCondLst>
+                              <p:cond delay="750"/>
+                            </p:stCondLst>
+                            <p:childTnLst>
                               <p:par>
-                                <p:cTn id="8" presetID="10" presetClass="entr" presetSubtype="0" fill="hold" grpId="0" nodeType="afterEffect">
+                                <p:cTn presetID="10" presetClass="entr" presetSubtype="0" fill="hold" grpId="0" nodeType="afterEffect">
                                   <p:stCondLst>
-                                    <p:cond delay="750"/>
+                                    <p:cond delay="0"/>
                                   </p:stCondLst>
                                   <p:childTnLst>
                                     <p:set>
                                       <p:cBhvr>
-                                        <p:cTn id="9" dur="1"/>
+                                        <p:cTn id="8" dur="1" fill="hold">
+                                          <p:stCondLst>
+                                            <p:cond delay="0"/>
+                                          </p:stCondLst>
+                                        </p:cTn>
                                         <p:tgtEl>
                                           <p:spTgt spid="3"/>
                                         </p:tgtEl>
@@ -6310,7 +6903,7 @@
                                     </p:set>
                                     <p:animEffect transition="in" filter="fade">
                                       <p:cBhvr>
-                                        <p:cTn id="10" dur="600"/>
+                                        <p:cTn id="9" dur="600"/>
                                         <p:tgtEl>
                                           <p:spTgt spid="3"/>
                                         </p:tgtEl>
@@ -6319,15 +6912,28 @@
                                   </p:childTnLst>
                                 </p:cTn>
                               </p:par>
+                            </p:childTnLst>
+                          </p:cTn>
+                        </p:par>
+                        <p:par>
+                          <p:cTn id="10" fill="hold">
+                            <p:stCondLst>
+                              <p:cond delay="1650"/>
+                            </p:stCondLst>
+                            <p:childTnLst>
                               <p:par>
-                                <p:cTn id="11" presetID="10" presetClass="entr" presetSubtype="0" fill="hold" grpId="0" nodeType="afterEffect">
+                                <p:cTn presetID="10" presetClass="entr" presetSubtype="0" fill="hold" grpId="0" nodeType="afterEffect">
                                   <p:stCondLst>
-                                    <p:cond delay="1650"/>
+                                    <p:cond delay="0"/>
                                   </p:stCondLst>
                                   <p:childTnLst>
                                     <p:set>
                                       <p:cBhvr>
-                                        <p:cTn id="12" dur="1"/>
+                                        <p:cTn id="11" dur="1" fill="hold">
+                                          <p:stCondLst>
+                                            <p:cond delay="0"/>
+                                          </p:stCondLst>
+                                        </p:cTn>
                                         <p:tgtEl>
                                           <p:spTgt spid="4"/>
                                         </p:tgtEl>
@@ -6341,7 +6947,7 @@
                                     </p:set>
                                     <p:animEffect transition="in" filter="fade">
                                       <p:cBhvr>
-                                        <p:cTn id="13" dur="600"/>
+                                        <p:cTn id="12" dur="600"/>
                                         <p:tgtEl>
                                           <p:spTgt spid="4"/>
                                         </p:tgtEl>
@@ -6350,15 +6956,28 @@
                                   </p:childTnLst>
                                 </p:cTn>
                               </p:par>
+                            </p:childTnLst>
+                          </p:cTn>
+                        </p:par>
+                        <p:par>
+                          <p:cTn id="13" fill="hold">
+                            <p:stCondLst>
+                              <p:cond delay="2700"/>
+                            </p:stCondLst>
+                            <p:childTnLst>
                               <p:par>
-                                <p:cTn id="14" presetID="10" presetClass="entr" presetSubtype="0" fill="hold" grpId="0" nodeType="afterEffect">
+                                <p:cTn presetID="10" presetClass="entr" presetSubtype="0" fill="hold" grpId="0" nodeType="afterEffect">
                                   <p:stCondLst>
-                                    <p:cond delay="2700"/>
+                                    <p:cond delay="0"/>
                                   </p:stCondLst>
                                   <p:childTnLst>
                                     <p:set>
                                       <p:cBhvr>
-                                        <p:cTn id="15" dur="1"/>
+                                        <p:cTn id="14" dur="1" fill="hold">
+                                          <p:stCondLst>
+                                            <p:cond delay="0"/>
+                                          </p:stCondLst>
+                                        </p:cTn>
                                         <p:tgtEl>
                                           <p:spTgt spid="5"/>
                                         </p:tgtEl>
@@ -6372,7 +6991,7 @@
                                     </p:set>
                                     <p:animEffect transition="in" filter="fade">
                                       <p:cBhvr>
-                                        <p:cTn id="16" dur="600"/>
+                                        <p:cTn id="15" dur="600"/>
                                         <p:tgtEl>
                                           <p:spTgt spid="5"/>
                                         </p:tgtEl>
@@ -6381,15 +7000,28 @@
                                   </p:childTnLst>
                                 </p:cTn>
                               </p:par>
+                            </p:childTnLst>
+                          </p:cTn>
+                        </p:par>
+                        <p:par>
+                          <p:cTn id="16" fill="hold">
+                            <p:stCondLst>
+                              <p:cond delay="3900"/>
+                            </p:stCondLst>
+                            <p:childTnLst>
                               <p:par>
-                                <p:cTn id="17" presetID="10" presetClass="entr" presetSubtype="0" fill="hold" grpId="0" nodeType="afterEffect">
+                                <p:cTn presetID="10" presetClass="entr" presetSubtype="0" fill="hold" grpId="0" nodeType="afterEffect">
                                   <p:stCondLst>
-                                    <p:cond delay="3900"/>
+                                    <p:cond delay="0"/>
                                   </p:stCondLst>
                                   <p:childTnLst>
                                     <p:set>
                                       <p:cBhvr>
-                                        <p:cTn id="18" dur="1"/>
+                                        <p:cTn id="17" dur="1" fill="hold">
+                                          <p:stCondLst>
+                                            <p:cond delay="0"/>
+                                          </p:stCondLst>
+                                        </p:cTn>
                                         <p:tgtEl>
                                           <p:spTgt spid="6"/>
                                         </p:tgtEl>
@@ -6403,7 +7035,7 @@
                                     </p:set>
                                     <p:animEffect transition="in" filter="fade">
                                       <p:cBhvr>
-                                        <p:cTn id="19" dur="600"/>
+                                        <p:cTn id="18" dur="600"/>
                                         <p:tgtEl>
                                           <p:spTgt spid="6"/>
                                         </p:tgtEl>
@@ -6412,15 +7044,28 @@
                                   </p:childTnLst>
                                 </p:cTn>
                               </p:par>
+                            </p:childTnLst>
+                          </p:cTn>
+                        </p:par>
+                        <p:par>
+                          <p:cTn id="19" fill="hold">
+                            <p:stCondLst>
+                              <p:cond delay="5250"/>
+                            </p:stCondLst>
+                            <p:childTnLst>
                               <p:par>
-                                <p:cTn id="20" presetID="10" presetClass="entr" presetSubtype="0" fill="hold" grpId="0" nodeType="afterEffect">
+                                <p:cTn presetID="10" presetClass="entr" presetSubtype="0" fill="hold" grpId="0" nodeType="afterEffect">
                                   <p:stCondLst>
-                                    <p:cond delay="5250"/>
+                                    <p:cond delay="0"/>
                                   </p:stCondLst>
                                   <p:childTnLst>
                                     <p:set>
                                       <p:cBhvr>
-                                        <p:cTn id="21" dur="1"/>
+                                        <p:cTn id="20" dur="1" fill="hold">
+                                          <p:stCondLst>
+                                            <p:cond delay="0"/>
+                                          </p:stCondLst>
+                                        </p:cTn>
                                         <p:tgtEl>
                                           <p:spTgt spid="7"/>
                                         </p:tgtEl>
@@ -6434,7 +7079,7 @@
                                     </p:set>
                                     <p:animEffect transition="in" filter="fade">
                                       <p:cBhvr>
-                                        <p:cTn id="22" dur="600"/>
+                                        <p:cTn id="21" dur="600"/>
                                         <p:tgtEl>
                                           <p:spTgt spid="7"/>
                                         </p:tgtEl>
@@ -6443,15 +7088,28 @@
                                   </p:childTnLst>
                                 </p:cTn>
                               </p:par>
+                            </p:childTnLst>
+                          </p:cTn>
+                        </p:par>
+                        <p:par>
+                          <p:cTn id="22" fill="hold">
+                            <p:stCondLst>
+                              <p:cond delay="6750"/>
+                            </p:stCondLst>
+                            <p:childTnLst>
                               <p:par>
-                                <p:cTn id="23" presetID="10" presetClass="entr" presetSubtype="0" fill="hold" grpId="0" nodeType="afterEffect">
+                                <p:cTn presetID="10" presetClass="entr" presetSubtype="0" fill="hold" grpId="0" nodeType="afterEffect">
                                   <p:stCondLst>
-                                    <p:cond delay="6750"/>
+                                    <p:cond delay="0"/>
                                   </p:stCondLst>
                                   <p:childTnLst>
                                     <p:set>
                                       <p:cBhvr>
-                                        <p:cTn id="24" dur="1"/>
+                                        <p:cTn id="23" dur="1" fill="hold">
+                                          <p:stCondLst>
+                                            <p:cond delay="0"/>
+                                          </p:stCondLst>
+                                        </p:cTn>
                                         <p:tgtEl>
                                           <p:spTgt spid="8"/>
                                         </p:tgtEl>
@@ -6465,7 +7123,7 @@
                                     </p:set>
                                     <p:animEffect transition="in" filter="fade">
                                       <p:cBhvr>
-                                        <p:cTn id="25" dur="600"/>
+                                        <p:cTn id="24" dur="600"/>
                                         <p:tgtEl>
                                           <p:spTgt spid="8"/>
                                         </p:tgtEl>
@@ -6474,15 +7132,28 @@
                                   </p:childTnLst>
                                 </p:cTn>
                               </p:par>
+                            </p:childTnLst>
+                          </p:cTn>
+                        </p:par>
+                        <p:par>
+                          <p:cTn id="25" fill="hold">
+                            <p:stCondLst>
+                              <p:cond delay="8400"/>
+                            </p:stCondLst>
+                            <p:childTnLst>
                               <p:par>
-                                <p:cTn id="26" presetID="10" presetClass="entr" presetSubtype="0" fill="hold" grpId="0" nodeType="afterEffect">
+                                <p:cTn presetID="10" presetClass="entr" presetSubtype="0" fill="hold" grpId="0" nodeType="afterEffect">
                                   <p:stCondLst>
-                                    <p:cond delay="8400"/>
+                                    <p:cond delay="0"/>
                                   </p:stCondLst>
                                   <p:childTnLst>
                                     <p:set>
                                       <p:cBhvr>
-                                        <p:cTn id="27" dur="1"/>
+                                        <p:cTn id="26" dur="1" fill="hold">
+                                          <p:stCondLst>
+                                            <p:cond delay="0"/>
+                                          </p:stCondLst>
+                                        </p:cTn>
                                         <p:tgtEl>
                                           <p:spTgt spid="9"/>
                                         </p:tgtEl>
@@ -6496,7 +7167,7 @@
                                     </p:set>
                                     <p:animEffect transition="in" filter="fade">
                                       <p:cBhvr>
-                                        <p:cTn id="28" dur="600"/>
+                                        <p:cTn id="27" dur="600"/>
                                         <p:tgtEl>
                                           <p:spTgt spid="9"/>
                                         </p:tgtEl>
@@ -6505,15 +7176,28 @@
                                   </p:childTnLst>
                                 </p:cTn>
                               </p:par>
+                            </p:childTnLst>
+                          </p:cTn>
+                        </p:par>
+                        <p:par>
+                          <p:cTn id="28" fill="hold">
+                            <p:stCondLst>
+                              <p:cond delay="10200"/>
+                            </p:stCondLst>
+                            <p:childTnLst>
                               <p:par>
-                                <p:cTn id="29" presetID="10" presetClass="entr" presetSubtype="0" fill="hold" grpId="0" nodeType="afterEffect">
+                                <p:cTn presetID="10" presetClass="entr" presetSubtype="0" fill="hold" grpId="0" nodeType="afterEffect">
                                   <p:stCondLst>
-                                    <p:cond delay="10200"/>
+                                    <p:cond delay="0"/>
                                   </p:stCondLst>
                                   <p:childTnLst>
                                     <p:set>
                                       <p:cBhvr>
-                                        <p:cTn id="30" dur="1"/>
+                                        <p:cTn id="29" dur="1" fill="hold">
+                                          <p:stCondLst>
+                                            <p:cond delay="0"/>
+                                          </p:stCondLst>
+                                        </p:cTn>
                                         <p:tgtEl>
                                           <p:spTgt spid="10"/>
                                         </p:tgtEl>
@@ -6527,7 +7211,7 @@
                                     </p:set>
                                     <p:animEffect transition="in" filter="fade">
                                       <p:cBhvr>
-                                        <p:cTn id="31" dur="600"/>
+                                        <p:cTn id="30" dur="600"/>
                                         <p:tgtEl>
                                           <p:spTgt spid="10"/>
                                         </p:tgtEl>
@@ -6728,10 +7412,7 @@
                   <p:par>
                     <p:cTn id="3" fill="hold">
                       <p:stCondLst>
-                        <p:cond delay="indefinite"/>
-                        <p:cond evt="onBegin" delay="0">
-                          <p:tn val="2"/>
-                        </p:cond>
+                        <p:cond delay="0"/>
                       </p:stCondLst>
                       <p:childTnLst>
                         <p:par>
@@ -6741,14 +7422,18 @@
                             </p:stCondLst>
                             <p:childTnLst>
                               <p:par>
-                                <p:cTn id="5" presetID="10" presetClass="entr" presetSubtype="0" fill="hold" grpId="0" nodeType="afterEffect">
+                                <p:cTn presetID="10" presetClass="entr" presetSubtype="0" fill="hold" grpId="0" nodeType="afterEffect">
                                   <p:stCondLst>
                                     <p:cond delay="0"/>
                                   </p:stCondLst>
                                   <p:childTnLst>
                                     <p:set>
                                       <p:cBhvr>
-                                        <p:cTn id="6" dur="1"/>
+                                        <p:cTn id="5" dur="1" fill="hold">
+                                          <p:stCondLst>
+                                            <p:cond delay="0"/>
+                                          </p:stCondLst>
+                                        </p:cTn>
                                         <p:tgtEl>
                                           <p:spTgt spid="2"/>
                                         </p:tgtEl>
@@ -6762,7 +7447,7 @@
                                     </p:set>
                                     <p:animEffect transition="in" filter="fade">
                                       <p:cBhvr>
-                                        <p:cTn id="7" dur="900"/>
+                                        <p:cTn id="6" dur="900"/>
                                         <p:tgtEl>
                                           <p:spTgt spid="2"/>
                                         </p:tgtEl>
@@ -6771,15 +7456,28 @@
                                   </p:childTnLst>
                                 </p:cTn>
                               </p:par>
+                            </p:childTnLst>
+                          </p:cTn>
+                        </p:par>
+                        <p:par>
+                          <p:cTn id="7" fill="hold">
+                            <p:stCondLst>
+                              <p:cond delay="900"/>
+                            </p:stCondLst>
+                            <p:childTnLst>
                               <p:par>
-                                <p:cTn id="8" presetID="10" presetClass="entr" presetSubtype="0" fill="hold" grpId="0" nodeType="afterEffect">
+                                <p:cTn presetID="10" presetClass="entr" presetSubtype="0" fill="hold" grpId="0" nodeType="afterEffect">
                                   <p:stCondLst>
-                                    <p:cond delay="900"/>
+                                    <p:cond delay="0"/>
                                   </p:stCondLst>
                                   <p:childTnLst>
                                     <p:set>
                                       <p:cBhvr>
-                                        <p:cTn id="9" dur="1"/>
+                                        <p:cTn id="8" dur="1" fill="hold">
+                                          <p:stCondLst>
+                                            <p:cond delay="0"/>
+                                          </p:stCondLst>
+                                        </p:cTn>
                                         <p:tgtEl>
                                           <p:spTgt spid="3"/>
                                         </p:tgtEl>
@@ -6793,7 +7491,7 @@
                                     </p:set>
                                     <p:animEffect transition="in" filter="fade">
                                       <p:cBhvr>
-                                        <p:cTn id="10" dur="900"/>
+                                        <p:cTn id="9" dur="900"/>
                                         <p:tgtEl>
                                           <p:spTgt spid="3"/>
                                         </p:tgtEl>
@@ -6802,15 +7500,28 @@
                                   </p:childTnLst>
                                 </p:cTn>
                               </p:par>
+                            </p:childTnLst>
+                          </p:cTn>
+                        </p:par>
+                        <p:par>
+                          <p:cTn id="10" fill="hold">
+                            <p:stCondLst>
+                              <p:cond delay="1800"/>
+                            </p:stCondLst>
+                            <p:childTnLst>
                               <p:par>
-                                <p:cTn id="11" presetID="10" presetClass="entr" presetSubtype="0" fill="hold" grpId="0" nodeType="afterEffect">
+                                <p:cTn presetID="10" presetClass="entr" presetSubtype="0" fill="hold" grpId="0" nodeType="afterEffect">
                                   <p:stCondLst>
-                                    <p:cond delay="1800"/>
+                                    <p:cond delay="0"/>
                                   </p:stCondLst>
                                   <p:childTnLst>
                                     <p:set>
                                       <p:cBhvr>
-                                        <p:cTn id="12" dur="1"/>
+                                        <p:cTn id="11" dur="1" fill="hold">
+                                          <p:stCondLst>
+                                            <p:cond delay="0"/>
+                                          </p:stCondLst>
+                                        </p:cTn>
                                         <p:tgtEl>
                                           <p:spTgt spid="4"/>
                                         </p:tgtEl>
@@ -6824,7 +7535,7 @@
                                     </p:set>
                                     <p:animEffect transition="in" filter="fade">
                                       <p:cBhvr>
-                                        <p:cTn id="13" dur="900"/>
+                                        <p:cTn id="12" dur="900"/>
                                         <p:tgtEl>
                                           <p:spTgt spid="4"/>
                                         </p:tgtEl>

--- a/examples/premium-st2/星尘ST2-发布会.pptx
+++ b/examples/premium-st2/星尘ST2-发布会.pptx
@@ -1657,9 +1657,16 @@
   <p:cSld name="Slide 1">
     <p:bg>
       <p:bgPr>
-        <a:solidFill>
-          <a:srgbClr val="141210"/>
-        </a:solidFill>
+        <a:blipFill dpi="0" rotWithShape="1">
+          <a:blip r:embed="rId1">
+            <a:lum/>
+          </a:blip>
+          <a:srcRect/>
+          <a:stretch>
+            <a:fillRect/>
+          </a:stretch>
+        </a:blipFill>
+        <a:effectLst/>
       </p:bgPr>
     </p:bg>
     <p:spTree>
@@ -1705,9 +1712,35 @@
           </a:ln>
         </p:spPr>
       </p:sp>
-      <p:sp>
-        <p:nvSpPr>
-          <p:cNvPr id="3" name="Text 1"/>
+      <p:pic>
+        <p:nvPicPr>
+          <p:cNvPr id="3" name="Image 0" descr="assets/glow.png">    </p:cNvPr>
+          <p:cNvPicPr>
+            <a:picLocks noChangeAspect="1"/>
+          </p:cNvPicPr>
+          <p:nvPr/>
+        </p:nvPicPr>
+        <p:blipFill>
+          <a:blip r:embed="rId2">
+            <a:alphaModFix amt="45000"/>
+          </a:blip>
+          <a:stretch>
+            <a:fillRect/>
+          </a:stretch>
+        </p:blipFill>
+        <p:spPr>
+          <a:xfrm>
+            <a:off x="2985516" y="1097280"/>
+            <a:ext cx="6217920" cy="6217920"/>
+          </a:xfrm>
+          <a:prstGeom prst="rect">
+            <a:avLst/>
+          </a:prstGeom>
+        </p:spPr>
+      </p:pic>
+      <p:sp>
+        <p:nvSpPr>
+          <p:cNvPr id="4" name="Text 1"/>
           <p:cNvSpPr/>
           <p:nvPr/>
         </p:nvSpPr>
@@ -1746,7 +1779,7 @@
       </p:sp>
       <p:sp>
         <p:nvSpPr>
-          <p:cNvPr id="4" name="Text 2"/>
+          <p:cNvPr id="5" name="Text 2"/>
           <p:cNvSpPr/>
           <p:nvPr/>
         </p:nvSpPr>
@@ -1785,7 +1818,7 @@
       </p:sp>
       <p:sp>
         <p:nvSpPr>
-          <p:cNvPr id="5" name="Text 3"/>
+          <p:cNvPr id="6" name="Text 3"/>
           <p:cNvSpPr/>
           <p:nvPr/>
         </p:nvSpPr>
@@ -2011,6 +2044,50 @@
                                         <p:cTn id="15" dur="900"/>
                                         <p:tgtEl>
                                           <p:spTgt spid="5"/>
+                                        </p:tgtEl>
+                                      </p:cBhvr>
+                                    </p:animEffect>
+                                  </p:childTnLst>
+                                </p:cTn>
+                              </p:par>
+                            </p:childTnLst>
+                          </p:cTn>
+                        </p:par>
+                        <p:par>
+                          <p:cTn id="16" fill="hold">
+                            <p:stCondLst>
+                              <p:cond delay="6600"/>
+                            </p:stCondLst>
+                            <p:childTnLst>
+                              <p:par>
+                                <p:cTn presetID="10" presetClass="entr" presetSubtype="0" fill="hold" grpId="0" nodeType="afterEffect">
+                                  <p:stCondLst>
+                                    <p:cond delay="0"/>
+                                  </p:stCondLst>
+                                  <p:childTnLst>
+                                    <p:set>
+                                      <p:cBhvr>
+                                        <p:cTn id="17" dur="1" fill="hold">
+                                          <p:stCondLst>
+                                            <p:cond delay="0"/>
+                                          </p:stCondLst>
+                                        </p:cTn>
+                                        <p:tgtEl>
+                                          <p:spTgt spid="6"/>
+                                        </p:tgtEl>
+                                        <p:attrNameLst>
+                                          <p:attrName>style.visibility</p:attrName>
+                                        </p:attrNameLst>
+                                      </p:cBhvr>
+                                      <p:to>
+                                        <p:strVal val="visible"/>
+                                      </p:to>
+                                    </p:set>
+                                    <p:animEffect transition="in" filter="fade">
+                                      <p:cBhvr>
+                                        <p:cTn id="18" dur="900"/>
+                                        <p:tgtEl>
+                                          <p:spTgt spid="6"/>
                                         </p:tgtEl>
                                       </p:cBhvr>
                                     </p:animEffect>
@@ -2049,6 +2126,7 @@
       <p:bldP spid="3" grpId="0"/>
       <p:bldP spid="4" grpId="0"/>
       <p:bldP spid="5" grpId="0"/>
+      <p:bldP spid="6" grpId="0"/>
     </p:bldLst>
   </p:timing>
 </p:sld>
@@ -2059,9 +2137,16 @@
   <p:cSld name="Slide 10">
     <p:bg>
       <p:bgPr>
-        <a:solidFill>
-          <a:srgbClr val="141210"/>
-        </a:solidFill>
+        <a:blipFill dpi="0" rotWithShape="1">
+          <a:blip r:embed="rId1">
+            <a:lum/>
+          </a:blip>
+          <a:srcRect/>
+          <a:stretch>
+            <a:fillRect/>
+          </a:stretch>
+        </a:blipFill>
+        <a:effectLst/>
       </p:bgPr>
     </p:bg>
     <p:spTree>
@@ -2172,9 +2257,16 @@
   <p:cSld name="Slide 2">
     <p:bg>
       <p:bgPr>
-        <a:solidFill>
-          <a:srgbClr val="141210"/>
-        </a:solidFill>
+        <a:blipFill dpi="0" rotWithShape="1">
+          <a:blip r:embed="rId1">
+            <a:lum/>
+          </a:blip>
+          <a:srcRect/>
+          <a:stretch>
+            <a:fillRect/>
+          </a:stretch>
+        </a:blipFill>
+        <a:effectLst/>
       </p:bgPr>
     </p:bg>
     <p:spTree>
@@ -2574,9 +2666,16 @@
   <p:cSld name="Slide 3">
     <p:bg>
       <p:bgPr>
-        <a:solidFill>
-          <a:srgbClr val="141210"/>
-        </a:solidFill>
+        <a:blipFill dpi="0" rotWithShape="1">
+          <a:blip r:embed="rId1">
+            <a:lum/>
+          </a:blip>
+          <a:srcRect/>
+          <a:stretch>
+            <a:fillRect/>
+          </a:stretch>
+        </a:blipFill>
+        <a:effectLst/>
       </p:bgPr>
     </p:bg>
     <p:spTree>
@@ -2818,9 +2917,16 @@
   <p:cSld name="Slide 4">
     <p:bg>
       <p:bgPr>
-        <a:solidFill>
-          <a:srgbClr val="141210"/>
-        </a:solidFill>
+        <a:blipFill dpi="0" rotWithShape="1">
+          <a:blip r:embed="rId1">
+            <a:lum/>
+          </a:blip>
+          <a:srcRect/>
+          <a:stretch>
+            <a:fillRect/>
+          </a:stretch>
+        </a:blipFill>
+        <a:effectLst/>
       </p:bgPr>
     </p:bg>
     <p:spTree>
@@ -3618,9 +3724,16 @@
   <p:cSld name="Slide 5">
     <p:bg>
       <p:bgPr>
-        <a:solidFill>
-          <a:srgbClr val="141210"/>
-        </a:solidFill>
+        <a:blipFill dpi="0" rotWithShape="1">
+          <a:blip r:embed="rId1">
+            <a:lum/>
+          </a:blip>
+          <a:srcRect/>
+          <a:stretch>
+            <a:fillRect/>
+          </a:stretch>
+        </a:blipFill>
+        <a:effectLst/>
       </p:bgPr>
     </p:bg>
     <p:spTree>
@@ -4350,9 +4463,16 @@
   <p:cSld name="Slide 6">
     <p:bg>
       <p:bgPr>
-        <a:solidFill>
-          <a:srgbClr val="141210"/>
-        </a:solidFill>
+        <a:blipFill dpi="0" rotWithShape="1">
+          <a:blip r:embed="rId1">
+            <a:lum/>
+          </a:blip>
+          <a:srcRect/>
+          <a:stretch>
+            <a:fillRect/>
+          </a:stretch>
+        </a:blipFill>
+        <a:effectLst/>
       </p:bgPr>
     </p:bg>
     <p:spTree>
@@ -5958,9 +6078,16 @@
   <p:cSld name="Slide 7">
     <p:bg>
       <p:bgPr>
-        <a:solidFill>
-          <a:srgbClr val="141210"/>
-        </a:solidFill>
+        <a:blipFill dpi="0" rotWithShape="1">
+          <a:blip r:embed="rId1">
+            <a:lum/>
+          </a:blip>
+          <a:srcRect/>
+          <a:stretch>
+            <a:fillRect/>
+          </a:stretch>
+        </a:blipFill>
+        <a:effectLst/>
       </p:bgPr>
     </p:bg>
     <p:spTree>
@@ -6045,9 +6172,35 @@
           </a:p>
         </p:txBody>
       </p:sp>
-      <p:sp>
-        <p:nvSpPr>
-          <p:cNvPr id="4" name="Text 2"/>
+      <p:pic>
+        <p:nvPicPr>
+          <p:cNvPr id="4" name="Image 0" descr="assets/glow.png">    </p:cNvPr>
+          <p:cNvPicPr>
+            <a:picLocks noChangeAspect="1"/>
+          </p:cNvPicPr>
+          <p:nvPr/>
+        </p:nvPicPr>
+        <p:blipFill>
+          <a:blip r:embed="rId2">
+            <a:alphaModFix amt="55000"/>
+          </a:blip>
+          <a:stretch>
+            <a:fillRect/>
+          </a:stretch>
+        </p:blipFill>
+        <p:spPr>
+          <a:xfrm>
+            <a:off x="3717036" y="2194560"/>
+            <a:ext cx="4754880" cy="4754880"/>
+          </a:xfrm>
+          <a:prstGeom prst="rect">
+            <a:avLst/>
+          </a:prstGeom>
+        </p:spPr>
+      </p:pic>
+      <p:sp>
+        <p:nvSpPr>
+          <p:cNvPr id="5" name="Text 2"/>
           <p:cNvSpPr/>
           <p:nvPr/>
         </p:nvSpPr>
@@ -6086,7 +6239,7 @@
       </p:sp>
       <p:sp>
         <p:nvSpPr>
-          <p:cNvPr id="5" name="Text 3"/>
+          <p:cNvPr id="6" name="Text 3"/>
           <p:cNvSpPr/>
           <p:nvPr/>
         </p:nvSpPr>
@@ -6148,7 +6301,7 @@
       </p:sp>
       <p:sp>
         <p:nvSpPr>
-          <p:cNvPr id="6" name="Text 4"/>
+          <p:cNvPr id="7" name="Text 4"/>
           <p:cNvSpPr/>
           <p:nvPr/>
         </p:nvSpPr>
@@ -6271,7 +6424,7 @@
                                           </p:stCondLst>
                                         </p:cTn>
                                         <p:tgtEl>
-                                          <p:spTgt spid="3"/>
+                                          <p:spTgt spid="4"/>
                                         </p:tgtEl>
                                         <p:attrNameLst>
                                           <p:attrName>style.visibility</p:attrName>
@@ -6285,7 +6438,7 @@
                                       <p:cBhvr>
                                         <p:cTn id="9" dur="900"/>
                                         <p:tgtEl>
-                                          <p:spTgt spid="3"/>
+                                          <p:spTgt spid="4"/>
                                         </p:tgtEl>
                                       </p:cBhvr>
                                     </p:animEffect>
@@ -6315,7 +6468,7 @@
                                           </p:stCondLst>
                                         </p:cTn>
                                         <p:tgtEl>
-                                          <p:spTgt spid="4"/>
+                                          <p:spTgt spid="3"/>
                                         </p:tgtEl>
                                         <p:attrNameLst>
                                           <p:attrName>style.visibility</p:attrName>
@@ -6329,7 +6482,7 @@
                                       <p:cBhvr>
                                         <p:cTn id="12" dur="900"/>
                                         <p:tgtEl>
-                                          <p:spTgt spid="4"/>
+                                          <p:spTgt spid="3"/>
                                         </p:tgtEl>
                                       </p:cBhvr>
                                     </p:animEffect>
@@ -6418,6 +6571,50 @@
                                         <p:cTn id="18" dur="900"/>
                                         <p:tgtEl>
                                           <p:spTgt spid="6"/>
+                                        </p:tgtEl>
+                                      </p:cBhvr>
+                                    </p:animEffect>
+                                  </p:childTnLst>
+                                </p:cTn>
+                              </p:par>
+                            </p:childTnLst>
+                          </p:cTn>
+                        </p:par>
+                        <p:par>
+                          <p:cTn id="19" fill="hold">
+                            <p:stCondLst>
+                              <p:cond delay="8250"/>
+                            </p:stCondLst>
+                            <p:childTnLst>
+                              <p:par>
+                                <p:cTn presetID="10" presetClass="entr" presetSubtype="0" fill="hold" grpId="0" nodeType="afterEffect">
+                                  <p:stCondLst>
+                                    <p:cond delay="0"/>
+                                  </p:stCondLst>
+                                  <p:childTnLst>
+                                    <p:set>
+                                      <p:cBhvr>
+                                        <p:cTn id="20" dur="1" fill="hold">
+                                          <p:stCondLst>
+                                            <p:cond delay="0"/>
+                                          </p:stCondLst>
+                                        </p:cTn>
+                                        <p:tgtEl>
+                                          <p:spTgt spid="7"/>
+                                        </p:tgtEl>
+                                        <p:attrNameLst>
+                                          <p:attrName>style.visibility</p:attrName>
+                                        </p:attrNameLst>
+                                      </p:cBhvr>
+                                      <p:to>
+                                        <p:strVal val="visible"/>
+                                      </p:to>
+                                    </p:set>
+                                    <p:animEffect transition="in" filter="fade">
+                                      <p:cBhvr>
+                                        <p:cTn id="21" dur="900"/>
+                                        <p:tgtEl>
+                                          <p:spTgt spid="7"/>
                                         </p:tgtEl>
                                       </p:cBhvr>
                                     </p:animEffect>
@@ -6453,10 +6650,11 @@
     </p:tnLst>
     <p:bldLst>
       <p:bldP spid="2" grpId="0"/>
+      <p:bldP spid="4" grpId="0"/>
       <p:bldP spid="3" grpId="0"/>
-      <p:bldP spid="4" grpId="0"/>
       <p:bldP spid="5" grpId="0"/>
       <p:bldP spid="6" grpId="0"/>
+      <p:bldP spid="7" grpId="0"/>
     </p:bldLst>
   </p:timing>
 </p:sld>
@@ -6467,9 +6665,16 @@
   <p:cSld name="Slide 8">
     <p:bg>
       <p:bgPr>
-        <a:solidFill>
-          <a:srgbClr val="141210"/>
-        </a:solidFill>
+        <a:blipFill dpi="0" rotWithShape="1">
+          <a:blip r:embed="rId1">
+            <a:lum/>
+          </a:blip>
+          <a:srcRect/>
+          <a:stretch>
+            <a:fillRect/>
+          </a:stretch>
+        </a:blipFill>
+        <a:effectLst/>
       </p:bgPr>
     </p:bg>
     <p:spTree>
@@ -7267,9 +7472,16 @@
   <p:cSld name="Slide 9">
     <p:bg>
       <p:bgPr>
-        <a:solidFill>
-          <a:srgbClr val="141210"/>
-        </a:solidFill>
+        <a:blipFill dpi="0" rotWithShape="1">
+          <a:blip r:embed="rId1">
+            <a:lum/>
+          </a:blip>
+          <a:srcRect/>
+          <a:stretch>
+            <a:fillRect/>
+          </a:stretch>
+        </a:blipFill>
+        <a:effectLst/>
       </p:bgPr>
     </p:bg>
     <p:spTree>

--- a/examples/premium-st2/星尘ST2-发布会.pptx
+++ b/examples/premium-st2/星尘ST2-发布会.pptx
@@ -1711,6 +1711,10 @@
             <a:prstDash val="solid"/>
           </a:ln>
         </p:spPr>
+        <p:txBody>
+          <a:bodyPr/>
+          <a:p/>
+        </p:txBody>
       </p:sp>
       <p:pic>
         <p:nvPicPr>
@@ -1746,8 +1750,8 @@
         </p:nvSpPr>
         <p:spPr>
           <a:xfrm>
-            <a:off x="0" y="2377440"/>
-            <a:ext cx="12188952" cy="1371600"/>
+            <a:off x="0" y="2286000"/>
+            <a:ext cx="12188952" cy="1554480"/>
           </a:xfrm>
           <a:prstGeom prst="rect">
             <a:avLst/>
@@ -1763,17 +1767,17 @@
               <a:buNone/>
             </a:pPr>
             <a:r>
-              <a:rPr lang="en-US" sz="8800" b="1" spc="800" kern="0" dirty="0">
+              <a:rPr lang="en-US" sz="9600" b="1" spc="800" kern="0" dirty="0">
                 <a:solidFill>
                   <a:srgbClr val="D8C7A8"/>
                 </a:solidFill>
-                <a:latin typeface="微软雅黑" pitchFamily="34" charset="0"/>
-                <a:ea typeface="微软雅黑" pitchFamily="34" charset="-122"/>
-                <a:cs typeface="微软雅黑" pitchFamily="34" charset="-120"/>
+                <a:latin typeface="宋体" pitchFamily="34" charset="0"/>
+                <a:ea typeface="宋体" pitchFamily="34" charset="-122"/>
+                <a:cs typeface="宋体" pitchFamily="34" charset="-120"/>
               </a:rPr>
               <a:t>星尘 ST2</a:t>
             </a:r>
-            <a:endParaRPr lang="en-US" sz="8800" dirty="0"/>
+            <a:endParaRPr lang="en-US" sz="9600" dirty="0"/>
           </a:p>
         </p:txBody>
       </p:sp>
@@ -1874,7 +1878,10 @@
                   <p:par>
                     <p:cTn id="3" fill="hold">
                       <p:stCondLst>
-                        <p:cond delay="0"/>
+                        <p:cond delay="indefinite"/>
+                        <p:cond evt="onBegin" delay="0">
+                          <p:tn val="2"/>
+                        </p:cond>
                       </p:stCondLst>
                       <p:childTnLst>
                         <p:par>
@@ -1897,7 +1904,7 @@
                                           </p:stCondLst>
                                         </p:cTn>
                                         <p:tgtEl>
-                                          <p:spTgt spid="2"/>
+                                          <p:spTgt spid="3"/>
                                         </p:tgtEl>
                                         <p:attrNameLst>
                                           <p:attrName>style.visibility</p:attrName>
@@ -1909,9 +1916,9 @@
                                     </p:set>
                                     <p:animEffect transition="in" filter="fade">
                                       <p:cBhvr>
-                                        <p:cTn id="6" dur="900"/>
-                                        <p:tgtEl>
-                                          <p:spTgt spid="2"/>
+                                        <p:cTn id="6" dur="790"/>
+                                        <p:tgtEl>
+                                          <p:spTgt spid="3"/>
                                         </p:tgtEl>
                                       </p:cBhvr>
                                     </p:animEffect>
@@ -1924,7 +1931,61 @@
                         <p:par>
                           <p:cTn id="7" fill="hold">
                             <p:stCondLst>
-                              <p:cond delay="1200"/>
+                              <p:cond delay="736"/>
+                            </p:stCondLst>
+                            <p:childTnLst>
+                              <p:par>
+                                <p:cTn presetID="23" presetClass="entr" presetSubtype="16" fill="hold" grpId="0" nodeType="afterEffect">
+                                  <p:stCondLst>
+                                    <p:cond delay="0"/>
+                                  </p:stCondLst>
+                                  <p:childTnLst>
+                                    <p:set>
+                                      <p:cBhvr>
+                                        <p:cTn id="8" dur="1" fill="hold">
+                                          <p:stCondLst>
+                                            <p:cond delay="0"/>
+                                          </p:stCondLst>
+                                        </p:cTn>
+                                        <p:tgtEl>
+                                          <p:spTgt spid="4"/>
+                                        </p:tgtEl>
+                                        <p:attrNameLst>
+                                          <p:attrName>style.visibility</p:attrName>
+                                        </p:attrNameLst>
+                                      </p:cBhvr>
+                                      <p:to>
+                                        <p:strVal val="visible"/>
+                                      </p:to>
+                                    </p:set>
+                                    <p:animEffect transition="in" filter="fade">
+                                      <p:cBhvr>
+                                        <p:cTn id="9" dur="790"/>
+                                        <p:tgtEl>
+                                          <p:spTgt spid="4"/>
+                                        </p:tgtEl>
+                                      </p:cBhvr>
+                                    </p:animEffect>
+                                    <p:animScale>
+                                      <p:cBhvr>
+                                        <p:cTn id="10" dur="790"/>
+                                        <p:tgtEl>
+                                          <p:spTgt spid="4"/>
+                                        </p:tgtEl>
+                                      </p:cBhvr>
+                                      <p:from x="55000" y="55000"/>
+                                      <p:to x="100000" y="100000"/>
+                                    </p:animScale>
+                                  </p:childTnLst>
+                                </p:cTn>
+                              </p:par>
+                            </p:childTnLst>
+                          </p:cTn>
+                        </p:par>
+                        <p:par>
+                          <p:cTn id="11" fill="hold">
+                            <p:stCondLst>
+                              <p:cond delay="1472"/>
                             </p:stCondLst>
                             <p:childTnLst>
                               <p:par>
@@ -1935,13 +1996,13 @@
                                   <p:childTnLst>
                                     <p:set>
                                       <p:cBhvr>
-                                        <p:cTn id="8" dur="1" fill="hold">
+                                        <p:cTn id="12" dur="1" fill="hold">
                                           <p:stCondLst>
                                             <p:cond delay="0"/>
                                           </p:stCondLst>
                                         </p:cTn>
                                         <p:tgtEl>
-                                          <p:spTgt spid="3"/>
+                                          <p:spTgt spid="5"/>
                                         </p:tgtEl>
                                         <p:attrNameLst>
                                           <p:attrName>style.visibility</p:attrName>
@@ -1953,9 +2014,9 @@
                                     </p:set>
                                     <p:animEffect transition="in" filter="fade">
                                       <p:cBhvr>
-                                        <p:cTn id="9" dur="900"/>
-                                        <p:tgtEl>
-                                          <p:spTgt spid="3"/>
+                                        <p:cTn id="13" dur="650"/>
+                                        <p:tgtEl>
+                                          <p:spTgt spid="5"/>
                                         </p:tgtEl>
                                       </p:cBhvr>
                                     </p:animEffect>
@@ -1966,9 +2027,9 @@
                           </p:cTn>
                         </p:par>
                         <p:par>
-                          <p:cTn id="10" fill="hold">
+                          <p:cTn id="14" fill="hold">
                             <p:stCondLst>
-                              <p:cond delay="2700"/>
+                              <p:cond delay="2208"/>
                             </p:stCondLst>
                             <p:childTnLst>
                               <p:par>
@@ -1979,13 +2040,13 @@
                                   <p:childTnLst>
                                     <p:set>
                                       <p:cBhvr>
-                                        <p:cTn id="11" dur="1" fill="hold">
+                                        <p:cTn id="15" dur="1" fill="hold">
                                           <p:stCondLst>
                                             <p:cond delay="0"/>
                                           </p:stCondLst>
                                         </p:cTn>
                                         <p:tgtEl>
-                                          <p:spTgt spid="4"/>
+                                          <p:spTgt spid="6"/>
                                         </p:tgtEl>
                                         <p:attrNameLst>
                                           <p:attrName>style.visibility</p:attrName>
@@ -1997,95 +2058,7 @@
                                     </p:set>
                                     <p:animEffect transition="in" filter="fade">
                                       <p:cBhvr>
-                                        <p:cTn id="12" dur="900"/>
-                                        <p:tgtEl>
-                                          <p:spTgt spid="4"/>
-                                        </p:tgtEl>
-                                      </p:cBhvr>
-                                    </p:animEffect>
-                                  </p:childTnLst>
-                                </p:cTn>
-                              </p:par>
-                            </p:childTnLst>
-                          </p:cTn>
-                        </p:par>
-                        <p:par>
-                          <p:cTn id="13" fill="hold">
-                            <p:stCondLst>
-                              <p:cond delay="4500"/>
-                            </p:stCondLst>
-                            <p:childTnLst>
-                              <p:par>
-                                <p:cTn presetID="10" presetClass="entr" presetSubtype="0" fill="hold" grpId="0" nodeType="afterEffect">
-                                  <p:stCondLst>
-                                    <p:cond delay="0"/>
-                                  </p:stCondLst>
-                                  <p:childTnLst>
-                                    <p:set>
-                                      <p:cBhvr>
-                                        <p:cTn id="14" dur="1" fill="hold">
-                                          <p:stCondLst>
-                                            <p:cond delay="0"/>
-                                          </p:stCondLst>
-                                        </p:cTn>
-                                        <p:tgtEl>
-                                          <p:spTgt spid="5"/>
-                                        </p:tgtEl>
-                                        <p:attrNameLst>
-                                          <p:attrName>style.visibility</p:attrName>
-                                        </p:attrNameLst>
-                                      </p:cBhvr>
-                                      <p:to>
-                                        <p:strVal val="visible"/>
-                                      </p:to>
-                                    </p:set>
-                                    <p:animEffect transition="in" filter="fade">
-                                      <p:cBhvr>
-                                        <p:cTn id="15" dur="900"/>
-                                        <p:tgtEl>
-                                          <p:spTgt spid="5"/>
-                                        </p:tgtEl>
-                                      </p:cBhvr>
-                                    </p:animEffect>
-                                  </p:childTnLst>
-                                </p:cTn>
-                              </p:par>
-                            </p:childTnLst>
-                          </p:cTn>
-                        </p:par>
-                        <p:par>
-                          <p:cTn id="16" fill="hold">
-                            <p:stCondLst>
-                              <p:cond delay="6600"/>
-                            </p:stCondLst>
-                            <p:childTnLst>
-                              <p:par>
-                                <p:cTn presetID="10" presetClass="entr" presetSubtype="0" fill="hold" grpId="0" nodeType="afterEffect">
-                                  <p:stCondLst>
-                                    <p:cond delay="0"/>
-                                  </p:stCondLst>
-                                  <p:childTnLst>
-                                    <p:set>
-                                      <p:cBhvr>
-                                        <p:cTn id="17" dur="1" fill="hold">
-                                          <p:stCondLst>
-                                            <p:cond delay="0"/>
-                                          </p:stCondLst>
-                                        </p:cTn>
-                                        <p:tgtEl>
-                                          <p:spTgt spid="6"/>
-                                        </p:tgtEl>
-                                        <p:attrNameLst>
-                                          <p:attrName>style.visibility</p:attrName>
-                                        </p:attrNameLst>
-                                      </p:cBhvr>
-                                      <p:to>
-                                        <p:strVal val="visible"/>
-                                      </p:to>
-                                    </p:set>
-                                    <p:animEffect transition="in" filter="fade">
-                                      <p:cBhvr>
-                                        <p:cTn id="18" dur="900"/>
+                                        <p:cTn id="16" dur="650"/>
                                         <p:tgtEl>
                                           <p:spTgt spid="6"/>
                                         </p:tgtEl>
@@ -2122,7 +2095,6 @@
       </p:par>
     </p:tnLst>
     <p:bldLst>
-      <p:bldP spid="2" grpId="0"/>
       <p:bldP spid="3" grpId="0"/>
       <p:bldP spid="4" grpId="0"/>
       <p:bldP spid="5" grpId="0"/>
@@ -2249,194 +2221,6 @@
   <p:transition spd="slow">
     <p:fade/>
   </p:transition>
-</p:sld>
-</file>
-
-<file path=ppt/slides/slide2.xml><?xml version="1.0" encoding="utf-8"?>
-<p:sld xmlns:a="http://schemas.openxmlformats.org/drawingml/2006/main" xmlns:r="http://schemas.openxmlformats.org/officeDocument/2006/relationships" xmlns:p="http://schemas.openxmlformats.org/presentationml/2006/main">
-  <p:cSld name="Slide 2">
-    <p:bg>
-      <p:bgPr>
-        <a:blipFill dpi="0" rotWithShape="1">
-          <a:blip r:embed="rId1">
-            <a:lum/>
-          </a:blip>
-          <a:srcRect/>
-          <a:stretch>
-            <a:fillRect/>
-          </a:stretch>
-        </a:blipFill>
-        <a:effectLst/>
-      </p:bgPr>
-    </p:bg>
-    <p:spTree>
-      <p:nvGrpSpPr>
-        <p:cNvPr id="1" name=""/>
-        <p:cNvGrpSpPr/>
-        <p:nvPr/>
-      </p:nvGrpSpPr>
-      <p:grpSpPr>
-        <a:xfrm>
-          <a:off x="0" y="0"/>
-          <a:ext cx="0" cy="0"/>
-          <a:chOff x="0" y="0"/>
-          <a:chExt cx="0" cy="0"/>
-        </a:xfrm>
-      </p:grpSpPr>
-      <p:sp>
-        <p:nvSpPr>
-          <p:cNvPr id="2" name="Shape 0"/>
-          <p:cNvSpPr/>
-          <p:nvPr/>
-        </p:nvSpPr>
-        <p:spPr>
-          <a:xfrm>
-            <a:off x="5454396" y="1737360"/>
-            <a:ext cx="1280160" cy="1280160"/>
-          </a:xfrm>
-          <a:prstGeom prst="ellipse">
-            <a:avLst/>
-          </a:prstGeom>
-          <a:solidFill>
-            <a:srgbClr val="141210">
-              <a:alpha val="0"/>
-            </a:srgbClr>
-          </a:solidFill>
-          <a:ln w="15875">
-            <a:solidFill>
-              <a:srgbClr val="D8C7A8">
-                <a:alpha val="45000"/>
-              </a:srgbClr>
-            </a:solidFill>
-            <a:prstDash val="solid"/>
-          </a:ln>
-        </p:spPr>
-      </p:sp>
-      <p:sp>
-        <p:nvSpPr>
-          <p:cNvPr id="3" name="Text 1"/>
-          <p:cNvSpPr/>
-          <p:nvPr/>
-        </p:nvSpPr>
-        <p:spPr>
-          <a:xfrm>
-            <a:off x="0" y="3977640"/>
-            <a:ext cx="12188952" cy="914400"/>
-          </a:xfrm>
-          <a:prstGeom prst="rect">
-            <a:avLst/>
-          </a:prstGeom>
-          <a:noFill/>
-          <a:ln/>
-        </p:spPr>
-        <p:txBody>
-          <a:bodyPr wrap="square" lIns="0" tIns="0" rIns="0" bIns="0" rtlCol="0" anchor="ctr"/>
-          <a:lstStyle/>
-          <a:p>
-            <a:pPr algn="ctr" indent="0" marL="0">
-              <a:buNone/>
-            </a:pPr>
-            <a:r>
-              <a:rPr lang="en-US" sz="4000" b="1" spc="600" kern="0" dirty="0">
-                <a:solidFill>
-                  <a:srgbClr val="F5EFE6"/>
-                </a:solidFill>
-                <a:latin typeface="微软雅黑" pitchFamily="34" charset="0"/>
-                <a:ea typeface="微软雅黑" pitchFamily="34" charset="-122"/>
-                <a:cs typeface="微软雅黑" pitchFamily="34" charset="-120"/>
-              </a:rPr>
-              <a:t>夜晚的房间</a:t>
-            </a:r>
-            <a:endParaRPr lang="en-US" sz="4000" dirty="0"/>
-          </a:p>
-        </p:txBody>
-      </p:sp>
-      <p:sp>
-        <p:nvSpPr>
-          <p:cNvPr id="4" name="Text 2"/>
-          <p:cNvSpPr/>
-          <p:nvPr/>
-        </p:nvSpPr>
-        <p:spPr>
-          <a:xfrm>
-            <a:off x="0" y="5029200"/>
-            <a:ext cx="12188952" cy="320040"/>
-          </a:xfrm>
-          <a:prstGeom prst="rect">
-            <a:avLst/>
-          </a:prstGeom>
-          <a:noFill/>
-          <a:ln/>
-        </p:spPr>
-        <p:txBody>
-          <a:bodyPr wrap="square" lIns="0" tIns="0" rIns="0" bIns="0" rtlCol="0" anchor="ctr"/>
-          <a:lstStyle/>
-          <a:p>
-            <a:pPr algn="ctr" indent="0" marL="0">
-              <a:buNone/>
-            </a:pPr>
-            <a:r>
-              <a:rPr lang="en-US" sz="1400" dirty="0">
-                <a:solidFill>
-                  <a:srgbClr val="9A8F80"/>
-                </a:solidFill>
-                <a:latin typeface="微软雅黑" pitchFamily="34" charset="0"/>
-                <a:ea typeface="微软雅黑" pitchFamily="34" charset="-122"/>
-                <a:cs typeface="微软雅黑" pitchFamily="34" charset="-120"/>
-              </a:rPr>
-              <a:t>品牌视频 · 30 秒</a:t>
-            </a:r>
-            <a:endParaRPr lang="en-US" sz="1400" dirty="0"/>
-          </a:p>
-        </p:txBody>
-      </p:sp>
-      <p:sp>
-        <p:nvSpPr>
-          <p:cNvPr id="5" name="Text 3"/>
-          <p:cNvSpPr/>
-          <p:nvPr/>
-        </p:nvSpPr>
-        <p:spPr>
-          <a:xfrm>
-            <a:off x="10634472" y="6291072"/>
-            <a:ext cx="731520" cy="274320"/>
-          </a:xfrm>
-          <a:prstGeom prst="rect">
-            <a:avLst/>
-          </a:prstGeom>
-          <a:noFill/>
-          <a:ln/>
-        </p:spPr>
-        <p:txBody>
-          <a:bodyPr wrap="square" lIns="0" tIns="0" rIns="0" bIns="0" rtlCol="0" anchor="ctr"/>
-          <a:lstStyle/>
-          <a:p>
-            <a:pPr algn="r" indent="0" marL="0">
-              <a:buNone/>
-            </a:pPr>
-            <a:r>
-              <a:rPr lang="en-US" sz="1200" dirty="0">
-                <a:solidFill>
-                  <a:srgbClr val="9A8F80"/>
-                </a:solidFill>
-                <a:latin typeface="微软雅黑" pitchFamily="34" charset="0"/>
-                <a:ea typeface="微软雅黑" pitchFamily="34" charset="-122"/>
-                <a:cs typeface="微软雅黑" pitchFamily="34" charset="-120"/>
-              </a:rPr>
-              <a:t>2</a:t>
-            </a:r>
-            <a:endParaRPr lang="en-US" sz="1200" dirty="0"/>
-          </a:p>
-        </p:txBody>
-      </p:sp>
-    </p:spTree>
-  </p:cSld>
-  <p:clrMapOvr>
-    <a:masterClrMapping/>
-  </p:clrMapOvr>
-  <p:transition spd="slow">
-    <p:fade/>
-  </p:transition>
   <p:timing>
     <p:tnLst>
       <p:par>
@@ -2448,7 +2232,10 @@
                   <p:par>
                     <p:cTn id="3" fill="hold">
                       <p:stCondLst>
-                        <p:cond delay="0"/>
+                        <p:cond delay="indefinite"/>
+                        <p:cond evt="onBegin" delay="0">
+                          <p:tn val="2"/>
+                        </p:cond>
                       </p:stCondLst>
                       <p:childTnLst>
                         <p:par>
@@ -2483,7 +2270,7 @@
                                     </p:set>
                                     <p:animEffect transition="in" filter="fade">
                                       <p:cBhvr>
-                                        <p:cTn id="6" dur="800"/>
+                                        <p:cTn id="6" dur="650"/>
                                         <p:tgtEl>
                                           <p:spTgt spid="2"/>
                                         </p:tgtEl>
@@ -2498,7 +2285,7 @@
                         <p:par>
                           <p:cTn id="7" fill="hold">
                             <p:stCondLst>
-                              <p:cond delay="1050"/>
+                              <p:cond delay="740"/>
                             </p:stCondLst>
                             <p:childTnLst>
                               <p:par>
@@ -2527,348 +2314,7 @@
                                     </p:set>
                                     <p:animEffect transition="in" filter="fade">
                                       <p:cBhvr>
-                                        <p:cTn id="9" dur="800"/>
-                                        <p:tgtEl>
-                                          <p:spTgt spid="3"/>
-                                        </p:tgtEl>
-                                      </p:cBhvr>
-                                    </p:animEffect>
-                                  </p:childTnLst>
-                                </p:cTn>
-                              </p:par>
-                            </p:childTnLst>
-                          </p:cTn>
-                        </p:par>
-                        <p:par>
-                          <p:cTn id="10" fill="hold">
-                            <p:stCondLst>
-                              <p:cond delay="2350"/>
-                            </p:stCondLst>
-                            <p:childTnLst>
-                              <p:par>
-                                <p:cTn presetID="10" presetClass="entr" presetSubtype="0" fill="hold" grpId="0" nodeType="afterEffect">
-                                  <p:stCondLst>
-                                    <p:cond delay="0"/>
-                                  </p:stCondLst>
-                                  <p:childTnLst>
-                                    <p:set>
-                                      <p:cBhvr>
-                                        <p:cTn id="11" dur="1" fill="hold">
-                                          <p:stCondLst>
-                                            <p:cond delay="0"/>
-                                          </p:stCondLst>
-                                        </p:cTn>
-                                        <p:tgtEl>
-                                          <p:spTgt spid="4"/>
-                                        </p:tgtEl>
-                                        <p:attrNameLst>
-                                          <p:attrName>style.visibility</p:attrName>
-                                        </p:attrNameLst>
-                                      </p:cBhvr>
-                                      <p:to>
-                                        <p:strVal val="visible"/>
-                                      </p:to>
-                                    </p:set>
-                                    <p:animEffect transition="in" filter="fade">
-                                      <p:cBhvr>
-                                        <p:cTn id="12" dur="800"/>
-                                        <p:tgtEl>
-                                          <p:spTgt spid="4"/>
-                                        </p:tgtEl>
-                                      </p:cBhvr>
-                                    </p:animEffect>
-                                  </p:childTnLst>
-                                </p:cTn>
-                              </p:par>
-                            </p:childTnLst>
-                          </p:cTn>
-                        </p:par>
-                        <p:par>
-                          <p:cTn id="13" fill="hold">
-                            <p:stCondLst>
-                              <p:cond delay="3900"/>
-                            </p:stCondLst>
-                            <p:childTnLst>
-                              <p:par>
-                                <p:cTn presetID="10" presetClass="entr" presetSubtype="0" fill="hold" grpId="0" nodeType="afterEffect">
-                                  <p:stCondLst>
-                                    <p:cond delay="0"/>
-                                  </p:stCondLst>
-                                  <p:childTnLst>
-                                    <p:set>
-                                      <p:cBhvr>
-                                        <p:cTn id="14" dur="1" fill="hold">
-                                          <p:stCondLst>
-                                            <p:cond delay="0"/>
-                                          </p:stCondLst>
-                                        </p:cTn>
-                                        <p:tgtEl>
-                                          <p:spTgt spid="5"/>
-                                        </p:tgtEl>
-                                        <p:attrNameLst>
-                                          <p:attrName>style.visibility</p:attrName>
-                                        </p:attrNameLst>
-                                      </p:cBhvr>
-                                      <p:to>
-                                        <p:strVal val="visible"/>
-                                      </p:to>
-                                    </p:set>
-                                    <p:animEffect transition="in" filter="fade">
-                                      <p:cBhvr>
-                                        <p:cTn id="15" dur="800"/>
-                                        <p:tgtEl>
-                                          <p:spTgt spid="5"/>
-                                        </p:tgtEl>
-                                      </p:cBhvr>
-                                    </p:animEffect>
-                                  </p:childTnLst>
-                                </p:cTn>
-                              </p:par>
-                            </p:childTnLst>
-                          </p:cTn>
-                        </p:par>
-                      </p:childTnLst>
-                    </p:cTn>
-                  </p:par>
-                </p:childTnLst>
-              </p:cTn>
-              <p:prevCondLst>
-                <p:cond evt="onPrev" delay="0">
-                  <p:tgtEl>
-                    <p:sldTgt/>
-                  </p:tgtEl>
-                </p:cond>
-              </p:prevCondLst>
-              <p:nextCondLst>
-                <p:cond evt="onNext" delay="0">
-                  <p:tgtEl>
-                    <p:sldTgt/>
-                  </p:tgtEl>
-                </p:cond>
-              </p:nextCondLst>
-            </p:seq>
-          </p:childTnLst>
-        </p:cTn>
-      </p:par>
-    </p:tnLst>
-    <p:bldLst>
-      <p:bldP spid="2" grpId="0"/>
-      <p:bldP spid="3" grpId="0"/>
-      <p:bldP spid="4" grpId="0"/>
-      <p:bldP spid="5" grpId="0"/>
-    </p:bldLst>
-  </p:timing>
-</p:sld>
-</file>
-
-<file path=ppt/slides/slide3.xml><?xml version="1.0" encoding="utf-8"?>
-<p:sld xmlns:a="http://schemas.openxmlformats.org/drawingml/2006/main" xmlns:r="http://schemas.openxmlformats.org/officeDocument/2006/relationships" xmlns:p="http://schemas.openxmlformats.org/presentationml/2006/main">
-  <p:cSld name="Slide 3">
-    <p:bg>
-      <p:bgPr>
-        <a:blipFill dpi="0" rotWithShape="1">
-          <a:blip r:embed="rId1">
-            <a:lum/>
-          </a:blip>
-          <a:srcRect/>
-          <a:stretch>
-            <a:fillRect/>
-          </a:stretch>
-        </a:blipFill>
-        <a:effectLst/>
-      </p:bgPr>
-    </p:bg>
-    <p:spTree>
-      <p:nvGrpSpPr>
-        <p:cNvPr id="1" name=""/>
-        <p:cNvGrpSpPr/>
-        <p:nvPr/>
-      </p:nvGrpSpPr>
-      <p:grpSpPr>
-        <a:xfrm>
-          <a:off x="0" y="0"/>
-          <a:ext cx="0" cy="0"/>
-          <a:chOff x="0" y="0"/>
-          <a:chExt cx="0" cy="0"/>
-        </a:xfrm>
-      </p:grpSpPr>
-      <p:sp>
-        <p:nvSpPr>
-          <p:cNvPr id="2" name="Text 0"/>
-          <p:cNvSpPr/>
-          <p:nvPr/>
-        </p:nvSpPr>
-        <p:spPr>
-          <a:xfrm>
-            <a:off x="0" y="2834640"/>
-            <a:ext cx="12188952" cy="1097280"/>
-          </a:xfrm>
-          <a:prstGeom prst="rect">
-            <a:avLst/>
-          </a:prstGeom>
-          <a:noFill/>
-          <a:ln/>
-        </p:spPr>
-        <p:txBody>
-          <a:bodyPr wrap="square" lIns="0" tIns="0" rIns="0" bIns="0" rtlCol="0" anchor="ctr"/>
-          <a:lstStyle/>
-          <a:p>
-            <a:pPr algn="ctr" indent="0" marL="0">
-              <a:buNone/>
-            </a:pPr>
-            <a:r>
-              <a:rPr lang="en-US" sz="4800" b="1" spc="400" kern="0" dirty="0">
-                <a:solidFill>
-                  <a:srgbClr val="D8C7A8"/>
-                </a:solidFill>
-                <a:latin typeface="微软雅黑" pitchFamily="34" charset="0"/>
-                <a:ea typeface="微软雅黑" pitchFamily="34" charset="-122"/>
-                <a:cs typeface="微软雅黑" pitchFamily="34" charset="-120"/>
-              </a:rPr>
-              <a:t>让家，有自己的天气。</a:t>
-            </a:r>
-            <a:endParaRPr lang="en-US" sz="4800" dirty="0"/>
-          </a:p>
-        </p:txBody>
-      </p:sp>
-      <p:sp>
-        <p:nvSpPr>
-          <p:cNvPr id="3" name="Text 1"/>
-          <p:cNvSpPr/>
-          <p:nvPr/>
-        </p:nvSpPr>
-        <p:spPr>
-          <a:xfrm>
-            <a:off x="10634472" y="6291072"/>
-            <a:ext cx="731520" cy="274320"/>
-          </a:xfrm>
-          <a:prstGeom prst="rect">
-            <a:avLst/>
-          </a:prstGeom>
-          <a:noFill/>
-          <a:ln/>
-        </p:spPr>
-        <p:txBody>
-          <a:bodyPr wrap="square" lIns="0" tIns="0" rIns="0" bIns="0" rtlCol="0" anchor="ctr"/>
-          <a:lstStyle/>
-          <a:p>
-            <a:pPr algn="r" indent="0" marL="0">
-              <a:buNone/>
-            </a:pPr>
-            <a:r>
-              <a:rPr lang="en-US" sz="1200" dirty="0">
-                <a:solidFill>
-                  <a:srgbClr val="9A8F80"/>
-                </a:solidFill>
-                <a:latin typeface="微软雅黑" pitchFamily="34" charset="0"/>
-                <a:ea typeface="微软雅黑" pitchFamily="34" charset="-122"/>
-                <a:cs typeface="微软雅黑" pitchFamily="34" charset="-120"/>
-              </a:rPr>
-              <a:t>3</a:t>
-            </a:r>
-            <a:endParaRPr lang="en-US" sz="1200" dirty="0"/>
-          </a:p>
-        </p:txBody>
-      </p:sp>
-    </p:spTree>
-  </p:cSld>
-  <p:clrMapOvr>
-    <a:masterClrMapping/>
-  </p:clrMapOvr>
-  <p:transition spd="slow">
-    <p:fade/>
-  </p:transition>
-  <p:timing>
-    <p:tnLst>
-      <p:par>
-        <p:cTn id="1" dur="indefinite" restart="never" nodeType="tmRoot">
-          <p:childTnLst>
-            <p:seq concurrent="1" nextAc="seek">
-              <p:cTn id="2" dur="indefinite" nodeType="mainSeq">
-                <p:childTnLst>
-                  <p:par>
-                    <p:cTn id="3" fill="hold">
-                      <p:stCondLst>
-                        <p:cond delay="0"/>
-                      </p:stCondLst>
-                      <p:childTnLst>
-                        <p:par>
-                          <p:cTn id="4" fill="hold">
-                            <p:stCondLst>
-                              <p:cond delay="0"/>
-                            </p:stCondLst>
-                            <p:childTnLst>
-                              <p:par>
-                                <p:cTn presetID="10" presetClass="entr" presetSubtype="0" fill="hold" grpId="0" nodeType="afterEffect">
-                                  <p:stCondLst>
-                                    <p:cond delay="0"/>
-                                  </p:stCondLst>
-                                  <p:childTnLst>
-                                    <p:set>
-                                      <p:cBhvr>
-                                        <p:cTn id="5" dur="1" fill="hold">
-                                          <p:stCondLst>
-                                            <p:cond delay="0"/>
-                                          </p:stCondLst>
-                                        </p:cTn>
-                                        <p:tgtEl>
-                                          <p:spTgt spid="2"/>
-                                        </p:tgtEl>
-                                        <p:attrNameLst>
-                                          <p:attrName>style.visibility</p:attrName>
-                                        </p:attrNameLst>
-                                      </p:cBhvr>
-                                      <p:to>
-                                        <p:strVal val="visible"/>
-                                      </p:to>
-                                    </p:set>
-                                    <p:animEffect transition="in" filter="fade">
-                                      <p:cBhvr>
-                                        <p:cTn id="6" dur="900"/>
-                                        <p:tgtEl>
-                                          <p:spTgt spid="2"/>
-                                        </p:tgtEl>
-                                      </p:cBhvr>
-                                    </p:animEffect>
-                                  </p:childTnLst>
-                                </p:cTn>
-                              </p:par>
-                            </p:childTnLst>
-                          </p:cTn>
-                        </p:par>
-                        <p:par>
-                          <p:cTn id="7" fill="hold">
-                            <p:stCondLst>
-                              <p:cond delay="900"/>
-                            </p:stCondLst>
-                            <p:childTnLst>
-                              <p:par>
-                                <p:cTn presetID="10" presetClass="entr" presetSubtype="0" fill="hold" grpId="0" nodeType="afterEffect">
-                                  <p:stCondLst>
-                                    <p:cond delay="0"/>
-                                  </p:stCondLst>
-                                  <p:childTnLst>
-                                    <p:set>
-                                      <p:cBhvr>
-                                        <p:cTn id="8" dur="1" fill="hold">
-                                          <p:stCondLst>
-                                            <p:cond delay="0"/>
-                                          </p:stCondLst>
-                                        </p:cTn>
-                                        <p:tgtEl>
-                                          <p:spTgt spid="3"/>
-                                        </p:tgtEl>
-                                        <p:attrNameLst>
-                                          <p:attrName>style.visibility</p:attrName>
-                                        </p:attrNameLst>
-                                      </p:cBhvr>
-                                      <p:to>
-                                        <p:strVal val="visible"/>
-                                      </p:to>
-                                    </p:set>
-                                    <p:animEffect transition="in" filter="fade">
-                                      <p:cBhvr>
-                                        <p:cTn id="9" dur="900"/>
+                                        <p:cTn id="9" dur="650"/>
                                         <p:tgtEl>
                                           <p:spTgt spid="3"/>
                                         </p:tgtEl>
@@ -2912,6 +2358,561 @@
 </p:sld>
 </file>
 
+<file path=ppt/slides/slide2.xml><?xml version="1.0" encoding="utf-8"?>
+<p:sld xmlns:a="http://schemas.openxmlformats.org/drawingml/2006/main" xmlns:r="http://schemas.openxmlformats.org/officeDocument/2006/relationships" xmlns:p="http://schemas.openxmlformats.org/presentationml/2006/main">
+  <p:cSld name="Slide 2">
+    <p:bg>
+      <p:bgPr>
+        <a:blipFill dpi="0" rotWithShape="1">
+          <a:blip r:embed="rId1">
+            <a:lum/>
+          </a:blip>
+          <a:srcRect/>
+          <a:stretch>
+            <a:fillRect/>
+          </a:stretch>
+        </a:blipFill>
+        <a:effectLst/>
+      </p:bgPr>
+    </p:bg>
+    <p:spTree>
+      <p:nvGrpSpPr>
+        <p:cNvPr id="1" name=""/>
+        <p:cNvGrpSpPr/>
+        <p:nvPr/>
+      </p:nvGrpSpPr>
+      <p:grpSpPr>
+        <a:xfrm>
+          <a:off x="0" y="0"/>
+          <a:ext cx="0" cy="0"/>
+          <a:chOff x="0" y="0"/>
+          <a:chExt cx="0" cy="0"/>
+        </a:xfrm>
+      </p:grpSpPr>
+      <p:sp>
+        <p:nvSpPr>
+          <p:cNvPr id="2" name="Shape 0"/>
+          <p:cNvSpPr/>
+          <p:nvPr/>
+        </p:nvSpPr>
+        <p:spPr>
+          <a:xfrm>
+            <a:off x="5454396" y="1737360"/>
+            <a:ext cx="1280160" cy="1280160"/>
+          </a:xfrm>
+          <a:prstGeom prst="ellipse">
+            <a:avLst/>
+          </a:prstGeom>
+          <a:solidFill>
+            <a:srgbClr val="141210">
+              <a:alpha val="0"/>
+            </a:srgbClr>
+          </a:solidFill>
+          <a:ln w="15875">
+            <a:solidFill>
+              <a:srgbClr val="D8C7A8">
+                <a:alpha val="45000"/>
+              </a:srgbClr>
+            </a:solidFill>
+            <a:prstDash val="solid"/>
+          </a:ln>
+        </p:spPr>
+        <p:txBody>
+          <a:bodyPr/>
+          <a:p/>
+        </p:txBody>
+      </p:sp>
+      <p:sp>
+        <p:nvSpPr>
+          <p:cNvPr id="3" name="Text 1"/>
+          <p:cNvSpPr/>
+          <p:nvPr/>
+        </p:nvSpPr>
+        <p:spPr>
+          <a:xfrm>
+            <a:off x="0" y="3977640"/>
+            <a:ext cx="12188952" cy="914400"/>
+          </a:xfrm>
+          <a:prstGeom prst="rect">
+            <a:avLst/>
+          </a:prstGeom>
+          <a:noFill/>
+          <a:ln/>
+        </p:spPr>
+        <p:txBody>
+          <a:bodyPr wrap="square" lIns="0" tIns="0" rIns="0" bIns="0" rtlCol="0" anchor="ctr"/>
+          <a:lstStyle/>
+          <a:p>
+            <a:pPr algn="ctr" indent="0" marL="0">
+              <a:buNone/>
+            </a:pPr>
+            <a:r>
+              <a:rPr lang="en-US" sz="4000" b="1" spc="600" kern="0" dirty="0">
+                <a:solidFill>
+                  <a:srgbClr val="F5EFE6"/>
+                </a:solidFill>
+                <a:latin typeface="微软雅黑" pitchFamily="34" charset="0"/>
+                <a:ea typeface="微软雅黑" pitchFamily="34" charset="-122"/>
+                <a:cs typeface="微软雅黑" pitchFamily="34" charset="-120"/>
+              </a:rPr>
+              <a:t>夜晚的房间</a:t>
+            </a:r>
+            <a:endParaRPr lang="en-US" sz="4000" dirty="0"/>
+          </a:p>
+        </p:txBody>
+      </p:sp>
+      <p:sp>
+        <p:nvSpPr>
+          <p:cNvPr id="4" name="Text 2"/>
+          <p:cNvSpPr/>
+          <p:nvPr/>
+        </p:nvSpPr>
+        <p:spPr>
+          <a:xfrm>
+            <a:off x="0" y="5029200"/>
+            <a:ext cx="12188952" cy="320040"/>
+          </a:xfrm>
+          <a:prstGeom prst="rect">
+            <a:avLst/>
+          </a:prstGeom>
+          <a:noFill/>
+          <a:ln/>
+        </p:spPr>
+        <p:txBody>
+          <a:bodyPr wrap="square" lIns="0" tIns="0" rIns="0" bIns="0" rtlCol="0" anchor="ctr"/>
+          <a:lstStyle/>
+          <a:p>
+            <a:pPr algn="ctr" indent="0" marL="0">
+              <a:buNone/>
+            </a:pPr>
+            <a:r>
+              <a:rPr lang="en-US" sz="1400" dirty="0">
+                <a:solidFill>
+                  <a:srgbClr val="9A8F80"/>
+                </a:solidFill>
+                <a:latin typeface="微软雅黑" pitchFamily="34" charset="0"/>
+                <a:ea typeface="微软雅黑" pitchFamily="34" charset="-122"/>
+                <a:cs typeface="微软雅黑" pitchFamily="34" charset="-120"/>
+              </a:rPr>
+              <a:t>品牌视频 · 30 秒</a:t>
+            </a:r>
+            <a:endParaRPr lang="en-US" sz="1400" dirty="0"/>
+          </a:p>
+        </p:txBody>
+      </p:sp>
+      <p:sp>
+        <p:nvSpPr>
+          <p:cNvPr id="5" name="Text 3"/>
+          <p:cNvSpPr/>
+          <p:nvPr/>
+        </p:nvSpPr>
+        <p:spPr>
+          <a:xfrm>
+            <a:off x="10634472" y="6291072"/>
+            <a:ext cx="731520" cy="274320"/>
+          </a:xfrm>
+          <a:prstGeom prst="rect">
+            <a:avLst/>
+          </a:prstGeom>
+          <a:noFill/>
+          <a:ln/>
+        </p:spPr>
+        <p:txBody>
+          <a:bodyPr wrap="square" lIns="0" tIns="0" rIns="0" bIns="0" rtlCol="0" anchor="ctr"/>
+          <a:lstStyle/>
+          <a:p>
+            <a:pPr algn="r" indent="0" marL="0">
+              <a:buNone/>
+            </a:pPr>
+            <a:r>
+              <a:rPr lang="en-US" sz="1200" dirty="0">
+                <a:solidFill>
+                  <a:srgbClr val="9A8F80"/>
+                </a:solidFill>
+                <a:latin typeface="微软雅黑" pitchFamily="34" charset="0"/>
+                <a:ea typeface="微软雅黑" pitchFamily="34" charset="-122"/>
+                <a:cs typeface="微软雅黑" pitchFamily="34" charset="-120"/>
+              </a:rPr>
+              <a:t>2</a:t>
+            </a:r>
+            <a:endParaRPr lang="en-US" sz="1200" dirty="0"/>
+          </a:p>
+        </p:txBody>
+      </p:sp>
+    </p:spTree>
+  </p:cSld>
+  <p:clrMapOvr>
+    <a:masterClrMapping/>
+  </p:clrMapOvr>
+  <p:transition spd="slow">
+    <p:fade/>
+  </p:transition>
+  <p:timing>
+    <p:tnLst>
+      <p:par>
+        <p:cTn id="1" dur="indefinite" restart="never" nodeType="tmRoot">
+          <p:childTnLst>
+            <p:seq concurrent="1" nextAc="seek">
+              <p:cTn id="2" dur="indefinite" nodeType="mainSeq">
+                <p:childTnLst>
+                  <p:par>
+                    <p:cTn id="3" fill="hold">
+                      <p:stCondLst>
+                        <p:cond delay="indefinite"/>
+                        <p:cond evt="onBegin" delay="0">
+                          <p:tn val="2"/>
+                        </p:cond>
+                      </p:stCondLst>
+                      <p:childTnLst>
+                        <p:par>
+                          <p:cTn id="4" fill="hold">
+                            <p:stCondLst>
+                              <p:cond delay="0"/>
+                            </p:stCondLst>
+                            <p:childTnLst>
+                              <p:par>
+                                <p:cTn presetID="23" presetClass="entr" presetSubtype="16" fill="hold" grpId="0" nodeType="afterEffect">
+                                  <p:stCondLst>
+                                    <p:cond delay="0"/>
+                                  </p:stCondLst>
+                                  <p:childTnLst>
+                                    <p:set>
+                                      <p:cBhvr>
+                                        <p:cTn id="5" dur="1" fill="hold">
+                                          <p:stCondLst>
+                                            <p:cond delay="0"/>
+                                          </p:stCondLst>
+                                        </p:cTn>
+                                        <p:tgtEl>
+                                          <p:spTgt spid="3"/>
+                                        </p:tgtEl>
+                                        <p:attrNameLst>
+                                          <p:attrName>style.visibility</p:attrName>
+                                        </p:attrNameLst>
+                                      </p:cBhvr>
+                                      <p:to>
+                                        <p:strVal val="visible"/>
+                                      </p:to>
+                                    </p:set>
+                                    <p:animEffect transition="in" filter="fade">
+                                      <p:cBhvr>
+                                        <p:cTn id="6" dur="790"/>
+                                        <p:tgtEl>
+                                          <p:spTgt spid="3"/>
+                                        </p:tgtEl>
+                                      </p:cBhvr>
+                                    </p:animEffect>
+                                    <p:animScale>
+                                      <p:cBhvr>
+                                        <p:cTn id="7" dur="790"/>
+                                        <p:tgtEl>
+                                          <p:spTgt spid="3"/>
+                                        </p:tgtEl>
+                                      </p:cBhvr>
+                                      <p:from x="55000" y="55000"/>
+                                      <p:to x="100000" y="100000"/>
+                                    </p:animScale>
+                                  </p:childTnLst>
+                                </p:cTn>
+                              </p:par>
+                            </p:childTnLst>
+                          </p:cTn>
+                        </p:par>
+                        <p:par>
+                          <p:cTn id="8" fill="hold">
+                            <p:stCondLst>
+                              <p:cond delay="740"/>
+                            </p:stCondLst>
+                            <p:childTnLst>
+                              <p:par>
+                                <p:cTn presetID="10" presetClass="entr" presetSubtype="0" fill="hold" grpId="0" nodeType="afterEffect">
+                                  <p:stCondLst>
+                                    <p:cond delay="0"/>
+                                  </p:stCondLst>
+                                  <p:childTnLst>
+                                    <p:set>
+                                      <p:cBhvr>
+                                        <p:cTn id="9" dur="1" fill="hold">
+                                          <p:stCondLst>
+                                            <p:cond delay="0"/>
+                                          </p:stCondLst>
+                                        </p:cTn>
+                                        <p:tgtEl>
+                                          <p:spTgt spid="4"/>
+                                        </p:tgtEl>
+                                        <p:attrNameLst>
+                                          <p:attrName>style.visibility</p:attrName>
+                                        </p:attrNameLst>
+                                      </p:cBhvr>
+                                      <p:to>
+                                        <p:strVal val="visible"/>
+                                      </p:to>
+                                    </p:set>
+                                    <p:animEffect transition="in" filter="fade">
+                                      <p:cBhvr>
+                                        <p:cTn id="10" dur="650"/>
+                                        <p:tgtEl>
+                                          <p:spTgt spid="4"/>
+                                        </p:tgtEl>
+                                      </p:cBhvr>
+                                    </p:animEffect>
+                                  </p:childTnLst>
+                                </p:cTn>
+                              </p:par>
+                            </p:childTnLst>
+                          </p:cTn>
+                        </p:par>
+                      </p:childTnLst>
+                    </p:cTn>
+                  </p:par>
+                </p:childTnLst>
+              </p:cTn>
+              <p:prevCondLst>
+                <p:cond evt="onPrev" delay="0">
+                  <p:tgtEl>
+                    <p:sldTgt/>
+                  </p:tgtEl>
+                </p:cond>
+              </p:prevCondLst>
+              <p:nextCondLst>
+                <p:cond evt="onNext" delay="0">
+                  <p:tgtEl>
+                    <p:sldTgt/>
+                  </p:tgtEl>
+                </p:cond>
+              </p:nextCondLst>
+            </p:seq>
+          </p:childTnLst>
+        </p:cTn>
+      </p:par>
+    </p:tnLst>
+    <p:bldLst>
+      <p:bldP spid="3" grpId="0"/>
+      <p:bldP spid="4" grpId="0"/>
+    </p:bldLst>
+  </p:timing>
+</p:sld>
+</file>
+
+<file path=ppt/slides/slide3.xml><?xml version="1.0" encoding="utf-8"?>
+<p:sld xmlns:a="http://schemas.openxmlformats.org/drawingml/2006/main" xmlns:r="http://schemas.openxmlformats.org/officeDocument/2006/relationships" xmlns:p="http://schemas.openxmlformats.org/presentationml/2006/main">
+  <p:cSld name="Slide 3">
+    <p:bg>
+      <p:bgPr>
+        <a:blipFill dpi="0" rotWithShape="1">
+          <a:blip r:embed="rId1">
+            <a:lum/>
+          </a:blip>
+          <a:srcRect/>
+          <a:stretch>
+            <a:fillRect/>
+          </a:stretch>
+        </a:blipFill>
+        <a:effectLst/>
+      </p:bgPr>
+    </p:bg>
+    <p:spTree>
+      <p:nvGrpSpPr>
+        <p:cNvPr id="1" name=""/>
+        <p:cNvGrpSpPr/>
+        <p:nvPr/>
+      </p:nvGrpSpPr>
+      <p:grpSpPr>
+        <a:xfrm>
+          <a:off x="0" y="0"/>
+          <a:ext cx="0" cy="0"/>
+          <a:chOff x="0" y="0"/>
+          <a:chExt cx="0" cy="0"/>
+        </a:xfrm>
+      </p:grpSpPr>
+      <p:sp>
+        <p:nvSpPr>
+          <p:cNvPr id="2" name="Text 0"/>
+          <p:cNvSpPr/>
+          <p:nvPr/>
+        </p:nvSpPr>
+        <p:spPr>
+          <a:xfrm>
+            <a:off x="0" y="2834640"/>
+            <a:ext cx="12188952" cy="1188720"/>
+          </a:xfrm>
+          <a:prstGeom prst="rect">
+            <a:avLst/>
+          </a:prstGeom>
+          <a:noFill/>
+          <a:ln/>
+        </p:spPr>
+        <p:txBody>
+          <a:bodyPr wrap="square" lIns="0" tIns="0" rIns="0" bIns="0" rtlCol="0" anchor="ctr"/>
+          <a:lstStyle/>
+          <a:p>
+            <a:pPr algn="ctr" indent="0" marL="0">
+              <a:buNone/>
+            </a:pPr>
+            <a:r>
+              <a:rPr lang="en-US" sz="5200" b="1" spc="400" kern="0" dirty="0">
+                <a:solidFill>
+                  <a:srgbClr val="D8C7A8"/>
+                </a:solidFill>
+                <a:latin typeface="宋体" pitchFamily="34" charset="0"/>
+                <a:ea typeface="宋体" pitchFamily="34" charset="-122"/>
+                <a:cs typeface="宋体" pitchFamily="34" charset="-120"/>
+              </a:rPr>
+              <a:t>让家，有自己的天气。</a:t>
+            </a:r>
+            <a:endParaRPr lang="en-US" sz="5200" dirty="0"/>
+          </a:p>
+        </p:txBody>
+      </p:sp>
+      <p:sp>
+        <p:nvSpPr>
+          <p:cNvPr id="3" name="Text 1"/>
+          <p:cNvSpPr/>
+          <p:nvPr/>
+        </p:nvSpPr>
+        <p:spPr>
+          <a:xfrm>
+            <a:off x="10634472" y="6291072"/>
+            <a:ext cx="731520" cy="274320"/>
+          </a:xfrm>
+          <a:prstGeom prst="rect">
+            <a:avLst/>
+          </a:prstGeom>
+          <a:noFill/>
+          <a:ln/>
+        </p:spPr>
+        <p:txBody>
+          <a:bodyPr wrap="square" lIns="0" tIns="0" rIns="0" bIns="0" rtlCol="0" anchor="ctr"/>
+          <a:lstStyle/>
+          <a:p>
+            <a:pPr algn="r" indent="0" marL="0">
+              <a:buNone/>
+            </a:pPr>
+            <a:r>
+              <a:rPr lang="en-US" sz="1200" dirty="0">
+                <a:solidFill>
+                  <a:srgbClr val="9A8F80"/>
+                </a:solidFill>
+                <a:latin typeface="微软雅黑" pitchFamily="34" charset="0"/>
+                <a:ea typeface="微软雅黑" pitchFamily="34" charset="-122"/>
+                <a:cs typeface="微软雅黑" pitchFamily="34" charset="-120"/>
+              </a:rPr>
+              <a:t>3</a:t>
+            </a:r>
+            <a:endParaRPr lang="en-US" sz="1200" dirty="0"/>
+          </a:p>
+        </p:txBody>
+      </p:sp>
+    </p:spTree>
+  </p:cSld>
+  <p:clrMapOvr>
+    <a:masterClrMapping/>
+  </p:clrMapOvr>
+  <p:transition spd="slow">
+    <p:fade/>
+  </p:transition>
+  <p:timing>
+    <p:tnLst>
+      <p:par>
+        <p:cTn id="1" dur="indefinite" restart="never" nodeType="tmRoot">
+          <p:childTnLst>
+            <p:seq concurrent="1" nextAc="seek">
+              <p:cTn id="2" dur="indefinite" nodeType="mainSeq">
+                <p:childTnLst>
+                  <p:par>
+                    <p:cTn id="3" fill="hold">
+                      <p:stCondLst>
+                        <p:cond delay="indefinite"/>
+                        <p:cond evt="onBegin" delay="0">
+                          <p:tn val="2"/>
+                        </p:cond>
+                      </p:stCondLst>
+                      <p:childTnLst>
+                        <p:par>
+                          <p:cTn id="4" fill="hold">
+                            <p:stCondLst>
+                              <p:cond delay="0"/>
+                            </p:stCondLst>
+                            <p:childTnLst>
+                              <p:par>
+                                <p:cTn presetID="23" presetClass="entr" presetSubtype="16" fill="hold" grpId="0" nodeType="afterEffect">
+                                  <p:stCondLst>
+                                    <p:cond delay="0"/>
+                                  </p:stCondLst>
+                                  <p:childTnLst>
+                                    <p:set>
+                                      <p:cBhvr>
+                                        <p:cTn id="5" dur="1" fill="hold">
+                                          <p:stCondLst>
+                                            <p:cond delay="0"/>
+                                          </p:stCondLst>
+                                        </p:cTn>
+                                        <p:tgtEl>
+                                          <p:spTgt spid="2"/>
+                                        </p:tgtEl>
+                                        <p:attrNameLst>
+                                          <p:attrName>style.visibility</p:attrName>
+                                        </p:attrNameLst>
+                                      </p:cBhvr>
+                                      <p:to>
+                                        <p:strVal val="visible"/>
+                                      </p:to>
+                                    </p:set>
+                                    <p:animEffect transition="in" filter="fade">
+                                      <p:cBhvr>
+                                        <p:cTn id="6" dur="790"/>
+                                        <p:tgtEl>
+                                          <p:spTgt spid="2"/>
+                                        </p:tgtEl>
+                                      </p:cBhvr>
+                                    </p:animEffect>
+                                    <p:animScale>
+                                      <p:cBhvr>
+                                        <p:cTn id="7" dur="790"/>
+                                        <p:tgtEl>
+                                          <p:spTgt spid="2"/>
+                                        </p:tgtEl>
+                                      </p:cBhvr>
+                                      <p:from x="55000" y="55000"/>
+                                      <p:to x="100000" y="100000"/>
+                                    </p:animScale>
+                                  </p:childTnLst>
+                                </p:cTn>
+                              </p:par>
+                            </p:childTnLst>
+                          </p:cTn>
+                        </p:par>
+                      </p:childTnLst>
+                    </p:cTn>
+                  </p:par>
+                </p:childTnLst>
+              </p:cTn>
+              <p:prevCondLst>
+                <p:cond evt="onPrev" delay="0">
+                  <p:tgtEl>
+                    <p:sldTgt/>
+                  </p:tgtEl>
+                </p:cond>
+              </p:prevCondLst>
+              <p:nextCondLst>
+                <p:cond evt="onNext" delay="0">
+                  <p:tgtEl>
+                    <p:sldTgt/>
+                  </p:tgtEl>
+                </p:cond>
+              </p:nextCondLst>
+            </p:seq>
+          </p:childTnLst>
+        </p:cTn>
+      </p:par>
+    </p:tnLst>
+    <p:bldLst>
+      <p:bldP spid="2" grpId="0"/>
+    </p:bldLst>
+  </p:timing>
+</p:sld>
+</file>
+
 <file path=ppt/slides/slide4.xml><?xml version="1.0" encoding="utf-8"?>
 <p:sld xmlns:a="http://schemas.openxmlformats.org/drawingml/2006/main" xmlns:r="http://schemas.openxmlformats.org/officeDocument/2006/relationships" xmlns:p="http://schemas.openxmlformats.org/presentationml/2006/main">
   <p:cSld name="Slide 4">
@@ -3043,6 +3044,10 @@
             <a:prstDash val="solid"/>
           </a:ln>
         </p:spPr>
+        <p:txBody>
+          <a:bodyPr/>
+          <a:p/>
+        </p:txBody>
       </p:sp>
       <p:sp>
         <p:nvSpPr>
@@ -3144,6 +3149,10 @@
             <a:prstDash val="solid"/>
           </a:ln>
         </p:spPr>
+        <p:txBody>
+          <a:bodyPr/>
+          <a:p/>
+        </p:txBody>
       </p:sp>
       <p:sp>
         <p:nvSpPr>
@@ -3281,7 +3290,10 @@
                   <p:par>
                     <p:cTn id="3" fill="hold">
                       <p:stCondLst>
-                        <p:cond delay="0"/>
+                        <p:cond delay="indefinite"/>
+                        <p:cond evt="onBegin" delay="0">
+                          <p:tn val="2"/>
+                        </p:cond>
                       </p:stCondLst>
                       <p:childTnLst>
                         <p:par>
@@ -3291,7 +3303,7 @@
                             </p:stCondLst>
                             <p:childTnLst>
                               <p:par>
-                                <p:cTn presetID="10" presetClass="entr" presetSubtype="0" fill="hold" grpId="0" nodeType="afterEffect">
+                                <p:cTn presetID="23" presetClass="entr" presetSubtype="16" fill="hold" grpId="0" nodeType="afterEffect">
                                   <p:stCondLst>
                                     <p:cond delay="0"/>
                                   </p:stCondLst>
@@ -3316,12 +3328,22 @@
                                     </p:set>
                                     <p:animEffect transition="in" filter="fade">
                                       <p:cBhvr>
-                                        <p:cTn id="6" dur="700"/>
+                                        <p:cTn id="6" dur="790"/>
                                         <p:tgtEl>
                                           <p:spTgt spid="2"/>
                                         </p:tgtEl>
                                       </p:cBhvr>
                                     </p:animEffect>
+                                    <p:animScale>
+                                      <p:cBhvr>
+                                        <p:cTn id="7" dur="790"/>
+                                        <p:tgtEl>
+                                          <p:spTgt spid="2"/>
+                                        </p:tgtEl>
+                                      </p:cBhvr>
+                                      <p:from x="55000" y="55000"/>
+                                      <p:to x="100000" y="100000"/>
+                                    </p:animScale>
                                   </p:childTnLst>
                                 </p:cTn>
                               </p:par>
@@ -3329,9 +3351,9 @@
                           </p:cTn>
                         </p:par>
                         <p:par>
-                          <p:cTn id="7" fill="hold">
+                          <p:cTn id="8" fill="hold">
                             <p:stCondLst>
-                              <p:cond delay="900"/>
+                              <p:cond delay="200"/>
                             </p:stCondLst>
                             <p:childTnLst>
                               <p:par>
@@ -3342,7 +3364,7 @@
                                   <p:childTnLst>
                                     <p:set>
                                       <p:cBhvr>
-                                        <p:cTn id="8" dur="1" fill="hold">
+                                        <p:cTn id="9" dur="1" fill="hold">
                                           <p:stCondLst>
                                             <p:cond delay="0"/>
                                           </p:stCondLst>
@@ -3360,7 +3382,7 @@
                                     </p:set>
                                     <p:animEffect transition="in" filter="fade">
                                       <p:cBhvr>
-                                        <p:cTn id="9" dur="700"/>
+                                        <p:cTn id="10" dur="650"/>
                                         <p:tgtEl>
                                           <p:spTgt spid="3"/>
                                         </p:tgtEl>
@@ -3373,9 +3395,63 @@
                           </p:cTn>
                         </p:par>
                         <p:par>
-                          <p:cTn id="10" fill="hold">
+                          <p:cTn id="11" fill="hold">
                             <p:stCondLst>
-                              <p:cond delay="2000"/>
+                              <p:cond delay="940"/>
+                            </p:stCondLst>
+                            <p:childTnLst>
+                              <p:par>
+                                <p:cTn presetID="23" presetClass="entr" presetSubtype="16" fill="hold" grpId="0" nodeType="afterEffect">
+                                  <p:stCondLst>
+                                    <p:cond delay="0"/>
+                                  </p:stCondLst>
+                                  <p:childTnLst>
+                                    <p:set>
+                                      <p:cBhvr>
+                                        <p:cTn id="12" dur="1" fill="hold">
+                                          <p:stCondLst>
+                                            <p:cond delay="0"/>
+                                          </p:stCondLst>
+                                        </p:cTn>
+                                        <p:tgtEl>
+                                          <p:spTgt spid="5"/>
+                                        </p:tgtEl>
+                                        <p:attrNameLst>
+                                          <p:attrName>style.visibility</p:attrName>
+                                        </p:attrNameLst>
+                                      </p:cBhvr>
+                                      <p:to>
+                                        <p:strVal val="visible"/>
+                                      </p:to>
+                                    </p:set>
+                                    <p:animEffect transition="in" filter="fade">
+                                      <p:cBhvr>
+                                        <p:cTn id="13" dur="790"/>
+                                        <p:tgtEl>
+                                          <p:spTgt spid="5"/>
+                                        </p:tgtEl>
+                                      </p:cBhvr>
+                                    </p:animEffect>
+                                    <p:animScale>
+                                      <p:cBhvr>
+                                        <p:cTn id="14" dur="790"/>
+                                        <p:tgtEl>
+                                          <p:spTgt spid="5"/>
+                                        </p:tgtEl>
+                                      </p:cBhvr>
+                                      <p:from x="55000" y="55000"/>
+                                      <p:to x="100000" y="100000"/>
+                                    </p:animScale>
+                                  </p:childTnLst>
+                                </p:cTn>
+                              </p:par>
+                            </p:childTnLst>
+                          </p:cTn>
+                        </p:par>
+                        <p:par>
+                          <p:cTn id="15" fill="hold">
+                            <p:stCondLst>
+                              <p:cond delay="1140"/>
                             </p:stCondLst>
                             <p:childTnLst>
                               <p:par>
@@ -3386,13 +3462,13 @@
                                   <p:childTnLst>
                                     <p:set>
                                       <p:cBhvr>
-                                        <p:cTn id="11" dur="1" fill="hold">
+                                        <p:cTn id="16" dur="1" fill="hold">
                                           <p:stCondLst>
                                             <p:cond delay="0"/>
                                           </p:stCondLst>
                                         </p:cTn>
                                         <p:tgtEl>
-                                          <p:spTgt spid="4"/>
+                                          <p:spTgt spid="6"/>
                                         </p:tgtEl>
                                         <p:attrNameLst>
                                           <p:attrName>style.visibility</p:attrName>
@@ -3404,9 +3480,9 @@
                                     </p:set>
                                     <p:animEffect transition="in" filter="fade">
                                       <p:cBhvr>
-                                        <p:cTn id="12" dur="700"/>
-                                        <p:tgtEl>
-                                          <p:spTgt spid="4"/>
+                                        <p:cTn id="17" dur="650"/>
+                                        <p:tgtEl>
+                                          <p:spTgt spid="6"/>
                                         </p:tgtEl>
                                       </p:cBhvr>
                                     </p:animEffect>
@@ -3417,9 +3493,63 @@
                           </p:cTn>
                         </p:par>
                         <p:par>
-                          <p:cTn id="13" fill="hold">
+                          <p:cTn id="18" fill="hold">
                             <p:stCondLst>
-                              <p:cond delay="3300"/>
+                              <p:cond delay="1880"/>
+                            </p:stCondLst>
+                            <p:childTnLst>
+                              <p:par>
+                                <p:cTn presetID="23" presetClass="entr" presetSubtype="16" fill="hold" grpId="0" nodeType="afterEffect">
+                                  <p:stCondLst>
+                                    <p:cond delay="0"/>
+                                  </p:stCondLst>
+                                  <p:childTnLst>
+                                    <p:set>
+                                      <p:cBhvr>
+                                        <p:cTn id="19" dur="1" fill="hold">
+                                          <p:stCondLst>
+                                            <p:cond delay="0"/>
+                                          </p:stCondLst>
+                                        </p:cTn>
+                                        <p:tgtEl>
+                                          <p:spTgt spid="8"/>
+                                        </p:tgtEl>
+                                        <p:attrNameLst>
+                                          <p:attrName>style.visibility</p:attrName>
+                                        </p:attrNameLst>
+                                      </p:cBhvr>
+                                      <p:to>
+                                        <p:strVal val="visible"/>
+                                      </p:to>
+                                    </p:set>
+                                    <p:animEffect transition="in" filter="fade">
+                                      <p:cBhvr>
+                                        <p:cTn id="20" dur="790"/>
+                                        <p:tgtEl>
+                                          <p:spTgt spid="8"/>
+                                        </p:tgtEl>
+                                      </p:cBhvr>
+                                    </p:animEffect>
+                                    <p:animScale>
+                                      <p:cBhvr>
+                                        <p:cTn id="21" dur="790"/>
+                                        <p:tgtEl>
+                                          <p:spTgt spid="8"/>
+                                        </p:tgtEl>
+                                      </p:cBhvr>
+                                      <p:from x="55000" y="55000"/>
+                                      <p:to x="100000" y="100000"/>
+                                    </p:animScale>
+                                  </p:childTnLst>
+                                </p:cTn>
+                              </p:par>
+                            </p:childTnLst>
+                          </p:cTn>
+                        </p:par>
+                        <p:par>
+                          <p:cTn id="22" fill="hold">
+                            <p:stCondLst>
+                              <p:cond delay="2080"/>
                             </p:stCondLst>
                             <p:childTnLst>
                               <p:par>
@@ -3430,13 +3560,13 @@
                                   <p:childTnLst>
                                     <p:set>
                                       <p:cBhvr>
-                                        <p:cTn id="14" dur="1" fill="hold">
+                                        <p:cTn id="23" dur="1" fill="hold">
                                           <p:stCondLst>
                                             <p:cond delay="0"/>
                                           </p:stCondLst>
                                         </p:cTn>
                                         <p:tgtEl>
-                                          <p:spTgt spid="5"/>
+                                          <p:spTgt spid="9"/>
                                         </p:tgtEl>
                                         <p:attrNameLst>
                                           <p:attrName>style.visibility</p:attrName>
@@ -3448,229 +3578,9 @@
                                     </p:set>
                                     <p:animEffect transition="in" filter="fade">
                                       <p:cBhvr>
-                                        <p:cTn id="15" dur="700"/>
-                                        <p:tgtEl>
-                                          <p:spTgt spid="5"/>
-                                        </p:tgtEl>
-                                      </p:cBhvr>
-                                    </p:animEffect>
-                                  </p:childTnLst>
-                                </p:cTn>
-                              </p:par>
-                            </p:childTnLst>
-                          </p:cTn>
-                        </p:par>
-                        <p:par>
-                          <p:cTn id="16" fill="hold">
-                            <p:stCondLst>
-                              <p:cond delay="4800"/>
-                            </p:stCondLst>
-                            <p:childTnLst>
-                              <p:par>
-                                <p:cTn presetID="10" presetClass="entr" presetSubtype="0" fill="hold" grpId="0" nodeType="afterEffect">
-                                  <p:stCondLst>
-                                    <p:cond delay="0"/>
-                                  </p:stCondLst>
-                                  <p:childTnLst>
-                                    <p:set>
-                                      <p:cBhvr>
-                                        <p:cTn id="17" dur="1" fill="hold">
-                                          <p:stCondLst>
-                                            <p:cond delay="0"/>
-                                          </p:stCondLst>
-                                        </p:cTn>
-                                        <p:tgtEl>
-                                          <p:spTgt spid="6"/>
-                                        </p:tgtEl>
-                                        <p:attrNameLst>
-                                          <p:attrName>style.visibility</p:attrName>
-                                        </p:attrNameLst>
-                                      </p:cBhvr>
-                                      <p:to>
-                                        <p:strVal val="visible"/>
-                                      </p:to>
-                                    </p:set>
-                                    <p:animEffect transition="in" filter="fade">
-                                      <p:cBhvr>
-                                        <p:cTn id="18" dur="700"/>
-                                        <p:tgtEl>
-                                          <p:spTgt spid="6"/>
-                                        </p:tgtEl>
-                                      </p:cBhvr>
-                                    </p:animEffect>
-                                  </p:childTnLst>
-                                </p:cTn>
-                              </p:par>
-                            </p:childTnLst>
-                          </p:cTn>
-                        </p:par>
-                        <p:par>
-                          <p:cTn id="19" fill="hold">
-                            <p:stCondLst>
-                              <p:cond delay="6500"/>
-                            </p:stCondLst>
-                            <p:childTnLst>
-                              <p:par>
-                                <p:cTn presetID="10" presetClass="entr" presetSubtype="0" fill="hold" grpId="0" nodeType="afterEffect">
-                                  <p:stCondLst>
-                                    <p:cond delay="0"/>
-                                  </p:stCondLst>
-                                  <p:childTnLst>
-                                    <p:set>
-                                      <p:cBhvr>
-                                        <p:cTn id="20" dur="1" fill="hold">
-                                          <p:stCondLst>
-                                            <p:cond delay="0"/>
-                                          </p:stCondLst>
-                                        </p:cTn>
-                                        <p:tgtEl>
-                                          <p:spTgt spid="7"/>
-                                        </p:tgtEl>
-                                        <p:attrNameLst>
-                                          <p:attrName>style.visibility</p:attrName>
-                                        </p:attrNameLst>
-                                      </p:cBhvr>
-                                      <p:to>
-                                        <p:strVal val="visible"/>
-                                      </p:to>
-                                    </p:set>
-                                    <p:animEffect transition="in" filter="fade">
-                                      <p:cBhvr>
-                                        <p:cTn id="21" dur="700"/>
-                                        <p:tgtEl>
-                                          <p:spTgt spid="7"/>
-                                        </p:tgtEl>
-                                      </p:cBhvr>
-                                    </p:animEffect>
-                                  </p:childTnLst>
-                                </p:cTn>
-                              </p:par>
-                            </p:childTnLst>
-                          </p:cTn>
-                        </p:par>
-                        <p:par>
-                          <p:cTn id="22" fill="hold">
-                            <p:stCondLst>
-                              <p:cond delay="8400"/>
-                            </p:stCondLst>
-                            <p:childTnLst>
-                              <p:par>
-                                <p:cTn presetID="10" presetClass="entr" presetSubtype="0" fill="hold" grpId="0" nodeType="afterEffect">
-                                  <p:stCondLst>
-                                    <p:cond delay="0"/>
-                                  </p:stCondLst>
-                                  <p:childTnLst>
-                                    <p:set>
-                                      <p:cBhvr>
-                                        <p:cTn id="23" dur="1" fill="hold">
-                                          <p:stCondLst>
-                                            <p:cond delay="0"/>
-                                          </p:stCondLst>
-                                        </p:cTn>
-                                        <p:tgtEl>
-                                          <p:spTgt spid="8"/>
-                                        </p:tgtEl>
-                                        <p:attrNameLst>
-                                          <p:attrName>style.visibility</p:attrName>
-                                        </p:attrNameLst>
-                                      </p:cBhvr>
-                                      <p:to>
-                                        <p:strVal val="visible"/>
-                                      </p:to>
-                                    </p:set>
-                                    <p:animEffect transition="in" filter="fade">
-                                      <p:cBhvr>
-                                        <p:cTn id="24" dur="700"/>
-                                        <p:tgtEl>
-                                          <p:spTgt spid="8"/>
-                                        </p:tgtEl>
-                                      </p:cBhvr>
-                                    </p:animEffect>
-                                  </p:childTnLst>
-                                </p:cTn>
-                              </p:par>
-                            </p:childTnLst>
-                          </p:cTn>
-                        </p:par>
-                        <p:par>
-                          <p:cTn id="25" fill="hold">
-                            <p:stCondLst>
-                              <p:cond delay="10500"/>
-                            </p:stCondLst>
-                            <p:childTnLst>
-                              <p:par>
-                                <p:cTn presetID="10" presetClass="entr" presetSubtype="0" fill="hold" grpId="0" nodeType="afterEffect">
-                                  <p:stCondLst>
-                                    <p:cond delay="0"/>
-                                  </p:stCondLst>
-                                  <p:childTnLst>
-                                    <p:set>
-                                      <p:cBhvr>
-                                        <p:cTn id="26" dur="1" fill="hold">
-                                          <p:stCondLst>
-                                            <p:cond delay="0"/>
-                                          </p:stCondLst>
-                                        </p:cTn>
+                                        <p:cTn id="24" dur="650"/>
                                         <p:tgtEl>
                                           <p:spTgt spid="9"/>
-                                        </p:tgtEl>
-                                        <p:attrNameLst>
-                                          <p:attrName>style.visibility</p:attrName>
-                                        </p:attrNameLst>
-                                      </p:cBhvr>
-                                      <p:to>
-                                        <p:strVal val="visible"/>
-                                      </p:to>
-                                    </p:set>
-                                    <p:animEffect transition="in" filter="fade">
-                                      <p:cBhvr>
-                                        <p:cTn id="27" dur="700"/>
-                                        <p:tgtEl>
-                                          <p:spTgt spid="9"/>
-                                        </p:tgtEl>
-                                      </p:cBhvr>
-                                    </p:animEffect>
-                                  </p:childTnLst>
-                                </p:cTn>
-                              </p:par>
-                            </p:childTnLst>
-                          </p:cTn>
-                        </p:par>
-                        <p:par>
-                          <p:cTn id="28" fill="hold">
-                            <p:stCondLst>
-                              <p:cond delay="12800"/>
-                            </p:stCondLst>
-                            <p:childTnLst>
-                              <p:par>
-                                <p:cTn presetID="10" presetClass="entr" presetSubtype="0" fill="hold" grpId="0" nodeType="afterEffect">
-                                  <p:stCondLst>
-                                    <p:cond delay="0"/>
-                                  </p:stCondLst>
-                                  <p:childTnLst>
-                                    <p:set>
-                                      <p:cBhvr>
-                                        <p:cTn id="29" dur="1" fill="hold">
-                                          <p:stCondLst>
-                                            <p:cond delay="0"/>
-                                          </p:stCondLst>
-                                        </p:cTn>
-                                        <p:tgtEl>
-                                          <p:spTgt spid="10"/>
-                                        </p:tgtEl>
-                                        <p:attrNameLst>
-                                          <p:attrName>style.visibility</p:attrName>
-                                        </p:attrNameLst>
-                                      </p:cBhvr>
-                                      <p:to>
-                                        <p:strVal val="visible"/>
-                                      </p:to>
-                                    </p:set>
-                                    <p:animEffect transition="in" filter="fade">
-                                      <p:cBhvr>
-                                        <p:cTn id="30" dur="700"/>
-                                        <p:tgtEl>
-                                          <p:spTgt spid="10"/>
                                         </p:tgtEl>
                                       </p:cBhvr>
                                     </p:animEffect>
@@ -3707,13 +3617,10 @@
     <p:bldLst>
       <p:bldP spid="2" grpId="0"/>
       <p:bldP spid="3" grpId="0"/>
-      <p:bldP spid="4" grpId="0"/>
       <p:bldP spid="5" grpId="0"/>
       <p:bldP spid="6" grpId="0"/>
-      <p:bldP spid="7" grpId="0"/>
       <p:bldP spid="8" grpId="0"/>
       <p:bldP spid="9" grpId="0"/>
-      <p:bldP spid="10" grpId="0"/>
     </p:bldLst>
   </p:timing>
 </p:sld>
@@ -3759,7 +3666,7 @@
         <p:spPr>
           <a:xfrm>
             <a:off x="822960" y="2468880"/>
-            <a:ext cx="3291840" cy="1188720"/>
+            <a:ext cx="3291840" cy="1234440"/>
           </a:xfrm>
           <a:prstGeom prst="rect">
             <a:avLst/>
@@ -3775,7 +3682,7 @@
               <a:buNone/>
             </a:pPr>
             <a:r>
-              <a:rPr lang="en-US" sz="6400" b="1" dirty="0">
+              <a:rPr lang="en-US" sz="6800" b="1" dirty="0">
                 <a:solidFill>
                   <a:srgbClr val="D8C7A8"/>
                 </a:solidFill>
@@ -3785,7 +3692,7 @@
               </a:rPr>
               <a:t>28dB</a:t>
             </a:r>
-            <a:endParaRPr lang="en-US" sz="6400" dirty="0"/>
+            <a:endParaRPr lang="en-US" sz="6800" dirty="0"/>
           </a:p>
         </p:txBody>
       </p:sp>
@@ -3837,7 +3744,7 @@
         <p:spPr>
           <a:xfrm>
             <a:off x="4434840" y="2468880"/>
-            <a:ext cx="3291840" cy="1188720"/>
+            <a:ext cx="3291840" cy="1234440"/>
           </a:xfrm>
           <a:prstGeom prst="rect">
             <a:avLst/>
@@ -3853,7 +3760,7 @@
               <a:buNone/>
             </a:pPr>
             <a:r>
-              <a:rPr lang="en-US" sz="6400" b="1" dirty="0">
+              <a:rPr lang="en-US" sz="6800" b="1" dirty="0">
                 <a:solidFill>
                   <a:srgbClr val="C96F4A"/>
                 </a:solidFill>
@@ -3863,7 +3770,7 @@
               </a:rPr>
               <a:t>60 天</a:t>
             </a:r>
-            <a:endParaRPr lang="en-US" sz="6400" dirty="0"/>
+            <a:endParaRPr lang="en-US" sz="6800" dirty="0"/>
           </a:p>
         </p:txBody>
       </p:sp>
@@ -3915,7 +3822,7 @@
         <p:spPr>
           <a:xfrm>
             <a:off x="8046720" y="2468880"/>
-            <a:ext cx="3291840" cy="1188720"/>
+            <a:ext cx="3291840" cy="1234440"/>
           </a:xfrm>
           <a:prstGeom prst="rect">
             <a:avLst/>
@@ -3931,7 +3838,7 @@
               <a:buNone/>
             </a:pPr>
             <a:r>
-              <a:rPr lang="en-US" sz="6400" b="1" dirty="0">
+              <a:rPr lang="en-US" sz="6800" b="1" dirty="0">
                 <a:solidFill>
                   <a:srgbClr val="D8C7A8"/>
                 </a:solidFill>
@@ -3941,7 +3848,7 @@
               </a:rPr>
               <a:t>24 种</a:t>
             </a:r>
-            <a:endParaRPr lang="en-US" sz="6400" dirty="0"/>
+            <a:endParaRPr lang="en-US" sz="6800" dirty="0"/>
           </a:p>
         </p:txBody>
       </p:sp>
@@ -4006,6 +3913,10 @@
             <a:prstDash val="solid"/>
           </a:ln>
         </p:spPr>
+        <p:txBody>
+          <a:bodyPr/>
+          <a:p/>
+        </p:txBody>
       </p:sp>
       <p:sp>
         <p:nvSpPr>
@@ -4065,7 +3976,10 @@
                   <p:par>
                     <p:cTn id="3" fill="hold">
                       <p:stCondLst>
-                        <p:cond delay="0"/>
+                        <p:cond delay="indefinite"/>
+                        <p:cond evt="onBegin" delay="0">
+                          <p:tn val="2"/>
+                        </p:cond>
                       </p:stCondLst>
                       <p:childTnLst>
                         <p:par>
@@ -4075,7 +3989,7 @@
                             </p:stCondLst>
                             <p:childTnLst>
                               <p:par>
-                                <p:cTn presetID="10" presetClass="entr" presetSubtype="0" fill="hold" grpId="0" nodeType="afterEffect">
+                                <p:cTn presetID="23" presetClass="entr" presetSubtype="16" fill="hold" grpId="0" nodeType="afterEffect">
                                   <p:stCondLst>
                                     <p:cond delay="0"/>
                                   </p:stCondLst>
@@ -4088,7 +4002,7 @@
                                           </p:stCondLst>
                                         </p:cTn>
                                         <p:tgtEl>
-                                          <p:spTgt spid="8"/>
+                                          <p:spTgt spid="2"/>
                                         </p:tgtEl>
                                         <p:attrNameLst>
                                           <p:attrName>style.visibility</p:attrName>
@@ -4100,12 +4014,22 @@
                                     </p:set>
                                     <p:animEffect transition="in" filter="fade">
                                       <p:cBhvr>
-                                        <p:cTn id="6" dur="800"/>
-                                        <p:tgtEl>
-                                          <p:spTgt spid="8"/>
+                                        <p:cTn id="6" dur="790"/>
+                                        <p:tgtEl>
+                                          <p:spTgt spid="2"/>
                                         </p:tgtEl>
                                       </p:cBhvr>
                                     </p:animEffect>
+                                    <p:animScale>
+                                      <p:cBhvr>
+                                        <p:cTn id="7" dur="790"/>
+                                        <p:tgtEl>
+                                          <p:spTgt spid="2"/>
+                                        </p:tgtEl>
+                                      </p:cBhvr>
+                                      <p:from x="55000" y="55000"/>
+                                      <p:to x="100000" y="100000"/>
+                                    </p:animScale>
                                   </p:childTnLst>
                                 </p:cTn>
                               </p:par>
@@ -4113,9 +4037,117 @@
                           </p:cTn>
                         </p:par>
                         <p:par>
-                          <p:cTn id="7" fill="hold">
+                          <p:cTn id="8" fill="hold">
                             <p:stCondLst>
-                              <p:cond delay="1050"/>
+                              <p:cond delay="200"/>
+                            </p:stCondLst>
+                            <p:childTnLst>
+                              <p:par>
+                                <p:cTn presetID="23" presetClass="entr" presetSubtype="16" fill="hold" grpId="0" nodeType="afterEffect">
+                                  <p:stCondLst>
+                                    <p:cond delay="0"/>
+                                  </p:stCondLst>
+                                  <p:childTnLst>
+                                    <p:set>
+                                      <p:cBhvr>
+                                        <p:cTn id="9" dur="1" fill="hold">
+                                          <p:stCondLst>
+                                            <p:cond delay="0"/>
+                                          </p:stCondLst>
+                                        </p:cTn>
+                                        <p:tgtEl>
+                                          <p:spTgt spid="4"/>
+                                        </p:tgtEl>
+                                        <p:attrNameLst>
+                                          <p:attrName>style.visibility</p:attrName>
+                                        </p:attrNameLst>
+                                      </p:cBhvr>
+                                      <p:to>
+                                        <p:strVal val="visible"/>
+                                      </p:to>
+                                    </p:set>
+                                    <p:animEffect transition="in" filter="fade">
+                                      <p:cBhvr>
+                                        <p:cTn id="10" dur="790"/>
+                                        <p:tgtEl>
+                                          <p:spTgt spid="4"/>
+                                        </p:tgtEl>
+                                      </p:cBhvr>
+                                    </p:animEffect>
+                                    <p:animScale>
+                                      <p:cBhvr>
+                                        <p:cTn id="11" dur="790"/>
+                                        <p:tgtEl>
+                                          <p:spTgt spid="4"/>
+                                        </p:tgtEl>
+                                      </p:cBhvr>
+                                      <p:from x="55000" y="55000"/>
+                                      <p:to x="100000" y="100000"/>
+                                    </p:animScale>
+                                  </p:childTnLst>
+                                </p:cTn>
+                              </p:par>
+                            </p:childTnLst>
+                          </p:cTn>
+                        </p:par>
+                        <p:par>
+                          <p:cTn id="12" fill="hold">
+                            <p:stCondLst>
+                              <p:cond delay="400"/>
+                            </p:stCondLst>
+                            <p:childTnLst>
+                              <p:par>
+                                <p:cTn presetID="23" presetClass="entr" presetSubtype="16" fill="hold" grpId="0" nodeType="afterEffect">
+                                  <p:stCondLst>
+                                    <p:cond delay="0"/>
+                                  </p:stCondLst>
+                                  <p:childTnLst>
+                                    <p:set>
+                                      <p:cBhvr>
+                                        <p:cTn id="13" dur="1" fill="hold">
+                                          <p:stCondLst>
+                                            <p:cond delay="0"/>
+                                          </p:stCondLst>
+                                        </p:cTn>
+                                        <p:tgtEl>
+                                          <p:spTgt spid="6"/>
+                                        </p:tgtEl>
+                                        <p:attrNameLst>
+                                          <p:attrName>style.visibility</p:attrName>
+                                        </p:attrNameLst>
+                                      </p:cBhvr>
+                                      <p:to>
+                                        <p:strVal val="visible"/>
+                                      </p:to>
+                                    </p:set>
+                                    <p:animEffect transition="in" filter="fade">
+                                      <p:cBhvr>
+                                        <p:cTn id="14" dur="790"/>
+                                        <p:tgtEl>
+                                          <p:spTgt spid="6"/>
+                                        </p:tgtEl>
+                                      </p:cBhvr>
+                                    </p:animEffect>
+                                    <p:animScale>
+                                      <p:cBhvr>
+                                        <p:cTn id="15" dur="790"/>
+                                        <p:tgtEl>
+                                          <p:spTgt spid="6"/>
+                                        </p:tgtEl>
+                                      </p:cBhvr>
+                                      <p:from x="55000" y="55000"/>
+                                      <p:to x="100000" y="100000"/>
+                                    </p:animScale>
+                                  </p:childTnLst>
+                                </p:cTn>
+                              </p:par>
+                            </p:childTnLst>
+                          </p:cTn>
+                        </p:par>
+                        <p:par>
+                          <p:cTn id="16" fill="hold">
+                            <p:stCondLst>
+                              <p:cond delay="1140"/>
                             </p:stCondLst>
                             <p:childTnLst>
                               <p:par>
@@ -4126,13 +4158,13 @@
                                   <p:childTnLst>
                                     <p:set>
                                       <p:cBhvr>
-                                        <p:cTn id="8" dur="1" fill="hold">
+                                        <p:cTn id="17" dur="1" fill="hold">
                                           <p:stCondLst>
                                             <p:cond delay="0"/>
                                           </p:stCondLst>
                                         </p:cTn>
                                         <p:tgtEl>
-                                          <p:spTgt spid="2"/>
+                                          <p:spTgt spid="3"/>
                                         </p:tgtEl>
                                         <p:attrNameLst>
                                           <p:attrName>style.visibility</p:attrName>
@@ -4144,139 +4176,7 @@
                                     </p:set>
                                     <p:animEffect transition="in" filter="fade">
                                       <p:cBhvr>
-                                        <p:cTn id="9" dur="800"/>
-                                        <p:tgtEl>
-                                          <p:spTgt spid="2"/>
-                                        </p:tgtEl>
-                                      </p:cBhvr>
-                                    </p:animEffect>
-                                  </p:childTnLst>
-                                </p:cTn>
-                              </p:par>
-                            </p:childTnLst>
-                          </p:cTn>
-                        </p:par>
-                        <p:par>
-                          <p:cTn id="10" fill="hold">
-                            <p:stCondLst>
-                              <p:cond delay="2350"/>
-                            </p:stCondLst>
-                            <p:childTnLst>
-                              <p:par>
-                                <p:cTn presetID="10" presetClass="entr" presetSubtype="0" fill="hold" grpId="0" nodeType="afterEffect">
-                                  <p:stCondLst>
-                                    <p:cond delay="0"/>
-                                  </p:stCondLst>
-                                  <p:childTnLst>
-                                    <p:set>
-                                      <p:cBhvr>
-                                        <p:cTn id="11" dur="1" fill="hold">
-                                          <p:stCondLst>
-                                            <p:cond delay="0"/>
-                                          </p:stCondLst>
-                                        </p:cTn>
-                                        <p:tgtEl>
-                                          <p:spTgt spid="4"/>
-                                        </p:tgtEl>
-                                        <p:attrNameLst>
-                                          <p:attrName>style.visibility</p:attrName>
-                                        </p:attrNameLst>
-                                      </p:cBhvr>
-                                      <p:to>
-                                        <p:strVal val="visible"/>
-                                      </p:to>
-                                    </p:set>
-                                    <p:animEffect transition="in" filter="fade">
-                                      <p:cBhvr>
-                                        <p:cTn id="12" dur="800"/>
-                                        <p:tgtEl>
-                                          <p:spTgt spid="4"/>
-                                        </p:tgtEl>
-                                      </p:cBhvr>
-                                    </p:animEffect>
-                                  </p:childTnLst>
-                                </p:cTn>
-                              </p:par>
-                            </p:childTnLst>
-                          </p:cTn>
-                        </p:par>
-                        <p:par>
-                          <p:cTn id="13" fill="hold">
-                            <p:stCondLst>
-                              <p:cond delay="3900"/>
-                            </p:stCondLst>
-                            <p:childTnLst>
-                              <p:par>
-                                <p:cTn presetID="10" presetClass="entr" presetSubtype="0" fill="hold" grpId="0" nodeType="afterEffect">
-                                  <p:stCondLst>
-                                    <p:cond delay="0"/>
-                                  </p:stCondLst>
-                                  <p:childTnLst>
-                                    <p:set>
-                                      <p:cBhvr>
-                                        <p:cTn id="14" dur="1" fill="hold">
-                                          <p:stCondLst>
-                                            <p:cond delay="0"/>
-                                          </p:stCondLst>
-                                        </p:cTn>
-                                        <p:tgtEl>
-                                          <p:spTgt spid="6"/>
-                                        </p:tgtEl>
-                                        <p:attrNameLst>
-                                          <p:attrName>style.visibility</p:attrName>
-                                        </p:attrNameLst>
-                                      </p:cBhvr>
-                                      <p:to>
-                                        <p:strVal val="visible"/>
-                                      </p:to>
-                                    </p:set>
-                                    <p:animEffect transition="in" filter="fade">
-                                      <p:cBhvr>
-                                        <p:cTn id="15" dur="800"/>
-                                        <p:tgtEl>
-                                          <p:spTgt spid="6"/>
-                                        </p:tgtEl>
-                                      </p:cBhvr>
-                                    </p:animEffect>
-                                  </p:childTnLst>
-                                </p:cTn>
-                              </p:par>
-                            </p:childTnLst>
-                          </p:cTn>
-                        </p:par>
-                        <p:par>
-                          <p:cTn id="16" fill="hold">
-                            <p:stCondLst>
-                              <p:cond delay="5700"/>
-                            </p:stCondLst>
-                            <p:childTnLst>
-                              <p:par>
-                                <p:cTn presetID="10" presetClass="entr" presetSubtype="0" fill="hold" grpId="0" nodeType="afterEffect">
-                                  <p:stCondLst>
-                                    <p:cond delay="0"/>
-                                  </p:stCondLst>
-                                  <p:childTnLst>
-                                    <p:set>
-                                      <p:cBhvr>
-                                        <p:cTn id="17" dur="1" fill="hold">
-                                          <p:stCondLst>
-                                            <p:cond delay="0"/>
-                                          </p:stCondLst>
-                                        </p:cTn>
-                                        <p:tgtEl>
-                                          <p:spTgt spid="3"/>
-                                        </p:tgtEl>
-                                        <p:attrNameLst>
-                                          <p:attrName>style.visibility</p:attrName>
-                                        </p:attrNameLst>
-                                      </p:cBhvr>
-                                      <p:to>
-                                        <p:strVal val="visible"/>
-                                      </p:to>
-                                    </p:set>
-                                    <p:animEffect transition="in" filter="fade">
-                                      <p:cBhvr>
-                                        <p:cTn id="18" dur="800"/>
+                                        <p:cTn id="18" dur="650"/>
                                         <p:tgtEl>
                                           <p:spTgt spid="3"/>
                                         </p:tgtEl>
@@ -4291,7 +4191,7 @@
                         <p:par>
                           <p:cTn id="19" fill="hold">
                             <p:stCondLst>
-                              <p:cond delay="7750"/>
+                              <p:cond delay="1340"/>
                             </p:stCondLst>
                             <p:childTnLst>
                               <p:par>
@@ -4320,7 +4220,7 @@
                                     </p:set>
                                     <p:animEffect transition="in" filter="fade">
                                       <p:cBhvr>
-                                        <p:cTn id="21" dur="800"/>
+                                        <p:cTn id="21" dur="650"/>
                                         <p:tgtEl>
                                           <p:spTgt spid="5"/>
                                         </p:tgtEl>
@@ -4335,7 +4235,7 @@
                         <p:par>
                           <p:cTn id="22" fill="hold">
                             <p:stCondLst>
-                              <p:cond delay="10050"/>
+                              <p:cond delay="1540"/>
                             </p:stCondLst>
                             <p:childTnLst>
                               <p:par>
@@ -4364,53 +4264,9 @@
                                     </p:set>
                                     <p:animEffect transition="in" filter="fade">
                                       <p:cBhvr>
-                                        <p:cTn id="24" dur="800"/>
+                                        <p:cTn id="24" dur="650"/>
                                         <p:tgtEl>
                                           <p:spTgt spid="7"/>
-                                        </p:tgtEl>
-                                      </p:cBhvr>
-                                    </p:animEffect>
-                                  </p:childTnLst>
-                                </p:cTn>
-                              </p:par>
-                            </p:childTnLst>
-                          </p:cTn>
-                        </p:par>
-                        <p:par>
-                          <p:cTn id="25" fill="hold">
-                            <p:stCondLst>
-                              <p:cond delay="12600"/>
-                            </p:stCondLst>
-                            <p:childTnLst>
-                              <p:par>
-                                <p:cTn presetID="10" presetClass="entr" presetSubtype="0" fill="hold" grpId="0" nodeType="afterEffect">
-                                  <p:stCondLst>
-                                    <p:cond delay="0"/>
-                                  </p:stCondLst>
-                                  <p:childTnLst>
-                                    <p:set>
-                                      <p:cBhvr>
-                                        <p:cTn id="26" dur="1" fill="hold">
-                                          <p:stCondLst>
-                                            <p:cond delay="0"/>
-                                          </p:stCondLst>
-                                        </p:cTn>
-                                        <p:tgtEl>
-                                          <p:spTgt spid="9"/>
-                                        </p:tgtEl>
-                                        <p:attrNameLst>
-                                          <p:attrName>style.visibility</p:attrName>
-                                        </p:attrNameLst>
-                                      </p:cBhvr>
-                                      <p:to>
-                                        <p:strVal val="visible"/>
-                                      </p:to>
-                                    </p:set>
-                                    <p:animEffect transition="in" filter="fade">
-                                      <p:cBhvr>
-                                        <p:cTn id="27" dur="800"/>
-                                        <p:tgtEl>
-                                          <p:spTgt spid="9"/>
                                         </p:tgtEl>
                                       </p:cBhvr>
                                     </p:animEffect>
@@ -4445,14 +4301,12 @@
       </p:par>
     </p:tnLst>
     <p:bldLst>
-      <p:bldP spid="8" grpId="0"/>
       <p:bldP spid="2" grpId="0"/>
       <p:bldP spid="4" grpId="0"/>
       <p:bldP spid="6" grpId="0"/>
       <p:bldP spid="3" grpId="0"/>
       <p:bldP spid="5" grpId="0"/>
       <p:bldP spid="7" grpId="0"/>
-      <p:bldP spid="9" grpId="0"/>
     </p:bldLst>
   </p:timing>
 </p:sld>
@@ -4518,9 +4372,9 @@
                 <a:solidFill>
                   <a:srgbClr val="D8C7A8"/>
                 </a:solidFill>
-                <a:latin typeface="微软雅黑" pitchFamily="34" charset="0"/>
-                <a:ea typeface="微软雅黑" pitchFamily="34" charset="-122"/>
-                <a:cs typeface="微软雅黑" pitchFamily="34" charset="-120"/>
+                <a:latin typeface="宋体" pitchFamily="34" charset="0"/>
+                <a:ea typeface="宋体" pitchFamily="34" charset="-122"/>
+                <a:cs typeface="宋体" pitchFamily="34" charset="-120"/>
               </a:rPr>
               <a:t>24</a:t>
             </a:r>
@@ -4667,6 +4521,10 @@
             <a:prstDash val="solid"/>
           </a:ln>
         </p:spPr>
+        <p:txBody>
+          <a:bodyPr/>
+          <a:p/>
+        </p:txBody>
       </p:sp>
       <p:sp>
         <p:nvSpPr>
@@ -4768,6 +4626,10 @@
             <a:prstDash val="solid"/>
           </a:ln>
         </p:spPr>
+        <p:txBody>
+          <a:bodyPr/>
+          <a:p/>
+        </p:txBody>
       </p:sp>
       <p:sp>
         <p:nvSpPr>
@@ -4869,6 +4731,10 @@
             <a:prstDash val="solid"/>
           </a:ln>
         </p:spPr>
+        <p:txBody>
+          <a:bodyPr/>
+          <a:p/>
+        </p:txBody>
       </p:sp>
       <p:sp>
         <p:nvSpPr>
@@ -4970,6 +4836,10 @@
             <a:prstDash val="solid"/>
           </a:ln>
         </p:spPr>
+        <p:txBody>
+          <a:bodyPr/>
+          <a:p/>
+        </p:txBody>
       </p:sp>
       <p:sp>
         <p:nvSpPr>
@@ -5185,7 +5055,10 @@
                   <p:par>
                     <p:cTn id="3" fill="hold">
                       <p:stCondLst>
-                        <p:cond delay="0"/>
+                        <p:cond delay="indefinite"/>
+                        <p:cond evt="onBegin" delay="0">
+                          <p:tn val="2"/>
+                        </p:cond>
                       </p:stCondLst>
                       <p:childTnLst>
                         <p:par>
@@ -5195,7 +5068,7 @@
                             </p:stCondLst>
                             <p:childTnLst>
                               <p:par>
-                                <p:cTn presetID="10" presetClass="entr" presetSubtype="0" fill="hold" grpId="0" nodeType="afterEffect">
+                                <p:cTn presetID="23" presetClass="entr" presetSubtype="16" fill="hold" grpId="0" nodeType="afterEffect">
                                   <p:stCondLst>
                                     <p:cond delay="0"/>
                                   </p:stCondLst>
@@ -5220,12 +5093,22 @@
                                     </p:set>
                                     <p:animEffect transition="in" filter="fade">
                                       <p:cBhvr>
-                                        <p:cTn id="6" dur="700"/>
+                                        <p:cTn id="6" dur="790"/>
                                         <p:tgtEl>
                                           <p:spTgt spid="2"/>
                                         </p:tgtEl>
                                       </p:cBhvr>
                                     </p:animEffect>
+                                    <p:animScale>
+                                      <p:cBhvr>
+                                        <p:cTn id="7" dur="790"/>
+                                        <p:tgtEl>
+                                          <p:spTgt spid="2"/>
+                                        </p:tgtEl>
+                                      </p:cBhvr>
+                                      <p:from x="55000" y="55000"/>
+                                      <p:to x="100000" y="100000"/>
+                                    </p:animScale>
                                   </p:childTnLst>
                                 </p:cTn>
                               </p:par>
@@ -5233,9 +5116,9 @@
                           </p:cTn>
                         </p:par>
                         <p:par>
-                          <p:cTn id="7" fill="hold">
+                          <p:cTn id="8" fill="hold">
                             <p:stCondLst>
-                              <p:cond delay="880"/>
+                              <p:cond delay="99"/>
                             </p:stCondLst>
                             <p:childTnLst>
                               <p:par>
@@ -5246,7 +5129,7 @@
                                   <p:childTnLst>
                                     <p:set>
                                       <p:cBhvr>
-                                        <p:cTn id="8" dur="1" fill="hold">
+                                        <p:cTn id="9" dur="1" fill="hold">
                                           <p:stCondLst>
                                             <p:cond delay="0"/>
                                           </p:stCondLst>
@@ -5264,7 +5147,7 @@
                                     </p:set>
                                     <p:animEffect transition="in" filter="fade">
                                       <p:cBhvr>
-                                        <p:cTn id="9" dur="700"/>
+                                        <p:cTn id="10" dur="650"/>
                                         <p:tgtEl>
                                           <p:spTgt spid="4"/>
                                         </p:tgtEl>
@@ -5277,9 +5160,9 @@
                           </p:cTn>
                         </p:par>
                         <p:par>
-                          <p:cTn id="10" fill="hold">
+                          <p:cTn id="11" fill="hold">
                             <p:stCondLst>
-                              <p:cond delay="1940"/>
+                              <p:cond delay="198"/>
                             </p:stCondLst>
                             <p:childTnLst>
                               <p:par>
@@ -5290,7 +5173,7 @@
                                   <p:childTnLst>
                                     <p:set>
                                       <p:cBhvr>
-                                        <p:cTn id="11" dur="1" fill="hold">
+                                        <p:cTn id="12" dur="1" fill="hold">
                                           <p:stCondLst>
                                             <p:cond delay="0"/>
                                           </p:stCondLst>
@@ -5308,7 +5191,7 @@
                                     </p:set>
                                     <p:animEffect transition="in" filter="fade">
                                       <p:cBhvr>
-                                        <p:cTn id="12" dur="700"/>
+                                        <p:cTn id="13" dur="650"/>
                                         <p:tgtEl>
                                           <p:spTgt spid="7"/>
                                         </p:tgtEl>
@@ -5321,9 +5204,9 @@
                           </p:cTn>
                         </p:par>
                         <p:par>
-                          <p:cTn id="13" fill="hold">
+                          <p:cTn id="14" fill="hold">
                             <p:stCondLst>
-                              <p:cond delay="3180"/>
+                              <p:cond delay="892"/>
                             </p:stCondLst>
                             <p:childTnLst>
                               <p:par>
@@ -5334,7 +5217,7 @@
                                   <p:childTnLst>
                                     <p:set>
                                       <p:cBhvr>
-                                        <p:cTn id="14" dur="1" fill="hold">
+                                        <p:cTn id="15" dur="1" fill="hold">
                                           <p:stCondLst>
                                             <p:cond delay="0"/>
                                           </p:stCondLst>
@@ -5352,7 +5235,7 @@
                                     </p:set>
                                     <p:animEffect transition="in" filter="fade">
                                       <p:cBhvr>
-                                        <p:cTn id="15" dur="700"/>
+                                        <p:cTn id="16" dur="650"/>
                                         <p:tgtEl>
                                           <p:spTgt spid="5"/>
                                         </p:tgtEl>
@@ -5365,9 +5248,9 @@
                           </p:cTn>
                         </p:par>
                         <p:par>
-                          <p:cTn id="16" fill="hold">
+                          <p:cTn id="17" fill="hold">
                             <p:stCondLst>
-                              <p:cond delay="4600"/>
+                              <p:cond delay="991"/>
                             </p:stCondLst>
                             <p:childTnLst>
                               <p:par>
@@ -5378,7 +5261,7 @@
                                   <p:childTnLst>
                                     <p:set>
                                       <p:cBhvr>
-                                        <p:cTn id="17" dur="1" fill="hold">
+                                        <p:cTn id="18" dur="1" fill="hold">
                                           <p:stCondLst>
                                             <p:cond delay="0"/>
                                           </p:stCondLst>
@@ -5396,7 +5279,7 @@
                                     </p:set>
                                     <p:animEffect transition="in" filter="fade">
                                       <p:cBhvr>
-                                        <p:cTn id="18" dur="700"/>
+                                        <p:cTn id="19" dur="650"/>
                                         <p:tgtEl>
                                           <p:spTgt spid="8"/>
                                         </p:tgtEl>
@@ -5409,9 +5292,9 @@
                           </p:cTn>
                         </p:par>
                         <p:par>
-                          <p:cTn id="19" fill="hold">
+                          <p:cTn id="20" fill="hold">
                             <p:stCondLst>
-                              <p:cond delay="6200"/>
+                              <p:cond delay="1685"/>
                             </p:stCondLst>
                             <p:childTnLst>
                               <p:par>
@@ -5422,13 +5305,13 @@
                                   <p:childTnLst>
                                     <p:set>
                                       <p:cBhvr>
-                                        <p:cTn id="20" dur="1" fill="hold">
+                                        <p:cTn id="21" dur="1" fill="hold">
                                           <p:stCondLst>
                                             <p:cond delay="0"/>
                                           </p:stCondLst>
                                         </p:cTn>
                                         <p:tgtEl>
-                                          <p:spTgt spid="6"/>
+                                          <p:spTgt spid="10"/>
                                         </p:tgtEl>
                                         <p:attrNameLst>
                                           <p:attrName>style.visibility</p:attrName>
@@ -5440,9 +5323,9 @@
                                     </p:set>
                                     <p:animEffect transition="in" filter="fade">
                                       <p:cBhvr>
-                                        <p:cTn id="21" dur="700"/>
-                                        <p:tgtEl>
-                                          <p:spTgt spid="6"/>
+                                        <p:cTn id="22" dur="650"/>
+                                        <p:tgtEl>
+                                          <p:spTgt spid="10"/>
                                         </p:tgtEl>
                                       </p:cBhvr>
                                     </p:animEffect>
@@ -5453,9 +5336,9 @@
                           </p:cTn>
                         </p:par>
                         <p:par>
-                          <p:cTn id="22" fill="hold">
+                          <p:cTn id="23" fill="hold">
                             <p:stCondLst>
-                              <p:cond delay="7980"/>
+                              <p:cond delay="1784"/>
                             </p:stCondLst>
                             <p:childTnLst>
                               <p:par>
@@ -5466,13 +5349,13 @@
                                   <p:childTnLst>
                                     <p:set>
                                       <p:cBhvr>
-                                        <p:cTn id="23" dur="1" fill="hold">
+                                        <p:cTn id="24" dur="1" fill="hold">
                                           <p:stCondLst>
                                             <p:cond delay="0"/>
                                           </p:stCondLst>
                                         </p:cTn>
                                         <p:tgtEl>
-                                          <p:spTgt spid="9"/>
+                                          <p:spTgt spid="13"/>
                                         </p:tgtEl>
                                         <p:attrNameLst>
                                           <p:attrName>style.visibility</p:attrName>
@@ -5484,9 +5367,9 @@
                                     </p:set>
                                     <p:animEffect transition="in" filter="fade">
                                       <p:cBhvr>
-                                        <p:cTn id="24" dur="700"/>
-                                        <p:tgtEl>
-                                          <p:spTgt spid="9"/>
+                                        <p:cTn id="25" dur="650"/>
+                                        <p:tgtEl>
+                                          <p:spTgt spid="13"/>
                                         </p:tgtEl>
                                       </p:cBhvr>
                                     </p:animEffect>
@@ -5497,9 +5380,9 @@
                           </p:cTn>
                         </p:par>
                         <p:par>
-                          <p:cTn id="25" fill="hold">
+                          <p:cTn id="26" fill="hold">
                             <p:stCondLst>
-                              <p:cond delay="9940"/>
+                              <p:cond delay="2478"/>
                             </p:stCondLst>
                             <p:childTnLst>
                               <p:par>
@@ -5510,13 +5393,13 @@
                                   <p:childTnLst>
                                     <p:set>
                                       <p:cBhvr>
-                                        <p:cTn id="26" dur="1" fill="hold">
+                                        <p:cTn id="27" dur="1" fill="hold">
                                           <p:stCondLst>
                                             <p:cond delay="0"/>
                                           </p:stCondLst>
                                         </p:cTn>
                                         <p:tgtEl>
-                                          <p:spTgt spid="10"/>
+                                          <p:spTgt spid="3"/>
                                         </p:tgtEl>
                                         <p:attrNameLst>
                                           <p:attrName>style.visibility</p:attrName>
@@ -5528,9 +5411,9 @@
                                     </p:set>
                                     <p:animEffect transition="in" filter="fade">
                                       <p:cBhvr>
-                                        <p:cTn id="27" dur="700"/>
-                                        <p:tgtEl>
-                                          <p:spTgt spid="10"/>
+                                        <p:cTn id="28" dur="650"/>
+                                        <p:tgtEl>
+                                          <p:spTgt spid="3"/>
                                         </p:tgtEl>
                                       </p:cBhvr>
                                     </p:animEffect>
@@ -5541,9 +5424,9 @@
                           </p:cTn>
                         </p:par>
                         <p:par>
-                          <p:cTn id="28" fill="hold">
+                          <p:cTn id="29" fill="hold">
                             <p:stCondLst>
-                              <p:cond delay="12080"/>
+                              <p:cond delay="2577"/>
                             </p:stCondLst>
                             <p:childTnLst>
                               <p:par>
@@ -5554,13 +5437,13 @@
                                   <p:childTnLst>
                                     <p:set>
                                       <p:cBhvr>
-                                        <p:cTn id="29" dur="1" fill="hold">
+                                        <p:cTn id="30" dur="1" fill="hold">
                                           <p:stCondLst>
                                             <p:cond delay="0"/>
                                           </p:stCondLst>
                                         </p:cTn>
                                         <p:tgtEl>
-                                          <p:spTgt spid="13"/>
+                                          <p:spTgt spid="11"/>
                                         </p:tgtEl>
                                         <p:attrNameLst>
                                           <p:attrName>style.visibility</p:attrName>
@@ -5572,9 +5455,9 @@
                                     </p:set>
                                     <p:animEffect transition="in" filter="fade">
                                       <p:cBhvr>
-                                        <p:cTn id="30" dur="700"/>
-                                        <p:tgtEl>
-                                          <p:spTgt spid="13"/>
+                                        <p:cTn id="31" dur="650"/>
+                                        <p:tgtEl>
+                                          <p:spTgt spid="11"/>
                                         </p:tgtEl>
                                       </p:cBhvr>
                                     </p:animEffect>
@@ -5585,9 +5468,9 @@
                           </p:cTn>
                         </p:par>
                         <p:par>
-                          <p:cTn id="31" fill="hold">
+                          <p:cTn id="32" fill="hold">
                             <p:stCondLst>
-                              <p:cond delay="14400"/>
+                              <p:cond delay="2676"/>
                             </p:stCondLst>
                             <p:childTnLst>
                               <p:par>
@@ -5598,13 +5481,13 @@
                                   <p:childTnLst>
                                     <p:set>
                                       <p:cBhvr>
-                                        <p:cTn id="32" dur="1" fill="hold">
+                                        <p:cTn id="33" dur="1" fill="hold">
                                           <p:stCondLst>
                                             <p:cond delay="0"/>
                                           </p:stCondLst>
                                         </p:cTn>
                                         <p:tgtEl>
-                                          <p:spTgt spid="11"/>
+                                          <p:spTgt spid="14"/>
                                         </p:tgtEl>
                                         <p:attrNameLst>
                                           <p:attrName>style.visibility</p:attrName>
@@ -5616,9 +5499,9 @@
                                     </p:set>
                                     <p:animEffect transition="in" filter="fade">
                                       <p:cBhvr>
-                                        <p:cTn id="33" dur="700"/>
-                                        <p:tgtEl>
-                                          <p:spTgt spid="11"/>
+                                        <p:cTn id="34" dur="650"/>
+                                        <p:tgtEl>
+                                          <p:spTgt spid="14"/>
                                         </p:tgtEl>
                                       </p:cBhvr>
                                     </p:animEffect>
@@ -5629,9 +5512,9 @@
                           </p:cTn>
                         </p:par>
                         <p:par>
-                          <p:cTn id="34" fill="hold">
+                          <p:cTn id="35" fill="hold">
                             <p:stCondLst>
-                              <p:cond delay="16900"/>
+                              <p:cond delay="3370"/>
                             </p:stCondLst>
                             <p:childTnLst>
                               <p:par>
@@ -5642,13 +5525,13 @@
                                   <p:childTnLst>
                                     <p:set>
                                       <p:cBhvr>
-                                        <p:cTn id="35" dur="1" fill="hold">
+                                        <p:cTn id="36" dur="1" fill="hold">
                                           <p:stCondLst>
                                             <p:cond delay="0"/>
                                           </p:stCondLst>
                                         </p:cTn>
                                         <p:tgtEl>
-                                          <p:spTgt spid="14"/>
+                                          <p:spTgt spid="16"/>
                                         </p:tgtEl>
                                         <p:attrNameLst>
                                           <p:attrName>style.visibility</p:attrName>
@@ -5660,9 +5543,9 @@
                                     </p:set>
                                     <p:animEffect transition="in" filter="fade">
                                       <p:cBhvr>
-                                        <p:cTn id="36" dur="700"/>
-                                        <p:tgtEl>
-                                          <p:spTgt spid="14"/>
+                                        <p:cTn id="37" dur="650"/>
+                                        <p:tgtEl>
+                                          <p:spTgt spid="16"/>
                                         </p:tgtEl>
                                       </p:cBhvr>
                                     </p:animEffect>
@@ -5673,9 +5556,9 @@
                           </p:cTn>
                         </p:par>
                         <p:par>
-                          <p:cTn id="37" fill="hold">
+                          <p:cTn id="38" fill="hold">
                             <p:stCondLst>
-                              <p:cond delay="19580"/>
+                              <p:cond delay="3469"/>
                             </p:stCondLst>
                             <p:childTnLst>
                               <p:par>
@@ -5686,13 +5569,13 @@
                                   <p:childTnLst>
                                     <p:set>
                                       <p:cBhvr>
-                                        <p:cTn id="38" dur="1" fill="hold">
+                                        <p:cTn id="39" dur="1" fill="hold">
                                           <p:stCondLst>
                                             <p:cond delay="0"/>
                                           </p:stCondLst>
                                         </p:cTn>
                                         <p:tgtEl>
-                                          <p:spTgt spid="3"/>
+                                          <p:spTgt spid="18"/>
                                         </p:tgtEl>
                                         <p:attrNameLst>
                                           <p:attrName>style.visibility</p:attrName>
@@ -5704,9 +5587,9 @@
                                     </p:set>
                                     <p:animEffect transition="in" filter="fade">
                                       <p:cBhvr>
-                                        <p:cTn id="39" dur="700"/>
-                                        <p:tgtEl>
-                                          <p:spTgt spid="3"/>
+                                        <p:cTn id="40" dur="650"/>
+                                        <p:tgtEl>
+                                          <p:spTgt spid="18"/>
                                         </p:tgtEl>
                                       </p:cBhvr>
                                     </p:animEffect>
@@ -5717,9 +5600,9 @@
                           </p:cTn>
                         </p:par>
                         <p:par>
-                          <p:cTn id="40" fill="hold">
+                          <p:cTn id="41" fill="hold">
                             <p:stCondLst>
-                              <p:cond delay="22440"/>
+                              <p:cond delay="4163"/>
                             </p:stCondLst>
                             <p:childTnLst>
                               <p:par>
@@ -5730,13 +5613,13 @@
                                   <p:childTnLst>
                                     <p:set>
                                       <p:cBhvr>
-                                        <p:cTn id="41" dur="1" fill="hold">
+                                        <p:cTn id="42" dur="1" fill="hold">
                                           <p:stCondLst>
                                             <p:cond delay="0"/>
                                           </p:stCondLst>
                                         </p:cTn>
                                         <p:tgtEl>
-                                          <p:spTgt spid="12"/>
+                                          <p:spTgt spid="17"/>
                                         </p:tgtEl>
                                         <p:attrNameLst>
                                           <p:attrName>style.visibility</p:attrName>
@@ -5748,9 +5631,9 @@
                                     </p:set>
                                     <p:animEffect transition="in" filter="fade">
                                       <p:cBhvr>
-                                        <p:cTn id="42" dur="700"/>
-                                        <p:tgtEl>
-                                          <p:spTgt spid="12"/>
+                                        <p:cTn id="43" dur="650"/>
+                                        <p:tgtEl>
+                                          <p:spTgt spid="17"/>
                                         </p:tgtEl>
                                       </p:cBhvr>
                                     </p:animEffect>
@@ -5761,9 +5644,9 @@
                           </p:cTn>
                         </p:par>
                         <p:par>
-                          <p:cTn id="43" fill="hold">
+                          <p:cTn id="44" fill="hold">
                             <p:stCondLst>
-                              <p:cond delay="25480"/>
+                              <p:cond delay="4262"/>
                             </p:stCondLst>
                             <p:childTnLst>
                               <p:par>
@@ -5774,13 +5657,13 @@
                                   <p:childTnLst>
                                     <p:set>
                                       <p:cBhvr>
-                                        <p:cTn id="44" dur="1" fill="hold">
+                                        <p:cTn id="45" dur="1" fill="hold">
                                           <p:stCondLst>
                                             <p:cond delay="0"/>
                                           </p:stCondLst>
                                         </p:cTn>
                                         <p:tgtEl>
-                                          <p:spTgt spid="15"/>
+                                          <p:spTgt spid="19"/>
                                         </p:tgtEl>
                                         <p:attrNameLst>
                                           <p:attrName>style.visibility</p:attrName>
@@ -5792,229 +5675,9 @@
                                     </p:set>
                                     <p:animEffect transition="in" filter="fade">
                                       <p:cBhvr>
-                                        <p:cTn id="45" dur="700"/>
-                                        <p:tgtEl>
-                                          <p:spTgt spid="15"/>
-                                        </p:tgtEl>
-                                      </p:cBhvr>
-                                    </p:animEffect>
-                                  </p:childTnLst>
-                                </p:cTn>
-                              </p:par>
-                            </p:childTnLst>
-                          </p:cTn>
-                        </p:par>
-                        <p:par>
-                          <p:cTn id="46" fill="hold">
-                            <p:stCondLst>
-                              <p:cond delay="28700"/>
-                            </p:stCondLst>
-                            <p:childTnLst>
-                              <p:par>
-                                <p:cTn presetID="10" presetClass="entr" presetSubtype="0" fill="hold" grpId="0" nodeType="afterEffect">
-                                  <p:stCondLst>
-                                    <p:cond delay="0"/>
-                                  </p:stCondLst>
-                                  <p:childTnLst>
-                                    <p:set>
-                                      <p:cBhvr>
-                                        <p:cTn id="47" dur="1" fill="hold">
-                                          <p:stCondLst>
-                                            <p:cond delay="0"/>
-                                          </p:stCondLst>
-                                        </p:cTn>
-                                        <p:tgtEl>
-                                          <p:spTgt spid="16"/>
-                                        </p:tgtEl>
-                                        <p:attrNameLst>
-                                          <p:attrName>style.visibility</p:attrName>
-                                        </p:attrNameLst>
-                                      </p:cBhvr>
-                                      <p:to>
-                                        <p:strVal val="visible"/>
-                                      </p:to>
-                                    </p:set>
-                                    <p:animEffect transition="in" filter="fade">
-                                      <p:cBhvr>
-                                        <p:cTn id="48" dur="700"/>
-                                        <p:tgtEl>
-                                          <p:spTgt spid="16"/>
-                                        </p:tgtEl>
-                                      </p:cBhvr>
-                                    </p:animEffect>
-                                  </p:childTnLst>
-                                </p:cTn>
-                              </p:par>
-                            </p:childTnLst>
-                          </p:cTn>
-                        </p:par>
-                        <p:par>
-                          <p:cTn id="49" fill="hold">
-                            <p:stCondLst>
-                              <p:cond delay="32100"/>
-                            </p:stCondLst>
-                            <p:childTnLst>
-                              <p:par>
-                                <p:cTn presetID="10" presetClass="entr" presetSubtype="0" fill="hold" grpId="0" nodeType="afterEffect">
-                                  <p:stCondLst>
-                                    <p:cond delay="0"/>
-                                  </p:stCondLst>
-                                  <p:childTnLst>
-                                    <p:set>
-                                      <p:cBhvr>
-                                        <p:cTn id="50" dur="1" fill="hold">
-                                          <p:stCondLst>
-                                            <p:cond delay="0"/>
-                                          </p:stCondLst>
-                                        </p:cTn>
-                                        <p:tgtEl>
-                                          <p:spTgt spid="18"/>
-                                        </p:tgtEl>
-                                        <p:attrNameLst>
-                                          <p:attrName>style.visibility</p:attrName>
-                                        </p:attrNameLst>
-                                      </p:cBhvr>
-                                      <p:to>
-                                        <p:strVal val="visible"/>
-                                      </p:to>
-                                    </p:set>
-                                    <p:animEffect transition="in" filter="fade">
-                                      <p:cBhvr>
-                                        <p:cTn id="51" dur="700"/>
-                                        <p:tgtEl>
-                                          <p:spTgt spid="18"/>
-                                        </p:tgtEl>
-                                      </p:cBhvr>
-                                    </p:animEffect>
-                                  </p:childTnLst>
-                                </p:cTn>
-                              </p:par>
-                            </p:childTnLst>
-                          </p:cTn>
-                        </p:par>
-                        <p:par>
-                          <p:cTn id="52" fill="hold">
-                            <p:stCondLst>
-                              <p:cond delay="35680"/>
-                            </p:stCondLst>
-                            <p:childTnLst>
-                              <p:par>
-                                <p:cTn presetID="10" presetClass="entr" presetSubtype="0" fill="hold" grpId="0" nodeType="afterEffect">
-                                  <p:stCondLst>
-                                    <p:cond delay="0"/>
-                                  </p:stCondLst>
-                                  <p:childTnLst>
-                                    <p:set>
-                                      <p:cBhvr>
-                                        <p:cTn id="53" dur="1" fill="hold">
-                                          <p:stCondLst>
-                                            <p:cond delay="0"/>
-                                          </p:stCondLst>
-                                        </p:cTn>
-                                        <p:tgtEl>
-                                          <p:spTgt spid="17"/>
-                                        </p:tgtEl>
-                                        <p:attrNameLst>
-                                          <p:attrName>style.visibility</p:attrName>
-                                        </p:attrNameLst>
-                                      </p:cBhvr>
-                                      <p:to>
-                                        <p:strVal val="visible"/>
-                                      </p:to>
-                                    </p:set>
-                                    <p:animEffect transition="in" filter="fade">
-                                      <p:cBhvr>
-                                        <p:cTn id="54" dur="700"/>
-                                        <p:tgtEl>
-                                          <p:spTgt spid="17"/>
-                                        </p:tgtEl>
-                                      </p:cBhvr>
-                                    </p:animEffect>
-                                  </p:childTnLst>
-                                </p:cTn>
-                              </p:par>
-                            </p:childTnLst>
-                          </p:cTn>
-                        </p:par>
-                        <p:par>
-                          <p:cTn id="55" fill="hold">
-                            <p:stCondLst>
-                              <p:cond delay="39440"/>
-                            </p:stCondLst>
-                            <p:childTnLst>
-                              <p:par>
-                                <p:cTn presetID="10" presetClass="entr" presetSubtype="0" fill="hold" grpId="0" nodeType="afterEffect">
-                                  <p:stCondLst>
-                                    <p:cond delay="0"/>
-                                  </p:stCondLst>
-                                  <p:childTnLst>
-                                    <p:set>
-                                      <p:cBhvr>
-                                        <p:cTn id="56" dur="1" fill="hold">
-                                          <p:stCondLst>
-                                            <p:cond delay="0"/>
-                                          </p:stCondLst>
-                                        </p:cTn>
+                                        <p:cTn id="46" dur="650"/>
                                         <p:tgtEl>
                                           <p:spTgt spid="19"/>
-                                        </p:tgtEl>
-                                        <p:attrNameLst>
-                                          <p:attrName>style.visibility</p:attrName>
-                                        </p:attrNameLst>
-                                      </p:cBhvr>
-                                      <p:to>
-                                        <p:strVal val="visible"/>
-                                      </p:to>
-                                    </p:set>
-                                    <p:animEffect transition="in" filter="fade">
-                                      <p:cBhvr>
-                                        <p:cTn id="57" dur="700"/>
-                                        <p:tgtEl>
-                                          <p:spTgt spid="19"/>
-                                        </p:tgtEl>
-                                      </p:cBhvr>
-                                    </p:animEffect>
-                                  </p:childTnLst>
-                                </p:cTn>
-                              </p:par>
-                            </p:childTnLst>
-                          </p:cTn>
-                        </p:par>
-                        <p:par>
-                          <p:cTn id="58" fill="hold">
-                            <p:stCondLst>
-                              <p:cond delay="43380"/>
-                            </p:stCondLst>
-                            <p:childTnLst>
-                              <p:par>
-                                <p:cTn presetID="10" presetClass="entr" presetSubtype="0" fill="hold" grpId="0" nodeType="afterEffect">
-                                  <p:stCondLst>
-                                    <p:cond delay="0"/>
-                                  </p:stCondLst>
-                                  <p:childTnLst>
-                                    <p:set>
-                                      <p:cBhvr>
-                                        <p:cTn id="59" dur="1" fill="hold">
-                                          <p:stCondLst>
-                                            <p:cond delay="0"/>
-                                          </p:stCondLst>
-                                        </p:cTn>
-                                        <p:tgtEl>
-                                          <p:spTgt spid="20"/>
-                                        </p:tgtEl>
-                                        <p:attrNameLst>
-                                          <p:attrName>style.visibility</p:attrName>
-                                        </p:attrNameLst>
-                                      </p:cBhvr>
-                                      <p:to>
-                                        <p:strVal val="visible"/>
-                                      </p:to>
-                                    </p:set>
-                                    <p:animEffect transition="in" filter="fade">
-                                      <p:cBhvr>
-                                        <p:cTn id="60" dur="700"/>
-                                        <p:tgtEl>
-                                          <p:spTgt spid="20"/>
                                         </p:tgtEl>
                                       </p:cBhvr>
                                     </p:animEffect>
@@ -6054,20 +5717,15 @@
       <p:bldP spid="7" grpId="0"/>
       <p:bldP spid="5" grpId="0"/>
       <p:bldP spid="8" grpId="0"/>
-      <p:bldP spid="6" grpId="0"/>
-      <p:bldP spid="9" grpId="0"/>
       <p:bldP spid="10" grpId="0"/>
       <p:bldP spid="13" grpId="0"/>
+      <p:bldP spid="3" grpId="0"/>
       <p:bldP spid="11" grpId="0"/>
       <p:bldP spid="14" grpId="0"/>
-      <p:bldP spid="3" grpId="0"/>
-      <p:bldP spid="12" grpId="0"/>
-      <p:bldP spid="15" grpId="0"/>
       <p:bldP spid="16" grpId="0"/>
       <p:bldP spid="18" grpId="0"/>
       <p:bldP spid="17" grpId="0"/>
       <p:bldP spid="19" grpId="0"/>
-      <p:bldP spid="20" grpId="0"/>
     </p:bldLst>
   </p:timing>
 </p:sld>
@@ -6132,6 +5790,10 @@
             <a:prstDash val="solid"/>
           </a:ln>
         </p:spPr>
+        <p:txBody>
+          <a:bodyPr/>
+          <a:p/>
+        </p:txBody>
       </p:sp>
       <p:sp>
         <p:nvSpPr>
@@ -6206,8 +5868,8 @@
         </p:nvSpPr>
         <p:spPr>
           <a:xfrm>
-            <a:off x="0" y="3017520"/>
-            <a:ext cx="12188952" cy="1737360"/>
+            <a:off x="0" y="2880360"/>
+            <a:ext cx="12188952" cy="2148840"/>
           </a:xfrm>
           <a:prstGeom prst="rect">
             <a:avLst/>
@@ -6223,17 +5885,17 @@
               <a:buNone/>
             </a:pPr>
             <a:r>
-              <a:rPr lang="en-US" sz="11000" b="1" dirty="0">
+              <a:rPr lang="en-US" sz="12000" b="1" dirty="0">
                 <a:solidFill>
                   <a:srgbClr val="C96F4A"/>
                 </a:solidFill>
-                <a:latin typeface="微软雅黑" pitchFamily="34" charset="0"/>
-                <a:ea typeface="微软雅黑" pitchFamily="34" charset="-122"/>
-                <a:cs typeface="微软雅黑" pitchFamily="34" charset="-120"/>
+                <a:latin typeface="宋体" pitchFamily="34" charset="0"/>
+                <a:ea typeface="宋体" pitchFamily="34" charset="-122"/>
+                <a:cs typeface="宋体" pitchFamily="34" charset="-120"/>
               </a:rPr>
               <a:t>¥ 799</a:t>
             </a:r>
-            <a:endParaRPr lang="en-US" sz="11000" dirty="0"/>
+            <a:endParaRPr lang="en-US" sz="12000" dirty="0"/>
           </a:p>
         </p:txBody>
       </p:sp>
@@ -6357,7 +6019,10 @@
                   <p:par>
                     <p:cTn id="3" fill="hold">
                       <p:stCondLst>
-                        <p:cond delay="0"/>
+                        <p:cond delay="indefinite"/>
+                        <p:cond evt="onBegin" delay="0">
+                          <p:tn val="2"/>
+                        </p:cond>
                       </p:stCondLst>
                       <p:childTnLst>
                         <p:par>
@@ -6380,7 +6045,7 @@
                                           </p:stCondLst>
                                         </p:cTn>
                                         <p:tgtEl>
-                                          <p:spTgt spid="2"/>
+                                          <p:spTgt spid="3"/>
                                         </p:tgtEl>
                                         <p:attrNameLst>
                                           <p:attrName>style.visibility</p:attrName>
@@ -6392,9 +6057,9 @@
                                     </p:set>
                                     <p:animEffect transition="in" filter="fade">
                                       <p:cBhvr>
-                                        <p:cTn id="6" dur="900"/>
-                                        <p:tgtEl>
-                                          <p:spTgt spid="2"/>
+                                        <p:cTn id="6" dur="650"/>
+                                        <p:tgtEl>
+                                          <p:spTgt spid="3"/>
                                         </p:tgtEl>
                                       </p:cBhvr>
                                     </p:animEffect>
@@ -6407,7 +6072,7 @@
                         <p:par>
                           <p:cTn id="7" fill="hold">
                             <p:stCondLst>
-                              <p:cond delay="1150"/>
+                              <p:cond delay="200"/>
                             </p:stCondLst>
                             <p:childTnLst>
                               <p:par>
@@ -6436,7 +6101,7 @@
                                     </p:set>
                                     <p:animEffect transition="in" filter="fade">
                                       <p:cBhvr>
-                                        <p:cTn id="9" dur="900"/>
+                                        <p:cTn id="9" dur="790"/>
                                         <p:tgtEl>
                                           <p:spTgt spid="4"/>
                                         </p:tgtEl>
@@ -6451,7 +6116,61 @@
                         <p:par>
                           <p:cTn id="10" fill="hold">
                             <p:stCondLst>
-                              <p:cond delay="2550"/>
+                              <p:cond delay="940"/>
+                            </p:stCondLst>
+                            <p:childTnLst>
+                              <p:par>
+                                <p:cTn presetID="23" presetClass="entr" presetSubtype="16" fill="hold" grpId="0" nodeType="afterEffect">
+                                  <p:stCondLst>
+                                    <p:cond delay="0"/>
+                                  </p:stCondLst>
+                                  <p:childTnLst>
+                                    <p:set>
+                                      <p:cBhvr>
+                                        <p:cTn id="11" dur="1" fill="hold">
+                                          <p:stCondLst>
+                                            <p:cond delay="0"/>
+                                          </p:stCondLst>
+                                        </p:cTn>
+                                        <p:tgtEl>
+                                          <p:spTgt spid="5"/>
+                                        </p:tgtEl>
+                                        <p:attrNameLst>
+                                          <p:attrName>style.visibility</p:attrName>
+                                        </p:attrNameLst>
+                                      </p:cBhvr>
+                                      <p:to>
+                                        <p:strVal val="visible"/>
+                                      </p:to>
+                                    </p:set>
+                                    <p:animEffect transition="in" filter="fade">
+                                      <p:cBhvr>
+                                        <p:cTn id="12" dur="790"/>
+                                        <p:tgtEl>
+                                          <p:spTgt spid="5"/>
+                                        </p:tgtEl>
+                                      </p:cBhvr>
+                                    </p:animEffect>
+                                    <p:animScale>
+                                      <p:cBhvr>
+                                        <p:cTn id="13" dur="790"/>
+                                        <p:tgtEl>
+                                          <p:spTgt spid="5"/>
+                                        </p:tgtEl>
+                                      </p:cBhvr>
+                                      <p:from x="55000" y="55000"/>
+                                      <p:to x="100000" y="100000"/>
+                                    </p:animScale>
+                                  </p:childTnLst>
+                                </p:cTn>
+                              </p:par>
+                            </p:childTnLst>
+                          </p:cTn>
+                        </p:par>
+                        <p:par>
+                          <p:cTn id="14" fill="hold">
+                            <p:stCondLst>
+                              <p:cond delay="1680"/>
                             </p:stCondLst>
                             <p:childTnLst>
                               <p:par>
@@ -6462,13 +6181,13 @@
                                   <p:childTnLst>
                                     <p:set>
                                       <p:cBhvr>
-                                        <p:cTn id="11" dur="1" fill="hold">
+                                        <p:cTn id="15" dur="1" fill="hold">
                                           <p:stCondLst>
                                             <p:cond delay="0"/>
                                           </p:stCondLst>
                                         </p:cTn>
                                         <p:tgtEl>
-                                          <p:spTgt spid="3"/>
+                                          <p:spTgt spid="6"/>
                                         </p:tgtEl>
                                         <p:attrNameLst>
                                           <p:attrName>style.visibility</p:attrName>
@@ -6480,141 +6199,9 @@
                                     </p:set>
                                     <p:animEffect transition="in" filter="fade">
                                       <p:cBhvr>
-                                        <p:cTn id="12" dur="900"/>
-                                        <p:tgtEl>
-                                          <p:spTgt spid="3"/>
-                                        </p:tgtEl>
-                                      </p:cBhvr>
-                                    </p:animEffect>
-                                  </p:childTnLst>
-                                </p:cTn>
-                              </p:par>
-                            </p:childTnLst>
-                          </p:cTn>
-                        </p:par>
-                        <p:par>
-                          <p:cTn id="13" fill="hold">
-                            <p:stCondLst>
-                              <p:cond delay="4200"/>
-                            </p:stCondLst>
-                            <p:childTnLst>
-                              <p:par>
-                                <p:cTn presetID="10" presetClass="entr" presetSubtype="0" fill="hold" grpId="0" nodeType="afterEffect">
-                                  <p:stCondLst>
-                                    <p:cond delay="0"/>
-                                  </p:stCondLst>
-                                  <p:childTnLst>
-                                    <p:set>
-                                      <p:cBhvr>
-                                        <p:cTn id="14" dur="1" fill="hold">
-                                          <p:stCondLst>
-                                            <p:cond delay="0"/>
-                                          </p:stCondLst>
-                                        </p:cTn>
-                                        <p:tgtEl>
-                                          <p:spTgt spid="5"/>
-                                        </p:tgtEl>
-                                        <p:attrNameLst>
-                                          <p:attrName>style.visibility</p:attrName>
-                                        </p:attrNameLst>
-                                      </p:cBhvr>
-                                      <p:to>
-                                        <p:strVal val="visible"/>
-                                      </p:to>
-                                    </p:set>
-                                    <p:animEffect transition="in" filter="fade">
-                                      <p:cBhvr>
-                                        <p:cTn id="15" dur="900"/>
-                                        <p:tgtEl>
-                                          <p:spTgt spid="5"/>
-                                        </p:tgtEl>
-                                      </p:cBhvr>
-                                    </p:animEffect>
-                                  </p:childTnLst>
-                                </p:cTn>
-                              </p:par>
-                            </p:childTnLst>
-                          </p:cTn>
-                        </p:par>
-                        <p:par>
-                          <p:cTn id="16" fill="hold">
-                            <p:stCondLst>
-                              <p:cond delay="6100"/>
-                            </p:stCondLst>
-                            <p:childTnLst>
-                              <p:par>
-                                <p:cTn presetID="10" presetClass="entr" presetSubtype="0" fill="hold" grpId="0" nodeType="afterEffect">
-                                  <p:stCondLst>
-                                    <p:cond delay="0"/>
-                                  </p:stCondLst>
-                                  <p:childTnLst>
-                                    <p:set>
-                                      <p:cBhvr>
-                                        <p:cTn id="17" dur="1" fill="hold">
-                                          <p:stCondLst>
-                                            <p:cond delay="0"/>
-                                          </p:stCondLst>
-                                        </p:cTn>
+                                        <p:cTn id="16" dur="650"/>
                                         <p:tgtEl>
                                           <p:spTgt spid="6"/>
-                                        </p:tgtEl>
-                                        <p:attrNameLst>
-                                          <p:attrName>style.visibility</p:attrName>
-                                        </p:attrNameLst>
-                                      </p:cBhvr>
-                                      <p:to>
-                                        <p:strVal val="visible"/>
-                                      </p:to>
-                                    </p:set>
-                                    <p:animEffect transition="in" filter="fade">
-                                      <p:cBhvr>
-                                        <p:cTn id="18" dur="900"/>
-                                        <p:tgtEl>
-                                          <p:spTgt spid="6"/>
-                                        </p:tgtEl>
-                                      </p:cBhvr>
-                                    </p:animEffect>
-                                  </p:childTnLst>
-                                </p:cTn>
-                              </p:par>
-                            </p:childTnLst>
-                          </p:cTn>
-                        </p:par>
-                        <p:par>
-                          <p:cTn id="19" fill="hold">
-                            <p:stCondLst>
-                              <p:cond delay="8250"/>
-                            </p:stCondLst>
-                            <p:childTnLst>
-                              <p:par>
-                                <p:cTn presetID="10" presetClass="entr" presetSubtype="0" fill="hold" grpId="0" nodeType="afterEffect">
-                                  <p:stCondLst>
-                                    <p:cond delay="0"/>
-                                  </p:stCondLst>
-                                  <p:childTnLst>
-                                    <p:set>
-                                      <p:cBhvr>
-                                        <p:cTn id="20" dur="1" fill="hold">
-                                          <p:stCondLst>
-                                            <p:cond delay="0"/>
-                                          </p:stCondLst>
-                                        </p:cTn>
-                                        <p:tgtEl>
-                                          <p:spTgt spid="7"/>
-                                        </p:tgtEl>
-                                        <p:attrNameLst>
-                                          <p:attrName>style.visibility</p:attrName>
-                                        </p:attrNameLst>
-                                      </p:cBhvr>
-                                      <p:to>
-                                        <p:strVal val="visible"/>
-                                      </p:to>
-                                    </p:set>
-                                    <p:animEffect transition="in" filter="fade">
-                                      <p:cBhvr>
-                                        <p:cTn id="21" dur="900"/>
-                                        <p:tgtEl>
-                                          <p:spTgt spid="7"/>
                                         </p:tgtEl>
                                       </p:cBhvr>
                                     </p:animEffect>
@@ -6649,12 +6236,10 @@
       </p:par>
     </p:tnLst>
     <p:bldLst>
-      <p:bldP spid="2" grpId="0"/>
+      <p:bldP spid="3" grpId="0"/>
       <p:bldP spid="4" grpId="0"/>
-      <p:bldP spid="3" grpId="0"/>
       <p:bldP spid="5" grpId="0"/>
       <p:bldP spid="6" grpId="0"/>
-      <p:bldP spid="7" grpId="0"/>
     </p:bldLst>
   </p:timing>
 </p:sld>
@@ -6791,6 +6376,10 @@
             <a:prstDash val="solid"/>
           </a:ln>
         </p:spPr>
+        <p:txBody>
+          <a:bodyPr/>
+          <a:p/>
+        </p:txBody>
       </p:sp>
       <p:sp>
         <p:nvSpPr>
@@ -6892,6 +6481,10 @@
             <a:prstDash val="solid"/>
           </a:ln>
         </p:spPr>
+        <p:txBody>
+          <a:bodyPr/>
+          <a:p/>
+        </p:txBody>
       </p:sp>
       <p:sp>
         <p:nvSpPr>
@@ -7029,7 +6622,10 @@
                   <p:par>
                     <p:cTn id="3" fill="hold">
                       <p:stCondLst>
-                        <p:cond delay="0"/>
+                        <p:cond delay="indefinite"/>
+                        <p:cond evt="onBegin" delay="0">
+                          <p:tn val="2"/>
+                        </p:cond>
                       </p:stCondLst>
                       <p:childTnLst>
                         <p:par>
@@ -7064,7 +6660,7 @@
                                     </p:set>
                                     <p:animEffect transition="in" filter="fade">
                                       <p:cBhvr>
-                                        <p:cTn id="6" dur="600"/>
+                                        <p:cTn id="6" dur="650"/>
                                         <p:tgtEl>
                                           <p:spTgt spid="2"/>
                                         </p:tgtEl>
@@ -7079,7 +6675,7 @@
                         <p:par>
                           <p:cTn id="7" fill="hold">
                             <p:stCondLst>
-                              <p:cond delay="750"/>
+                              <p:cond delay="200"/>
                             </p:stCondLst>
                             <p:childTnLst>
                               <p:par>
@@ -7108,7 +6704,7 @@
                                     </p:set>
                                     <p:animEffect transition="in" filter="fade">
                                       <p:cBhvr>
-                                        <p:cTn id="9" dur="600"/>
+                                        <p:cTn id="9" dur="650"/>
                                         <p:tgtEl>
                                           <p:spTgt spid="3"/>
                                         </p:tgtEl>
@@ -7123,7 +6719,7 @@
                         <p:par>
                           <p:cTn id="10" fill="hold">
                             <p:stCondLst>
-                              <p:cond delay="1650"/>
+                              <p:cond delay="940"/>
                             </p:stCondLst>
                             <p:childTnLst>
                               <p:par>
@@ -7140,7 +6736,7 @@
                                           </p:stCondLst>
                                         </p:cTn>
                                         <p:tgtEl>
-                                          <p:spTgt spid="4"/>
+                                          <p:spTgt spid="5"/>
                                         </p:tgtEl>
                                         <p:attrNameLst>
                                           <p:attrName>style.visibility</p:attrName>
@@ -7152,9 +6748,9 @@
                                     </p:set>
                                     <p:animEffect transition="in" filter="fade">
                                       <p:cBhvr>
-                                        <p:cTn id="12" dur="600"/>
-                                        <p:tgtEl>
-                                          <p:spTgt spid="4"/>
+                                        <p:cTn id="12" dur="650"/>
+                                        <p:tgtEl>
+                                          <p:spTgt spid="5"/>
                                         </p:tgtEl>
                                       </p:cBhvr>
                                     </p:animEffect>
@@ -7167,7 +6763,7 @@
                         <p:par>
                           <p:cTn id="13" fill="hold">
                             <p:stCondLst>
-                              <p:cond delay="2700"/>
+                              <p:cond delay="1140"/>
                             </p:stCondLst>
                             <p:childTnLst>
                               <p:par>
@@ -7184,7 +6780,7 @@
                                           </p:stCondLst>
                                         </p:cTn>
                                         <p:tgtEl>
-                                          <p:spTgt spid="5"/>
+                                          <p:spTgt spid="6"/>
                                         </p:tgtEl>
                                         <p:attrNameLst>
                                           <p:attrName>style.visibility</p:attrName>
@@ -7196,9 +6792,9 @@
                                     </p:set>
                                     <p:animEffect transition="in" filter="fade">
                                       <p:cBhvr>
-                                        <p:cTn id="15" dur="600"/>
-                                        <p:tgtEl>
-                                          <p:spTgt spid="5"/>
+                                        <p:cTn id="15" dur="650"/>
+                                        <p:tgtEl>
+                                          <p:spTgt spid="6"/>
                                         </p:tgtEl>
                                       </p:cBhvr>
                                     </p:animEffect>
@@ -7211,7 +6807,7 @@
                         <p:par>
                           <p:cTn id="16" fill="hold">
                             <p:stCondLst>
-                              <p:cond delay="3900"/>
+                              <p:cond delay="1880"/>
                             </p:stCondLst>
                             <p:childTnLst>
                               <p:par>
@@ -7228,7 +6824,7 @@
                                           </p:stCondLst>
                                         </p:cTn>
                                         <p:tgtEl>
-                                          <p:spTgt spid="6"/>
+                                          <p:spTgt spid="8"/>
                                         </p:tgtEl>
                                         <p:attrNameLst>
                                           <p:attrName>style.visibility</p:attrName>
@@ -7240,9 +6836,9 @@
                                     </p:set>
                                     <p:animEffect transition="in" filter="fade">
                                       <p:cBhvr>
-                                        <p:cTn id="18" dur="600"/>
-                                        <p:tgtEl>
-                                          <p:spTgt spid="6"/>
+                                        <p:cTn id="18" dur="650"/>
+                                        <p:tgtEl>
+                                          <p:spTgt spid="8"/>
                                         </p:tgtEl>
                                       </p:cBhvr>
                                     </p:animEffect>
@@ -7255,7 +6851,7 @@
                         <p:par>
                           <p:cTn id="19" fill="hold">
                             <p:stCondLst>
-                              <p:cond delay="5250"/>
+                              <p:cond delay="2080"/>
                             </p:stCondLst>
                             <p:childTnLst>
                               <p:par>
@@ -7272,7 +6868,7 @@
                                           </p:stCondLst>
                                         </p:cTn>
                                         <p:tgtEl>
-                                          <p:spTgt spid="7"/>
+                                          <p:spTgt spid="9"/>
                                         </p:tgtEl>
                                         <p:attrNameLst>
                                           <p:attrName>style.visibility</p:attrName>
@@ -7284,141 +6880,9 @@
                                     </p:set>
                                     <p:animEffect transition="in" filter="fade">
                                       <p:cBhvr>
-                                        <p:cTn id="21" dur="600"/>
-                                        <p:tgtEl>
-                                          <p:spTgt spid="7"/>
-                                        </p:tgtEl>
-                                      </p:cBhvr>
-                                    </p:animEffect>
-                                  </p:childTnLst>
-                                </p:cTn>
-                              </p:par>
-                            </p:childTnLst>
-                          </p:cTn>
-                        </p:par>
-                        <p:par>
-                          <p:cTn id="22" fill="hold">
-                            <p:stCondLst>
-                              <p:cond delay="6750"/>
-                            </p:stCondLst>
-                            <p:childTnLst>
-                              <p:par>
-                                <p:cTn presetID="10" presetClass="entr" presetSubtype="0" fill="hold" grpId="0" nodeType="afterEffect">
-                                  <p:stCondLst>
-                                    <p:cond delay="0"/>
-                                  </p:stCondLst>
-                                  <p:childTnLst>
-                                    <p:set>
-                                      <p:cBhvr>
-                                        <p:cTn id="23" dur="1" fill="hold">
-                                          <p:stCondLst>
-                                            <p:cond delay="0"/>
-                                          </p:stCondLst>
-                                        </p:cTn>
-                                        <p:tgtEl>
-                                          <p:spTgt spid="8"/>
-                                        </p:tgtEl>
-                                        <p:attrNameLst>
-                                          <p:attrName>style.visibility</p:attrName>
-                                        </p:attrNameLst>
-                                      </p:cBhvr>
-                                      <p:to>
-                                        <p:strVal val="visible"/>
-                                      </p:to>
-                                    </p:set>
-                                    <p:animEffect transition="in" filter="fade">
-                                      <p:cBhvr>
-                                        <p:cTn id="24" dur="600"/>
-                                        <p:tgtEl>
-                                          <p:spTgt spid="8"/>
-                                        </p:tgtEl>
-                                      </p:cBhvr>
-                                    </p:animEffect>
-                                  </p:childTnLst>
-                                </p:cTn>
-                              </p:par>
-                            </p:childTnLst>
-                          </p:cTn>
-                        </p:par>
-                        <p:par>
-                          <p:cTn id="25" fill="hold">
-                            <p:stCondLst>
-                              <p:cond delay="8400"/>
-                            </p:stCondLst>
-                            <p:childTnLst>
-                              <p:par>
-                                <p:cTn presetID="10" presetClass="entr" presetSubtype="0" fill="hold" grpId="0" nodeType="afterEffect">
-                                  <p:stCondLst>
-                                    <p:cond delay="0"/>
-                                  </p:stCondLst>
-                                  <p:childTnLst>
-                                    <p:set>
-                                      <p:cBhvr>
-                                        <p:cTn id="26" dur="1" fill="hold">
-                                          <p:stCondLst>
-                                            <p:cond delay="0"/>
-                                          </p:stCondLst>
-                                        </p:cTn>
+                                        <p:cTn id="21" dur="650"/>
                                         <p:tgtEl>
                                           <p:spTgt spid="9"/>
-                                        </p:tgtEl>
-                                        <p:attrNameLst>
-                                          <p:attrName>style.visibility</p:attrName>
-                                        </p:attrNameLst>
-                                      </p:cBhvr>
-                                      <p:to>
-                                        <p:strVal val="visible"/>
-                                      </p:to>
-                                    </p:set>
-                                    <p:animEffect transition="in" filter="fade">
-                                      <p:cBhvr>
-                                        <p:cTn id="27" dur="600"/>
-                                        <p:tgtEl>
-                                          <p:spTgt spid="9"/>
-                                        </p:tgtEl>
-                                      </p:cBhvr>
-                                    </p:animEffect>
-                                  </p:childTnLst>
-                                </p:cTn>
-                              </p:par>
-                            </p:childTnLst>
-                          </p:cTn>
-                        </p:par>
-                        <p:par>
-                          <p:cTn id="28" fill="hold">
-                            <p:stCondLst>
-                              <p:cond delay="10200"/>
-                            </p:stCondLst>
-                            <p:childTnLst>
-                              <p:par>
-                                <p:cTn presetID="10" presetClass="entr" presetSubtype="0" fill="hold" grpId="0" nodeType="afterEffect">
-                                  <p:stCondLst>
-                                    <p:cond delay="0"/>
-                                  </p:stCondLst>
-                                  <p:childTnLst>
-                                    <p:set>
-                                      <p:cBhvr>
-                                        <p:cTn id="29" dur="1" fill="hold">
-                                          <p:stCondLst>
-                                            <p:cond delay="0"/>
-                                          </p:stCondLst>
-                                        </p:cTn>
-                                        <p:tgtEl>
-                                          <p:spTgt spid="10"/>
-                                        </p:tgtEl>
-                                        <p:attrNameLst>
-                                          <p:attrName>style.visibility</p:attrName>
-                                        </p:attrNameLst>
-                                      </p:cBhvr>
-                                      <p:to>
-                                        <p:strVal val="visible"/>
-                                      </p:to>
-                                    </p:set>
-                                    <p:animEffect transition="in" filter="fade">
-                                      <p:cBhvr>
-                                        <p:cTn id="30" dur="600"/>
-                                        <p:tgtEl>
-                                          <p:spTgt spid="10"/>
                                         </p:tgtEl>
                                       </p:cBhvr>
                                     </p:animEffect>
@@ -7455,13 +6919,10 @@
     <p:bldLst>
       <p:bldP spid="2" grpId="0"/>
       <p:bldP spid="3" grpId="0"/>
-      <p:bldP spid="4" grpId="0"/>
       <p:bldP spid="5" grpId="0"/>
       <p:bldP spid="6" grpId="0"/>
-      <p:bldP spid="7" grpId="0"/>
       <p:bldP spid="8" grpId="0"/>
       <p:bldP spid="9" grpId="0"/>
-      <p:bldP spid="10" grpId="0"/>
     </p:bldLst>
   </p:timing>
 </p:sld>
@@ -7526,6 +6987,10 @@
             <a:prstDash val="solid"/>
           </a:ln>
         </p:spPr>
+        <p:txBody>
+          <a:bodyPr/>
+          <a:p/>
+        </p:txBody>
       </p:sp>
       <p:sp>
         <p:nvSpPr>
@@ -7552,7 +7017,7 @@
               <a:buNone/>
             </a:pPr>
             <a:r>
-              <a:rPr lang="en-US" sz="4400" b="1" spc="400" kern="0" dirty="0">
+              <a:rPr lang="en-US" sz="4600" b="1" spc="400" kern="0" dirty="0">
                 <a:solidFill>
                   <a:srgbClr val="D8C7A8"/>
                 </a:solidFill>
@@ -7562,7 +7027,7 @@
               </a:rPr>
               <a:t>让家，有自己的天气。</a:t>
             </a:r>
-            <a:endParaRPr lang="en-US" sz="4400" dirty="0"/>
+            <a:endParaRPr lang="en-US" sz="4600" dirty="0"/>
           </a:p>
         </p:txBody>
       </p:sp>
@@ -7624,7 +7089,10 @@
                   <p:par>
                     <p:cTn id="3" fill="hold">
                       <p:stCondLst>
-                        <p:cond delay="0"/>
+                        <p:cond delay="indefinite"/>
+                        <p:cond evt="onBegin" delay="0">
+                          <p:tn val="2"/>
+                        </p:cond>
                       </p:stCondLst>
                       <p:childTnLst>
                         <p:par>
@@ -7634,7 +7102,7 @@
                             </p:stCondLst>
                             <p:childTnLst>
                               <p:par>
-                                <p:cTn presetID="10" presetClass="entr" presetSubtype="0" fill="hold" grpId="0" nodeType="afterEffect">
+                                <p:cTn presetID="23" presetClass="entr" presetSubtype="16" fill="hold" grpId="0" nodeType="afterEffect">
                                   <p:stCondLst>
                                     <p:cond delay="0"/>
                                   </p:stCondLst>
@@ -7647,7 +7115,7 @@
                                           </p:stCondLst>
                                         </p:cTn>
                                         <p:tgtEl>
-                                          <p:spTgt spid="2"/>
+                                          <p:spTgt spid="3"/>
                                         </p:tgtEl>
                                         <p:attrNameLst>
                                           <p:attrName>style.visibility</p:attrName>
@@ -7659,100 +7127,22 @@
                                     </p:set>
                                     <p:animEffect transition="in" filter="fade">
                                       <p:cBhvr>
-                                        <p:cTn id="6" dur="900"/>
-                                        <p:tgtEl>
-                                          <p:spTgt spid="2"/>
+                                        <p:cTn id="6" dur="790"/>
+                                        <p:tgtEl>
+                                          <p:spTgt spid="3"/>
                                         </p:tgtEl>
                                       </p:cBhvr>
                                     </p:animEffect>
-                                  </p:childTnLst>
-                                </p:cTn>
-                              </p:par>
-                            </p:childTnLst>
-                          </p:cTn>
-                        </p:par>
-                        <p:par>
-                          <p:cTn id="7" fill="hold">
-                            <p:stCondLst>
-                              <p:cond delay="900"/>
-                            </p:stCondLst>
-                            <p:childTnLst>
-                              <p:par>
-                                <p:cTn presetID="10" presetClass="entr" presetSubtype="0" fill="hold" grpId="0" nodeType="afterEffect">
-                                  <p:stCondLst>
-                                    <p:cond delay="0"/>
-                                  </p:stCondLst>
-                                  <p:childTnLst>
-                                    <p:set>
-                                      <p:cBhvr>
-                                        <p:cTn id="8" dur="1" fill="hold">
-                                          <p:stCondLst>
-                                            <p:cond delay="0"/>
-                                          </p:stCondLst>
-                                        </p:cTn>
+                                    <p:animScale>
+                                      <p:cBhvr>
+                                        <p:cTn id="7" dur="790"/>
                                         <p:tgtEl>
                                           <p:spTgt spid="3"/>
                                         </p:tgtEl>
-                                        <p:attrNameLst>
-                                          <p:attrName>style.visibility</p:attrName>
-                                        </p:attrNameLst>
-                                      </p:cBhvr>
-                                      <p:to>
-                                        <p:strVal val="visible"/>
-                                      </p:to>
-                                    </p:set>
-                                    <p:animEffect transition="in" filter="fade">
-                                      <p:cBhvr>
-                                        <p:cTn id="9" dur="900"/>
-                                        <p:tgtEl>
-                                          <p:spTgt spid="3"/>
-                                        </p:tgtEl>
-                                      </p:cBhvr>
-                                    </p:animEffect>
-                                  </p:childTnLst>
-                                </p:cTn>
-                              </p:par>
-                            </p:childTnLst>
-                          </p:cTn>
-                        </p:par>
-                        <p:par>
-                          <p:cTn id="10" fill="hold">
-                            <p:stCondLst>
-                              <p:cond delay="1800"/>
-                            </p:stCondLst>
-                            <p:childTnLst>
-                              <p:par>
-                                <p:cTn presetID="10" presetClass="entr" presetSubtype="0" fill="hold" grpId="0" nodeType="afterEffect">
-                                  <p:stCondLst>
-                                    <p:cond delay="0"/>
-                                  </p:stCondLst>
-                                  <p:childTnLst>
-                                    <p:set>
-                                      <p:cBhvr>
-                                        <p:cTn id="11" dur="1" fill="hold">
-                                          <p:stCondLst>
-                                            <p:cond delay="0"/>
-                                          </p:stCondLst>
-                                        </p:cTn>
-                                        <p:tgtEl>
-                                          <p:spTgt spid="4"/>
-                                        </p:tgtEl>
-                                        <p:attrNameLst>
-                                          <p:attrName>style.visibility</p:attrName>
-                                        </p:attrNameLst>
-                                      </p:cBhvr>
-                                      <p:to>
-                                        <p:strVal val="visible"/>
-                                      </p:to>
-                                    </p:set>
-                                    <p:animEffect transition="in" filter="fade">
-                                      <p:cBhvr>
-                                        <p:cTn id="12" dur="900"/>
-                                        <p:tgtEl>
-                                          <p:spTgt spid="4"/>
-                                        </p:tgtEl>
-                                      </p:cBhvr>
-                                    </p:animEffect>
+                                      </p:cBhvr>
+                                      <p:from x="55000" y="55000"/>
+                                      <p:to x="100000" y="100000"/>
+                                    </p:animScale>
                                   </p:childTnLst>
                                 </p:cTn>
                               </p:par>
@@ -7784,9 +7174,7 @@
       </p:par>
     </p:tnLst>
     <p:bldLst>
-      <p:bldP spid="2" grpId="0"/>
       <p:bldP spid="3" grpId="0"/>
-      <p:bldP spid="4" grpId="0"/>
     </p:bldLst>
   </p:timing>
 </p:sld>

--- a/examples/premium-st2/星尘ST2-发布会.pptx
+++ b/examples/premium-st2/星尘ST2-发布会.pptx
@@ -1683,9 +1683,61 @@
           <a:chExt cx="0" cy="0"/>
         </a:xfrm>
       </p:grpSpPr>
-      <p:sp>
-        <p:nvSpPr>
-          <p:cNvPr id="2" name="Shape 0"/>
+      <p:pic>
+        <p:nvPicPr>
+          <p:cNvPr id="2" name="Image 0" descr="assets/motion-bg.gif">    </p:cNvPr>
+          <p:cNvPicPr>
+            <a:picLocks noChangeAspect="1"/>
+          </p:cNvPicPr>
+          <p:nvPr/>
+        </p:nvPicPr>
+        <p:blipFill>
+          <a:blip r:embed="rId2">
+            <a:alphaModFix amt="58000"/>
+          </a:blip>
+          <a:stretch>
+            <a:fillRect/>
+          </a:stretch>
+        </p:blipFill>
+        <p:spPr>
+          <a:xfrm>
+            <a:off x="0" y="0"/>
+            <a:ext cx="12188952" cy="6858000"/>
+          </a:xfrm>
+          <a:prstGeom prst="rect">
+            <a:avLst/>
+          </a:prstGeom>
+        </p:spPr>
+      </p:pic>
+      <p:sp>
+        <p:nvSpPr>
+          <p:cNvPr id="3" name="Shape 0"/>
+          <p:cNvSpPr/>
+          <p:nvPr/>
+        </p:nvSpPr>
+        <p:spPr>
+          <a:xfrm>
+            <a:off x="0" y="0"/>
+            <a:ext cx="12188952" cy="6858000"/>
+          </a:xfrm>
+          <a:prstGeom prst="rect">
+            <a:avLst/>
+          </a:prstGeom>
+          <a:solidFill>
+            <a:srgbClr val="141210">
+              <a:alpha val="58000"/>
+            </a:srgbClr>
+          </a:solidFill>
+          <a:ln/>
+        </p:spPr>
+        <p:txBody>
+          <a:bodyPr/>
+          <a:p/>
+        </p:txBody>
+      </p:sp>
+      <p:sp>
+        <p:nvSpPr>
+          <p:cNvPr id="4" name="Shape 1"/>
           <p:cNvSpPr/>
           <p:nvPr/>
         </p:nvSpPr>
@@ -1718,14 +1770,14 @@
       </p:sp>
       <p:pic>
         <p:nvPicPr>
-          <p:cNvPr id="3" name="Image 0" descr="assets/glow.png">    </p:cNvPr>
+          <p:cNvPr id="5" name="Image 1" descr="assets/glow.png">    </p:cNvPr>
           <p:cNvPicPr>
             <a:picLocks noChangeAspect="1"/>
           </p:cNvPicPr>
           <p:nvPr/>
         </p:nvPicPr>
         <p:blipFill>
-          <a:blip r:embed="rId2">
+          <a:blip r:embed="rId3">
             <a:alphaModFix amt="45000"/>
           </a:blip>
           <a:stretch>
@@ -1744,7 +1796,7 @@
       </p:pic>
       <p:sp>
         <p:nvSpPr>
-          <p:cNvPr id="4" name="Text 1"/>
+          <p:cNvPr id="6" name="Text 2"/>
           <p:cNvSpPr/>
           <p:nvPr/>
         </p:nvSpPr>
@@ -1783,7 +1835,7 @@
       </p:sp>
       <p:sp>
         <p:nvSpPr>
-          <p:cNvPr id="5" name="Text 2"/>
+          <p:cNvPr id="7" name="Text 3"/>
           <p:cNvSpPr/>
           <p:nvPr/>
         </p:nvSpPr>
@@ -1822,7 +1874,7 @@
       </p:sp>
       <p:sp>
         <p:nvSpPr>
-          <p:cNvPr id="6" name="Text 3"/>
+          <p:cNvPr id="8" name="Text 4"/>
           <p:cNvSpPr/>
           <p:nvPr/>
         </p:nvSpPr>
@@ -1904,7 +1956,7 @@
                                           </p:stCondLst>
                                         </p:cTn>
                                         <p:tgtEl>
-                                          <p:spTgt spid="3"/>
+                                          <p:spTgt spid="2"/>
                                         </p:tgtEl>
                                         <p:attrNameLst>
                                           <p:attrName>style.visibility</p:attrName>
@@ -1918,7 +1970,7 @@
                                       <p:cBhvr>
                                         <p:cTn id="6" dur="790"/>
                                         <p:tgtEl>
-                                          <p:spTgt spid="3"/>
+                                          <p:spTgt spid="2"/>
                                         </p:tgtEl>
                                       </p:cBhvr>
                                     </p:animEffect>
@@ -1931,7 +1983,139 @@
                         <p:par>
                           <p:cTn id="7" fill="hold">
                             <p:stCondLst>
-                              <p:cond delay="736"/>
+                              <p:cond delay="200"/>
+                            </p:stCondLst>
+                            <p:childTnLst>
+                              <p:par>
+                                <p:cTn presetID="10" presetClass="entr" presetSubtype="0" fill="hold" grpId="0" nodeType="afterEffect">
+                                  <p:stCondLst>
+                                    <p:cond delay="0"/>
+                                  </p:stCondLst>
+                                  <p:childTnLst>
+                                    <p:set>
+                                      <p:cBhvr>
+                                        <p:cTn id="8" dur="1" fill="hold">
+                                          <p:stCondLst>
+                                            <p:cond delay="0"/>
+                                          </p:stCondLst>
+                                        </p:cTn>
+                                        <p:tgtEl>
+                                          <p:spTgt spid="3"/>
+                                        </p:tgtEl>
+                                        <p:attrNameLst>
+                                          <p:attrName>style.visibility</p:attrName>
+                                        </p:attrNameLst>
+                                      </p:cBhvr>
+                                      <p:to>
+                                        <p:strVal val="visible"/>
+                                      </p:to>
+                                    </p:set>
+                                    <p:animEffect transition="in" filter="fade">
+                                      <p:cBhvr>
+                                        <p:cTn id="9" dur="650"/>
+                                        <p:tgtEl>
+                                          <p:spTgt spid="3"/>
+                                        </p:tgtEl>
+                                      </p:cBhvr>
+                                    </p:animEffect>
+                                  </p:childTnLst>
+                                </p:cTn>
+                              </p:par>
+                            </p:childTnLst>
+                          </p:cTn>
+                        </p:par>
+                        <p:par>
+                          <p:cTn id="10" fill="hold">
+                            <p:stCondLst>
+                              <p:cond delay="400"/>
+                            </p:stCondLst>
+                            <p:childTnLst>
+                              <p:par>
+                                <p:cTn presetID="10" presetClass="entr" presetSubtype="0" fill="hold" grpId="0" nodeType="afterEffect">
+                                  <p:stCondLst>
+                                    <p:cond delay="0"/>
+                                  </p:stCondLst>
+                                  <p:childTnLst>
+                                    <p:set>
+                                      <p:cBhvr>
+                                        <p:cTn id="11" dur="1" fill="hold">
+                                          <p:stCondLst>
+                                            <p:cond delay="0"/>
+                                          </p:stCondLst>
+                                        </p:cTn>
+                                        <p:tgtEl>
+                                          <p:spTgt spid="5"/>
+                                        </p:tgtEl>
+                                        <p:attrNameLst>
+                                          <p:attrName>style.visibility</p:attrName>
+                                        </p:attrNameLst>
+                                      </p:cBhvr>
+                                      <p:to>
+                                        <p:strVal val="visible"/>
+                                      </p:to>
+                                    </p:set>
+                                    <p:animEffect transition="in" filter="fade">
+                                      <p:cBhvr>
+                                        <p:cTn id="12" dur="790"/>
+                                        <p:tgtEl>
+                                          <p:spTgt spid="5"/>
+                                        </p:tgtEl>
+                                      </p:cBhvr>
+                                    </p:animEffect>
+                                  </p:childTnLst>
+                                </p:cTn>
+                              </p:par>
+                            </p:childTnLst>
+                          </p:cTn>
+                        </p:par>
+                        <p:par>
+                          <p:cTn id="13" fill="hold">
+                            <p:stCondLst>
+                              <p:cond delay="600"/>
+                            </p:stCondLst>
+                            <p:childTnLst>
+                              <p:par>
+                                <p:cTn presetID="10" presetClass="entr" presetSubtype="0" fill="hold" grpId="0" nodeType="afterEffect">
+                                  <p:stCondLst>
+                                    <p:cond delay="0"/>
+                                  </p:stCondLst>
+                                  <p:childTnLst>
+                                    <p:set>
+                                      <p:cBhvr>
+                                        <p:cTn id="14" dur="1" fill="hold">
+                                          <p:stCondLst>
+                                            <p:cond delay="0"/>
+                                          </p:stCondLst>
+                                        </p:cTn>
+                                        <p:tgtEl>
+                                          <p:spTgt spid="5"/>
+                                        </p:tgtEl>
+                                        <p:attrNameLst>
+                                          <p:attrName>style.visibility</p:attrName>
+                                        </p:attrNameLst>
+                                      </p:cBhvr>
+                                      <p:to>
+                                        <p:strVal val="visible"/>
+                                      </p:to>
+                                    </p:set>
+                                    <p:animEffect transition="in" filter="fade">
+                                      <p:cBhvr>
+                                        <p:cTn id="15" dur="650"/>
+                                        <p:tgtEl>
+                                          <p:spTgt spid="5"/>
+                                        </p:tgtEl>
+                                      </p:cBhvr>
+                                    </p:animEffect>
+                                  </p:childTnLst>
+                                </p:cTn>
+                              </p:par>
+                            </p:childTnLst>
+                          </p:cTn>
+                        </p:par>
+                        <p:par>
+                          <p:cTn id="16" fill="hold">
+                            <p:stCondLst>
+                              <p:cond delay="1340"/>
                             </p:stCondLst>
                             <p:childTnLst>
                               <p:par>
@@ -1942,13 +2126,13 @@
                                   <p:childTnLst>
                                     <p:set>
                                       <p:cBhvr>
-                                        <p:cTn id="8" dur="1" fill="hold">
+                                        <p:cTn id="17" dur="1" fill="hold">
                                           <p:stCondLst>
                                             <p:cond delay="0"/>
                                           </p:stCondLst>
                                         </p:cTn>
                                         <p:tgtEl>
-                                          <p:spTgt spid="4"/>
+                                          <p:spTgt spid="6"/>
                                         </p:tgtEl>
                                         <p:attrNameLst>
                                           <p:attrName>style.visibility</p:attrName>
@@ -1960,17 +2144,17 @@
                                     </p:set>
                                     <p:animEffect transition="in" filter="fade">
                                       <p:cBhvr>
-                                        <p:cTn id="9" dur="790"/>
-                                        <p:tgtEl>
-                                          <p:spTgt spid="4"/>
+                                        <p:cTn id="18" dur="790"/>
+                                        <p:tgtEl>
+                                          <p:spTgt spid="6"/>
                                         </p:tgtEl>
                                       </p:cBhvr>
                                     </p:animEffect>
                                     <p:animScale>
                                       <p:cBhvr>
-                                        <p:cTn id="10" dur="790"/>
-                                        <p:tgtEl>
-                                          <p:spTgt spid="4"/>
+                                        <p:cTn id="19" dur="790"/>
+                                        <p:tgtEl>
+                                          <p:spTgt spid="6"/>
                                         </p:tgtEl>
                                       </p:cBhvr>
                                       <p:from x="55000" y="55000"/>
@@ -1983,9 +2167,9 @@
                           </p:cTn>
                         </p:par>
                         <p:par>
-                          <p:cTn id="11" fill="hold">
+                          <p:cTn id="20" fill="hold">
                             <p:stCondLst>
-                              <p:cond delay="1472"/>
+                              <p:cond delay="1540"/>
                             </p:stCondLst>
                             <p:childTnLst>
                               <p:par>
@@ -1996,13 +2180,13 @@
                                   <p:childTnLst>
                                     <p:set>
                                       <p:cBhvr>
-                                        <p:cTn id="12" dur="1" fill="hold">
+                                        <p:cTn id="21" dur="1" fill="hold">
                                           <p:stCondLst>
                                             <p:cond delay="0"/>
                                           </p:stCondLst>
                                         </p:cTn>
                                         <p:tgtEl>
-                                          <p:spTgt spid="5"/>
+                                          <p:spTgt spid="7"/>
                                         </p:tgtEl>
                                         <p:attrNameLst>
                                           <p:attrName>style.visibility</p:attrName>
@@ -2014,9 +2198,9 @@
                                     </p:set>
                                     <p:animEffect transition="in" filter="fade">
                                       <p:cBhvr>
-                                        <p:cTn id="13" dur="650"/>
-                                        <p:tgtEl>
-                                          <p:spTgt spid="5"/>
+                                        <p:cTn id="22" dur="650"/>
+                                        <p:tgtEl>
+                                          <p:spTgt spid="7"/>
                                         </p:tgtEl>
                                       </p:cBhvr>
                                     </p:animEffect>
@@ -2027,9 +2211,9 @@
                           </p:cTn>
                         </p:par>
                         <p:par>
-                          <p:cTn id="14" fill="hold">
+                          <p:cTn id="23" fill="hold">
                             <p:stCondLst>
-                              <p:cond delay="2208"/>
+                              <p:cond delay="1740"/>
                             </p:stCondLst>
                             <p:childTnLst>
                               <p:par>
@@ -2040,13 +2224,13 @@
                                   <p:childTnLst>
                                     <p:set>
                                       <p:cBhvr>
-                                        <p:cTn id="15" dur="1" fill="hold">
+                                        <p:cTn id="24" dur="1" fill="hold">
                                           <p:stCondLst>
                                             <p:cond delay="0"/>
                                           </p:stCondLst>
                                         </p:cTn>
                                         <p:tgtEl>
-                                          <p:spTgt spid="6"/>
+                                          <p:spTgt spid="8"/>
                                         </p:tgtEl>
                                         <p:attrNameLst>
                                           <p:attrName>style.visibility</p:attrName>
@@ -2058,9 +2242,9 @@
                                     </p:set>
                                     <p:animEffect transition="in" filter="fade">
                                       <p:cBhvr>
-                                        <p:cTn id="16" dur="650"/>
-                                        <p:tgtEl>
-                                          <p:spTgt spid="6"/>
+                                        <p:cTn id="25" dur="650"/>
+                                        <p:tgtEl>
+                                          <p:spTgt spid="8"/>
                                         </p:tgtEl>
                                       </p:cBhvr>
                                     </p:animEffect>
@@ -2095,10 +2279,12 @@
       </p:par>
     </p:tnLst>
     <p:bldLst>
+      <p:bldP spid="2" grpId="0"/>
       <p:bldP spid="3" grpId="0"/>
-      <p:bldP spid="4" grpId="0"/>
       <p:bldP spid="5" grpId="0"/>
       <p:bldP spid="6" grpId="0"/>
+      <p:bldP spid="7" grpId="0"/>
+      <p:bldP spid="8" grpId="0"/>
     </p:bldLst>
   </p:timing>
 </p:sld>
@@ -2285,7 +2471,7 @@
                         <p:par>
                           <p:cTn id="7" fill="hold">
                             <p:stCondLst>
-                              <p:cond delay="740"/>
+                              <p:cond delay="200"/>
                             </p:stCondLst>
                             <p:childTnLst>
                               <p:par>
@@ -2621,7 +2807,7 @@
                         <p:par>
                           <p:cTn id="8" fill="hold">
                             <p:stCondLst>
-                              <p:cond delay="740"/>
+                              <p:cond delay="200"/>
                             </p:stCondLst>
                             <p:childTnLst>
                               <p:par>
@@ -3357,50 +3543,6 @@
                             </p:stCondLst>
                             <p:childTnLst>
                               <p:par>
-                                <p:cTn presetID="10" presetClass="entr" presetSubtype="0" fill="hold" grpId="0" nodeType="afterEffect">
-                                  <p:stCondLst>
-                                    <p:cond delay="0"/>
-                                  </p:stCondLst>
-                                  <p:childTnLst>
-                                    <p:set>
-                                      <p:cBhvr>
-                                        <p:cTn id="9" dur="1" fill="hold">
-                                          <p:stCondLst>
-                                            <p:cond delay="0"/>
-                                          </p:stCondLst>
-                                        </p:cTn>
-                                        <p:tgtEl>
-                                          <p:spTgt spid="3"/>
-                                        </p:tgtEl>
-                                        <p:attrNameLst>
-                                          <p:attrName>style.visibility</p:attrName>
-                                        </p:attrNameLst>
-                                      </p:cBhvr>
-                                      <p:to>
-                                        <p:strVal val="visible"/>
-                                      </p:to>
-                                    </p:set>
-                                    <p:animEffect transition="in" filter="fade">
-                                      <p:cBhvr>
-                                        <p:cTn id="10" dur="650"/>
-                                        <p:tgtEl>
-                                          <p:spTgt spid="3"/>
-                                        </p:tgtEl>
-                                      </p:cBhvr>
-                                    </p:animEffect>
-                                  </p:childTnLst>
-                                </p:cTn>
-                              </p:par>
-                            </p:childTnLst>
-                          </p:cTn>
-                        </p:par>
-                        <p:par>
-                          <p:cTn id="11" fill="hold">
-                            <p:stCondLst>
-                              <p:cond delay="940"/>
-                            </p:stCondLst>
-                            <p:childTnLst>
-                              <p:par>
                                 <p:cTn presetID="23" presetClass="entr" presetSubtype="16" fill="hold" grpId="0" nodeType="afterEffect">
                                   <p:stCondLst>
                                     <p:cond delay="0"/>
@@ -3408,7 +3550,7 @@
                                   <p:childTnLst>
                                     <p:set>
                                       <p:cBhvr>
-                                        <p:cTn id="12" dur="1" fill="hold">
+                                        <p:cTn id="9" dur="1" fill="hold">
                                           <p:stCondLst>
                                             <p:cond delay="0"/>
                                           </p:stCondLst>
@@ -3426,7 +3568,7 @@
                                     </p:set>
                                     <p:animEffect transition="in" filter="fade">
                                       <p:cBhvr>
-                                        <p:cTn id="13" dur="790"/>
+                                        <p:cTn id="10" dur="790"/>
                                         <p:tgtEl>
                                           <p:spTgt spid="5"/>
                                         </p:tgtEl>
@@ -3434,7 +3576,7 @@
                                     </p:animEffect>
                                     <p:animScale>
                                       <p:cBhvr>
-                                        <p:cTn id="14" dur="790"/>
+                                        <p:cTn id="11" dur="790"/>
                                         <p:tgtEl>
                                           <p:spTgt spid="5"/>
                                         </p:tgtEl>
@@ -3449,9 +3591,53 @@
                           </p:cTn>
                         </p:par>
                         <p:par>
+                          <p:cTn id="12" fill="hold">
+                            <p:stCondLst>
+                              <p:cond delay="400"/>
+                            </p:stCondLst>
+                            <p:childTnLst>
+                              <p:par>
+                                <p:cTn presetID="10" presetClass="entr" presetSubtype="0" fill="hold" grpId="0" nodeType="afterEffect">
+                                  <p:stCondLst>
+                                    <p:cond delay="0"/>
+                                  </p:stCondLst>
+                                  <p:childTnLst>
+                                    <p:set>
+                                      <p:cBhvr>
+                                        <p:cTn id="13" dur="1" fill="hold">
+                                          <p:stCondLst>
+                                            <p:cond delay="0"/>
+                                          </p:stCondLst>
+                                        </p:cTn>
+                                        <p:tgtEl>
+                                          <p:spTgt spid="3"/>
+                                        </p:tgtEl>
+                                        <p:attrNameLst>
+                                          <p:attrName>style.visibility</p:attrName>
+                                        </p:attrNameLst>
+                                      </p:cBhvr>
+                                      <p:to>
+                                        <p:strVal val="visible"/>
+                                      </p:to>
+                                    </p:set>
+                                    <p:animEffect transition="in" filter="fade">
+                                      <p:cBhvr>
+                                        <p:cTn id="14" dur="650"/>
+                                        <p:tgtEl>
+                                          <p:spTgt spid="3"/>
+                                        </p:tgtEl>
+                                      </p:cBhvr>
+                                    </p:animEffect>
+                                  </p:childTnLst>
+                                </p:cTn>
+                              </p:par>
+                            </p:childTnLst>
+                          </p:cTn>
+                        </p:par>
+                        <p:par>
                           <p:cTn id="15" fill="hold">
                             <p:stCondLst>
-                              <p:cond delay="1140"/>
+                              <p:cond delay="600"/>
                             </p:stCondLst>
                             <p:childTnLst>
                               <p:par>
@@ -3495,7 +3681,7 @@
                         <p:par>
                           <p:cTn id="18" fill="hold">
                             <p:stCondLst>
-                              <p:cond delay="1880"/>
+                              <p:cond delay="1340"/>
                             </p:stCondLst>
                             <p:childTnLst>
                               <p:par>
@@ -3549,7 +3735,7 @@
                         <p:par>
                           <p:cTn id="22" fill="hold">
                             <p:stCondLst>
-                              <p:cond delay="2080"/>
+                              <p:cond delay="1540"/>
                             </p:stCondLst>
                             <p:childTnLst>
                               <p:par>
@@ -3616,8 +3802,8 @@
     </p:tnLst>
     <p:bldLst>
       <p:bldP spid="2" grpId="0"/>
+      <p:bldP spid="5" grpId="0"/>
       <p:bldP spid="3" grpId="0"/>
-      <p:bldP spid="5" grpId="0"/>
       <p:bldP spid="6" grpId="0"/>
       <p:bldP spid="8" grpId="0"/>
       <p:bldP spid="9" grpId="0"/>
@@ -4043,7 +4229,7 @@
                             </p:stCondLst>
                             <p:childTnLst>
                               <p:par>
-                                <p:cTn presetID="23" presetClass="entr" presetSubtype="16" fill="hold" grpId="0" nodeType="afterEffect">
+                                <p:cTn presetID="10" presetClass="entr" presetSubtype="0" fill="hold" grpId="0" nodeType="afterEffect">
                                   <p:stCondLst>
                                     <p:cond delay="0"/>
                                   </p:stCondLst>
@@ -4056,7 +4242,7 @@
                                           </p:stCondLst>
                                         </p:cTn>
                                         <p:tgtEl>
-                                          <p:spTgt spid="4"/>
+                                          <p:spTgt spid="3"/>
                                         </p:tgtEl>
                                         <p:attrNameLst>
                                           <p:attrName>style.visibility</p:attrName>
@@ -4068,22 +4254,12 @@
                                     </p:set>
                                     <p:animEffect transition="in" filter="fade">
                                       <p:cBhvr>
-                                        <p:cTn id="10" dur="790"/>
-                                        <p:tgtEl>
-                                          <p:spTgt spid="4"/>
+                                        <p:cTn id="10" dur="650"/>
+                                        <p:tgtEl>
+                                          <p:spTgt spid="3"/>
                                         </p:tgtEl>
                                       </p:cBhvr>
                                     </p:animEffect>
-                                    <p:animScale>
-                                      <p:cBhvr>
-                                        <p:cTn id="11" dur="790"/>
-                                        <p:tgtEl>
-                                          <p:spTgt spid="4"/>
-                                        </p:tgtEl>
-                                      </p:cBhvr>
-                                      <p:from x="55000" y="55000"/>
-                                      <p:to x="100000" y="100000"/>
-                                    </p:animScale>
                                   </p:childTnLst>
                                 </p:cTn>
                               </p:par>
@@ -4091,7 +4267,7 @@
                           </p:cTn>
                         </p:par>
                         <p:par>
-                          <p:cTn id="12" fill="hold">
+                          <p:cTn id="11" fill="hold">
                             <p:stCondLst>
                               <p:cond delay="400"/>
                             </p:stCondLst>
@@ -4104,13 +4280,13 @@
                                   <p:childTnLst>
                                     <p:set>
                                       <p:cBhvr>
-                                        <p:cTn id="13" dur="1" fill="hold">
+                                        <p:cTn id="12" dur="1" fill="hold">
                                           <p:stCondLst>
                                             <p:cond delay="0"/>
                                           </p:stCondLst>
                                         </p:cTn>
                                         <p:tgtEl>
-                                          <p:spTgt spid="6"/>
+                                          <p:spTgt spid="4"/>
                                         </p:tgtEl>
                                         <p:attrNameLst>
                                           <p:attrName>style.visibility</p:attrName>
@@ -4122,17 +4298,17 @@
                                     </p:set>
                                     <p:animEffect transition="in" filter="fade">
                                       <p:cBhvr>
-                                        <p:cTn id="14" dur="790"/>
-                                        <p:tgtEl>
-                                          <p:spTgt spid="6"/>
+                                        <p:cTn id="13" dur="790"/>
+                                        <p:tgtEl>
+                                          <p:spTgt spid="4"/>
                                         </p:tgtEl>
                                       </p:cBhvr>
                                     </p:animEffect>
                                     <p:animScale>
                                       <p:cBhvr>
-                                        <p:cTn id="15" dur="790"/>
-                                        <p:tgtEl>
-                                          <p:spTgt spid="6"/>
+                                        <p:cTn id="14" dur="790"/>
+                                        <p:tgtEl>
+                                          <p:spTgt spid="4"/>
                                         </p:tgtEl>
                                       </p:cBhvr>
                                       <p:from x="55000" y="55000"/>
@@ -4145,26 +4321,26 @@
                           </p:cTn>
                         </p:par>
                         <p:par>
-                          <p:cTn id="16" fill="hold">
+                          <p:cTn id="15" fill="hold">
                             <p:stCondLst>
-                              <p:cond delay="1140"/>
+                              <p:cond delay="600"/>
                             </p:stCondLst>
                             <p:childTnLst>
                               <p:par>
-                                <p:cTn presetID="10" presetClass="entr" presetSubtype="0" fill="hold" grpId="0" nodeType="afterEffect">
+                                <p:cTn presetID="23" presetClass="entr" presetSubtype="16" fill="hold" grpId="0" nodeType="afterEffect">
                                   <p:stCondLst>
                                     <p:cond delay="0"/>
                                   </p:stCondLst>
                                   <p:childTnLst>
                                     <p:set>
                                       <p:cBhvr>
-                                        <p:cTn id="17" dur="1" fill="hold">
+                                        <p:cTn id="16" dur="1" fill="hold">
                                           <p:stCondLst>
                                             <p:cond delay="0"/>
                                           </p:stCondLst>
                                         </p:cTn>
                                         <p:tgtEl>
-                                          <p:spTgt spid="3"/>
+                                          <p:spTgt spid="6"/>
                                         </p:tgtEl>
                                         <p:attrNameLst>
                                           <p:attrName>style.visibility</p:attrName>
@@ -4176,12 +4352,22 @@
                                     </p:set>
                                     <p:animEffect transition="in" filter="fade">
                                       <p:cBhvr>
-                                        <p:cTn id="18" dur="650"/>
-                                        <p:tgtEl>
-                                          <p:spTgt spid="3"/>
+                                        <p:cTn id="17" dur="790"/>
+                                        <p:tgtEl>
+                                          <p:spTgt spid="6"/>
                                         </p:tgtEl>
                                       </p:cBhvr>
                                     </p:animEffect>
+                                    <p:animScale>
+                                      <p:cBhvr>
+                                        <p:cTn id="18" dur="790"/>
+                                        <p:tgtEl>
+                                          <p:spTgt spid="6"/>
+                                        </p:tgtEl>
+                                      </p:cBhvr>
+                                      <p:from x="55000" y="55000"/>
+                                      <p:to x="100000" y="100000"/>
+                                    </p:animScale>
                                   </p:childTnLst>
                                 </p:cTn>
                               </p:par>
@@ -4302,9 +4488,9 @@
     </p:tnLst>
     <p:bldLst>
       <p:bldP spid="2" grpId="0"/>
+      <p:bldP spid="3" grpId="0"/>
       <p:bldP spid="4" grpId="0"/>
       <p:bldP spid="6" grpId="0"/>
-      <p:bldP spid="3" grpId="0"/>
       <p:bldP spid="5" grpId="0"/>
       <p:bldP spid="7" grpId="0"/>
     </p:bldLst>
@@ -5118,7 +5304,7 @@
                         <p:par>
                           <p:cTn id="8" fill="hold">
                             <p:stCondLst>
-                              <p:cond delay="99"/>
+                              <p:cond delay="125"/>
                             </p:stCondLst>
                             <p:childTnLst>
                               <p:par>
@@ -5162,7 +5348,7 @@
                         <p:par>
                           <p:cTn id="11" fill="hold">
                             <p:stCondLst>
-                              <p:cond delay="198"/>
+                              <p:cond delay="250"/>
                             </p:stCondLst>
                             <p:childTnLst>
                               <p:par>
@@ -5179,7 +5365,7 @@
                                           </p:stCondLst>
                                         </p:cTn>
                                         <p:tgtEl>
-                                          <p:spTgt spid="7"/>
+                                          <p:spTgt spid="5"/>
                                         </p:tgtEl>
                                         <p:attrNameLst>
                                           <p:attrName>style.visibility</p:attrName>
@@ -5193,7 +5379,7 @@
                                       <p:cBhvr>
                                         <p:cTn id="13" dur="650"/>
                                         <p:tgtEl>
-                                          <p:spTgt spid="7"/>
+                                          <p:spTgt spid="5"/>
                                         </p:tgtEl>
                                       </p:cBhvr>
                                     </p:animEffect>
@@ -5206,7 +5392,7 @@
                         <p:par>
                           <p:cTn id="14" fill="hold">
                             <p:stCondLst>
-                              <p:cond delay="892"/>
+                              <p:cond delay="375"/>
                             </p:stCondLst>
                             <p:childTnLst>
                               <p:par>
@@ -5223,7 +5409,7 @@
                                           </p:stCondLst>
                                         </p:cTn>
                                         <p:tgtEl>
-                                          <p:spTgt spid="5"/>
+                                          <p:spTgt spid="7"/>
                                         </p:tgtEl>
                                         <p:attrNameLst>
                                           <p:attrName>style.visibility</p:attrName>
@@ -5237,7 +5423,7 @@
                                       <p:cBhvr>
                                         <p:cTn id="16" dur="650"/>
                                         <p:tgtEl>
-                                          <p:spTgt spid="5"/>
+                                          <p:spTgt spid="7"/>
                                         </p:tgtEl>
                                       </p:cBhvr>
                                     </p:animEffect>
@@ -5250,7 +5436,7 @@
                         <p:par>
                           <p:cTn id="17" fill="hold">
                             <p:stCondLst>
-                              <p:cond delay="991"/>
+                              <p:cond delay="1081"/>
                             </p:stCondLst>
                             <p:childTnLst>
                               <p:par>
@@ -5267,7 +5453,7 @@
                                           </p:stCondLst>
                                         </p:cTn>
                                         <p:tgtEl>
-                                          <p:spTgt spid="8"/>
+                                          <p:spTgt spid="10"/>
                                         </p:tgtEl>
                                         <p:attrNameLst>
                                           <p:attrName>style.visibility</p:attrName>
@@ -5281,7 +5467,7 @@
                                       <p:cBhvr>
                                         <p:cTn id="19" dur="650"/>
                                         <p:tgtEl>
-                                          <p:spTgt spid="8"/>
+                                          <p:spTgt spid="10"/>
                                         </p:tgtEl>
                                       </p:cBhvr>
                                     </p:animEffect>
@@ -5294,7 +5480,7 @@
                         <p:par>
                           <p:cTn id="20" fill="hold">
                             <p:stCondLst>
-                              <p:cond delay="1685"/>
+                              <p:cond delay="1206"/>
                             </p:stCondLst>
                             <p:childTnLst>
                               <p:par>
@@ -5311,7 +5497,7 @@
                                           </p:stCondLst>
                                         </p:cTn>
                                         <p:tgtEl>
-                                          <p:spTgt spid="10"/>
+                                          <p:spTgt spid="11"/>
                                         </p:tgtEl>
                                         <p:attrNameLst>
                                           <p:attrName>style.visibility</p:attrName>
@@ -5325,7 +5511,7 @@
                                       <p:cBhvr>
                                         <p:cTn id="22" dur="650"/>
                                         <p:tgtEl>
-                                          <p:spTgt spid="10"/>
+                                          <p:spTgt spid="11"/>
                                         </p:tgtEl>
                                       </p:cBhvr>
                                     </p:animEffect>
@@ -5338,7 +5524,7 @@
                         <p:par>
                           <p:cTn id="23" fill="hold">
                             <p:stCondLst>
-                              <p:cond delay="1784"/>
+                              <p:cond delay="1331"/>
                             </p:stCondLst>
                             <p:childTnLst>
                               <p:par>
@@ -5355,7 +5541,7 @@
                                           </p:stCondLst>
                                         </p:cTn>
                                         <p:tgtEl>
-                                          <p:spTgt spid="13"/>
+                                          <p:spTgt spid="8"/>
                                         </p:tgtEl>
                                         <p:attrNameLst>
                                           <p:attrName>style.visibility</p:attrName>
@@ -5369,7 +5555,7 @@
                                       <p:cBhvr>
                                         <p:cTn id="25" dur="650"/>
                                         <p:tgtEl>
-                                          <p:spTgt spid="13"/>
+                                          <p:spTgt spid="8"/>
                                         </p:tgtEl>
                                       </p:cBhvr>
                                     </p:animEffect>
@@ -5382,7 +5568,7 @@
                         <p:par>
                           <p:cTn id="26" fill="hold">
                             <p:stCondLst>
-                              <p:cond delay="2478"/>
+                              <p:cond delay="1456"/>
                             </p:stCondLst>
                             <p:childTnLst>
                               <p:par>
@@ -5399,7 +5585,7 @@
                                           </p:stCondLst>
                                         </p:cTn>
                                         <p:tgtEl>
-                                          <p:spTgt spid="3"/>
+                                          <p:spTgt spid="13"/>
                                         </p:tgtEl>
                                         <p:attrNameLst>
                                           <p:attrName>style.visibility</p:attrName>
@@ -5413,7 +5599,7 @@
                                       <p:cBhvr>
                                         <p:cTn id="28" dur="650"/>
                                         <p:tgtEl>
-                                          <p:spTgt spid="3"/>
+                                          <p:spTgt spid="13"/>
                                         </p:tgtEl>
                                       </p:cBhvr>
                                     </p:animEffect>
@@ -5426,7 +5612,7 @@
                         <p:par>
                           <p:cTn id="29" fill="hold">
                             <p:stCondLst>
-                              <p:cond delay="2577"/>
+                              <p:cond delay="2162"/>
                             </p:stCondLst>
                             <p:childTnLst>
                               <p:par>
@@ -5443,7 +5629,7 @@
                                           </p:stCondLst>
                                         </p:cTn>
                                         <p:tgtEl>
-                                          <p:spTgt spid="11"/>
+                                          <p:spTgt spid="3"/>
                                         </p:tgtEl>
                                         <p:attrNameLst>
                                           <p:attrName>style.visibility</p:attrName>
@@ -5457,7 +5643,7 @@
                                       <p:cBhvr>
                                         <p:cTn id="31" dur="650"/>
                                         <p:tgtEl>
-                                          <p:spTgt spid="11"/>
+                                          <p:spTgt spid="3"/>
                                         </p:tgtEl>
                                       </p:cBhvr>
                                     </p:animEffect>
@@ -5470,7 +5656,7 @@
                         <p:par>
                           <p:cTn id="32" fill="hold">
                             <p:stCondLst>
-                              <p:cond delay="2676"/>
+                              <p:cond delay="2287"/>
                             </p:stCondLst>
                             <p:childTnLst>
                               <p:par>
@@ -5487,7 +5673,7 @@
                                           </p:stCondLst>
                                         </p:cTn>
                                         <p:tgtEl>
-                                          <p:spTgt spid="14"/>
+                                          <p:spTgt spid="16"/>
                                         </p:tgtEl>
                                         <p:attrNameLst>
                                           <p:attrName>style.visibility</p:attrName>
@@ -5501,7 +5687,7 @@
                                       <p:cBhvr>
                                         <p:cTn id="34" dur="650"/>
                                         <p:tgtEl>
-                                          <p:spTgt spid="14"/>
+                                          <p:spTgt spid="16"/>
                                         </p:tgtEl>
                                       </p:cBhvr>
                                     </p:animEffect>
@@ -5514,7 +5700,7 @@
                         <p:par>
                           <p:cTn id="35" fill="hold">
                             <p:stCondLst>
-                              <p:cond delay="3370"/>
+                              <p:cond delay="2412"/>
                             </p:stCondLst>
                             <p:childTnLst>
                               <p:par>
@@ -5531,7 +5717,7 @@
                                           </p:stCondLst>
                                         </p:cTn>
                                         <p:tgtEl>
-                                          <p:spTgt spid="16"/>
+                                          <p:spTgt spid="14"/>
                                         </p:tgtEl>
                                         <p:attrNameLst>
                                           <p:attrName>style.visibility</p:attrName>
@@ -5545,7 +5731,7 @@
                                       <p:cBhvr>
                                         <p:cTn id="37" dur="650"/>
                                         <p:tgtEl>
-                                          <p:spTgt spid="16"/>
+                                          <p:spTgt spid="14"/>
                                         </p:tgtEl>
                                       </p:cBhvr>
                                     </p:animEffect>
@@ -5558,7 +5744,7 @@
                         <p:par>
                           <p:cTn id="38" fill="hold">
                             <p:stCondLst>
-                              <p:cond delay="3469"/>
+                              <p:cond delay="2537"/>
                             </p:stCondLst>
                             <p:childTnLst>
                               <p:par>
@@ -5602,7 +5788,7 @@
                         <p:par>
                           <p:cTn id="41" fill="hold">
                             <p:stCondLst>
-                              <p:cond delay="4163"/>
+                              <p:cond delay="3243"/>
                             </p:stCondLst>
                             <p:childTnLst>
                               <p:par>
@@ -5646,7 +5832,7 @@
                         <p:par>
                           <p:cTn id="44" fill="hold">
                             <p:stCondLst>
-                              <p:cond delay="4262"/>
+                              <p:cond delay="3368"/>
                             </p:stCondLst>
                             <p:childTnLst>
                               <p:par>
@@ -5714,15 +5900,15 @@
     <p:bldLst>
       <p:bldP spid="2" grpId="0"/>
       <p:bldP spid="4" grpId="0"/>
+      <p:bldP spid="5" grpId="0"/>
       <p:bldP spid="7" grpId="0"/>
-      <p:bldP spid="5" grpId="0"/>
+      <p:bldP spid="10" grpId="0"/>
+      <p:bldP spid="11" grpId="0"/>
       <p:bldP spid="8" grpId="0"/>
-      <p:bldP spid="10" grpId="0"/>
       <p:bldP spid="13" grpId="0"/>
       <p:bldP spid="3" grpId="0"/>
-      <p:bldP spid="11" grpId="0"/>
+      <p:bldP spid="16" grpId="0"/>
       <p:bldP spid="14" grpId="0"/>
-      <p:bldP spid="16" grpId="0"/>
       <p:bldP spid="18" grpId="0"/>
       <p:bldP spid="17" grpId="0"/>
       <p:bldP spid="19" grpId="0"/>
@@ -6076,50 +6262,6 @@
                             </p:stCondLst>
                             <p:childTnLst>
                               <p:par>
-                                <p:cTn presetID="10" presetClass="entr" presetSubtype="0" fill="hold" grpId="0" nodeType="afterEffect">
-                                  <p:stCondLst>
-                                    <p:cond delay="0"/>
-                                  </p:stCondLst>
-                                  <p:childTnLst>
-                                    <p:set>
-                                      <p:cBhvr>
-                                        <p:cTn id="8" dur="1" fill="hold">
-                                          <p:stCondLst>
-                                            <p:cond delay="0"/>
-                                          </p:stCondLst>
-                                        </p:cTn>
-                                        <p:tgtEl>
-                                          <p:spTgt spid="4"/>
-                                        </p:tgtEl>
-                                        <p:attrNameLst>
-                                          <p:attrName>style.visibility</p:attrName>
-                                        </p:attrNameLst>
-                                      </p:cBhvr>
-                                      <p:to>
-                                        <p:strVal val="visible"/>
-                                      </p:to>
-                                    </p:set>
-                                    <p:animEffect transition="in" filter="fade">
-                                      <p:cBhvr>
-                                        <p:cTn id="9" dur="790"/>
-                                        <p:tgtEl>
-                                          <p:spTgt spid="4"/>
-                                        </p:tgtEl>
-                                      </p:cBhvr>
-                                    </p:animEffect>
-                                  </p:childTnLst>
-                                </p:cTn>
-                              </p:par>
-                            </p:childTnLst>
-                          </p:cTn>
-                        </p:par>
-                        <p:par>
-                          <p:cTn id="10" fill="hold">
-                            <p:stCondLst>
-                              <p:cond delay="940"/>
-                            </p:stCondLst>
-                            <p:childTnLst>
-                              <p:par>
                                 <p:cTn presetID="23" presetClass="entr" presetSubtype="16" fill="hold" grpId="0" nodeType="afterEffect">
                                   <p:stCondLst>
                                     <p:cond delay="0"/>
@@ -6127,7 +6269,7 @@
                                   <p:childTnLst>
                                     <p:set>
                                       <p:cBhvr>
-                                        <p:cTn id="11" dur="1" fill="hold">
+                                        <p:cTn id="8" dur="1" fill="hold">
                                           <p:stCondLst>
                                             <p:cond delay="0"/>
                                           </p:stCondLst>
@@ -6145,7 +6287,7 @@
                                     </p:set>
                                     <p:animEffect transition="in" filter="fade">
                                       <p:cBhvr>
-                                        <p:cTn id="12" dur="790"/>
+                                        <p:cTn id="9" dur="790"/>
                                         <p:tgtEl>
                                           <p:spTgt spid="5"/>
                                         </p:tgtEl>
@@ -6153,7 +6295,7 @@
                                     </p:animEffect>
                                     <p:animScale>
                                       <p:cBhvr>
-                                        <p:cTn id="13" dur="790"/>
+                                        <p:cTn id="10" dur="790"/>
                                         <p:tgtEl>
                                           <p:spTgt spid="5"/>
                                         </p:tgtEl>
@@ -6168,9 +6310,9 @@
                           </p:cTn>
                         </p:par>
                         <p:par>
-                          <p:cTn id="14" fill="hold">
+                          <p:cTn id="11" fill="hold">
                             <p:stCondLst>
-                              <p:cond delay="1680"/>
+                              <p:cond delay="400"/>
                             </p:stCondLst>
                             <p:childTnLst>
                               <p:par>
@@ -6181,13 +6323,57 @@
                                   <p:childTnLst>
                                     <p:set>
                                       <p:cBhvr>
+                                        <p:cTn id="12" dur="1" fill="hold">
+                                          <p:stCondLst>
+                                            <p:cond delay="0"/>
+                                          </p:stCondLst>
+                                        </p:cTn>
+                                        <p:tgtEl>
+                                          <p:spTgt spid="4"/>
+                                        </p:tgtEl>
+                                        <p:attrNameLst>
+                                          <p:attrName>style.visibility</p:attrName>
+                                        </p:attrNameLst>
+                                      </p:cBhvr>
+                                      <p:to>
+                                        <p:strVal val="visible"/>
+                                      </p:to>
+                                    </p:set>
+                                    <p:animEffect transition="in" filter="fade">
+                                      <p:cBhvr>
+                                        <p:cTn id="13" dur="790"/>
+                                        <p:tgtEl>
+                                          <p:spTgt spid="4"/>
+                                        </p:tgtEl>
+                                      </p:cBhvr>
+                                    </p:animEffect>
+                                  </p:childTnLst>
+                                </p:cTn>
+                              </p:par>
+                            </p:childTnLst>
+                          </p:cTn>
+                        </p:par>
+                        <p:par>
+                          <p:cTn id="14" fill="hold">
+                            <p:stCondLst>
+                              <p:cond delay="600"/>
+                            </p:stCondLst>
+                            <p:childTnLst>
+                              <p:par>
+                                <p:cTn presetID="10" presetClass="entr" presetSubtype="0" fill="hold" grpId="0" nodeType="afterEffect">
+                                  <p:stCondLst>
+                                    <p:cond delay="0"/>
+                                  </p:stCondLst>
+                                  <p:childTnLst>
+                                    <p:set>
+                                      <p:cBhvr>
                                         <p:cTn id="15" dur="1" fill="hold">
                                           <p:stCondLst>
                                             <p:cond delay="0"/>
                                           </p:stCondLst>
                                         </p:cTn>
                                         <p:tgtEl>
-                                          <p:spTgt spid="6"/>
+                                          <p:spTgt spid="4"/>
                                         </p:tgtEl>
                                         <p:attrNameLst>
                                           <p:attrName>style.visibility</p:attrName>
@@ -6200,6 +6386,50 @@
                                     <p:animEffect transition="in" filter="fade">
                                       <p:cBhvr>
                                         <p:cTn id="16" dur="650"/>
+                                        <p:tgtEl>
+                                          <p:spTgt spid="4"/>
+                                        </p:tgtEl>
+                                      </p:cBhvr>
+                                    </p:animEffect>
+                                  </p:childTnLst>
+                                </p:cTn>
+                              </p:par>
+                            </p:childTnLst>
+                          </p:cTn>
+                        </p:par>
+                        <p:par>
+                          <p:cTn id="17" fill="hold">
+                            <p:stCondLst>
+                              <p:cond delay="1340"/>
+                            </p:stCondLst>
+                            <p:childTnLst>
+                              <p:par>
+                                <p:cTn presetID="10" presetClass="entr" presetSubtype="0" fill="hold" grpId="0" nodeType="afterEffect">
+                                  <p:stCondLst>
+                                    <p:cond delay="0"/>
+                                  </p:stCondLst>
+                                  <p:childTnLst>
+                                    <p:set>
+                                      <p:cBhvr>
+                                        <p:cTn id="18" dur="1" fill="hold">
+                                          <p:stCondLst>
+                                            <p:cond delay="0"/>
+                                          </p:stCondLst>
+                                        </p:cTn>
+                                        <p:tgtEl>
+                                          <p:spTgt spid="6"/>
+                                        </p:tgtEl>
+                                        <p:attrNameLst>
+                                          <p:attrName>style.visibility</p:attrName>
+                                        </p:attrNameLst>
+                                      </p:cBhvr>
+                                      <p:to>
+                                        <p:strVal val="visible"/>
+                                      </p:to>
+                                    </p:set>
+                                    <p:animEffect transition="in" filter="fade">
+                                      <p:cBhvr>
+                                        <p:cTn id="19" dur="650"/>
                                         <p:tgtEl>
                                           <p:spTgt spid="6"/>
                                         </p:tgtEl>
@@ -6237,8 +6467,8 @@
     </p:tnLst>
     <p:bldLst>
       <p:bldP spid="3" grpId="0"/>
+      <p:bldP spid="5" grpId="0"/>
       <p:bldP spid="4" grpId="0"/>
-      <p:bldP spid="5" grpId="0"/>
       <p:bldP spid="6" grpId="0"/>
     </p:bldLst>
   </p:timing>
@@ -6692,7 +6922,7 @@
                                           </p:stCondLst>
                                         </p:cTn>
                                         <p:tgtEl>
-                                          <p:spTgt spid="3"/>
+                                          <p:spTgt spid="5"/>
                                         </p:tgtEl>
                                         <p:attrNameLst>
                                           <p:attrName>style.visibility</p:attrName>
@@ -6706,7 +6936,7 @@
                                       <p:cBhvr>
                                         <p:cTn id="9" dur="650"/>
                                         <p:tgtEl>
-                                          <p:spTgt spid="3"/>
+                                          <p:spTgt spid="5"/>
                                         </p:tgtEl>
                                       </p:cBhvr>
                                     </p:animEffect>
@@ -6719,7 +6949,7 @@
                         <p:par>
                           <p:cTn id="10" fill="hold">
                             <p:stCondLst>
-                              <p:cond delay="940"/>
+                              <p:cond delay="400"/>
                             </p:stCondLst>
                             <p:childTnLst>
                               <p:par>
@@ -6736,7 +6966,7 @@
                                           </p:stCondLst>
                                         </p:cTn>
                                         <p:tgtEl>
-                                          <p:spTgt spid="5"/>
+                                          <p:spTgt spid="3"/>
                                         </p:tgtEl>
                                         <p:attrNameLst>
                                           <p:attrName>style.visibility</p:attrName>
@@ -6750,7 +6980,7 @@
                                       <p:cBhvr>
                                         <p:cTn id="12" dur="650"/>
                                         <p:tgtEl>
-                                          <p:spTgt spid="5"/>
+                                          <p:spTgt spid="3"/>
                                         </p:tgtEl>
                                       </p:cBhvr>
                                     </p:animEffect>
@@ -6763,7 +6993,7 @@
                         <p:par>
                           <p:cTn id="13" fill="hold">
                             <p:stCondLst>
-                              <p:cond delay="1140"/>
+                              <p:cond delay="600"/>
                             </p:stCondLst>
                             <p:childTnLst>
                               <p:par>
@@ -6807,7 +7037,7 @@
                         <p:par>
                           <p:cTn id="16" fill="hold">
                             <p:stCondLst>
-                              <p:cond delay="1880"/>
+                              <p:cond delay="1340"/>
                             </p:stCondLst>
                             <p:childTnLst>
                               <p:par>
@@ -6851,7 +7081,7 @@
                         <p:par>
                           <p:cTn id="19" fill="hold">
                             <p:stCondLst>
-                              <p:cond delay="2080"/>
+                              <p:cond delay="1540"/>
                             </p:stCondLst>
                             <p:childTnLst>
                               <p:par>
@@ -6918,8 +7148,8 @@
     </p:tnLst>
     <p:bldLst>
       <p:bldP spid="2" grpId="0"/>
+      <p:bldP spid="5" grpId="0"/>
       <p:bldP spid="3" grpId="0"/>
-      <p:bldP spid="5" grpId="0"/>
       <p:bldP spid="6" grpId="0"/>
       <p:bldP spid="8" grpId="0"/>
       <p:bldP spid="9" grpId="0"/>
